--- a/5_Hypothesis Testing.pptx
+++ b/5_Hypothesis Testing.pptx
@@ -5,10 +5,10 @@
     <p:sldMasterId id="2147483648" r:id="rId4"/>
   </p:sldMasterIdLst>
   <p:notesMasterIdLst>
-    <p:notesMasterId r:id="rId27"/>
+    <p:notesMasterId r:id="rId28"/>
   </p:notesMasterIdLst>
   <p:handoutMasterIdLst>
-    <p:handoutMasterId r:id="rId28"/>
+    <p:handoutMasterId r:id="rId29"/>
   </p:handoutMasterIdLst>
   <p:sldIdLst>
     <p:sldId id="256" r:id="rId5"/>
@@ -19,20 +19,21 @@
     <p:sldId id="281" r:id="rId10"/>
     <p:sldId id="273" r:id="rId11"/>
     <p:sldId id="274" r:id="rId12"/>
-    <p:sldId id="275" r:id="rId13"/>
-    <p:sldId id="276" r:id="rId14"/>
-    <p:sldId id="363" r:id="rId15"/>
-    <p:sldId id="277" r:id="rId16"/>
-    <p:sldId id="368" r:id="rId17"/>
-    <p:sldId id="369" r:id="rId18"/>
-    <p:sldId id="370" r:id="rId19"/>
-    <p:sldId id="371" r:id="rId20"/>
-    <p:sldId id="314" r:id="rId21"/>
-    <p:sldId id="278" r:id="rId22"/>
-    <p:sldId id="279" r:id="rId23"/>
-    <p:sldId id="280" r:id="rId24"/>
-    <p:sldId id="366" r:id="rId25"/>
-    <p:sldId id="365" r:id="rId26"/>
+    <p:sldId id="372" r:id="rId13"/>
+    <p:sldId id="275" r:id="rId14"/>
+    <p:sldId id="276" r:id="rId15"/>
+    <p:sldId id="363" r:id="rId16"/>
+    <p:sldId id="277" r:id="rId17"/>
+    <p:sldId id="368" r:id="rId18"/>
+    <p:sldId id="369" r:id="rId19"/>
+    <p:sldId id="370" r:id="rId20"/>
+    <p:sldId id="371" r:id="rId21"/>
+    <p:sldId id="314" r:id="rId22"/>
+    <p:sldId id="278" r:id="rId23"/>
+    <p:sldId id="279" r:id="rId24"/>
+    <p:sldId id="280" r:id="rId25"/>
+    <p:sldId id="366" r:id="rId26"/>
+    <p:sldId id="365" r:id="rId27"/>
   </p:sldIdLst>
   <p:sldSz cx="12188825" cy="6858000"/>
   <p:notesSz cx="6858000" cy="9144000"/>
@@ -254,7 +255,7 @@
                 <a:latin typeface="맑은 고딕" panose="020B0503020000020004" pitchFamily="50" charset="-127"/>
                 <a:ea typeface="맑은 고딕" panose="020B0503020000020004" pitchFamily="50" charset="-127"/>
               </a:rPr>
-              <a:t>2026-03-25</a:t>
+              <a:t>2026-04-07</a:t>
             </a:fld>
             <a:endParaRPr lang="ko-KR" altLang="en-US" dirty="0">
               <a:latin typeface="맑은 고딕" panose="020B0503020000020004" pitchFamily="50" charset="-127"/>
@@ -441,7 +442,7 @@
             <a:fld id="{39DBE7D5-AA2D-4B26-8C69-8B60D39FD5EE}" type="datetime1">
               <a:rPr lang="ko-KR" altLang="en-US" smtClean="0"/>
               <a:pPr/>
-              <a:t>2026-03-25</a:t>
+              <a:t>2026-04-07</a:t>
             </a:fld>
             <a:endParaRPr lang="ko-KR" altLang="en-US" dirty="0"/>
           </a:p>
@@ -877,6 +878,91 @@
     </p:spTree>
     <p:extLst>
       <p:ext uri="{BB962C8B-B14F-4D97-AF65-F5344CB8AC3E}">
+        <p14:creationId xmlns:p14="http://schemas.microsoft.com/office/powerpoint/2010/main" val="3948408493"/>
+      </p:ext>
+    </p:extLst>
+  </p:cSld>
+  <p:clrMapOvr>
+    <a:masterClrMapping/>
+  </p:clrMapOvr>
+</p:notes>
+</file>
+
+<file path=ppt/notesSlides/notesSlide11.xml><?xml version="1.0" encoding="utf-8"?>
+<p:notes xmlns:a="http://schemas.openxmlformats.org/drawingml/2006/main" xmlns:r="http://schemas.openxmlformats.org/officeDocument/2006/relationships" xmlns:p="http://schemas.openxmlformats.org/presentationml/2006/main">
+  <p:cSld>
+    <p:spTree>
+      <p:nvGrpSpPr>
+        <p:cNvPr id="1" name=""/>
+        <p:cNvGrpSpPr/>
+        <p:nvPr/>
+      </p:nvGrpSpPr>
+      <p:grpSpPr>
+        <a:xfrm>
+          <a:off x="0" y="0"/>
+          <a:ext cx="0" cy="0"/>
+          <a:chOff x="0" y="0"/>
+          <a:chExt cx="0" cy="0"/>
+        </a:xfrm>
+      </p:grpSpPr>
+      <p:sp>
+        <p:nvSpPr>
+          <p:cNvPr id="2" name="슬라이드 이미지 개체 틀 1"/>
+          <p:cNvSpPr>
+            <a:spLocks noGrp="1" noRot="1" noChangeAspect="1"/>
+          </p:cNvSpPr>
+          <p:nvPr>
+            <p:ph type="sldImg"/>
+          </p:nvPr>
+        </p:nvSpPr>
+        <p:spPr/>
+      </p:sp>
+      <p:sp>
+        <p:nvSpPr>
+          <p:cNvPr id="3" name="슬라이드 노트 개체 틀 2"/>
+          <p:cNvSpPr>
+            <a:spLocks noGrp="1"/>
+          </p:cNvSpPr>
+          <p:nvPr>
+            <p:ph type="body" idx="1"/>
+          </p:nvPr>
+        </p:nvSpPr>
+        <p:spPr/>
+        <p:txBody>
+          <a:bodyPr/>
+          <a:lstStyle/>
+          <a:p>
+            <a:endParaRPr lang="ko-KR" altLang="en-US" dirty="0"/>
+          </a:p>
+        </p:txBody>
+      </p:sp>
+      <p:sp>
+        <p:nvSpPr>
+          <p:cNvPr id="4" name="슬라이드 번호 개체 틀 3"/>
+          <p:cNvSpPr>
+            <a:spLocks noGrp="1"/>
+          </p:cNvSpPr>
+          <p:nvPr>
+            <p:ph type="sldNum" sz="quarter" idx="10"/>
+          </p:nvPr>
+        </p:nvSpPr>
+        <p:spPr/>
+        <p:txBody>
+          <a:bodyPr/>
+          <a:lstStyle/>
+          <a:p>
+            <a:pPr rtl="0"/>
+            <a:fld id="{5FB91549-43BF-425A-AF25-75262019208C}" type="slidenum">
+              <a:rPr lang="en-US" altLang="ko-KR" smtClean="0"/>
+              <a:t>11</a:t>
+            </a:fld>
+            <a:endParaRPr lang="ko-KR" altLang="en-US" dirty="0"/>
+          </a:p>
+        </p:txBody>
+      </p:sp>
+    </p:spTree>
+    <p:extLst>
+      <p:ext uri="{BB962C8B-B14F-4D97-AF65-F5344CB8AC3E}">
         <p14:creationId xmlns:p14="http://schemas.microsoft.com/office/powerpoint/2010/main" val="3014349002"/>
       </p:ext>
     </p:extLst>
@@ -887,7 +973,7 @@
 </p:notes>
 </file>
 
-<file path=ppt/notesSlides/notesSlide11.xml><?xml version="1.0" encoding="utf-8"?>
+<file path=ppt/notesSlides/notesSlide12.xml><?xml version="1.0" encoding="utf-8"?>
 <p:notes xmlns:a="http://schemas.openxmlformats.org/drawingml/2006/main" xmlns:r="http://schemas.openxmlformats.org/officeDocument/2006/relationships" xmlns:p="http://schemas.openxmlformats.org/presentationml/2006/main">
   <p:cSld>
     <p:spTree>
@@ -977,7 +1063,7 @@
             <a:pPr rtl="0"/>
             <a:fld id="{5FB91549-43BF-425A-AF25-75262019208C}" type="slidenum">
               <a:rPr lang="en-US" altLang="ko-KR" smtClean="0"/>
-              <a:t>11</a:t>
+              <a:t>12</a:t>
             </a:fld>
             <a:endParaRPr lang="ko-KR" altLang="en-US" dirty="0"/>
           </a:p>
@@ -996,7 +1082,7 @@
 </p:notes>
 </file>
 
-<file path=ppt/notesSlides/notesSlide12.xml><?xml version="1.0" encoding="utf-8"?>
+<file path=ppt/notesSlides/notesSlide13.xml><?xml version="1.0" encoding="utf-8"?>
 <p:notes xmlns:a="http://schemas.openxmlformats.org/drawingml/2006/main" xmlns:r="http://schemas.openxmlformats.org/officeDocument/2006/relationships" xmlns:p="http://schemas.openxmlformats.org/presentationml/2006/main">
   <p:cSld>
     <p:spTree>
@@ -1062,7 +1148,7 @@
             <a:pPr rtl="0"/>
             <a:fld id="{5FB91549-43BF-425A-AF25-75262019208C}" type="slidenum">
               <a:rPr lang="en-US" altLang="ko-KR" smtClean="0"/>
-              <a:t>12</a:t>
+              <a:t>13</a:t>
             </a:fld>
             <a:endParaRPr lang="ko-KR" altLang="en-US" dirty="0"/>
           </a:p>
@@ -1081,7 +1167,7 @@
 </p:notes>
 </file>
 
-<file path=ppt/notesSlides/notesSlide13.xml><?xml version="1.0" encoding="utf-8"?>
+<file path=ppt/notesSlides/notesSlide14.xml><?xml version="1.0" encoding="utf-8"?>
 <p:notes xmlns:a="http://schemas.openxmlformats.org/drawingml/2006/main" xmlns:r="http://schemas.openxmlformats.org/officeDocument/2006/relationships" xmlns:p="http://schemas.openxmlformats.org/presentationml/2006/main">
   <p:cSld>
     <p:spTree>
@@ -1171,7 +1257,7 @@
             <a:pPr rtl="0"/>
             <a:fld id="{5FB91549-43BF-425A-AF25-75262019208C}" type="slidenum">
               <a:rPr lang="en-US" altLang="ko-KR" smtClean="0"/>
-              <a:t>13</a:t>
+              <a:t>14</a:t>
             </a:fld>
             <a:endParaRPr lang="ko-KR" altLang="en-US" dirty="0"/>
           </a:p>
@@ -1190,7 +1276,7 @@
 </p:notes>
 </file>
 
-<file path=ppt/notesSlides/notesSlide14.xml><?xml version="1.0" encoding="utf-8"?>
+<file path=ppt/notesSlides/notesSlide15.xml><?xml version="1.0" encoding="utf-8"?>
 <p:notes xmlns:a="http://schemas.openxmlformats.org/drawingml/2006/main" xmlns:r="http://schemas.openxmlformats.org/officeDocument/2006/relationships" xmlns:p="http://schemas.openxmlformats.org/presentationml/2006/main">
   <p:cSld>
     <p:spTree>
@@ -1280,7 +1366,7 @@
             <a:pPr rtl="0"/>
             <a:fld id="{5FB91549-43BF-425A-AF25-75262019208C}" type="slidenum">
               <a:rPr lang="en-US" altLang="ko-KR" smtClean="0"/>
-              <a:t>14</a:t>
+              <a:t>15</a:t>
             </a:fld>
             <a:endParaRPr lang="ko-KR" altLang="en-US" dirty="0"/>
           </a:p>
@@ -1299,7 +1385,7 @@
 </p:notes>
 </file>
 
-<file path=ppt/notesSlides/notesSlide15.xml><?xml version="1.0" encoding="utf-8"?>
+<file path=ppt/notesSlides/notesSlide16.xml><?xml version="1.0" encoding="utf-8"?>
 <p:notes xmlns:a="http://schemas.openxmlformats.org/drawingml/2006/main" xmlns:r="http://schemas.openxmlformats.org/officeDocument/2006/relationships" xmlns:p="http://schemas.openxmlformats.org/presentationml/2006/main">
   <p:cSld>
     <p:spTree>
@@ -1389,7 +1475,7 @@
             <a:pPr rtl="0"/>
             <a:fld id="{5FB91549-43BF-425A-AF25-75262019208C}" type="slidenum">
               <a:rPr lang="en-US" altLang="ko-KR" smtClean="0"/>
-              <a:t>15</a:t>
+              <a:t>16</a:t>
             </a:fld>
             <a:endParaRPr lang="ko-KR" altLang="en-US" dirty="0"/>
           </a:p>
@@ -1408,7 +1494,7 @@
 </p:notes>
 </file>
 
-<file path=ppt/notesSlides/notesSlide16.xml><?xml version="1.0" encoding="utf-8"?>
+<file path=ppt/notesSlides/notesSlide17.xml><?xml version="1.0" encoding="utf-8"?>
 <p:notes xmlns:a="http://schemas.openxmlformats.org/drawingml/2006/main" xmlns:r="http://schemas.openxmlformats.org/officeDocument/2006/relationships" xmlns:p="http://schemas.openxmlformats.org/presentationml/2006/main">
   <p:cSld>
     <p:spTree>
@@ -1498,7 +1584,7 @@
             <a:pPr rtl="0"/>
             <a:fld id="{5FB91549-43BF-425A-AF25-75262019208C}" type="slidenum">
               <a:rPr lang="en-US" altLang="ko-KR" smtClean="0"/>
-              <a:t>16</a:t>
+              <a:t>17</a:t>
             </a:fld>
             <a:endParaRPr lang="ko-KR" altLang="en-US" dirty="0"/>
           </a:p>
@@ -1508,91 +1594,6 @@
     <p:extLst>
       <p:ext uri="{BB962C8B-B14F-4D97-AF65-F5344CB8AC3E}">
         <p14:creationId xmlns:p14="http://schemas.microsoft.com/office/powerpoint/2010/main" val="1031935882"/>
-      </p:ext>
-    </p:extLst>
-  </p:cSld>
-  <p:clrMapOvr>
-    <a:masterClrMapping/>
-  </p:clrMapOvr>
-</p:notes>
-</file>
-
-<file path=ppt/notesSlides/notesSlide17.xml><?xml version="1.0" encoding="utf-8"?>
-<p:notes xmlns:a="http://schemas.openxmlformats.org/drawingml/2006/main" xmlns:r="http://schemas.openxmlformats.org/officeDocument/2006/relationships" xmlns:p="http://schemas.openxmlformats.org/presentationml/2006/main">
-  <p:cSld>
-    <p:spTree>
-      <p:nvGrpSpPr>
-        <p:cNvPr id="1" name=""/>
-        <p:cNvGrpSpPr/>
-        <p:nvPr/>
-      </p:nvGrpSpPr>
-      <p:grpSpPr>
-        <a:xfrm>
-          <a:off x="0" y="0"/>
-          <a:ext cx="0" cy="0"/>
-          <a:chOff x="0" y="0"/>
-          <a:chExt cx="0" cy="0"/>
-        </a:xfrm>
-      </p:grpSpPr>
-      <p:sp>
-        <p:nvSpPr>
-          <p:cNvPr id="2" name="슬라이드 이미지 개체 틀 1"/>
-          <p:cNvSpPr>
-            <a:spLocks noGrp="1" noRot="1" noChangeAspect="1"/>
-          </p:cNvSpPr>
-          <p:nvPr>
-            <p:ph type="sldImg"/>
-          </p:nvPr>
-        </p:nvSpPr>
-        <p:spPr/>
-      </p:sp>
-      <p:sp>
-        <p:nvSpPr>
-          <p:cNvPr id="3" name="슬라이드 노트 개체 틀 2"/>
-          <p:cNvSpPr>
-            <a:spLocks noGrp="1"/>
-          </p:cNvSpPr>
-          <p:nvPr>
-            <p:ph type="body" idx="1"/>
-          </p:nvPr>
-        </p:nvSpPr>
-        <p:spPr/>
-        <p:txBody>
-          <a:bodyPr/>
-          <a:lstStyle/>
-          <a:p>
-            <a:endParaRPr lang="ko-KR" altLang="en-US" dirty="0"/>
-          </a:p>
-        </p:txBody>
-      </p:sp>
-      <p:sp>
-        <p:nvSpPr>
-          <p:cNvPr id="4" name="슬라이드 번호 개체 틀 3"/>
-          <p:cNvSpPr>
-            <a:spLocks noGrp="1"/>
-          </p:cNvSpPr>
-          <p:nvPr>
-            <p:ph type="sldNum" sz="quarter" idx="10"/>
-          </p:nvPr>
-        </p:nvSpPr>
-        <p:spPr/>
-        <p:txBody>
-          <a:bodyPr/>
-          <a:lstStyle/>
-          <a:p>
-            <a:pPr rtl="0"/>
-            <a:fld id="{5FB91549-43BF-425A-AF25-75262019208C}" type="slidenum">
-              <a:rPr lang="en-US" altLang="ko-KR" smtClean="0"/>
-              <a:t>18</a:t>
-            </a:fld>
-            <a:endParaRPr lang="ko-KR" altLang="en-US" dirty="0"/>
-          </a:p>
-        </p:txBody>
-      </p:sp>
-    </p:spTree>
-    <p:extLst>
-      <p:ext uri="{BB962C8B-B14F-4D97-AF65-F5344CB8AC3E}">
-        <p14:creationId xmlns:p14="http://schemas.microsoft.com/office/powerpoint/2010/main" val="3077940026"/>
       </p:ext>
     </p:extLst>
   </p:cSld>
@@ -1677,7 +1678,7 @@
     </p:spTree>
     <p:extLst>
       <p:ext uri="{BB962C8B-B14F-4D97-AF65-F5344CB8AC3E}">
-        <p14:creationId xmlns:p14="http://schemas.microsoft.com/office/powerpoint/2010/main" val="999459255"/>
+        <p14:creationId xmlns:p14="http://schemas.microsoft.com/office/powerpoint/2010/main" val="3077940026"/>
       </p:ext>
     </p:extLst>
   </p:cSld>
@@ -1762,7 +1763,7 @@
     </p:spTree>
     <p:extLst>
       <p:ext uri="{BB962C8B-B14F-4D97-AF65-F5344CB8AC3E}">
-        <p14:creationId xmlns:p14="http://schemas.microsoft.com/office/powerpoint/2010/main" val="1195164198"/>
+        <p14:creationId xmlns:p14="http://schemas.microsoft.com/office/powerpoint/2010/main" val="999459255"/>
       </p:ext>
     </p:extLst>
   </p:cSld>
@@ -1862,6 +1863,91 @@
   <p:cSld>
     <p:spTree>
       <p:nvGrpSpPr>
+        <p:cNvPr id="1" name=""/>
+        <p:cNvGrpSpPr/>
+        <p:nvPr/>
+      </p:nvGrpSpPr>
+      <p:grpSpPr>
+        <a:xfrm>
+          <a:off x="0" y="0"/>
+          <a:ext cx="0" cy="0"/>
+          <a:chOff x="0" y="0"/>
+          <a:chExt cx="0" cy="0"/>
+        </a:xfrm>
+      </p:grpSpPr>
+      <p:sp>
+        <p:nvSpPr>
+          <p:cNvPr id="2" name="슬라이드 이미지 개체 틀 1"/>
+          <p:cNvSpPr>
+            <a:spLocks noGrp="1" noRot="1" noChangeAspect="1"/>
+          </p:cNvSpPr>
+          <p:nvPr>
+            <p:ph type="sldImg"/>
+          </p:nvPr>
+        </p:nvSpPr>
+        <p:spPr/>
+      </p:sp>
+      <p:sp>
+        <p:nvSpPr>
+          <p:cNvPr id="3" name="슬라이드 노트 개체 틀 2"/>
+          <p:cNvSpPr>
+            <a:spLocks noGrp="1"/>
+          </p:cNvSpPr>
+          <p:nvPr>
+            <p:ph type="body" idx="1"/>
+          </p:nvPr>
+        </p:nvSpPr>
+        <p:spPr/>
+        <p:txBody>
+          <a:bodyPr/>
+          <a:lstStyle/>
+          <a:p>
+            <a:endParaRPr lang="ko-KR" altLang="en-US" dirty="0"/>
+          </a:p>
+        </p:txBody>
+      </p:sp>
+      <p:sp>
+        <p:nvSpPr>
+          <p:cNvPr id="4" name="슬라이드 번호 개체 틀 3"/>
+          <p:cNvSpPr>
+            <a:spLocks noGrp="1"/>
+          </p:cNvSpPr>
+          <p:nvPr>
+            <p:ph type="sldNum" sz="quarter" idx="10"/>
+          </p:nvPr>
+        </p:nvSpPr>
+        <p:spPr/>
+        <p:txBody>
+          <a:bodyPr/>
+          <a:lstStyle/>
+          <a:p>
+            <a:pPr rtl="0"/>
+            <a:fld id="{5FB91549-43BF-425A-AF25-75262019208C}" type="slidenum">
+              <a:rPr lang="en-US" altLang="ko-KR" smtClean="0"/>
+              <a:t>21</a:t>
+            </a:fld>
+            <a:endParaRPr lang="ko-KR" altLang="en-US" dirty="0"/>
+          </a:p>
+        </p:txBody>
+      </p:sp>
+    </p:spTree>
+    <p:extLst>
+      <p:ext uri="{BB962C8B-B14F-4D97-AF65-F5344CB8AC3E}">
+        <p14:creationId xmlns:p14="http://schemas.microsoft.com/office/powerpoint/2010/main" val="1195164198"/>
+      </p:ext>
+    </p:extLst>
+  </p:cSld>
+  <p:clrMapOvr>
+    <a:masterClrMapping/>
+  </p:clrMapOvr>
+</p:notes>
+</file>
+
+<file path=ppt/notesSlides/notesSlide21.xml><?xml version="1.0" encoding="utf-8"?>
+<p:notes xmlns:a="http://schemas.openxmlformats.org/drawingml/2006/main" xmlns:r="http://schemas.openxmlformats.org/officeDocument/2006/relationships" xmlns:p="http://schemas.openxmlformats.org/presentationml/2006/main">
+  <p:cSld>
+    <p:spTree>
+      <p:nvGrpSpPr>
         <p:cNvPr id="1" name="">
           <a:extLst>
             <a:ext uri="{FF2B5EF4-FFF2-40B4-BE49-F238E27FC236}">
@@ -1947,7 +2033,7 @@
             <a:pPr rtl="0"/>
             <a:fld id="{5FB91549-43BF-425A-AF25-75262019208C}" type="slidenum">
               <a:rPr lang="en-US" altLang="ko-KR" smtClean="0"/>
-              <a:t>21</a:t>
+              <a:t>22</a:t>
             </a:fld>
             <a:endParaRPr lang="ko-KR" altLang="en-US" dirty="0"/>
           </a:p>
@@ -1966,7 +2052,7 @@
 </p:notes>
 </file>
 
-<file path=ppt/notesSlides/notesSlide21.xml><?xml version="1.0" encoding="utf-8"?>
+<file path=ppt/notesSlides/notesSlide22.xml><?xml version="1.0" encoding="utf-8"?>
 <p:notes xmlns:a="http://schemas.openxmlformats.org/drawingml/2006/main" xmlns:r="http://schemas.openxmlformats.org/officeDocument/2006/relationships" xmlns:p="http://schemas.openxmlformats.org/presentationml/2006/main">
   <p:cSld>
     <p:spTree>
@@ -2056,7 +2142,7 @@
             <a:pPr rtl="0"/>
             <a:fld id="{5FB91549-43BF-425A-AF25-75262019208C}" type="slidenum">
               <a:rPr lang="en-US" altLang="ko-KR" smtClean="0"/>
-              <a:t>22</a:t>
+              <a:t>23</a:t>
             </a:fld>
             <a:endParaRPr lang="ko-KR" altLang="en-US" dirty="0"/>
           </a:p>
@@ -2638,7 +2724,13 @@
   <p:cSld>
     <p:spTree>
       <p:nvGrpSpPr>
-        <p:cNvPr id="1" name=""/>
+        <p:cNvPr id="1" name="">
+          <a:extLst>
+            <a:ext uri="{FF2B5EF4-FFF2-40B4-BE49-F238E27FC236}">
+              <a16:creationId xmlns:a16="http://schemas.microsoft.com/office/drawing/2014/main" id="{AC5D8675-0015-6253-E34C-BFFFF1A14252}"/>
+            </a:ext>
+          </a:extLst>
+        </p:cNvPr>
         <p:cNvGrpSpPr/>
         <p:nvPr/>
       </p:nvGrpSpPr>
@@ -2652,7 +2744,13 @@
       </p:grpSpPr>
       <p:sp>
         <p:nvSpPr>
-          <p:cNvPr id="2" name="슬라이드 이미지 개체 틀 1"/>
+          <p:cNvPr id="2" name="슬라이드 이미지 개체 틀 1">
+            <a:extLst>
+              <a:ext uri="{FF2B5EF4-FFF2-40B4-BE49-F238E27FC236}">
+                <a16:creationId xmlns:a16="http://schemas.microsoft.com/office/drawing/2014/main" id="{16E6DC7F-79B6-9F94-1CEF-11E0F0627019}"/>
+              </a:ext>
+            </a:extLst>
+          </p:cNvPr>
           <p:cNvSpPr>
             <a:spLocks noGrp="1" noRot="1" noChangeAspect="1"/>
           </p:cNvSpPr>
@@ -2664,7 +2762,13 @@
       </p:sp>
       <p:sp>
         <p:nvSpPr>
-          <p:cNvPr id="3" name="슬라이드 노트 개체 틀 2"/>
+          <p:cNvPr id="3" name="슬라이드 노트 개체 틀 2">
+            <a:extLst>
+              <a:ext uri="{FF2B5EF4-FFF2-40B4-BE49-F238E27FC236}">
+                <a16:creationId xmlns:a16="http://schemas.microsoft.com/office/drawing/2014/main" id="{27D80BAB-8577-4879-6471-13E3CA1C6D2F}"/>
+              </a:ext>
+            </a:extLst>
+          </p:cNvPr>
           <p:cNvSpPr>
             <a:spLocks noGrp="1"/>
           </p:cNvSpPr>
@@ -2683,7 +2787,13 @@
       </p:sp>
       <p:sp>
         <p:nvSpPr>
-          <p:cNvPr id="4" name="슬라이드 번호 개체 틀 3"/>
+          <p:cNvPr id="4" name="슬라이드 번호 개체 틀 3">
+            <a:extLst>
+              <a:ext uri="{FF2B5EF4-FFF2-40B4-BE49-F238E27FC236}">
+                <a16:creationId xmlns:a16="http://schemas.microsoft.com/office/drawing/2014/main" id="{B7FB335B-13A1-54EA-24C0-C5799F384309}"/>
+              </a:ext>
+            </a:extLst>
+          </p:cNvPr>
           <p:cNvSpPr>
             <a:spLocks noGrp="1"/>
           </p:cNvSpPr>
@@ -2708,7 +2818,7 @@
     </p:spTree>
     <p:extLst>
       <p:ext uri="{BB962C8B-B14F-4D97-AF65-F5344CB8AC3E}">
-        <p14:creationId xmlns:p14="http://schemas.microsoft.com/office/powerpoint/2010/main" val="3948408493"/>
+        <p14:creationId xmlns:p14="http://schemas.microsoft.com/office/powerpoint/2010/main" val="2023948977"/>
       </p:ext>
     </p:extLst>
   </p:cSld>
@@ -2956,7 +3066,7 @@
           <a:p>
             <a:fld id="{4B229CEB-779D-4AB3-81CB-8FCEEAE03F61}" type="datetime1">
               <a:rPr lang="ko-KR" altLang="en-US" smtClean="0"/>
-              <a:t>2026-03-25</a:t>
+              <a:t>2026-04-07</a:t>
             </a:fld>
             <a:endParaRPr lang="ko-KR" altLang="en-US" dirty="0"/>
           </a:p>
@@ -3194,7 +3304,7 @@
             <a:pPr rtl="0"/>
             <a:fld id="{C3B7A883-0BF0-4B4B-84D5-D747A0111A56}" type="datetime1">
               <a:rPr lang="ko-KR" altLang="en-US" noProof="0" smtClean="0"/>
-              <a:t>2026-03-25</a:t>
+              <a:t>2026-04-07</a:t>
             </a:fld>
             <a:endParaRPr lang="ko-KR" altLang="en-US" noProof="0" dirty="0"/>
           </a:p>
@@ -3412,7 +3522,7 @@
             <a:pPr rtl="0"/>
             <a:fld id="{3DA7EA29-F2BB-4FB1-BB4B-C55A7FA3FC5C}" type="datetime1">
               <a:rPr lang="ko-KR" altLang="en-US" noProof="0" smtClean="0"/>
-              <a:t>2026-03-25</a:t>
+              <a:t>2026-04-07</a:t>
             </a:fld>
             <a:endParaRPr lang="ko-KR" altLang="en-US" noProof="0" dirty="0"/>
           </a:p>
@@ -3621,7 +3731,7 @@
             <a:pPr rtl="0"/>
             <a:fld id="{D76306AB-75A0-421C-B431-0E4E30A5C28E}" type="datetime1">
               <a:rPr lang="ko-KR" altLang="en-US" noProof="0" smtClean="0"/>
-              <a:t>2026-03-25</a:t>
+              <a:t>2026-04-07</a:t>
             </a:fld>
             <a:endParaRPr lang="ko-KR" altLang="en-US" noProof="0" dirty="0"/>
           </a:p>
@@ -3891,7 +4001,7 @@
             <a:pPr rtl="0"/>
             <a:fld id="{E1D969EE-F1EB-462E-B70D-5B36B3806A4E}" type="datetime1">
               <a:rPr lang="ko-KR" altLang="en-US" noProof="0" smtClean="0"/>
-              <a:t>2026-03-25</a:t>
+              <a:t>2026-04-07</a:t>
             </a:fld>
             <a:endParaRPr lang="ko-KR" altLang="en-US" noProof="0" dirty="0"/>
           </a:p>
@@ -4199,7 +4309,7 @@
             <a:pPr rtl="0"/>
             <a:fld id="{E8CBB1B7-E0A1-46A3-B5B5-C69931095FF6}" type="datetime1">
               <a:rPr lang="ko-KR" altLang="en-US" noProof="0" smtClean="0"/>
-              <a:t>2026-03-25</a:t>
+              <a:t>2026-04-07</a:t>
             </a:fld>
             <a:endParaRPr lang="ko-KR" altLang="en-US" noProof="0" dirty="0"/>
           </a:p>
@@ -4650,7 +4760,7 @@
             <a:pPr rtl="0"/>
             <a:fld id="{DAFC0E65-06AB-44D7-AAEE-8F4C7ED84A0C}" type="datetime1">
               <a:rPr lang="ko-KR" altLang="en-US" noProof="0" smtClean="0"/>
-              <a:t>2026-03-25</a:t>
+              <a:t>2026-04-07</a:t>
             </a:fld>
             <a:endParaRPr lang="ko-KR" altLang="en-US" noProof="0" dirty="0"/>
           </a:p>
@@ -4787,7 +4897,7 @@
             <a:pPr rtl="0"/>
             <a:fld id="{30189E66-D439-4767-B911-EB49CB20E313}" type="datetime1">
               <a:rPr lang="ko-KR" altLang="en-US" noProof="0" smtClean="0"/>
-              <a:t>2026-03-25</a:t>
+              <a:t>2026-04-07</a:t>
             </a:fld>
             <a:endParaRPr lang="ko-KR" altLang="en-US" noProof="0" dirty="0"/>
           </a:p>
@@ -4900,7 +5010,7 @@
             <a:pPr rtl="0"/>
             <a:fld id="{D4E4FFC0-DB28-4291-80A0-63DBF8428320}" type="datetime1">
               <a:rPr lang="ko-KR" altLang="en-US" noProof="0" smtClean="0"/>
-              <a:t>2026-03-25</a:t>
+              <a:t>2026-04-07</a:t>
             </a:fld>
             <a:endParaRPr lang="ko-KR" altLang="en-US" noProof="0" dirty="0"/>
           </a:p>
@@ -5205,7 +5315,7 @@
             <a:pPr rtl="0"/>
             <a:fld id="{3AB5804B-C38E-4214-93DF-3E6DA00134E8}" type="datetime1">
               <a:rPr lang="ko-KR" altLang="en-US" noProof="0" smtClean="0"/>
-              <a:t>2026-03-25</a:t>
+              <a:t>2026-04-07</a:t>
             </a:fld>
             <a:endParaRPr lang="ko-KR" altLang="en-US" noProof="0" dirty="0"/>
           </a:p>
@@ -5499,7 +5609,7 @@
             <a:pPr rtl="0"/>
             <a:fld id="{CABEE384-F18F-4153-AC21-608599869F84}" type="datetime1">
               <a:rPr lang="ko-KR" altLang="en-US" noProof="0" smtClean="0"/>
-              <a:t>2026-03-25</a:t>
+              <a:t>2026-04-07</a:t>
             </a:fld>
             <a:endParaRPr lang="ko-KR" altLang="en-US" noProof="0" dirty="0"/>
           </a:p>
@@ -5731,7 +5841,7 @@
           <a:p>
             <a:fld id="{667A4C69-65FB-481C-AC2A-84D254D33675}" type="datetime1">
               <a:rPr lang="ko-KR" altLang="en-US" smtClean="0"/>
-              <a:t>2026-03-25</a:t>
+              <a:t>2026-04-07</a:t>
             </a:fld>
             <a:endParaRPr lang="ko-KR" altLang="en-US" dirty="0"/>
           </a:p>
@@ -6374,6 +6484,153 @@
         <p:spPr>
           <a:xfrm>
             <a:off x="333772" y="370028"/>
+            <a:ext cx="7231467" cy="523220"/>
+          </a:xfrm>
+          <a:prstGeom prst="rect">
+            <a:avLst/>
+          </a:prstGeom>
+        </p:spPr>
+        <p:txBody>
+          <a:bodyPr wrap="none">
+            <a:spAutoFit/>
+          </a:bodyPr>
+          <a:lstStyle/>
+          <a:p>
+            <a:r>
+              <a:rPr lang="ko-KR" altLang="en-US" sz="2800" b="1" dirty="0"/>
+              <a:t>새로운 신약의 효과 검정을 위한 통계분석</a:t>
+            </a:r>
+            <a:r>
+              <a:rPr lang="en-US" altLang="ko-KR" sz="2800" b="1" dirty="0"/>
+              <a:t>(2/3)</a:t>
+            </a:r>
+            <a:endParaRPr lang="ko-KR" altLang="en-US" sz="2800" b="1" dirty="0"/>
+          </a:p>
+        </p:txBody>
+      </p:sp>
+      <p:pic>
+        <p:nvPicPr>
+          <p:cNvPr id="5" name="그림 4"/>
+          <p:cNvPicPr>
+            <a:picLocks noChangeAspect="1"/>
+          </p:cNvPicPr>
+          <p:nvPr/>
+        </p:nvPicPr>
+        <p:blipFill>
+          <a:blip r:embed="rId3"/>
+          <a:stretch>
+            <a:fillRect/>
+          </a:stretch>
+        </p:blipFill>
+        <p:spPr>
+          <a:xfrm>
+            <a:off x="1601945" y="1168519"/>
+            <a:ext cx="6796724" cy="819248"/>
+          </a:xfrm>
+          <a:prstGeom prst="rect">
+            <a:avLst/>
+          </a:prstGeom>
+        </p:spPr>
+      </p:pic>
+      <p:pic>
+        <p:nvPicPr>
+          <p:cNvPr id="3" name="그림 2"/>
+          <p:cNvPicPr>
+            <a:picLocks noChangeAspect="1"/>
+          </p:cNvPicPr>
+          <p:nvPr/>
+        </p:nvPicPr>
+        <p:blipFill>
+          <a:blip r:embed="rId4"/>
+          <a:stretch>
+            <a:fillRect/>
+          </a:stretch>
+        </p:blipFill>
+        <p:spPr>
+          <a:xfrm>
+            <a:off x="1601945" y="2263038"/>
+            <a:ext cx="9652701" cy="3953500"/>
+          </a:xfrm>
+          <a:prstGeom prst="rect">
+            <a:avLst/>
+          </a:prstGeom>
+        </p:spPr>
+      </p:pic>
+    </p:spTree>
+    <p:extLst>
+      <p:ext uri="{BB962C8B-B14F-4D97-AF65-F5344CB8AC3E}">
+        <p14:creationId xmlns:p14="http://schemas.microsoft.com/office/powerpoint/2010/main" val="3176157259"/>
+      </p:ext>
+    </p:extLst>
+  </p:cSld>
+  <p:clrMapOvr>
+    <a:masterClrMapping/>
+  </p:clrMapOvr>
+  <mc:AlternateContent xmlns:mc="http://schemas.openxmlformats.org/markup-compatibility/2006" xmlns:p14="http://schemas.microsoft.com/office/powerpoint/2010/main">
+    <mc:Choice Requires="p14">
+      <p:transition spd="med" p14:dur="700">
+        <p:fade/>
+      </p:transition>
+    </mc:Choice>
+    <mc:Fallback xmlns="">
+      <p:transition spd="med">
+        <p:fade/>
+      </p:transition>
+    </mc:Fallback>
+  </mc:AlternateContent>
+</p:sld>
+</file>
+
+<file path=ppt/slides/slide11.xml><?xml version="1.0" encoding="utf-8"?>
+<p:sld xmlns:a="http://schemas.openxmlformats.org/drawingml/2006/main" xmlns:r="http://schemas.openxmlformats.org/officeDocument/2006/relationships" xmlns:p="http://schemas.openxmlformats.org/presentationml/2006/main">
+  <p:cSld>
+    <p:spTree>
+      <p:nvGrpSpPr>
+        <p:cNvPr id="1" name=""/>
+        <p:cNvGrpSpPr/>
+        <p:nvPr/>
+      </p:nvGrpSpPr>
+      <p:grpSpPr>
+        <a:xfrm>
+          <a:off x="0" y="0"/>
+          <a:ext cx="0" cy="0"/>
+          <a:chOff x="0" y="0"/>
+          <a:chExt cx="0" cy="0"/>
+        </a:xfrm>
+      </p:grpSpPr>
+      <p:sp>
+        <p:nvSpPr>
+          <p:cNvPr id="8" name="슬라이드 번호 개체 틀 7"/>
+          <p:cNvSpPr>
+            <a:spLocks noGrp="1"/>
+          </p:cNvSpPr>
+          <p:nvPr>
+            <p:ph type="sldNum" sz="quarter" idx="12"/>
+          </p:nvPr>
+        </p:nvSpPr>
+        <p:spPr/>
+        <p:txBody>
+          <a:bodyPr/>
+          <a:lstStyle/>
+          <a:p>
+            <a:pPr rtl="0"/>
+            <a:fld id="{A3F31473-23EB-4724-8B59-FE6D21D89FA4}" type="slidenum">
+              <a:rPr lang="en-US" altLang="ko-KR" noProof="0" smtClean="0"/>
+              <a:t>11</a:t>
+            </a:fld>
+            <a:endParaRPr lang="en-US" altLang="ko-KR" noProof="0" dirty="0"/>
+          </a:p>
+        </p:txBody>
+      </p:sp>
+      <p:sp>
+        <p:nvSpPr>
+          <p:cNvPr id="4" name="직사각형 3"/>
+          <p:cNvSpPr/>
+          <p:nvPr/>
+        </p:nvSpPr>
+        <p:spPr>
+          <a:xfrm>
+            <a:off x="333772" y="370028"/>
             <a:ext cx="7603363" cy="523220"/>
           </a:xfrm>
           <a:prstGeom prst="rect">
@@ -6810,7 +7067,7 @@
 </p:sld>
 </file>
 
-<file path=ppt/slides/slide11.xml><?xml version="1.0" encoding="utf-8"?>
+<file path=ppt/slides/slide12.xml><?xml version="1.0" encoding="utf-8"?>
 <p:sld xmlns:a="http://schemas.openxmlformats.org/drawingml/2006/main" xmlns:r="http://schemas.openxmlformats.org/officeDocument/2006/relationships" xmlns:p="http://schemas.openxmlformats.org/presentationml/2006/main">
   <p:cSld>
     <p:spTree>
@@ -6857,7 +7114,7 @@
             <a:pPr rtl="0"/>
             <a:fld id="{A3F31473-23EB-4724-8B59-FE6D21D89FA4}" type="slidenum">
               <a:rPr lang="en-US" altLang="ko-KR" noProof="0" smtClean="0"/>
-              <a:t>11</a:t>
+              <a:t>12</a:t>
             </a:fld>
             <a:endParaRPr lang="en-US" altLang="ko-KR" noProof="0" dirty="0"/>
           </a:p>
@@ -7397,7 +7654,7 @@
 </p:sld>
 </file>
 
-<file path=ppt/slides/slide12.xml><?xml version="1.0" encoding="utf-8"?>
+<file path=ppt/slides/slide13.xml><?xml version="1.0" encoding="utf-8"?>
 <p:sld xmlns:a="http://schemas.openxmlformats.org/drawingml/2006/main" xmlns:r="http://schemas.openxmlformats.org/officeDocument/2006/relationships" xmlns:p="http://schemas.openxmlformats.org/presentationml/2006/main">
   <p:cSld>
     <p:spTree>
@@ -7432,7 +7689,7 @@
             <a:pPr rtl="0"/>
             <a:fld id="{A3F31473-23EB-4724-8B59-FE6D21D89FA4}" type="slidenum">
               <a:rPr lang="en-US" altLang="ko-KR" noProof="0" smtClean="0"/>
-              <a:t>12</a:t>
+              <a:t>13</a:t>
             </a:fld>
             <a:endParaRPr lang="en-US" altLang="ko-KR" noProof="0" dirty="0"/>
           </a:p>
@@ -7487,7 +7744,7 @@
 </p:sld>
 </file>
 
-<file path=ppt/slides/slide13.xml><?xml version="1.0" encoding="utf-8"?>
+<file path=ppt/slides/slide14.xml><?xml version="1.0" encoding="utf-8"?>
 <p:sld xmlns:a="http://schemas.openxmlformats.org/drawingml/2006/main" xmlns:r="http://schemas.openxmlformats.org/officeDocument/2006/relationships" xmlns:p="http://schemas.openxmlformats.org/presentationml/2006/main">
   <p:cSld>
     <p:spTree>
@@ -7534,7 +7791,7 @@
             <a:pPr rtl="0"/>
             <a:fld id="{A3F31473-23EB-4724-8B59-FE6D21D89FA4}" type="slidenum">
               <a:rPr lang="en-US" altLang="ko-KR" noProof="0" smtClean="0"/>
-              <a:t>13</a:t>
+              <a:t>14</a:t>
             </a:fld>
             <a:endParaRPr lang="en-US" altLang="ko-KR" noProof="0" dirty="0"/>
           </a:p>
@@ -8148,7 +8405,7 @@
 </p:sld>
 </file>
 
-<file path=ppt/slides/slide14.xml><?xml version="1.0" encoding="utf-8"?>
+<file path=ppt/slides/slide15.xml><?xml version="1.0" encoding="utf-8"?>
 <p:sld xmlns:a="http://schemas.openxmlformats.org/drawingml/2006/main" xmlns:r="http://schemas.openxmlformats.org/officeDocument/2006/relationships" xmlns:p="http://schemas.openxmlformats.org/presentationml/2006/main">
   <p:cSld>
     <p:spTree>
@@ -8195,7 +8452,7 @@
             <a:pPr rtl="0"/>
             <a:fld id="{A3F31473-23EB-4724-8B59-FE6D21D89FA4}" type="slidenum">
               <a:rPr lang="en-US" altLang="ko-KR" noProof="0" smtClean="0"/>
-              <a:t>14</a:t>
+              <a:t>15</a:t>
             </a:fld>
             <a:endParaRPr lang="en-US" altLang="ko-KR" noProof="0" dirty="0"/>
           </a:p>
@@ -8956,7 +9213,7 @@
 </p:sld>
 </file>
 
-<file path=ppt/slides/slide15.xml><?xml version="1.0" encoding="utf-8"?>
+<file path=ppt/slides/slide16.xml><?xml version="1.0" encoding="utf-8"?>
 <p:sld xmlns:a="http://schemas.openxmlformats.org/drawingml/2006/main" xmlns:r="http://schemas.openxmlformats.org/officeDocument/2006/relationships" xmlns:p="http://schemas.openxmlformats.org/presentationml/2006/main">
   <p:cSld>
     <p:spTree>
@@ -9003,7 +9260,7 @@
             <a:pPr rtl="0"/>
             <a:fld id="{A3F31473-23EB-4724-8B59-FE6D21D89FA4}" type="slidenum">
               <a:rPr lang="en-US" altLang="ko-KR" noProof="0" smtClean="0"/>
-              <a:t>15</a:t>
+              <a:t>16</a:t>
             </a:fld>
             <a:endParaRPr lang="en-US" altLang="ko-KR" noProof="0" dirty="0"/>
           </a:p>
@@ -9513,7 +9770,7 @@
 </p:sld>
 </file>
 
-<file path=ppt/slides/slide16.xml><?xml version="1.0" encoding="utf-8"?>
+<file path=ppt/slides/slide17.xml><?xml version="1.0" encoding="utf-8"?>
 <p:sld xmlns:a="http://schemas.openxmlformats.org/drawingml/2006/main" xmlns:r="http://schemas.openxmlformats.org/officeDocument/2006/relationships" xmlns:p="http://schemas.openxmlformats.org/presentationml/2006/main">
   <p:cSld>
     <p:spTree>
@@ -9560,7 +9817,7 @@
             <a:pPr rtl="0"/>
             <a:fld id="{A3F31473-23EB-4724-8B59-FE6D21D89FA4}" type="slidenum">
               <a:rPr lang="en-US" altLang="ko-KR" noProof="0" smtClean="0"/>
-              <a:t>16</a:t>
+              <a:t>17</a:t>
             </a:fld>
             <a:endParaRPr lang="en-US" altLang="ko-KR" noProof="0" dirty="0"/>
           </a:p>
@@ -10054,7 +10311,7 @@
 </p:sld>
 </file>
 
-<file path=ppt/slides/slide17.xml><?xml version="1.0" encoding="utf-8"?>
+<file path=ppt/slides/slide18.xml><?xml version="1.0" encoding="utf-8"?>
 <p:sld xmlns:a="http://schemas.openxmlformats.org/drawingml/2006/main" xmlns:r="http://schemas.openxmlformats.org/officeDocument/2006/relationships" xmlns:p="http://schemas.openxmlformats.org/presentationml/2006/main">
   <p:cSld>
     <p:spTree>
@@ -10095,7 +10352,7 @@
             <a:pPr rtl="0"/>
             <a:fld id="{A3F31473-23EB-4724-8B59-FE6D21D89FA4}" type="slidenum">
               <a:rPr lang="en-US" altLang="ko-KR" noProof="0" smtClean="0"/>
-              <a:t>17</a:t>
+              <a:t>18</a:t>
             </a:fld>
             <a:endParaRPr lang="en-US" altLang="ko-KR" noProof="0" dirty="0"/>
           </a:p>
@@ -10520,7 +10777,7 @@
 </p:sld>
 </file>
 
-<file path=ppt/slides/slide18.xml><?xml version="1.0" encoding="utf-8"?>
+<file path=ppt/slides/slide19.xml><?xml version="1.0" encoding="utf-8"?>
 <p:sld xmlns:a="http://schemas.openxmlformats.org/drawingml/2006/main" xmlns:r="http://schemas.openxmlformats.org/officeDocument/2006/relationships" xmlns:p="http://schemas.openxmlformats.org/presentationml/2006/main">
   <p:cSld>
     <p:spTree>
@@ -10555,7 +10812,7 @@
             <a:pPr rtl="0"/>
             <a:fld id="{A3F31473-23EB-4724-8B59-FE6D21D89FA4}" type="slidenum">
               <a:rPr lang="en-US" altLang="ko-KR" noProof="0" smtClean="0"/>
-              <a:t>18</a:t>
+              <a:t>19</a:t>
             </a:fld>
             <a:endParaRPr lang="en-US" altLang="ko-KR" noProof="0" dirty="0"/>
           </a:p>
@@ -10610,7 +10867,7 @@
 </p:sld>
 </file>
 
-<file path=ppt/slides/slide19.xml><?xml version="1.0" encoding="utf-8"?>
+<file path=ppt/slides/slide2.xml><?xml version="1.0" encoding="utf-8"?>
 <p:sld xmlns:a="http://schemas.openxmlformats.org/drawingml/2006/main" xmlns:r="http://schemas.openxmlformats.org/officeDocument/2006/relationships" xmlns:p="http://schemas.openxmlformats.org/presentationml/2006/main">
   <p:cSld>
     <p:spTree>
@@ -10645,7 +10902,526 @@
             <a:pPr rtl="0"/>
             <a:fld id="{A3F31473-23EB-4724-8B59-FE6D21D89FA4}" type="slidenum">
               <a:rPr lang="en-US" altLang="ko-KR" noProof="0" smtClean="0"/>
-              <a:t>19</a:t>
+              <a:t>2</a:t>
+            </a:fld>
+            <a:endParaRPr lang="en-US" altLang="ko-KR" noProof="0" dirty="0"/>
+          </a:p>
+        </p:txBody>
+      </p:sp>
+      <p:pic>
+        <p:nvPicPr>
+          <p:cNvPr id="4" name="그림 3"/>
+          <p:cNvPicPr>
+            <a:picLocks noChangeAspect="1"/>
+          </p:cNvPicPr>
+          <p:nvPr/>
+        </p:nvPicPr>
+        <p:blipFill>
+          <a:blip r:embed="rId3"/>
+          <a:stretch>
+            <a:fillRect/>
+          </a:stretch>
+        </p:blipFill>
+        <p:spPr>
+          <a:xfrm>
+            <a:off x="1108596" y="2774241"/>
+            <a:ext cx="3202059" cy="2886950"/>
+          </a:xfrm>
+          <a:prstGeom prst="rect">
+            <a:avLst/>
+          </a:prstGeom>
+        </p:spPr>
+      </p:pic>
+      <p:pic>
+        <p:nvPicPr>
+          <p:cNvPr id="5" name="그림 4"/>
+          <p:cNvPicPr>
+            <a:picLocks noChangeAspect="1"/>
+          </p:cNvPicPr>
+          <p:nvPr/>
+        </p:nvPicPr>
+        <p:blipFill>
+          <a:blip r:embed="rId4"/>
+          <a:stretch>
+            <a:fillRect/>
+          </a:stretch>
+        </p:blipFill>
+        <p:spPr>
+          <a:xfrm>
+            <a:off x="7678588" y="2774241"/>
+            <a:ext cx="2983281" cy="2850975"/>
+          </a:xfrm>
+          <a:prstGeom prst="rect">
+            <a:avLst/>
+          </a:prstGeom>
+        </p:spPr>
+      </p:pic>
+      <mc:AlternateContent xmlns:mc="http://schemas.openxmlformats.org/markup-compatibility/2006" xmlns:a14="http://schemas.microsoft.com/office/drawing/2010/main">
+        <mc:Choice Requires="a14">
+          <p:sp>
+            <p:nvSpPr>
+              <p:cNvPr id="6" name="TextBox 5"/>
+              <p:cNvSpPr txBox="1"/>
+              <p:nvPr/>
+            </p:nvSpPr>
+            <p:spPr>
+              <a:xfrm>
+                <a:off x="1108596" y="2095022"/>
+                <a:ext cx="3075955" cy="369332"/>
+              </a:xfrm>
+              <a:prstGeom prst="rect">
+                <a:avLst/>
+              </a:prstGeom>
+              <a:noFill/>
+            </p:spPr>
+            <p:txBody>
+              <a:bodyPr wrap="square" rtlCol="0">
+                <a:spAutoFit/>
+              </a:bodyPr>
+              <a:lstStyle/>
+              <a:p>
+                <a:pPr algn="ctr"/>
+                <a:r>
+                  <a:rPr lang="ko-KR" altLang="en-US" b="1" dirty="0"/>
+                  <a:t>천동설 </a:t>
+                </a:r>
+                <a:r>
+                  <a:rPr lang="en-US" altLang="ko-KR" b="1" dirty="0"/>
+                  <a:t>: </a:t>
+                </a:r>
+                <a:r>
+                  <a:rPr lang="ko-KR" altLang="en-US" b="1" dirty="0"/>
+                  <a:t>귀무가설</a:t>
+                </a:r>
+                <a:r>
+                  <a:rPr lang="en-US" altLang="ko-KR" b="1" dirty="0"/>
+                  <a:t>(</a:t>
+                </a:r>
+                <a14:m>
+                  <m:oMath xmlns:m="http://schemas.openxmlformats.org/officeDocument/2006/math">
+                    <m:sSub>
+                      <m:sSubPr>
+                        <m:ctrlPr>
+                          <a:rPr lang="en-US" altLang="ko-KR" b="1" i="1" smtClean="0">
+                            <a:latin typeface="Cambria Math" panose="02040503050406030204" pitchFamily="18" charset="0"/>
+                          </a:rPr>
+                        </m:ctrlPr>
+                      </m:sSubPr>
+                      <m:e>
+                        <m:r>
+                          <a:rPr lang="en-US" altLang="ko-KR" b="1" i="1" smtClean="0">
+                            <a:latin typeface="Cambria Math" panose="02040503050406030204" pitchFamily="18" charset="0"/>
+                          </a:rPr>
+                          <m:t>𝑯</m:t>
+                        </m:r>
+                      </m:e>
+                      <m:sub>
+                        <m:r>
+                          <a:rPr lang="en-US" altLang="ko-KR" b="1" i="1" smtClean="0">
+                            <a:latin typeface="Cambria Math" panose="02040503050406030204" pitchFamily="18" charset="0"/>
+                          </a:rPr>
+                          <m:t>𝟎</m:t>
+                        </m:r>
+                      </m:sub>
+                    </m:sSub>
+                  </m:oMath>
+                </a14:m>
+                <a:r>
+                  <a:rPr lang="en-US" altLang="ko-KR" b="1" dirty="0"/>
+                  <a:t>)</a:t>
+                </a:r>
+                <a:endParaRPr lang="ko-KR" altLang="en-US" b="1" dirty="0"/>
+              </a:p>
+            </p:txBody>
+          </p:sp>
+        </mc:Choice>
+        <mc:Fallback xmlns="">
+          <p:sp>
+            <p:nvSpPr>
+              <p:cNvPr id="6" name="TextBox 5"/>
+              <p:cNvSpPr txBox="1">
+                <a:spLocks noRot="1" noChangeAspect="1" noMove="1" noResize="1" noEditPoints="1" noAdjustHandles="1" noChangeArrowheads="1" noChangeShapeType="1" noTextEdit="1"/>
+              </p:cNvSpPr>
+              <p:nvPr/>
+            </p:nvSpPr>
+            <p:spPr>
+              <a:xfrm>
+                <a:off x="1108596" y="2095022"/>
+                <a:ext cx="3075955" cy="369332"/>
+              </a:xfrm>
+              <a:prstGeom prst="rect">
+                <a:avLst/>
+              </a:prstGeom>
+              <a:blipFill>
+                <a:blip r:embed="rId5"/>
+                <a:stretch>
+                  <a:fillRect t="-15000" b="-28333"/>
+                </a:stretch>
+              </a:blipFill>
+            </p:spPr>
+            <p:txBody>
+              <a:bodyPr/>
+              <a:lstStyle/>
+              <a:p>
+                <a:r>
+                  <a:rPr lang="ko-KR" altLang="en-US">
+                    <a:noFill/>
+                  </a:rPr>
+                  <a:t> </a:t>
+                </a:r>
+              </a:p>
+            </p:txBody>
+          </p:sp>
+        </mc:Fallback>
+      </mc:AlternateContent>
+      <mc:AlternateContent xmlns:mc="http://schemas.openxmlformats.org/markup-compatibility/2006" xmlns:a14="http://schemas.microsoft.com/office/drawing/2010/main">
+        <mc:Choice Requires="a14">
+          <p:sp>
+            <p:nvSpPr>
+              <p:cNvPr id="12" name="TextBox 11"/>
+              <p:cNvSpPr txBox="1"/>
+              <p:nvPr/>
+            </p:nvSpPr>
+            <p:spPr>
+              <a:xfrm>
+                <a:off x="7676200" y="2095022"/>
+                <a:ext cx="2983281" cy="369332"/>
+              </a:xfrm>
+              <a:prstGeom prst="rect">
+                <a:avLst/>
+              </a:prstGeom>
+              <a:noFill/>
+            </p:spPr>
+            <p:txBody>
+              <a:bodyPr wrap="square" rtlCol="0">
+                <a:spAutoFit/>
+              </a:bodyPr>
+              <a:lstStyle/>
+              <a:p>
+                <a:pPr algn="ctr"/>
+                <a:r>
+                  <a:rPr lang="ko-KR" altLang="en-US" b="1" dirty="0"/>
+                  <a:t>지동설 </a:t>
+                </a:r>
+                <a:r>
+                  <a:rPr lang="en-US" altLang="ko-KR" b="1" dirty="0"/>
+                  <a:t>: </a:t>
+                </a:r>
+                <a:r>
+                  <a:rPr lang="ko-KR" altLang="en-US" b="1" dirty="0" err="1"/>
+                  <a:t>대립가설</a:t>
+                </a:r>
+                <a:r>
+                  <a:rPr lang="en-US" altLang="ko-KR" b="1" dirty="0"/>
+                  <a:t>(</a:t>
+                </a:r>
+                <a14:m>
+                  <m:oMath xmlns:m="http://schemas.openxmlformats.org/officeDocument/2006/math">
+                    <m:sSub>
+                      <m:sSubPr>
+                        <m:ctrlPr>
+                          <a:rPr lang="en-US" altLang="ko-KR" b="1" i="1">
+                            <a:latin typeface="Cambria Math" panose="02040503050406030204" pitchFamily="18" charset="0"/>
+                          </a:rPr>
+                        </m:ctrlPr>
+                      </m:sSubPr>
+                      <m:e>
+                        <m:r>
+                          <a:rPr lang="en-US" altLang="ko-KR" b="1" i="1">
+                            <a:latin typeface="Cambria Math" panose="02040503050406030204" pitchFamily="18" charset="0"/>
+                          </a:rPr>
+                          <m:t>𝑯</m:t>
+                        </m:r>
+                      </m:e>
+                      <m:sub>
+                        <m:r>
+                          <a:rPr lang="en-US" altLang="ko-KR" b="1" i="1" smtClean="0">
+                            <a:latin typeface="Cambria Math" panose="02040503050406030204" pitchFamily="18" charset="0"/>
+                          </a:rPr>
+                          <m:t>𝟏</m:t>
+                        </m:r>
+                      </m:sub>
+                    </m:sSub>
+                  </m:oMath>
+                </a14:m>
+                <a:r>
+                  <a:rPr lang="en-US" altLang="ko-KR" b="1" dirty="0"/>
+                  <a:t>)</a:t>
+                </a:r>
+                <a:endParaRPr lang="ko-KR" altLang="en-US" b="1" dirty="0"/>
+              </a:p>
+            </p:txBody>
+          </p:sp>
+        </mc:Choice>
+        <mc:Fallback xmlns="">
+          <p:sp>
+            <p:nvSpPr>
+              <p:cNvPr id="12" name="TextBox 11"/>
+              <p:cNvSpPr txBox="1">
+                <a:spLocks noRot="1" noChangeAspect="1" noMove="1" noResize="1" noEditPoints="1" noAdjustHandles="1" noChangeArrowheads="1" noChangeShapeType="1" noTextEdit="1"/>
+              </p:cNvSpPr>
+              <p:nvPr/>
+            </p:nvSpPr>
+            <p:spPr>
+              <a:xfrm>
+                <a:off x="7676200" y="2095022"/>
+                <a:ext cx="2983281" cy="369332"/>
+              </a:xfrm>
+              <a:prstGeom prst="rect">
+                <a:avLst/>
+              </a:prstGeom>
+              <a:blipFill>
+                <a:blip r:embed="rId6"/>
+                <a:stretch>
+                  <a:fillRect t="-15000" b="-28333"/>
+                </a:stretch>
+              </a:blipFill>
+            </p:spPr>
+            <p:txBody>
+              <a:bodyPr/>
+              <a:lstStyle/>
+              <a:p>
+                <a:r>
+                  <a:rPr lang="ko-KR" altLang="en-US">
+                    <a:noFill/>
+                  </a:rPr>
+                  <a:t> </a:t>
+                </a:r>
+              </a:p>
+            </p:txBody>
+          </p:sp>
+        </mc:Fallback>
+      </mc:AlternateContent>
+      <p:cxnSp>
+        <p:nvCxnSpPr>
+          <p:cNvPr id="9" name="직선 화살표 연결선 8"/>
+          <p:cNvCxnSpPr>
+            <a:cxnSpLocks/>
+          </p:cNvCxnSpPr>
+          <p:nvPr/>
+        </p:nvCxnSpPr>
+        <p:spPr>
+          <a:xfrm>
+            <a:off x="5220054" y="4199728"/>
+            <a:ext cx="1440160" cy="0"/>
+          </a:xfrm>
+          <a:prstGeom prst="straightConnector1">
+            <a:avLst/>
+          </a:prstGeom>
+          <a:ln w="57150">
+            <a:headEnd type="triangle"/>
+            <a:tailEnd type="triangle"/>
+          </a:ln>
+        </p:spPr>
+        <p:style>
+          <a:lnRef idx="1">
+            <a:schemeClr val="accent1"/>
+          </a:lnRef>
+          <a:fillRef idx="0">
+            <a:schemeClr val="accent1"/>
+          </a:fillRef>
+          <a:effectRef idx="0">
+            <a:schemeClr val="accent1"/>
+          </a:effectRef>
+          <a:fontRef idx="minor">
+            <a:schemeClr val="tx1"/>
+          </a:fontRef>
+        </p:style>
+      </p:cxnSp>
+      <p:sp>
+        <p:nvSpPr>
+          <p:cNvPr id="3" name="TextBox 2">
+            <a:extLst>
+              <a:ext uri="{FF2B5EF4-FFF2-40B4-BE49-F238E27FC236}">
+                <a16:creationId xmlns:a16="http://schemas.microsoft.com/office/drawing/2014/main" id="{B1D92C58-8C4D-6C08-A392-EF301B1BC5A4}"/>
+              </a:ext>
+            </a:extLst>
+          </p:cNvPr>
+          <p:cNvSpPr txBox="1"/>
+          <p:nvPr/>
+        </p:nvSpPr>
+        <p:spPr>
+          <a:xfrm>
+            <a:off x="693812" y="630393"/>
+            <a:ext cx="11191750" cy="873124"/>
+          </a:xfrm>
+          <a:prstGeom prst="rect">
+            <a:avLst/>
+          </a:prstGeom>
+          <a:noFill/>
+        </p:spPr>
+        <p:txBody>
+          <a:bodyPr wrap="square">
+            <a:spAutoFit/>
+          </a:bodyPr>
+          <a:lstStyle/>
+          <a:p>
+            <a:pPr marL="285750" indent="-285750">
+              <a:lnSpc>
+                <a:spcPct val="150000"/>
+              </a:lnSpc>
+              <a:buFont typeface="Wingdings" panose="05000000000000000000" pitchFamily="2" charset="2"/>
+              <a:buChar char="v"/>
+            </a:pPr>
+            <a:r>
+              <a:rPr lang="ko-KR" altLang="en-US" dirty="0">
+                <a:latin typeface="+mj-ea"/>
+                <a:ea typeface="+mj-ea"/>
+              </a:rPr>
+              <a:t>천동설의</a:t>
+            </a:r>
+            <a:r>
+              <a:rPr lang="en-US" altLang="ko-KR" dirty="0">
+                <a:latin typeface="+mj-ea"/>
+                <a:ea typeface="+mj-ea"/>
+              </a:rPr>
+              <a:t> </a:t>
+            </a:r>
+            <a:r>
+              <a:rPr lang="ko-KR" altLang="en-US" dirty="0">
+                <a:latin typeface="+mj-ea"/>
+                <a:ea typeface="+mj-ea"/>
+              </a:rPr>
+              <a:t>확률분포를 가정하고 표본</a:t>
+            </a:r>
+            <a:r>
+              <a:rPr lang="en-US" altLang="ko-KR" dirty="0">
+                <a:latin typeface="+mj-ea"/>
+                <a:ea typeface="+mj-ea"/>
+              </a:rPr>
+              <a:t>(Sample)</a:t>
+            </a:r>
+            <a:r>
+              <a:rPr lang="ko-KR" altLang="en-US" dirty="0">
+                <a:latin typeface="+mj-ea"/>
+                <a:ea typeface="+mj-ea"/>
+              </a:rPr>
+              <a:t>으로부터 얻은 정보</a:t>
+            </a:r>
+            <a:r>
+              <a:rPr lang="en-US" altLang="ko-KR" dirty="0">
+                <a:latin typeface="+mj-ea"/>
+                <a:ea typeface="+mj-ea"/>
+              </a:rPr>
+              <a:t>(</a:t>
+            </a:r>
+            <a:r>
+              <a:rPr lang="ko-KR" altLang="en-US" dirty="0">
+                <a:latin typeface="+mj-ea"/>
+                <a:ea typeface="+mj-ea"/>
+              </a:rPr>
+              <a:t>통계량</a:t>
+            </a:r>
+            <a:r>
+              <a:rPr lang="en-US" altLang="ko-KR" dirty="0">
+                <a:latin typeface="+mj-ea"/>
+                <a:ea typeface="+mj-ea"/>
+              </a:rPr>
+              <a:t>)</a:t>
+            </a:r>
+            <a:r>
+              <a:rPr lang="ko-KR" altLang="en-US" dirty="0">
+                <a:latin typeface="+mj-ea"/>
+                <a:ea typeface="+mj-ea"/>
+              </a:rPr>
+              <a:t>를 바탕으로 얼마나 천동설</a:t>
+            </a:r>
+            <a:r>
+              <a:rPr lang="en-US" altLang="ko-KR" dirty="0">
+                <a:latin typeface="+mj-ea"/>
+                <a:ea typeface="+mj-ea"/>
+              </a:rPr>
+              <a:t>(</a:t>
+            </a:r>
+            <a:r>
+              <a:rPr lang="ko-KR" altLang="en-US" dirty="0">
+                <a:latin typeface="+mj-ea"/>
+                <a:ea typeface="+mj-ea"/>
+              </a:rPr>
+              <a:t>귀무가설</a:t>
+            </a:r>
+            <a:r>
+              <a:rPr lang="en-US" altLang="ko-KR" dirty="0">
+                <a:latin typeface="+mj-ea"/>
+                <a:ea typeface="+mj-ea"/>
+              </a:rPr>
+              <a:t>)</a:t>
+            </a:r>
+            <a:r>
+              <a:rPr lang="ko-KR" altLang="en-US" dirty="0">
+                <a:latin typeface="+mj-ea"/>
+                <a:ea typeface="+mj-ea"/>
+              </a:rPr>
+              <a:t>과 다른 지를 검증하는 것이 목적</a:t>
+            </a:r>
+            <a:endParaRPr lang="en-US" altLang="ko-KR" dirty="0">
+              <a:latin typeface="+mj-ea"/>
+              <a:ea typeface="+mj-ea"/>
+            </a:endParaRPr>
+          </a:p>
+        </p:txBody>
+      </p:sp>
+    </p:spTree>
+    <p:extLst>
+      <p:ext uri="{BB962C8B-B14F-4D97-AF65-F5344CB8AC3E}">
+        <p14:creationId xmlns:p14="http://schemas.microsoft.com/office/powerpoint/2010/main" val="1126723429"/>
+      </p:ext>
+    </p:extLst>
+  </p:cSld>
+  <p:clrMapOvr>
+    <a:masterClrMapping/>
+  </p:clrMapOvr>
+  <mc:AlternateContent xmlns:mc="http://schemas.openxmlformats.org/markup-compatibility/2006" xmlns:p14="http://schemas.microsoft.com/office/powerpoint/2010/main">
+    <mc:Choice Requires="p14">
+      <p:transition spd="med" p14:dur="700">
+        <p:fade/>
+      </p:transition>
+    </mc:Choice>
+    <mc:Fallback xmlns="">
+      <p:transition spd="med">
+        <p:fade/>
+      </p:transition>
+    </mc:Fallback>
+  </mc:AlternateContent>
+</p:sld>
+</file>
+
+<file path=ppt/slides/slide20.xml><?xml version="1.0" encoding="utf-8"?>
+<p:sld xmlns:a="http://schemas.openxmlformats.org/drawingml/2006/main" xmlns:r="http://schemas.openxmlformats.org/officeDocument/2006/relationships" xmlns:p="http://schemas.openxmlformats.org/presentationml/2006/main">
+  <p:cSld>
+    <p:spTree>
+      <p:nvGrpSpPr>
+        <p:cNvPr id="1" name=""/>
+        <p:cNvGrpSpPr/>
+        <p:nvPr/>
+      </p:nvGrpSpPr>
+      <p:grpSpPr>
+        <a:xfrm>
+          <a:off x="0" y="0"/>
+          <a:ext cx="0" cy="0"/>
+          <a:chOff x="0" y="0"/>
+          <a:chExt cx="0" cy="0"/>
+        </a:xfrm>
+      </p:grpSpPr>
+      <p:sp>
+        <p:nvSpPr>
+          <p:cNvPr id="8" name="슬라이드 번호 개체 틀 7"/>
+          <p:cNvSpPr>
+            <a:spLocks noGrp="1"/>
+          </p:cNvSpPr>
+          <p:nvPr>
+            <p:ph type="sldNum" sz="quarter" idx="12"/>
+          </p:nvPr>
+        </p:nvSpPr>
+        <p:spPr/>
+        <p:txBody>
+          <a:bodyPr/>
+          <a:lstStyle/>
+          <a:p>
+            <a:pPr rtl="0"/>
+            <a:fld id="{A3F31473-23EB-4724-8B59-FE6D21D89FA4}" type="slidenum">
+              <a:rPr lang="en-US" altLang="ko-KR" noProof="0" smtClean="0"/>
+              <a:t>20</a:t>
             </a:fld>
             <a:endParaRPr lang="en-US" altLang="ko-KR" noProof="0" dirty="0"/>
           </a:p>
@@ -10793,8 +11569,8 @@
           </a:fontRef>
         </p:style>
       </p:cxnSp>
-      <mc:AlternateContent xmlns:mc="http://schemas.openxmlformats.org/markup-compatibility/2006">
-        <mc:Choice xmlns:a14="http://schemas.microsoft.com/office/drawing/2010/main" Requires="a14">
+      <mc:AlternateContent xmlns:mc="http://schemas.openxmlformats.org/markup-compatibility/2006" xmlns:a14="http://schemas.microsoft.com/office/drawing/2010/main">
+        <mc:Choice Requires="a14">
           <p:sp>
             <p:nvSpPr>
               <p:cNvPr id="11" name="TextBox 10">
@@ -10843,7 +11619,7 @@
                       <m:sSubPr>
                         <m:ctrlPr>
                           <a:rPr lang="en-US" altLang="ko-KR" i="1">
-                            <a:latin typeface="+mj-ea"/>
+                            <a:latin typeface="Cambria Math" panose="02040503050406030204" pitchFamily="18" charset="0"/>
                             <a:ea typeface="+mj-ea"/>
                           </a:rPr>
                         </m:ctrlPr>
@@ -10851,7 +11627,7 @@
                       <m:e>
                         <m:r>
                           <a:rPr lang="en-US" altLang="ko-KR" b="0" i="1">
-                            <a:latin typeface="+mj-ea"/>
+                            <a:latin typeface="Cambria Math" panose="02040503050406030204" pitchFamily="18" charset="0"/>
                             <a:ea typeface="+mj-ea"/>
                           </a:rPr>
                           <m:t>𝐻</m:t>
@@ -10860,7 +11636,7 @@
                       <m:sub>
                         <m:r>
                           <a:rPr lang="en-US" altLang="ko-KR" b="0" i="1">
-                            <a:latin typeface="+mj-ea"/>
+                            <a:latin typeface="Cambria Math" panose="02040503050406030204" pitchFamily="18" charset="0"/>
                             <a:ea typeface="+mj-ea"/>
                           </a:rPr>
                           <m:t>0</m:t>
@@ -10884,7 +11660,7 @@
             </p:txBody>
           </p:sp>
         </mc:Choice>
-        <mc:Fallback>
+        <mc:Fallback xmlns="">
           <p:sp>
             <p:nvSpPr>
               <p:cNvPr id="11" name="TextBox 10">
@@ -10929,8 +11705,8 @@
           </p:sp>
         </mc:Fallback>
       </mc:AlternateContent>
-      <mc:AlternateContent xmlns:mc="http://schemas.openxmlformats.org/markup-compatibility/2006">
-        <mc:Choice xmlns:a14="http://schemas.microsoft.com/office/drawing/2010/main" Requires="a14">
+      <mc:AlternateContent xmlns:mc="http://schemas.openxmlformats.org/markup-compatibility/2006" xmlns:a14="http://schemas.microsoft.com/office/drawing/2010/main">
+        <mc:Choice Requires="a14">
           <p:sp>
             <p:nvSpPr>
               <p:cNvPr id="12" name="TextBox 11">
@@ -10979,7 +11755,7 @@
                       <m:sSubPr>
                         <m:ctrlPr>
                           <a:rPr lang="en-US" altLang="ko-KR" i="1">
-                            <a:latin typeface="+mj-ea"/>
+                            <a:latin typeface="Cambria Math" panose="02040503050406030204" pitchFamily="18" charset="0"/>
                             <a:ea typeface="+mj-ea"/>
                           </a:rPr>
                         </m:ctrlPr>
@@ -10987,7 +11763,7 @@
                       <m:e>
                         <m:r>
                           <a:rPr lang="en-US" altLang="ko-KR" b="0" i="1">
-                            <a:latin typeface="+mj-ea"/>
+                            <a:latin typeface="Cambria Math" panose="02040503050406030204" pitchFamily="18" charset="0"/>
                             <a:ea typeface="+mj-ea"/>
                           </a:rPr>
                           <m:t>𝐻</m:t>
@@ -11020,7 +11796,7 @@
             </p:txBody>
           </p:sp>
         </mc:Choice>
-        <mc:Fallback>
+        <mc:Fallback xmlns="">
           <p:sp>
             <p:nvSpPr>
               <p:cNvPr id="12" name="TextBox 11">
@@ -11065,8 +11841,8 @@
           </p:sp>
         </mc:Fallback>
       </mc:AlternateContent>
-      <mc:AlternateContent xmlns:mc="http://schemas.openxmlformats.org/markup-compatibility/2006">
-        <mc:Choice xmlns:a14="http://schemas.microsoft.com/office/drawing/2010/main" Requires="a14">
+      <mc:AlternateContent xmlns:mc="http://schemas.openxmlformats.org/markup-compatibility/2006" xmlns:a14="http://schemas.microsoft.com/office/drawing/2010/main">
+        <mc:Choice Requires="a14">
           <p:sp>
             <p:nvSpPr>
               <p:cNvPr id="13" name="TextBox 12">
@@ -11115,7 +11891,7 @@
                       <m:sSubPr>
                         <m:ctrlPr>
                           <a:rPr lang="en-US" altLang="ko-KR" i="1">
-                            <a:latin typeface="+mj-ea"/>
+                            <a:latin typeface="Cambria Math" panose="02040503050406030204" pitchFamily="18" charset="0"/>
                             <a:ea typeface="+mj-ea"/>
                           </a:rPr>
                         </m:ctrlPr>
@@ -11123,7 +11899,7 @@
                       <m:e>
                         <m:r>
                           <a:rPr lang="en-US" altLang="ko-KR" b="0" i="1">
-                            <a:latin typeface="+mj-ea"/>
+                            <a:latin typeface="Cambria Math" panose="02040503050406030204" pitchFamily="18" charset="0"/>
                             <a:ea typeface="+mj-ea"/>
                           </a:rPr>
                           <m:t>𝐻</m:t>
@@ -11156,7 +11932,7 @@
             </p:txBody>
           </p:sp>
         </mc:Choice>
-        <mc:Fallback>
+        <mc:Fallback xmlns="">
           <p:sp>
             <p:nvSpPr>
               <p:cNvPr id="13" name="TextBox 12">
@@ -11201,8 +11977,8 @@
           </p:sp>
         </mc:Fallback>
       </mc:AlternateContent>
-      <mc:AlternateContent xmlns:mc="http://schemas.openxmlformats.org/markup-compatibility/2006">
-        <mc:Choice xmlns:a14="http://schemas.microsoft.com/office/drawing/2010/main" Requires="a14">
+      <mc:AlternateContent xmlns:mc="http://schemas.openxmlformats.org/markup-compatibility/2006" xmlns:a14="http://schemas.microsoft.com/office/drawing/2010/main">
+        <mc:Choice Requires="a14">
           <p:sp>
             <p:nvSpPr>
               <p:cNvPr id="14" name="TextBox 13">
@@ -11251,7 +12027,7 @@
                       <m:sSubPr>
                         <m:ctrlPr>
                           <a:rPr lang="en-US" altLang="ko-KR" i="1">
-                            <a:latin typeface="+mj-ea"/>
+                            <a:latin typeface="Cambria Math" panose="02040503050406030204" pitchFamily="18" charset="0"/>
                             <a:ea typeface="+mj-ea"/>
                           </a:rPr>
                         </m:ctrlPr>
@@ -11259,7 +12035,7 @@
                       <m:e>
                         <m:r>
                           <a:rPr lang="en-US" altLang="ko-KR" b="0" i="1">
-                            <a:latin typeface="+mj-ea"/>
+                            <a:latin typeface="Cambria Math" panose="02040503050406030204" pitchFamily="18" charset="0"/>
                             <a:ea typeface="+mj-ea"/>
                           </a:rPr>
                           <m:t>𝐻</m:t>
@@ -11268,7 +12044,7 @@
                       <m:sub>
                         <m:r>
                           <a:rPr lang="en-US" altLang="ko-KR" b="0" i="1">
-                            <a:latin typeface="+mj-ea"/>
+                            <a:latin typeface="Cambria Math" panose="02040503050406030204" pitchFamily="18" charset="0"/>
                             <a:ea typeface="+mj-ea"/>
                           </a:rPr>
                           <m:t>0</m:t>
@@ -11292,7 +12068,7 @@
             </p:txBody>
           </p:sp>
         </mc:Choice>
-        <mc:Fallback>
+        <mc:Fallback xmlns="">
           <p:sp>
             <p:nvSpPr>
               <p:cNvPr id="14" name="TextBox 13">
@@ -11646,7 +12422,7 @@
 </p:sld>
 </file>
 
-<file path=ppt/slides/slide2.xml><?xml version="1.0" encoding="utf-8"?>
+<file path=ppt/slides/slide21.xml><?xml version="1.0" encoding="utf-8"?>
 <p:sld xmlns:a="http://schemas.openxmlformats.org/drawingml/2006/main" xmlns:r="http://schemas.openxmlformats.org/officeDocument/2006/relationships" xmlns:p="http://schemas.openxmlformats.org/presentationml/2006/main">
   <p:cSld>
     <p:spTree>
@@ -11681,526 +12457,7 @@
             <a:pPr rtl="0"/>
             <a:fld id="{A3F31473-23EB-4724-8B59-FE6D21D89FA4}" type="slidenum">
               <a:rPr lang="en-US" altLang="ko-KR" noProof="0" smtClean="0"/>
-              <a:t>2</a:t>
-            </a:fld>
-            <a:endParaRPr lang="en-US" altLang="ko-KR" noProof="0" dirty="0"/>
-          </a:p>
-        </p:txBody>
-      </p:sp>
-      <p:pic>
-        <p:nvPicPr>
-          <p:cNvPr id="4" name="그림 3"/>
-          <p:cNvPicPr>
-            <a:picLocks noChangeAspect="1"/>
-          </p:cNvPicPr>
-          <p:nvPr/>
-        </p:nvPicPr>
-        <p:blipFill>
-          <a:blip r:embed="rId3"/>
-          <a:stretch>
-            <a:fillRect/>
-          </a:stretch>
-        </p:blipFill>
-        <p:spPr>
-          <a:xfrm>
-            <a:off x="1108596" y="2774241"/>
-            <a:ext cx="3202059" cy="2886950"/>
-          </a:xfrm>
-          <a:prstGeom prst="rect">
-            <a:avLst/>
-          </a:prstGeom>
-        </p:spPr>
-      </p:pic>
-      <p:pic>
-        <p:nvPicPr>
-          <p:cNvPr id="5" name="그림 4"/>
-          <p:cNvPicPr>
-            <a:picLocks noChangeAspect="1"/>
-          </p:cNvPicPr>
-          <p:nvPr/>
-        </p:nvPicPr>
-        <p:blipFill>
-          <a:blip r:embed="rId4"/>
-          <a:stretch>
-            <a:fillRect/>
-          </a:stretch>
-        </p:blipFill>
-        <p:spPr>
-          <a:xfrm>
-            <a:off x="7678588" y="2774241"/>
-            <a:ext cx="2983281" cy="2850975"/>
-          </a:xfrm>
-          <a:prstGeom prst="rect">
-            <a:avLst/>
-          </a:prstGeom>
-        </p:spPr>
-      </p:pic>
-      <mc:AlternateContent xmlns:mc="http://schemas.openxmlformats.org/markup-compatibility/2006">
-        <mc:Choice xmlns:a14="http://schemas.microsoft.com/office/drawing/2010/main" Requires="a14">
-          <p:sp>
-            <p:nvSpPr>
-              <p:cNvPr id="6" name="TextBox 5"/>
-              <p:cNvSpPr txBox="1"/>
-              <p:nvPr/>
-            </p:nvSpPr>
-            <p:spPr>
-              <a:xfrm>
-                <a:off x="1108596" y="2095022"/>
-                <a:ext cx="3075955" cy="369332"/>
-              </a:xfrm>
-              <a:prstGeom prst="rect">
-                <a:avLst/>
-              </a:prstGeom>
-              <a:noFill/>
-            </p:spPr>
-            <p:txBody>
-              <a:bodyPr wrap="square" rtlCol="0">
-                <a:spAutoFit/>
-              </a:bodyPr>
-              <a:lstStyle/>
-              <a:p>
-                <a:pPr algn="ctr"/>
-                <a:r>
-                  <a:rPr lang="ko-KR" altLang="en-US" b="1" dirty="0"/>
-                  <a:t>천동설 </a:t>
-                </a:r>
-                <a:r>
-                  <a:rPr lang="en-US" altLang="ko-KR" b="1" dirty="0"/>
-                  <a:t>: </a:t>
-                </a:r>
-                <a:r>
-                  <a:rPr lang="ko-KR" altLang="en-US" b="1" dirty="0"/>
-                  <a:t>귀무가설</a:t>
-                </a:r>
-                <a:r>
-                  <a:rPr lang="en-US" altLang="ko-KR" b="1" dirty="0"/>
-                  <a:t>(</a:t>
-                </a:r>
-                <a14:m>
-                  <m:oMath xmlns:m="http://schemas.openxmlformats.org/officeDocument/2006/math">
-                    <m:sSub>
-                      <m:sSubPr>
-                        <m:ctrlPr>
-                          <a:rPr lang="en-US" altLang="ko-KR" b="1" i="1" smtClean="0">
-                            <a:latin typeface="Cambria Math" panose="02040503050406030204" pitchFamily="18" charset="0"/>
-                          </a:rPr>
-                        </m:ctrlPr>
-                      </m:sSubPr>
-                      <m:e>
-                        <m:r>
-                          <a:rPr lang="en-US" altLang="ko-KR" b="1" i="1" smtClean="0">
-                            <a:latin typeface="Cambria Math" panose="02040503050406030204" pitchFamily="18" charset="0"/>
-                          </a:rPr>
-                          <m:t>𝑯</m:t>
-                        </m:r>
-                      </m:e>
-                      <m:sub>
-                        <m:r>
-                          <a:rPr lang="en-US" altLang="ko-KR" b="1" i="1" smtClean="0">
-                            <a:latin typeface="Cambria Math" panose="02040503050406030204" pitchFamily="18" charset="0"/>
-                          </a:rPr>
-                          <m:t>𝟎</m:t>
-                        </m:r>
-                      </m:sub>
-                    </m:sSub>
-                  </m:oMath>
-                </a14:m>
-                <a:r>
-                  <a:rPr lang="en-US" altLang="ko-KR" b="1" dirty="0"/>
-                  <a:t>)</a:t>
-                </a:r>
-                <a:endParaRPr lang="ko-KR" altLang="en-US" b="1" dirty="0"/>
-              </a:p>
-            </p:txBody>
-          </p:sp>
-        </mc:Choice>
-        <mc:Fallback>
-          <p:sp>
-            <p:nvSpPr>
-              <p:cNvPr id="6" name="TextBox 5"/>
-              <p:cNvSpPr txBox="1">
-                <a:spLocks noRot="1" noChangeAspect="1" noMove="1" noResize="1" noEditPoints="1" noAdjustHandles="1" noChangeArrowheads="1" noChangeShapeType="1" noTextEdit="1"/>
-              </p:cNvSpPr>
-              <p:nvPr/>
-            </p:nvSpPr>
-            <p:spPr>
-              <a:xfrm>
-                <a:off x="1108596" y="2095022"/>
-                <a:ext cx="3075955" cy="369332"/>
-              </a:xfrm>
-              <a:prstGeom prst="rect">
-                <a:avLst/>
-              </a:prstGeom>
-              <a:blipFill>
-                <a:blip r:embed="rId5"/>
-                <a:stretch>
-                  <a:fillRect t="-15000" b="-28333"/>
-                </a:stretch>
-              </a:blipFill>
-            </p:spPr>
-            <p:txBody>
-              <a:bodyPr/>
-              <a:lstStyle/>
-              <a:p>
-                <a:r>
-                  <a:rPr lang="ko-KR" altLang="en-US">
-                    <a:noFill/>
-                  </a:rPr>
-                  <a:t> </a:t>
-                </a:r>
-              </a:p>
-            </p:txBody>
-          </p:sp>
-        </mc:Fallback>
-      </mc:AlternateContent>
-      <mc:AlternateContent xmlns:mc="http://schemas.openxmlformats.org/markup-compatibility/2006">
-        <mc:Choice xmlns:a14="http://schemas.microsoft.com/office/drawing/2010/main" Requires="a14">
-          <p:sp>
-            <p:nvSpPr>
-              <p:cNvPr id="12" name="TextBox 11"/>
-              <p:cNvSpPr txBox="1"/>
-              <p:nvPr/>
-            </p:nvSpPr>
-            <p:spPr>
-              <a:xfrm>
-                <a:off x="7676200" y="2095022"/>
-                <a:ext cx="2983281" cy="369332"/>
-              </a:xfrm>
-              <a:prstGeom prst="rect">
-                <a:avLst/>
-              </a:prstGeom>
-              <a:noFill/>
-            </p:spPr>
-            <p:txBody>
-              <a:bodyPr wrap="square" rtlCol="0">
-                <a:spAutoFit/>
-              </a:bodyPr>
-              <a:lstStyle/>
-              <a:p>
-                <a:pPr algn="ctr"/>
-                <a:r>
-                  <a:rPr lang="ko-KR" altLang="en-US" b="1" dirty="0"/>
-                  <a:t>지동설 </a:t>
-                </a:r>
-                <a:r>
-                  <a:rPr lang="en-US" altLang="ko-KR" b="1" dirty="0"/>
-                  <a:t>: </a:t>
-                </a:r>
-                <a:r>
-                  <a:rPr lang="ko-KR" altLang="en-US" b="1" dirty="0" err="1"/>
-                  <a:t>대립가설</a:t>
-                </a:r>
-                <a:r>
-                  <a:rPr lang="en-US" altLang="ko-KR" b="1" dirty="0"/>
-                  <a:t>(</a:t>
-                </a:r>
-                <a14:m>
-                  <m:oMath xmlns:m="http://schemas.openxmlformats.org/officeDocument/2006/math">
-                    <m:sSub>
-                      <m:sSubPr>
-                        <m:ctrlPr>
-                          <a:rPr lang="en-US" altLang="ko-KR" b="1" i="1">
-                            <a:latin typeface="Cambria Math" panose="02040503050406030204" pitchFamily="18" charset="0"/>
-                          </a:rPr>
-                        </m:ctrlPr>
-                      </m:sSubPr>
-                      <m:e>
-                        <m:r>
-                          <a:rPr lang="en-US" altLang="ko-KR" b="1" i="1">
-                            <a:latin typeface="Cambria Math" panose="02040503050406030204" pitchFamily="18" charset="0"/>
-                          </a:rPr>
-                          <m:t>𝑯</m:t>
-                        </m:r>
-                      </m:e>
-                      <m:sub>
-                        <m:r>
-                          <a:rPr lang="en-US" altLang="ko-KR" b="1" i="1" smtClean="0">
-                            <a:latin typeface="Cambria Math" panose="02040503050406030204" pitchFamily="18" charset="0"/>
-                          </a:rPr>
-                          <m:t>𝟏</m:t>
-                        </m:r>
-                      </m:sub>
-                    </m:sSub>
-                  </m:oMath>
-                </a14:m>
-                <a:r>
-                  <a:rPr lang="en-US" altLang="ko-KR" b="1" dirty="0"/>
-                  <a:t>)</a:t>
-                </a:r>
-                <a:endParaRPr lang="ko-KR" altLang="en-US" b="1" dirty="0"/>
-              </a:p>
-            </p:txBody>
-          </p:sp>
-        </mc:Choice>
-        <mc:Fallback>
-          <p:sp>
-            <p:nvSpPr>
-              <p:cNvPr id="12" name="TextBox 11"/>
-              <p:cNvSpPr txBox="1">
-                <a:spLocks noRot="1" noChangeAspect="1" noMove="1" noResize="1" noEditPoints="1" noAdjustHandles="1" noChangeArrowheads="1" noChangeShapeType="1" noTextEdit="1"/>
-              </p:cNvSpPr>
-              <p:nvPr/>
-            </p:nvSpPr>
-            <p:spPr>
-              <a:xfrm>
-                <a:off x="7676200" y="2095022"/>
-                <a:ext cx="2983281" cy="369332"/>
-              </a:xfrm>
-              <a:prstGeom prst="rect">
-                <a:avLst/>
-              </a:prstGeom>
-              <a:blipFill>
-                <a:blip r:embed="rId6"/>
-                <a:stretch>
-                  <a:fillRect t="-15000" b="-28333"/>
-                </a:stretch>
-              </a:blipFill>
-            </p:spPr>
-            <p:txBody>
-              <a:bodyPr/>
-              <a:lstStyle/>
-              <a:p>
-                <a:r>
-                  <a:rPr lang="ko-KR" altLang="en-US">
-                    <a:noFill/>
-                  </a:rPr>
-                  <a:t> </a:t>
-                </a:r>
-              </a:p>
-            </p:txBody>
-          </p:sp>
-        </mc:Fallback>
-      </mc:AlternateContent>
-      <p:cxnSp>
-        <p:nvCxnSpPr>
-          <p:cNvPr id="9" name="직선 화살표 연결선 8"/>
-          <p:cNvCxnSpPr>
-            <a:cxnSpLocks/>
-          </p:cNvCxnSpPr>
-          <p:nvPr/>
-        </p:nvCxnSpPr>
-        <p:spPr>
-          <a:xfrm>
-            <a:off x="5220054" y="4199728"/>
-            <a:ext cx="1440160" cy="0"/>
-          </a:xfrm>
-          <a:prstGeom prst="straightConnector1">
-            <a:avLst/>
-          </a:prstGeom>
-          <a:ln w="57150">
-            <a:headEnd type="triangle"/>
-            <a:tailEnd type="triangle"/>
-          </a:ln>
-        </p:spPr>
-        <p:style>
-          <a:lnRef idx="1">
-            <a:schemeClr val="accent1"/>
-          </a:lnRef>
-          <a:fillRef idx="0">
-            <a:schemeClr val="accent1"/>
-          </a:fillRef>
-          <a:effectRef idx="0">
-            <a:schemeClr val="accent1"/>
-          </a:effectRef>
-          <a:fontRef idx="minor">
-            <a:schemeClr val="tx1"/>
-          </a:fontRef>
-        </p:style>
-      </p:cxnSp>
-      <p:sp>
-        <p:nvSpPr>
-          <p:cNvPr id="3" name="TextBox 2">
-            <a:extLst>
-              <a:ext uri="{FF2B5EF4-FFF2-40B4-BE49-F238E27FC236}">
-                <a16:creationId xmlns:a16="http://schemas.microsoft.com/office/drawing/2014/main" id="{B1D92C58-8C4D-6C08-A392-EF301B1BC5A4}"/>
-              </a:ext>
-            </a:extLst>
-          </p:cNvPr>
-          <p:cNvSpPr txBox="1"/>
-          <p:nvPr/>
-        </p:nvSpPr>
-        <p:spPr>
-          <a:xfrm>
-            <a:off x="693812" y="630393"/>
-            <a:ext cx="11191750" cy="873124"/>
-          </a:xfrm>
-          <a:prstGeom prst="rect">
-            <a:avLst/>
-          </a:prstGeom>
-          <a:noFill/>
-        </p:spPr>
-        <p:txBody>
-          <a:bodyPr wrap="square">
-            <a:spAutoFit/>
-          </a:bodyPr>
-          <a:lstStyle/>
-          <a:p>
-            <a:pPr marL="285750" indent="-285750">
-              <a:lnSpc>
-                <a:spcPct val="150000"/>
-              </a:lnSpc>
-              <a:buFont typeface="Wingdings" panose="05000000000000000000" pitchFamily="2" charset="2"/>
-              <a:buChar char="v"/>
-            </a:pPr>
-            <a:r>
-              <a:rPr lang="ko-KR" altLang="en-US" dirty="0">
-                <a:latin typeface="+mj-ea"/>
-                <a:ea typeface="+mj-ea"/>
-              </a:rPr>
-              <a:t>천동설의</a:t>
-            </a:r>
-            <a:r>
-              <a:rPr lang="en-US" altLang="ko-KR" dirty="0">
-                <a:latin typeface="+mj-ea"/>
-                <a:ea typeface="+mj-ea"/>
-              </a:rPr>
-              <a:t> </a:t>
-            </a:r>
-            <a:r>
-              <a:rPr lang="ko-KR" altLang="en-US" dirty="0">
-                <a:latin typeface="+mj-ea"/>
-                <a:ea typeface="+mj-ea"/>
-              </a:rPr>
-              <a:t>확률분포를 가정하고 표본</a:t>
-            </a:r>
-            <a:r>
-              <a:rPr lang="en-US" altLang="ko-KR" dirty="0">
-                <a:latin typeface="+mj-ea"/>
-                <a:ea typeface="+mj-ea"/>
-              </a:rPr>
-              <a:t>(Sample)</a:t>
-            </a:r>
-            <a:r>
-              <a:rPr lang="ko-KR" altLang="en-US" dirty="0">
-                <a:latin typeface="+mj-ea"/>
-                <a:ea typeface="+mj-ea"/>
-              </a:rPr>
-              <a:t>으로부터 얻은 정보</a:t>
-            </a:r>
-            <a:r>
-              <a:rPr lang="en-US" altLang="ko-KR" dirty="0">
-                <a:latin typeface="+mj-ea"/>
-                <a:ea typeface="+mj-ea"/>
-              </a:rPr>
-              <a:t>(</a:t>
-            </a:r>
-            <a:r>
-              <a:rPr lang="ko-KR" altLang="en-US" dirty="0">
-                <a:latin typeface="+mj-ea"/>
-                <a:ea typeface="+mj-ea"/>
-              </a:rPr>
-              <a:t>통계량</a:t>
-            </a:r>
-            <a:r>
-              <a:rPr lang="en-US" altLang="ko-KR" dirty="0">
-                <a:latin typeface="+mj-ea"/>
-                <a:ea typeface="+mj-ea"/>
-              </a:rPr>
-              <a:t>)</a:t>
-            </a:r>
-            <a:r>
-              <a:rPr lang="ko-KR" altLang="en-US" dirty="0">
-                <a:latin typeface="+mj-ea"/>
-                <a:ea typeface="+mj-ea"/>
-              </a:rPr>
-              <a:t>를 바탕으로 얼마나 천동설</a:t>
-            </a:r>
-            <a:r>
-              <a:rPr lang="en-US" altLang="ko-KR" dirty="0">
-                <a:latin typeface="+mj-ea"/>
-                <a:ea typeface="+mj-ea"/>
-              </a:rPr>
-              <a:t>(</a:t>
-            </a:r>
-            <a:r>
-              <a:rPr lang="ko-KR" altLang="en-US" dirty="0">
-                <a:latin typeface="+mj-ea"/>
-                <a:ea typeface="+mj-ea"/>
-              </a:rPr>
-              <a:t>귀무가설</a:t>
-            </a:r>
-            <a:r>
-              <a:rPr lang="en-US" altLang="ko-KR" dirty="0">
-                <a:latin typeface="+mj-ea"/>
-                <a:ea typeface="+mj-ea"/>
-              </a:rPr>
-              <a:t>)</a:t>
-            </a:r>
-            <a:r>
-              <a:rPr lang="ko-KR" altLang="en-US" dirty="0">
-                <a:latin typeface="+mj-ea"/>
-                <a:ea typeface="+mj-ea"/>
-              </a:rPr>
-              <a:t>과 다른 지를 검증하는 것이 목적</a:t>
-            </a:r>
-            <a:endParaRPr lang="en-US" altLang="ko-KR" dirty="0">
-              <a:latin typeface="+mj-ea"/>
-              <a:ea typeface="+mj-ea"/>
-            </a:endParaRPr>
-          </a:p>
-        </p:txBody>
-      </p:sp>
-    </p:spTree>
-    <p:extLst>
-      <p:ext uri="{BB962C8B-B14F-4D97-AF65-F5344CB8AC3E}">
-        <p14:creationId xmlns:p14="http://schemas.microsoft.com/office/powerpoint/2010/main" val="1126723429"/>
-      </p:ext>
-    </p:extLst>
-  </p:cSld>
-  <p:clrMapOvr>
-    <a:masterClrMapping/>
-  </p:clrMapOvr>
-  <mc:AlternateContent xmlns:mc="http://schemas.openxmlformats.org/markup-compatibility/2006" xmlns:p14="http://schemas.microsoft.com/office/powerpoint/2010/main">
-    <mc:Choice Requires="p14">
-      <p:transition spd="med" p14:dur="700">
-        <p:fade/>
-      </p:transition>
-    </mc:Choice>
-    <mc:Fallback xmlns="">
-      <p:transition spd="med">
-        <p:fade/>
-      </p:transition>
-    </mc:Fallback>
-  </mc:AlternateContent>
-</p:sld>
-</file>
-
-<file path=ppt/slides/slide20.xml><?xml version="1.0" encoding="utf-8"?>
-<p:sld xmlns:a="http://schemas.openxmlformats.org/drawingml/2006/main" xmlns:r="http://schemas.openxmlformats.org/officeDocument/2006/relationships" xmlns:p="http://schemas.openxmlformats.org/presentationml/2006/main">
-  <p:cSld>
-    <p:spTree>
-      <p:nvGrpSpPr>
-        <p:cNvPr id="1" name=""/>
-        <p:cNvGrpSpPr/>
-        <p:nvPr/>
-      </p:nvGrpSpPr>
-      <p:grpSpPr>
-        <a:xfrm>
-          <a:off x="0" y="0"/>
-          <a:ext cx="0" cy="0"/>
-          <a:chOff x="0" y="0"/>
-          <a:chExt cx="0" cy="0"/>
-        </a:xfrm>
-      </p:grpSpPr>
-      <p:sp>
-        <p:nvSpPr>
-          <p:cNvPr id="8" name="슬라이드 번호 개체 틀 7"/>
-          <p:cNvSpPr>
-            <a:spLocks noGrp="1"/>
-          </p:cNvSpPr>
-          <p:nvPr>
-            <p:ph type="sldNum" sz="quarter" idx="12"/>
-          </p:nvPr>
-        </p:nvSpPr>
-        <p:spPr/>
-        <p:txBody>
-          <a:bodyPr/>
-          <a:lstStyle/>
-          <a:p>
-            <a:pPr rtl="0"/>
-            <a:fld id="{A3F31473-23EB-4724-8B59-FE6D21D89FA4}" type="slidenum">
-              <a:rPr lang="en-US" altLang="ko-KR" noProof="0" smtClean="0"/>
-              <a:t>20</a:t>
+              <a:t>21</a:t>
             </a:fld>
             <a:endParaRPr lang="en-US" altLang="ko-KR" noProof="0" dirty="0"/>
           </a:p>
@@ -12255,7 +12512,7 @@
 </p:sld>
 </file>
 
-<file path=ppt/slides/slide21.xml><?xml version="1.0" encoding="utf-8"?>
+<file path=ppt/slides/slide22.xml><?xml version="1.0" encoding="utf-8"?>
 <p:sld xmlns:a="http://schemas.openxmlformats.org/drawingml/2006/main" xmlns:r="http://schemas.openxmlformats.org/officeDocument/2006/relationships" xmlns:p="http://schemas.openxmlformats.org/presentationml/2006/main">
   <p:cSld>
     <p:spTree>
@@ -12302,7 +12559,7 @@
             <a:pPr rtl="0"/>
             <a:fld id="{A3F31473-23EB-4724-8B59-FE6D21D89FA4}" type="slidenum">
               <a:rPr lang="en-US" altLang="ko-KR" noProof="0" smtClean="0"/>
-              <a:t>21</a:t>
+              <a:t>22</a:t>
             </a:fld>
             <a:endParaRPr lang="en-US" altLang="ko-KR" noProof="0" dirty="0"/>
           </a:p>
@@ -12333,7 +12590,7 @@
 </p:sld>
 </file>
 
-<file path=ppt/slides/slide22.xml><?xml version="1.0" encoding="utf-8"?>
+<file path=ppt/slides/slide23.xml><?xml version="1.0" encoding="utf-8"?>
 <p:sld xmlns:a="http://schemas.openxmlformats.org/drawingml/2006/main" xmlns:r="http://schemas.openxmlformats.org/officeDocument/2006/relationships" xmlns:p="http://schemas.openxmlformats.org/presentationml/2006/main">
   <p:cSld>
     <p:spTree>
@@ -12380,7 +12637,7 @@
             <a:pPr rtl="0"/>
             <a:fld id="{A3F31473-23EB-4724-8B59-FE6D21D89FA4}" type="slidenum">
               <a:rPr lang="en-US" altLang="ko-KR" noProof="0" smtClean="0"/>
-              <a:t>22</a:t>
+              <a:t>23</a:t>
             </a:fld>
             <a:endParaRPr lang="en-US" altLang="ko-KR" noProof="0" dirty="0"/>
           </a:p>
@@ -14323,20 +14580,106 @@
       </p:sp>
       <p:sp>
         <p:nvSpPr>
-          <p:cNvPr id="2" name="직사각형 1"/>
+          <p:cNvPr id="4" name="직사각형 3"/>
           <p:cNvSpPr/>
           <p:nvPr/>
         </p:nvSpPr>
         <p:spPr>
           <a:xfrm>
-            <a:off x="909836" y="1412776"/>
-            <a:ext cx="10801200" cy="3831818"/>
+            <a:off x="765820" y="145576"/>
+            <a:ext cx="1144865" cy="523220"/>
           </a:xfrm>
           <a:prstGeom prst="rect">
             <a:avLst/>
           </a:prstGeom>
         </p:spPr>
         <p:txBody>
+          <a:bodyPr wrap="none">
+            <a:spAutoFit/>
+          </a:bodyPr>
+          <a:lstStyle/>
+          <a:p>
+            <a:r>
+              <a:rPr lang="en-US" altLang="ko-KR" sz="2800" b="1" dirty="0"/>
+              <a:t>t-</a:t>
+            </a:r>
+            <a:r>
+              <a:rPr lang="ko-KR" altLang="en-US" sz="2800" b="1" dirty="0"/>
+              <a:t>분포</a:t>
+            </a:r>
+          </a:p>
+        </p:txBody>
+      </p:sp>
+      <p:pic>
+        <p:nvPicPr>
+          <p:cNvPr id="1026" name="Picture 2">
+            <a:extLst>
+              <a:ext uri="{FF2B5EF4-FFF2-40B4-BE49-F238E27FC236}">
+                <a16:creationId xmlns:a16="http://schemas.microsoft.com/office/drawing/2014/main" id="{0FB41966-68DE-91D4-C70C-722462A86E8A}"/>
+              </a:ext>
+            </a:extLst>
+          </p:cNvPr>
+          <p:cNvPicPr>
+            <a:picLocks noChangeAspect="1" noChangeArrowheads="1"/>
+          </p:cNvPicPr>
+          <p:nvPr/>
+        </p:nvPicPr>
+        <p:blipFill>
+          <a:blip r:embed="rId3">
+            <a:extLst>
+              <a:ext uri="{28A0092B-C50C-407E-A947-70E740481C1C}">
+                <a14:useLocalDpi xmlns:a14="http://schemas.microsoft.com/office/drawing/2010/main" val="0"/>
+              </a:ext>
+            </a:extLst>
+          </a:blip>
+          <a:srcRect/>
+          <a:stretch>
+            <a:fillRect/>
+          </a:stretch>
+        </p:blipFill>
+        <p:spPr bwMode="auto">
+          <a:xfrm>
+            <a:off x="917559" y="2118108"/>
+            <a:ext cx="7949225" cy="4335228"/>
+          </a:xfrm>
+          <a:prstGeom prst="rect">
+            <a:avLst/>
+          </a:prstGeom>
+          <a:noFill/>
+          <a:extLst>
+            <a:ext uri="{909E8E84-426E-40DD-AFC4-6F175D3DCCD1}">
+              <a14:hiddenFill xmlns:a14="http://schemas.microsoft.com/office/drawing/2010/main">
+                <a:solidFill>
+                  <a:srgbClr val="FFFFFF"/>
+                </a:solidFill>
+              </a14:hiddenFill>
+            </a:ext>
+          </a:extLst>
+        </p:spPr>
+      </p:pic>
+      <p:sp>
+        <p:nvSpPr>
+          <p:cNvPr id="5" name="TextBox 4">
+            <a:extLst>
+              <a:ext uri="{FF2B5EF4-FFF2-40B4-BE49-F238E27FC236}">
+                <a16:creationId xmlns:a16="http://schemas.microsoft.com/office/drawing/2014/main" id="{2B68CDF7-C63C-F7A3-8D1D-AB7CDE1CD271}"/>
+              </a:ext>
+            </a:extLst>
+          </p:cNvPr>
+          <p:cNvSpPr txBox="1"/>
+          <p:nvPr/>
+        </p:nvSpPr>
+        <p:spPr>
+          <a:xfrm>
+            <a:off x="776644" y="734288"/>
+            <a:ext cx="11294431" cy="1192955"/>
+          </a:xfrm>
+          <a:prstGeom prst="rect">
+            <a:avLst/>
+          </a:prstGeom>
+          <a:noFill/>
+        </p:spPr>
+        <p:txBody>
           <a:bodyPr wrap="square">
             <a:spAutoFit/>
           </a:bodyPr>
@@ -14347,113 +14690,101 @@
                 <a:spcPct val="150000"/>
               </a:lnSpc>
               <a:buFont typeface="Wingdings" panose="05000000000000000000" pitchFamily="2" charset="2"/>
-              <a:buChar char="v"/>
+              <a:buChar char="§"/>
             </a:pPr>
             <a:r>
-              <a:rPr lang="en-US" altLang="ko-KR" b="1" dirty="0">
-                <a:latin typeface="Arial Narrow" panose="020B0606020202030204" pitchFamily="34" charset="0"/>
-              </a:rPr>
-              <a:t>1</a:t>
-            </a:r>
-            <a:r>
-              <a:rPr lang="ko-KR" altLang="en-US" b="1" dirty="0">
-                <a:latin typeface="Arial Narrow" panose="020B0606020202030204" pitchFamily="34" charset="0"/>
-              </a:rPr>
-              <a:t>단계</a:t>
-            </a:r>
-            <a:r>
-              <a:rPr lang="en-US" altLang="ko-KR" b="1" dirty="0">
-                <a:latin typeface="Arial Narrow" panose="020B0606020202030204" pitchFamily="34" charset="0"/>
-              </a:rPr>
-              <a:t>: </a:t>
-            </a:r>
-            <a:r>
-              <a:rPr lang="ko-KR" altLang="en-US" b="1" dirty="0">
-                <a:latin typeface="Arial Narrow" panose="020B0606020202030204" pitchFamily="34" charset="0"/>
-              </a:rPr>
-              <a:t>데이터 생성</a:t>
-            </a:r>
-          </a:p>
-          <a:p>
-            <a:pPr marL="742950" lvl="1" indent="-285750">
-              <a:lnSpc>
-                <a:spcPct val="150000"/>
-              </a:lnSpc>
-              <a:buFont typeface="Wingdings" panose="05000000000000000000" pitchFamily="2" charset="2"/>
-              <a:buChar char="v"/>
-            </a:pPr>
-            <a:r>
-              <a:rPr lang="ko-KR" altLang="en-US" dirty="0">
-                <a:latin typeface="Arial Narrow" panose="020B0606020202030204" pitchFamily="34" charset="0"/>
-              </a:rPr>
-              <a:t>신약 투여 전과 투여 후의 데이터를 각각 </a:t>
-            </a:r>
-            <a:r>
-              <a:rPr lang="en-US" altLang="ko-KR" dirty="0">
-                <a:latin typeface="Arial Narrow" panose="020B0606020202030204" pitchFamily="34" charset="0"/>
-              </a:rPr>
-              <a:t>100</a:t>
-            </a:r>
-            <a:r>
-              <a:rPr lang="ko-KR" altLang="en-US" dirty="0">
-                <a:latin typeface="Arial Narrow" panose="020B0606020202030204" pitchFamily="34" charset="0"/>
-              </a:rPr>
-              <a:t>명 분량으로 생성합니다</a:t>
-            </a:r>
-            <a:r>
-              <a:rPr lang="en-US" altLang="ko-KR" dirty="0">
-                <a:latin typeface="Arial Narrow" panose="020B0606020202030204" pitchFamily="34" charset="0"/>
-              </a:rPr>
-              <a:t>. </a:t>
-            </a:r>
-            <a:r>
-              <a:rPr lang="ko-KR" altLang="en-US" dirty="0">
-                <a:latin typeface="Arial Narrow" panose="020B0606020202030204" pitchFamily="34" charset="0"/>
-              </a:rPr>
-              <a:t>이 예에서는 투여 전 데이터를 정규 분포 </a:t>
-            </a:r>
-            <a:r>
-              <a:rPr lang="en-US" altLang="ko-KR" dirty="0">
-                <a:latin typeface="Arial Narrow" panose="020B0606020202030204" pitchFamily="34" charset="0"/>
-              </a:rPr>
-              <a:t>N(0, 1)</a:t>
-            </a:r>
-            <a:r>
-              <a:rPr lang="ko-KR" altLang="en-US" dirty="0">
-                <a:latin typeface="Arial Narrow" panose="020B0606020202030204" pitchFamily="34" charset="0"/>
-              </a:rPr>
-              <a:t>을 따르게 하고</a:t>
-            </a:r>
-            <a:r>
-              <a:rPr lang="en-US" altLang="ko-KR" dirty="0">
-                <a:latin typeface="Arial Narrow" panose="020B0606020202030204" pitchFamily="34" charset="0"/>
-              </a:rPr>
-              <a:t>, </a:t>
-            </a:r>
-            <a:r>
-              <a:rPr lang="ko-KR" altLang="en-US" dirty="0">
-                <a:latin typeface="Arial Narrow" panose="020B0606020202030204" pitchFamily="34" charset="0"/>
-              </a:rPr>
-              <a:t>투여 후 데이터는 투여의 효과를 모사하기 위해 평균이 약간 증가한 정규 분포 </a:t>
-            </a:r>
-            <a:r>
-              <a:rPr lang="en-US" altLang="ko-KR" dirty="0">
-                <a:latin typeface="Arial Narrow" panose="020B0606020202030204" pitchFamily="34" charset="0"/>
-              </a:rPr>
-              <a:t>N(0.3, 2)</a:t>
-            </a:r>
-            <a:r>
-              <a:rPr lang="ko-KR" altLang="en-US" dirty="0">
-                <a:latin typeface="Arial Narrow" panose="020B0606020202030204" pitchFamily="34" charset="0"/>
-              </a:rPr>
-              <a:t>를 사용합니다</a:t>
-            </a:r>
-            <a:r>
-              <a:rPr lang="en-US" altLang="ko-KR" dirty="0">
-                <a:latin typeface="Arial Narrow" panose="020B0606020202030204" pitchFamily="34" charset="0"/>
-              </a:rPr>
-              <a:t>.</a:t>
-            </a:r>
+              <a:rPr lang="ko-KR" altLang="en-US" sz="1600" dirty="0">
+                <a:latin typeface="맑은 고딕 Semilight" panose="020B0502040204020203" pitchFamily="50" charset="-127"/>
+                <a:ea typeface="맑은 고딕 Semilight" panose="020B0502040204020203" pitchFamily="50" charset="-127"/>
+                <a:cs typeface="맑은 고딕 Semilight" panose="020B0502040204020203" pitchFamily="50" charset="-127"/>
+              </a:rPr>
+              <a:t>표본의 크기가 작을 때</a:t>
+            </a:r>
+            <a:r>
+              <a:rPr lang="en-US" altLang="ko-KR" sz="1600" dirty="0">
+                <a:latin typeface="맑은 고딕 Semilight" panose="020B0502040204020203" pitchFamily="50" charset="-127"/>
+                <a:ea typeface="맑은 고딕 Semilight" panose="020B0502040204020203" pitchFamily="50" charset="-127"/>
+                <a:cs typeface="맑은 고딕 Semilight" panose="020B0502040204020203" pitchFamily="50" charset="-127"/>
+              </a:rPr>
+              <a:t>(</a:t>
+            </a:r>
+            <a:r>
+              <a:rPr lang="ko-KR" altLang="en-US" sz="1600" dirty="0">
+                <a:latin typeface="맑은 고딕 Semilight" panose="020B0502040204020203" pitchFamily="50" charset="-127"/>
+                <a:ea typeface="맑은 고딕 Semilight" panose="020B0502040204020203" pitchFamily="50" charset="-127"/>
+                <a:cs typeface="맑은 고딕 Semilight" panose="020B0502040204020203" pitchFamily="50" charset="-127"/>
+              </a:rPr>
+              <a:t>주로 </a:t>
+            </a:r>
+            <a:r>
+              <a:rPr lang="en-US" altLang="ko-KR" sz="1600" dirty="0">
+                <a:latin typeface="맑은 고딕 Semilight" panose="020B0502040204020203" pitchFamily="50" charset="-127"/>
+                <a:ea typeface="맑은 고딕 Semilight" panose="020B0502040204020203" pitchFamily="50" charset="-127"/>
+                <a:cs typeface="맑은 고딕 Semilight" panose="020B0502040204020203" pitchFamily="50" charset="-127"/>
+              </a:rPr>
+              <a:t>30</a:t>
+            </a:r>
+            <a:r>
+              <a:rPr lang="ko-KR" altLang="en-US" sz="1600" dirty="0">
+                <a:latin typeface="맑은 고딕 Semilight" panose="020B0502040204020203" pitchFamily="50" charset="-127"/>
+                <a:ea typeface="맑은 고딕 Semilight" panose="020B0502040204020203" pitchFamily="50" charset="-127"/>
+                <a:cs typeface="맑은 고딕 Semilight" panose="020B0502040204020203" pitchFamily="50" charset="-127"/>
+              </a:rPr>
+              <a:t>개 미만</a:t>
+            </a:r>
+            <a:r>
+              <a:rPr lang="en-US" altLang="ko-KR" sz="1600" dirty="0">
+                <a:latin typeface="맑은 고딕 Semilight" panose="020B0502040204020203" pitchFamily="50" charset="-127"/>
+                <a:ea typeface="맑은 고딕 Semilight" panose="020B0502040204020203" pitchFamily="50" charset="-127"/>
+                <a:cs typeface="맑은 고딕 Semilight" panose="020B0502040204020203" pitchFamily="50" charset="-127"/>
+              </a:rPr>
+              <a:t>), </a:t>
+            </a:r>
+            <a:r>
+              <a:rPr lang="ko-KR" altLang="en-US" sz="1600" dirty="0">
+                <a:latin typeface="맑은 고딕 Semilight" panose="020B0502040204020203" pitchFamily="50" charset="-127"/>
+                <a:ea typeface="맑은 고딕 Semilight" panose="020B0502040204020203" pitchFamily="50" charset="-127"/>
+                <a:cs typeface="맑은 고딕 Semilight" panose="020B0502040204020203" pitchFamily="50" charset="-127"/>
+              </a:rPr>
+              <a:t>모집단의 표준편차를 모르는 상태에서 </a:t>
+            </a:r>
+            <a:r>
+              <a:rPr lang="ko-KR" altLang="en-US" sz="1600" b="1" dirty="0">
+                <a:latin typeface="맑은 고딕 Semilight" panose="020B0502040204020203" pitchFamily="50" charset="-127"/>
+                <a:ea typeface="맑은 고딕 Semilight" panose="020B0502040204020203" pitchFamily="50" charset="-127"/>
+                <a:cs typeface="맑은 고딕 Semilight" panose="020B0502040204020203" pitchFamily="50" charset="-127"/>
+              </a:rPr>
+              <a:t>모평균을 추정</a:t>
+            </a:r>
+            <a:r>
+              <a:rPr lang="ko-KR" altLang="en-US" sz="1600" dirty="0">
+                <a:latin typeface="맑은 고딕 Semilight" panose="020B0502040204020203" pitchFamily="50" charset="-127"/>
+                <a:ea typeface="맑은 고딕 Semilight" panose="020B0502040204020203" pitchFamily="50" charset="-127"/>
+                <a:cs typeface="맑은 고딕 Semilight" panose="020B0502040204020203" pitchFamily="50" charset="-127"/>
+              </a:rPr>
+              <a:t>하거나 </a:t>
+            </a:r>
+            <a:r>
+              <a:rPr lang="ko-KR" altLang="en-US" sz="1600" b="1" dirty="0">
+                <a:latin typeface="맑은 고딕 Semilight" panose="020B0502040204020203" pitchFamily="50" charset="-127"/>
+                <a:ea typeface="맑은 고딕 Semilight" panose="020B0502040204020203" pitchFamily="50" charset="-127"/>
+                <a:cs typeface="맑은 고딕 Semilight" panose="020B0502040204020203" pitchFamily="50" charset="-127"/>
+              </a:rPr>
+              <a:t>가설 검정</a:t>
+            </a:r>
+            <a:r>
+              <a:rPr lang="ko-KR" altLang="en-US" sz="1600" dirty="0">
+                <a:latin typeface="맑은 고딕 Semilight" panose="020B0502040204020203" pitchFamily="50" charset="-127"/>
+                <a:ea typeface="맑은 고딕 Semilight" panose="020B0502040204020203" pitchFamily="50" charset="-127"/>
+                <a:cs typeface="맑은 고딕 Semilight" panose="020B0502040204020203" pitchFamily="50" charset="-127"/>
+              </a:rPr>
+              <a:t>을 하기 위해 사용하는 확률 분포</a:t>
+            </a:r>
+            <a:endParaRPr lang="en-US" altLang="ko-KR" sz="1600" dirty="0">
+              <a:latin typeface="맑은 고딕 Semilight" panose="020B0502040204020203" pitchFamily="50" charset="-127"/>
+              <a:ea typeface="맑은 고딕 Semilight" panose="020B0502040204020203" pitchFamily="50" charset="-127"/>
+              <a:cs typeface="맑은 고딕 Semilight" panose="020B0502040204020203" pitchFamily="50" charset="-127"/>
+            </a:endParaRPr>
           </a:p>
           <a:p>
             <a:pPr marL="285750" indent="-285750">
@@ -14461,134 +14792,227 @@
                 <a:spcPct val="150000"/>
               </a:lnSpc>
               <a:buFont typeface="Wingdings" panose="05000000000000000000" pitchFamily="2" charset="2"/>
-              <a:buChar char="v"/>
+              <a:buChar char="§"/>
             </a:pPr>
-            <a:endParaRPr lang="en-US" altLang="ko-KR" b="1" dirty="0">
-              <a:latin typeface="Arial Narrow" panose="020B0606020202030204" pitchFamily="34" charset="0"/>
+            <a:r>
+              <a:rPr lang="ko-KR" altLang="en-US" sz="1600" dirty="0">
+                <a:latin typeface="맑은 고딕 Semilight" panose="020B0502040204020203" pitchFamily="50" charset="-127"/>
+                <a:ea typeface="맑은 고딕 Semilight" panose="020B0502040204020203" pitchFamily="50" charset="-127"/>
+                <a:cs typeface="맑은 고딕 Semilight" panose="020B0502040204020203" pitchFamily="50" charset="-127"/>
+              </a:rPr>
+              <a:t>흔히 사용하는 정규분포와 비슷하게 생겼지만</a:t>
+            </a:r>
+            <a:r>
+              <a:rPr lang="en-US" altLang="ko-KR" sz="1600" dirty="0">
+                <a:latin typeface="맑은 고딕 Semilight" panose="020B0502040204020203" pitchFamily="50" charset="-127"/>
+                <a:ea typeface="맑은 고딕 Semilight" panose="020B0502040204020203" pitchFamily="50" charset="-127"/>
+                <a:cs typeface="맑은 고딕 Semilight" panose="020B0502040204020203" pitchFamily="50" charset="-127"/>
+              </a:rPr>
+              <a:t>, </a:t>
+            </a:r>
+            <a:r>
+              <a:rPr lang="ko-KR" altLang="en-US" sz="1600" dirty="0">
+                <a:latin typeface="맑은 고딕 Semilight" panose="020B0502040204020203" pitchFamily="50" charset="-127"/>
+                <a:ea typeface="맑은 고딕 Semilight" panose="020B0502040204020203" pitchFamily="50" charset="-127"/>
+                <a:cs typeface="맑은 고딕 Semilight" panose="020B0502040204020203" pitchFamily="50" charset="-127"/>
+              </a:rPr>
+              <a:t>그보다 양 끝</a:t>
+            </a:r>
+            <a:r>
+              <a:rPr lang="en-US" altLang="ko-KR" sz="1600" dirty="0">
+                <a:latin typeface="맑은 고딕 Semilight" panose="020B0502040204020203" pitchFamily="50" charset="-127"/>
+                <a:ea typeface="맑은 고딕 Semilight" panose="020B0502040204020203" pitchFamily="50" charset="-127"/>
+                <a:cs typeface="맑은 고딕 Semilight" panose="020B0502040204020203" pitchFamily="50" charset="-127"/>
+              </a:rPr>
+              <a:t>(</a:t>
+            </a:r>
+            <a:r>
+              <a:rPr lang="ko-KR" altLang="en-US" sz="1600" dirty="0">
+                <a:latin typeface="맑은 고딕 Semilight" panose="020B0502040204020203" pitchFamily="50" charset="-127"/>
+                <a:ea typeface="맑은 고딕 Semilight" panose="020B0502040204020203" pitchFamily="50" charset="-127"/>
+                <a:cs typeface="맑은 고딕 Semilight" panose="020B0502040204020203" pitchFamily="50" charset="-127"/>
+              </a:rPr>
+              <a:t>꼬리</a:t>
+            </a:r>
+            <a:r>
+              <a:rPr lang="en-US" altLang="ko-KR" sz="1600" dirty="0">
+                <a:latin typeface="맑은 고딕 Semilight" panose="020B0502040204020203" pitchFamily="50" charset="-127"/>
+                <a:ea typeface="맑은 고딕 Semilight" panose="020B0502040204020203" pitchFamily="50" charset="-127"/>
+                <a:cs typeface="맑은 고딕 Semilight" panose="020B0502040204020203" pitchFamily="50" charset="-127"/>
+              </a:rPr>
+              <a:t>)</a:t>
+            </a:r>
+            <a:r>
+              <a:rPr lang="ko-KR" altLang="en-US" sz="1600" dirty="0">
+                <a:latin typeface="맑은 고딕 Semilight" panose="020B0502040204020203" pitchFamily="50" charset="-127"/>
+                <a:ea typeface="맑은 고딕 Semilight" panose="020B0502040204020203" pitchFamily="50" charset="-127"/>
+                <a:cs typeface="맑은 고딕 Semilight" panose="020B0502040204020203" pitchFamily="50" charset="-127"/>
+              </a:rPr>
+              <a:t>이 더 두터운 것이 특징</a:t>
+            </a:r>
+            <a:endParaRPr lang="en-US" altLang="ko-KR" sz="1600" dirty="0">
+              <a:latin typeface="맑은 고딕 Semilight" panose="020B0502040204020203" pitchFamily="50" charset="-127"/>
+              <a:ea typeface="맑은 고딕 Semilight" panose="020B0502040204020203" pitchFamily="50" charset="-127"/>
+              <a:cs typeface="맑은 고딕 Semilight" panose="020B0502040204020203" pitchFamily="50" charset="-127"/>
             </a:endParaRPr>
           </a:p>
-          <a:p>
-            <a:pPr marL="285750" indent="-285750">
-              <a:lnSpc>
-                <a:spcPct val="150000"/>
-              </a:lnSpc>
-              <a:buFont typeface="Wingdings" panose="05000000000000000000" pitchFamily="2" charset="2"/>
-              <a:buChar char="v"/>
-            </a:pPr>
-            <a:endParaRPr lang="en-US" altLang="ko-KR" b="1" dirty="0">
-              <a:latin typeface="Arial Narrow" panose="020B0606020202030204" pitchFamily="34" charset="0"/>
-            </a:endParaRPr>
-          </a:p>
-          <a:p>
-            <a:pPr marL="285750" indent="-285750">
-              <a:lnSpc>
-                <a:spcPct val="150000"/>
-              </a:lnSpc>
-              <a:buFont typeface="Wingdings" panose="05000000000000000000" pitchFamily="2" charset="2"/>
-              <a:buChar char="v"/>
-            </a:pPr>
-            <a:r>
-              <a:rPr lang="en-US" altLang="ko-KR" b="1" dirty="0">
-                <a:latin typeface="Arial Narrow" panose="020B0606020202030204" pitchFamily="34" charset="0"/>
-              </a:rPr>
-              <a:t>2</a:t>
-            </a:r>
-            <a:r>
-              <a:rPr lang="ko-KR" altLang="en-US" b="1" dirty="0">
-                <a:latin typeface="Arial Narrow" panose="020B0606020202030204" pitchFamily="34" charset="0"/>
-              </a:rPr>
-              <a:t>단계</a:t>
-            </a:r>
-            <a:r>
-              <a:rPr lang="en-US" altLang="ko-KR" b="1" dirty="0">
-                <a:latin typeface="Arial Narrow" panose="020B0606020202030204" pitchFamily="34" charset="0"/>
-              </a:rPr>
-              <a:t>: t-test </a:t>
-            </a:r>
-            <a:r>
-              <a:rPr lang="ko-KR" altLang="en-US" b="1" dirty="0">
-                <a:latin typeface="Arial Narrow" panose="020B0606020202030204" pitchFamily="34" charset="0"/>
-              </a:rPr>
-              <a:t>수행</a:t>
-            </a:r>
-          </a:p>
-          <a:p>
-            <a:pPr marL="742950" lvl="1" indent="-285750">
-              <a:lnSpc>
-                <a:spcPct val="150000"/>
-              </a:lnSpc>
-              <a:buFont typeface="Wingdings" panose="05000000000000000000" pitchFamily="2" charset="2"/>
-              <a:buChar char="v"/>
-            </a:pPr>
-            <a:r>
-              <a:rPr lang="ko-KR" altLang="en-US" dirty="0">
-                <a:latin typeface="Arial Narrow" panose="020B0606020202030204" pitchFamily="34" charset="0"/>
-              </a:rPr>
-              <a:t>생성된 데이터에 대해 독립 표본 </a:t>
-            </a:r>
-            <a:r>
-              <a:rPr lang="en-US" altLang="ko-KR" dirty="0">
-                <a:latin typeface="Arial Narrow" panose="020B0606020202030204" pitchFamily="34" charset="0"/>
-              </a:rPr>
-              <a:t>t-test</a:t>
-            </a:r>
-            <a:r>
-              <a:rPr lang="ko-KR" altLang="en-US" dirty="0">
-                <a:latin typeface="Arial Narrow" panose="020B0606020202030204" pitchFamily="34" charset="0"/>
-              </a:rPr>
-              <a:t>를 수행하여 투여 전과 투여 후의 평균 차이가 통계적으로 </a:t>
-            </a:r>
-            <a:r>
-              <a:rPr lang="ko-KR" altLang="en-US" dirty="0" err="1">
-                <a:latin typeface="Arial Narrow" panose="020B0606020202030204" pitchFamily="34" charset="0"/>
-              </a:rPr>
-              <a:t>유의미한지</a:t>
-            </a:r>
-            <a:r>
-              <a:rPr lang="ko-KR" altLang="en-US" dirty="0">
-                <a:latin typeface="Arial Narrow" panose="020B0606020202030204" pitchFamily="34" charset="0"/>
-              </a:rPr>
-              <a:t> 검정합니다</a:t>
-            </a:r>
-            <a:r>
-              <a:rPr lang="en-US" altLang="ko-KR" dirty="0">
-                <a:latin typeface="Arial Narrow" panose="020B0606020202030204" pitchFamily="34" charset="0"/>
-              </a:rPr>
-              <a:t>.</a:t>
-            </a:r>
-          </a:p>
-        </p:txBody>
-      </p:sp>
-      <p:sp>
-        <p:nvSpPr>
-          <p:cNvPr id="4" name="직사각형 3"/>
-          <p:cNvSpPr/>
+        </p:txBody>
+      </p:sp>
+      <p:pic>
+        <p:nvPicPr>
+          <p:cNvPr id="7" name="그림 6">
+            <a:extLst>
+              <a:ext uri="{FF2B5EF4-FFF2-40B4-BE49-F238E27FC236}">
+                <a16:creationId xmlns:a16="http://schemas.microsoft.com/office/drawing/2014/main" id="{BB5CDD14-9033-98B0-8A7B-8064D2699D1F}"/>
+              </a:ext>
+            </a:extLst>
+          </p:cNvPr>
+          <p:cNvPicPr>
+            <a:picLocks noChangeAspect="1"/>
+          </p:cNvPicPr>
           <p:nvPr/>
-        </p:nvSpPr>
+        </p:nvPicPr>
+        <p:blipFill>
+          <a:blip r:embed="rId4"/>
+          <a:stretch>
+            <a:fillRect/>
+          </a:stretch>
+        </p:blipFill>
         <p:spPr>
           <a:xfrm>
-            <a:off x="333772" y="370028"/>
-            <a:ext cx="7229864" cy="523220"/>
+            <a:off x="2926060" y="3142130"/>
+            <a:ext cx="1251576" cy="687340"/>
           </a:xfrm>
           <a:prstGeom prst="rect">
             <a:avLst/>
           </a:prstGeom>
         </p:spPr>
-        <p:txBody>
-          <a:bodyPr wrap="none">
+      </p:pic>
+      <p:sp>
+        <p:nvSpPr>
+          <p:cNvPr id="10" name="TextBox 9">
+            <a:extLst>
+              <a:ext uri="{FF2B5EF4-FFF2-40B4-BE49-F238E27FC236}">
+                <a16:creationId xmlns:a16="http://schemas.microsoft.com/office/drawing/2014/main" id="{56D2F579-63EA-BC4E-E878-E5213AF5CFBE}"/>
+              </a:ext>
+            </a:extLst>
+          </p:cNvPr>
+          <p:cNvSpPr txBox="1"/>
+          <p:nvPr/>
+        </p:nvSpPr>
+        <p:spPr>
+          <a:xfrm>
+            <a:off x="9046740" y="2118108"/>
+            <a:ext cx="2736304" cy="2260683"/>
+          </a:xfrm>
+          <a:prstGeom prst="rect">
+            <a:avLst/>
+          </a:prstGeom>
+          <a:noFill/>
+        </p:spPr>
+        <p:txBody>
+          <a:bodyPr wrap="square">
             <a:spAutoFit/>
           </a:bodyPr>
           <a:lstStyle/>
           <a:p>
-            <a:r>
-              <a:rPr lang="ko-KR" altLang="en-US" sz="2800" b="1" dirty="0"/>
-              <a:t>새로운 신약의 효과 검정을 위한 통계분석</a:t>
-            </a:r>
-            <a:r>
-              <a:rPr lang="en-US" altLang="ko-KR" sz="2800" b="1" dirty="0"/>
-              <a:t>(1/3)</a:t>
-            </a:r>
-            <a:endParaRPr lang="ko-KR" altLang="en-US" sz="2800" b="1" dirty="0"/>
+            <a:pPr>
+              <a:lnSpc>
+                <a:spcPct val="150000"/>
+              </a:lnSpc>
+            </a:pPr>
+            <a:r>
+              <a:rPr lang="ko-KR" altLang="en-US" sz="1600" u="sng" dirty="0" err="1">
+                <a:latin typeface="맑은 고딕 Semilight" panose="020B0502040204020203" pitchFamily="50" charset="-127"/>
+                <a:ea typeface="맑은 고딕 Semilight" panose="020B0502040204020203" pitchFamily="50" charset="-127"/>
+                <a:cs typeface="맑은 고딕 Semilight" panose="020B0502040204020203" pitchFamily="50" charset="-127"/>
+              </a:rPr>
+              <a:t>머신러닝에서</a:t>
+            </a:r>
+            <a:r>
+              <a:rPr lang="ko-KR" altLang="en-US" sz="1600" u="sng" dirty="0">
+                <a:latin typeface="맑은 고딕 Semilight" panose="020B0502040204020203" pitchFamily="50" charset="-127"/>
+                <a:ea typeface="맑은 고딕 Semilight" panose="020B0502040204020203" pitchFamily="50" charset="-127"/>
+                <a:cs typeface="맑은 고딕 Semilight" panose="020B0502040204020203" pitchFamily="50" charset="-127"/>
+              </a:rPr>
+              <a:t> 활용</a:t>
+            </a:r>
+            <a:endParaRPr lang="en-US" altLang="ko-KR" sz="1600" u="sng" dirty="0">
+              <a:latin typeface="맑은 고딕 Semilight" panose="020B0502040204020203" pitchFamily="50" charset="-127"/>
+              <a:ea typeface="맑은 고딕 Semilight" panose="020B0502040204020203" pitchFamily="50" charset="-127"/>
+              <a:cs typeface="맑은 고딕 Semilight" panose="020B0502040204020203" pitchFamily="50" charset="-127"/>
+            </a:endParaRPr>
+          </a:p>
+          <a:p>
+            <a:pPr>
+              <a:lnSpc>
+                <a:spcPct val="150000"/>
+              </a:lnSpc>
+            </a:pPr>
+            <a:r>
+              <a:rPr lang="en-US" altLang="ko-KR" sz="1600" dirty="0">
+                <a:latin typeface="맑은 고딕 Semilight" panose="020B0502040204020203" pitchFamily="50" charset="-127"/>
+                <a:ea typeface="맑은 고딕 Semilight" panose="020B0502040204020203" pitchFamily="50" charset="-127"/>
+                <a:cs typeface="맑은 고딕 Semilight" panose="020B0502040204020203" pitchFamily="50" charset="-127"/>
+              </a:rPr>
+              <a:t>p-value</a:t>
+            </a:r>
+            <a:r>
+              <a:rPr lang="ko-KR" altLang="en-US" sz="1600" dirty="0">
+                <a:latin typeface="맑은 고딕 Semilight" panose="020B0502040204020203" pitchFamily="50" charset="-127"/>
+                <a:ea typeface="맑은 고딕 Semilight" panose="020B0502040204020203" pitchFamily="50" charset="-127"/>
+                <a:cs typeface="맑은 고딕 Semilight" panose="020B0502040204020203" pitchFamily="50" charset="-127"/>
+              </a:rPr>
+              <a:t>가 </a:t>
+            </a:r>
+            <a:r>
+              <a:rPr lang="en-US" altLang="ko-KR" sz="1600" dirty="0">
+                <a:latin typeface="맑은 고딕 Semilight" panose="020B0502040204020203" pitchFamily="50" charset="-127"/>
+                <a:ea typeface="맑은 고딕 Semilight" panose="020B0502040204020203" pitchFamily="50" charset="-127"/>
+                <a:cs typeface="맑은 고딕 Semilight" panose="020B0502040204020203" pitchFamily="50" charset="-127"/>
+              </a:rPr>
+              <a:t>0.05</a:t>
+            </a:r>
+            <a:r>
+              <a:rPr lang="ko-KR" altLang="en-US" sz="1600" dirty="0">
+                <a:latin typeface="맑은 고딕 Semilight" panose="020B0502040204020203" pitchFamily="50" charset="-127"/>
+                <a:ea typeface="맑은 고딕 Semilight" panose="020B0502040204020203" pitchFamily="50" charset="-127"/>
+                <a:cs typeface="맑은 고딕 Semilight" panose="020B0502040204020203" pitchFamily="50" charset="-127"/>
+              </a:rPr>
+              <a:t>보다 작다면</a:t>
+            </a:r>
+            <a:r>
+              <a:rPr lang="en-US" altLang="ko-KR" sz="1600" dirty="0">
+                <a:latin typeface="맑은 고딕 Semilight" panose="020B0502040204020203" pitchFamily="50" charset="-127"/>
+                <a:ea typeface="맑은 고딕 Semilight" panose="020B0502040204020203" pitchFamily="50" charset="-127"/>
+                <a:cs typeface="맑은 고딕 Semilight" panose="020B0502040204020203" pitchFamily="50" charset="-127"/>
+              </a:rPr>
+              <a:t>, "</a:t>
+            </a:r>
+            <a:r>
+              <a:rPr lang="ko-KR" altLang="en-US" sz="1600" dirty="0">
+                <a:latin typeface="맑은 고딕 Semilight" panose="020B0502040204020203" pitchFamily="50" charset="-127"/>
+                <a:ea typeface="맑은 고딕 Semilight" panose="020B0502040204020203" pitchFamily="50" charset="-127"/>
+                <a:cs typeface="맑은 고딕 Semilight" panose="020B0502040204020203" pitchFamily="50" charset="-127"/>
+              </a:rPr>
+              <a:t>두 모델의 성능 차이는 우연이 아니라 통계적으로 유의미하다</a:t>
+            </a:r>
+            <a:r>
+              <a:rPr lang="en-US" altLang="ko-KR" sz="1600" dirty="0">
+                <a:latin typeface="맑은 고딕 Semilight" panose="020B0502040204020203" pitchFamily="50" charset="-127"/>
+                <a:ea typeface="맑은 고딕 Semilight" panose="020B0502040204020203" pitchFamily="50" charset="-127"/>
+                <a:cs typeface="맑은 고딕 Semilight" panose="020B0502040204020203" pitchFamily="50" charset="-127"/>
+              </a:rPr>
+              <a:t>"</a:t>
+            </a:r>
+            <a:r>
+              <a:rPr lang="ko-KR" altLang="en-US" sz="1600" dirty="0">
+                <a:latin typeface="맑은 고딕 Semilight" panose="020B0502040204020203" pitchFamily="50" charset="-127"/>
+                <a:ea typeface="맑은 고딕 Semilight" panose="020B0502040204020203" pitchFamily="50" charset="-127"/>
+                <a:cs typeface="맑은 고딕 Semilight" panose="020B0502040204020203" pitchFamily="50" charset="-127"/>
+              </a:rPr>
+              <a:t>고 결론짓고 더 나은 모델을 선택</a:t>
+            </a:r>
           </a:p>
         </p:txBody>
       </p:sp>
@@ -14622,7 +15046,13 @@
   <p:cSld>
     <p:spTree>
       <p:nvGrpSpPr>
-        <p:cNvPr id="1" name=""/>
+        <p:cNvPr id="1" name="">
+          <a:extLst>
+            <a:ext uri="{FF2B5EF4-FFF2-40B4-BE49-F238E27FC236}">
+              <a16:creationId xmlns:a16="http://schemas.microsoft.com/office/drawing/2014/main" id="{762F6384-AE23-9E58-FC91-C5F1361CF6B8}"/>
+            </a:ext>
+          </a:extLst>
+        </p:cNvPr>
         <p:cNvGrpSpPr/>
         <p:nvPr/>
       </p:nvGrpSpPr>
@@ -14636,7 +15066,13 @@
       </p:grpSpPr>
       <p:sp>
         <p:nvSpPr>
-          <p:cNvPr id="8" name="슬라이드 번호 개체 틀 7"/>
+          <p:cNvPr id="8" name="슬라이드 번호 개체 틀 7">
+            <a:extLst>
+              <a:ext uri="{FF2B5EF4-FFF2-40B4-BE49-F238E27FC236}">
+                <a16:creationId xmlns:a16="http://schemas.microsoft.com/office/drawing/2014/main" id="{E6770638-C1ED-0705-08FE-872C53D9EBE4}"/>
+              </a:ext>
+            </a:extLst>
+          </p:cNvPr>
           <p:cNvSpPr>
             <a:spLocks noGrp="1"/>
           </p:cNvSpPr>
@@ -14660,89 +15096,291 @@
       </p:sp>
       <p:sp>
         <p:nvSpPr>
-          <p:cNvPr id="4" name="직사각형 3"/>
+          <p:cNvPr id="2" name="직사각형 1">
+            <a:extLst>
+              <a:ext uri="{FF2B5EF4-FFF2-40B4-BE49-F238E27FC236}">
+                <a16:creationId xmlns:a16="http://schemas.microsoft.com/office/drawing/2014/main" id="{E2A422D3-43C8-8F2B-7CF1-D410589B5765}"/>
+              </a:ext>
+            </a:extLst>
+          </p:cNvPr>
           <p:cNvSpPr/>
           <p:nvPr/>
         </p:nvSpPr>
         <p:spPr>
           <a:xfrm>
-            <a:off x="333772" y="370028"/>
-            <a:ext cx="7231467" cy="523220"/>
+            <a:off x="909836" y="1412776"/>
+            <a:ext cx="10801200" cy="3831818"/>
           </a:xfrm>
           <a:prstGeom prst="rect">
             <a:avLst/>
           </a:prstGeom>
         </p:spPr>
         <p:txBody>
-          <a:bodyPr wrap="none">
+          <a:bodyPr wrap="square">
             <a:spAutoFit/>
           </a:bodyPr>
           <a:lstStyle/>
           <a:p>
-            <a:r>
-              <a:rPr lang="ko-KR" altLang="en-US" sz="2800" b="1" dirty="0"/>
-              <a:t>새로운 신약의 효과 검정을 위한 통계분석</a:t>
-            </a:r>
-            <a:r>
-              <a:rPr lang="en-US" altLang="ko-KR" sz="2800" b="1" dirty="0"/>
-              <a:t>(2/3)</a:t>
-            </a:r>
-            <a:endParaRPr lang="ko-KR" altLang="en-US" sz="2800" b="1" dirty="0"/>
-          </a:p>
-        </p:txBody>
-      </p:sp>
-      <p:pic>
-        <p:nvPicPr>
-          <p:cNvPr id="5" name="그림 4"/>
-          <p:cNvPicPr>
-            <a:picLocks noChangeAspect="1"/>
-          </p:cNvPicPr>
+            <a:pPr marL="285750" indent="-285750">
+              <a:lnSpc>
+                <a:spcPct val="150000"/>
+              </a:lnSpc>
+              <a:buFont typeface="Wingdings" panose="05000000000000000000" pitchFamily="2" charset="2"/>
+              <a:buChar char="v"/>
+            </a:pPr>
+            <a:r>
+              <a:rPr lang="en-US" altLang="ko-KR" b="1" dirty="0">
+                <a:latin typeface="Arial Narrow" panose="020B0606020202030204" pitchFamily="34" charset="0"/>
+              </a:rPr>
+              <a:t>1</a:t>
+            </a:r>
+            <a:r>
+              <a:rPr lang="ko-KR" altLang="en-US" b="1" dirty="0">
+                <a:latin typeface="Arial Narrow" panose="020B0606020202030204" pitchFamily="34" charset="0"/>
+              </a:rPr>
+              <a:t>단계</a:t>
+            </a:r>
+            <a:r>
+              <a:rPr lang="en-US" altLang="ko-KR" b="1" dirty="0">
+                <a:latin typeface="Arial Narrow" panose="020B0606020202030204" pitchFamily="34" charset="0"/>
+              </a:rPr>
+              <a:t>: </a:t>
+            </a:r>
+            <a:r>
+              <a:rPr lang="ko-KR" altLang="en-US" b="1" dirty="0">
+                <a:latin typeface="Arial Narrow" panose="020B0606020202030204" pitchFamily="34" charset="0"/>
+              </a:rPr>
+              <a:t>데이터 생성</a:t>
+            </a:r>
+          </a:p>
+          <a:p>
+            <a:pPr marL="742950" lvl="1" indent="-285750">
+              <a:lnSpc>
+                <a:spcPct val="150000"/>
+              </a:lnSpc>
+              <a:buFont typeface="Wingdings" panose="05000000000000000000" pitchFamily="2" charset="2"/>
+              <a:buChar char="v"/>
+            </a:pPr>
+            <a:r>
+              <a:rPr lang="ko-KR" altLang="en-US" dirty="0">
+                <a:latin typeface="Arial Narrow" panose="020B0606020202030204" pitchFamily="34" charset="0"/>
+              </a:rPr>
+              <a:t>신약 투여 전과 투여 후의 데이터를 각각 </a:t>
+            </a:r>
+            <a:r>
+              <a:rPr lang="en-US" altLang="ko-KR" dirty="0">
+                <a:latin typeface="Arial Narrow" panose="020B0606020202030204" pitchFamily="34" charset="0"/>
+              </a:rPr>
+              <a:t>100</a:t>
+            </a:r>
+            <a:r>
+              <a:rPr lang="ko-KR" altLang="en-US" dirty="0">
+                <a:latin typeface="Arial Narrow" panose="020B0606020202030204" pitchFamily="34" charset="0"/>
+              </a:rPr>
+              <a:t>명 분량으로 생성합니다</a:t>
+            </a:r>
+            <a:r>
+              <a:rPr lang="en-US" altLang="ko-KR" dirty="0">
+                <a:latin typeface="Arial Narrow" panose="020B0606020202030204" pitchFamily="34" charset="0"/>
+              </a:rPr>
+              <a:t>. </a:t>
+            </a:r>
+            <a:r>
+              <a:rPr lang="ko-KR" altLang="en-US" dirty="0">
+                <a:latin typeface="Arial Narrow" panose="020B0606020202030204" pitchFamily="34" charset="0"/>
+              </a:rPr>
+              <a:t>이 예에서는 투여 전 데이터를 정규 분포 </a:t>
+            </a:r>
+            <a:r>
+              <a:rPr lang="en-US" altLang="ko-KR" dirty="0">
+                <a:latin typeface="Arial Narrow" panose="020B0606020202030204" pitchFamily="34" charset="0"/>
+              </a:rPr>
+              <a:t>N(0, 1)</a:t>
+            </a:r>
+            <a:r>
+              <a:rPr lang="ko-KR" altLang="en-US" dirty="0">
+                <a:latin typeface="Arial Narrow" panose="020B0606020202030204" pitchFamily="34" charset="0"/>
+              </a:rPr>
+              <a:t>을 따르게 하고</a:t>
+            </a:r>
+            <a:r>
+              <a:rPr lang="en-US" altLang="ko-KR" dirty="0">
+                <a:latin typeface="Arial Narrow" panose="020B0606020202030204" pitchFamily="34" charset="0"/>
+              </a:rPr>
+              <a:t>, </a:t>
+            </a:r>
+            <a:r>
+              <a:rPr lang="ko-KR" altLang="en-US" dirty="0">
+                <a:latin typeface="Arial Narrow" panose="020B0606020202030204" pitchFamily="34" charset="0"/>
+              </a:rPr>
+              <a:t>투여 후 데이터는 투여의 효과를 모사하기 위해 평균이 약간 증가한 정규 분포 </a:t>
+            </a:r>
+            <a:r>
+              <a:rPr lang="en-US" altLang="ko-KR" dirty="0">
+                <a:latin typeface="Arial Narrow" panose="020B0606020202030204" pitchFamily="34" charset="0"/>
+              </a:rPr>
+              <a:t>N(0.3, 2)</a:t>
+            </a:r>
+            <a:r>
+              <a:rPr lang="ko-KR" altLang="en-US" dirty="0">
+                <a:latin typeface="Arial Narrow" panose="020B0606020202030204" pitchFamily="34" charset="0"/>
+              </a:rPr>
+              <a:t>를 사용합니다</a:t>
+            </a:r>
+            <a:r>
+              <a:rPr lang="en-US" altLang="ko-KR" dirty="0">
+                <a:latin typeface="Arial Narrow" panose="020B0606020202030204" pitchFamily="34" charset="0"/>
+              </a:rPr>
+              <a:t>.</a:t>
+            </a:r>
+          </a:p>
+          <a:p>
+            <a:pPr marL="285750" indent="-285750">
+              <a:lnSpc>
+                <a:spcPct val="150000"/>
+              </a:lnSpc>
+              <a:buFont typeface="Wingdings" panose="05000000000000000000" pitchFamily="2" charset="2"/>
+              <a:buChar char="v"/>
+            </a:pPr>
+            <a:endParaRPr lang="en-US" altLang="ko-KR" b="1" dirty="0">
+              <a:latin typeface="Arial Narrow" panose="020B0606020202030204" pitchFamily="34" charset="0"/>
+            </a:endParaRPr>
+          </a:p>
+          <a:p>
+            <a:pPr marL="285750" indent="-285750">
+              <a:lnSpc>
+                <a:spcPct val="150000"/>
+              </a:lnSpc>
+              <a:buFont typeface="Wingdings" panose="05000000000000000000" pitchFamily="2" charset="2"/>
+              <a:buChar char="v"/>
+            </a:pPr>
+            <a:endParaRPr lang="en-US" altLang="ko-KR" b="1" dirty="0">
+              <a:latin typeface="Arial Narrow" panose="020B0606020202030204" pitchFamily="34" charset="0"/>
+            </a:endParaRPr>
+          </a:p>
+          <a:p>
+            <a:pPr marL="285750" indent="-285750">
+              <a:lnSpc>
+                <a:spcPct val="150000"/>
+              </a:lnSpc>
+              <a:buFont typeface="Wingdings" panose="05000000000000000000" pitchFamily="2" charset="2"/>
+              <a:buChar char="v"/>
+            </a:pPr>
+            <a:r>
+              <a:rPr lang="en-US" altLang="ko-KR" b="1" dirty="0">
+                <a:latin typeface="Arial Narrow" panose="020B0606020202030204" pitchFamily="34" charset="0"/>
+              </a:rPr>
+              <a:t>2</a:t>
+            </a:r>
+            <a:r>
+              <a:rPr lang="ko-KR" altLang="en-US" b="1" dirty="0">
+                <a:latin typeface="Arial Narrow" panose="020B0606020202030204" pitchFamily="34" charset="0"/>
+              </a:rPr>
+              <a:t>단계</a:t>
+            </a:r>
+            <a:r>
+              <a:rPr lang="en-US" altLang="ko-KR" b="1" dirty="0">
+                <a:latin typeface="Arial Narrow" panose="020B0606020202030204" pitchFamily="34" charset="0"/>
+              </a:rPr>
+              <a:t>: t-test </a:t>
+            </a:r>
+            <a:r>
+              <a:rPr lang="ko-KR" altLang="en-US" b="1" dirty="0">
+                <a:latin typeface="Arial Narrow" panose="020B0606020202030204" pitchFamily="34" charset="0"/>
+              </a:rPr>
+              <a:t>수행</a:t>
+            </a:r>
+          </a:p>
+          <a:p>
+            <a:pPr marL="742950" lvl="1" indent="-285750">
+              <a:lnSpc>
+                <a:spcPct val="150000"/>
+              </a:lnSpc>
+              <a:buFont typeface="Wingdings" panose="05000000000000000000" pitchFamily="2" charset="2"/>
+              <a:buChar char="v"/>
+            </a:pPr>
+            <a:r>
+              <a:rPr lang="ko-KR" altLang="en-US" dirty="0">
+                <a:latin typeface="Arial Narrow" panose="020B0606020202030204" pitchFamily="34" charset="0"/>
+              </a:rPr>
+              <a:t>생성된 데이터에 대해 독립 표본 </a:t>
+            </a:r>
+            <a:r>
+              <a:rPr lang="en-US" altLang="ko-KR" dirty="0">
+                <a:latin typeface="Arial Narrow" panose="020B0606020202030204" pitchFamily="34" charset="0"/>
+              </a:rPr>
+              <a:t>t-test</a:t>
+            </a:r>
+            <a:r>
+              <a:rPr lang="ko-KR" altLang="en-US" dirty="0">
+                <a:latin typeface="Arial Narrow" panose="020B0606020202030204" pitchFamily="34" charset="0"/>
+              </a:rPr>
+              <a:t>를 수행하여 투여 전과 투여 후의 평균 차이가 통계적으로 </a:t>
+            </a:r>
+            <a:r>
+              <a:rPr lang="ko-KR" altLang="en-US" dirty="0" err="1">
+                <a:latin typeface="Arial Narrow" panose="020B0606020202030204" pitchFamily="34" charset="0"/>
+              </a:rPr>
+              <a:t>유의미한지</a:t>
+            </a:r>
+            <a:r>
+              <a:rPr lang="ko-KR" altLang="en-US" dirty="0">
+                <a:latin typeface="Arial Narrow" panose="020B0606020202030204" pitchFamily="34" charset="0"/>
+              </a:rPr>
+              <a:t> 검정합니다</a:t>
+            </a:r>
+            <a:r>
+              <a:rPr lang="en-US" altLang="ko-KR" dirty="0">
+                <a:latin typeface="Arial Narrow" panose="020B0606020202030204" pitchFamily="34" charset="0"/>
+              </a:rPr>
+              <a:t>.</a:t>
+            </a:r>
+          </a:p>
+        </p:txBody>
+      </p:sp>
+      <p:sp>
+        <p:nvSpPr>
+          <p:cNvPr id="4" name="직사각형 3">
+            <a:extLst>
+              <a:ext uri="{FF2B5EF4-FFF2-40B4-BE49-F238E27FC236}">
+                <a16:creationId xmlns:a16="http://schemas.microsoft.com/office/drawing/2014/main" id="{2A6B6102-868A-0C39-9A08-91BF760A29D1}"/>
+              </a:ext>
+            </a:extLst>
+          </p:cNvPr>
+          <p:cNvSpPr/>
           <p:nvPr/>
-        </p:nvPicPr>
-        <p:blipFill>
-          <a:blip r:embed="rId3"/>
-          <a:stretch>
-            <a:fillRect/>
-          </a:stretch>
-        </p:blipFill>
+        </p:nvSpPr>
         <p:spPr>
           <a:xfrm>
-            <a:off x="1601945" y="1168519"/>
-            <a:ext cx="6796724" cy="819248"/>
+            <a:off x="333772" y="370028"/>
+            <a:ext cx="7229864" cy="523220"/>
           </a:xfrm>
           <a:prstGeom prst="rect">
             <a:avLst/>
           </a:prstGeom>
         </p:spPr>
-      </p:pic>
-      <p:pic>
-        <p:nvPicPr>
-          <p:cNvPr id="3" name="그림 2"/>
-          <p:cNvPicPr>
-            <a:picLocks noChangeAspect="1"/>
-          </p:cNvPicPr>
-          <p:nvPr/>
-        </p:nvPicPr>
-        <p:blipFill>
-          <a:blip r:embed="rId4"/>
-          <a:stretch>
-            <a:fillRect/>
-          </a:stretch>
-        </p:blipFill>
-        <p:spPr>
-          <a:xfrm>
-            <a:off x="1601945" y="2263038"/>
-            <a:ext cx="9652701" cy="3953500"/>
-          </a:xfrm>
-          <a:prstGeom prst="rect">
-            <a:avLst/>
-          </a:prstGeom>
-        </p:spPr>
-      </p:pic>
+        <p:txBody>
+          <a:bodyPr wrap="none">
+            <a:spAutoFit/>
+          </a:bodyPr>
+          <a:lstStyle/>
+          <a:p>
+            <a:r>
+              <a:rPr lang="ko-KR" altLang="en-US" sz="2800" b="1" dirty="0"/>
+              <a:t>새로운 신약의 효과 검정을 위한 통계분석</a:t>
+            </a:r>
+            <a:r>
+              <a:rPr lang="en-US" altLang="ko-KR" sz="2800" b="1" dirty="0"/>
+              <a:t>(1/3)</a:t>
+            </a:r>
+            <a:endParaRPr lang="ko-KR" altLang="en-US" sz="2800" b="1" dirty="0"/>
+          </a:p>
+        </p:txBody>
+      </p:sp>
     </p:spTree>
     <p:extLst>
       <p:ext uri="{BB962C8B-B14F-4D97-AF65-F5344CB8AC3E}">
-        <p14:creationId xmlns:p14="http://schemas.microsoft.com/office/powerpoint/2010/main" val="3176157259"/>
+        <p14:creationId xmlns:p14="http://schemas.microsoft.com/office/powerpoint/2010/main" val="580817323"/>
       </p:ext>
     </p:extLst>
   </p:cSld>
@@ -15565,6 +16203,15 @@
 </file>
 
 <file path=customXml/item1.xml><?xml version="1.0" encoding="utf-8"?>
+<?mso-contentType ?>
+<FormTemplates xmlns="http://schemas.microsoft.com/sharepoint/v3/contenttype/forms">
+  <Display>DocumentLibraryForm</Display>
+  <Edit>DocumentLibraryForm</Edit>
+  <New>DocumentLibraryForm</New>
+</FormTemplates>
+</file>
+
+<file path=customXml/item2.xml><?xml version="1.0" encoding="utf-8"?>
 <ct:contentTypeSchema xmlns:ct="http://schemas.microsoft.com/office/2006/metadata/contentType" xmlns:ma="http://schemas.microsoft.com/office/2006/metadata/properties/metaAttributes" ct:_="" ma:_="" ma:contentTypeName="Document" ma:contentTypeID="0x010100AA3F7D94069FF64A86F7DFF56D60E3BE" ma:contentTypeVersion="6" ma:contentTypeDescription="Create a new document." ma:contentTypeScope="" ma:versionID="c32302c77d4085ecf495bdddb7f5e889">
   <xsd:schema xmlns:xsd="http://www.w3.org/2001/XMLSchema" xmlns:xs="http://www.w3.org/2001/XMLSchema" xmlns:p="http://schemas.microsoft.com/office/2006/metadata/properties" xmlns:ns2="a4f35948-e619-41b3-aa29-22878b09cfd2" xmlns:ns3="40262f94-9f35-4ac3-9a90-690165a166b7" targetNamespace="http://schemas.microsoft.com/office/2006/metadata/properties" ma:root="true" ma:fieldsID="4ab5ae46be95f9d0be6107e8200be7a2" ns2:_="" ns3:_="">
     <xsd:import namespace="a4f35948-e619-41b3-aa29-22878b09cfd2"/>
@@ -15745,15 +16392,6 @@
 </ct:contentTypeSchema>
 </file>
 
-<file path=customXml/item2.xml><?xml version="1.0" encoding="utf-8"?>
-<?mso-contentType ?>
-<FormTemplates xmlns="http://schemas.microsoft.com/sharepoint/v3/contenttype/forms">
-  <Display>DocumentLibraryForm</Display>
-  <Edit>DocumentLibraryForm</Edit>
-  <New>DocumentLibraryForm</New>
-</FormTemplates>
-</file>
-
 <file path=customXml/item3.xml><?xml version="1.0" encoding="utf-8"?>
 <p:properties xmlns:p="http://schemas.microsoft.com/office/2006/metadata/properties" xmlns:xsi="http://www.w3.org/2001/XMLSchema-instance" xmlns:pc="http://schemas.microsoft.com/office/infopath/2007/PartnerControls">
   <documentManagement>
@@ -15766,6 +16404,14 @@
 </file>
 
 <file path=customXml/itemProps1.xml><?xml version="1.0" encoding="utf-8"?>
+<ds:datastoreItem xmlns:ds="http://schemas.openxmlformats.org/officeDocument/2006/customXml" ds:itemID="{7F9B8BCC-BF24-4800-92E1-9F891BBB27E6}">
+  <ds:schemaRefs>
+    <ds:schemaRef ds:uri="http://schemas.microsoft.com/sharepoint/v3/contenttype/forms"/>
+  </ds:schemaRefs>
+</ds:datastoreItem>
+</file>
+
+<file path=customXml/itemProps2.xml><?xml version="1.0" encoding="utf-8"?>
 <ds:datastoreItem xmlns:ds="http://schemas.openxmlformats.org/officeDocument/2006/customXml" ds:itemID="{5CCB2C71-1ED8-4540-B003-293B5E75C71F}">
   <ds:schemaRefs>
     <ds:schemaRef ds:uri="http://schemas.microsoft.com/office/2006/metadata/contentType"/>
@@ -15780,14 +16426,6 @@
     <ds:schemaRef ds:uri="http://purl.org/dc/elements/1.1/"/>
     <ds:schemaRef ds:uri="http://purl.org/dc/terms/"/>
     <ds:schemaRef ds:uri="http://schemas.microsoft.com/internal/obd"/>
-  </ds:schemaRefs>
-</ds:datastoreItem>
-</file>
-
-<file path=customXml/itemProps2.xml><?xml version="1.0" encoding="utf-8"?>
-<ds:datastoreItem xmlns:ds="http://schemas.openxmlformats.org/officeDocument/2006/customXml" ds:itemID="{7F9B8BCC-BF24-4800-92E1-9F891BBB27E6}">
-  <ds:schemaRefs>
-    <ds:schemaRef ds:uri="http://schemas.microsoft.com/sharepoint/v3/contenttype/forms"/>
   </ds:schemaRefs>
 </ds:datastoreItem>
 </file>

--- a/5_Hypothesis Testing.pptx
+++ b/5_Hypothesis Testing.pptx
@@ -5,40 +5,41 @@
     <p:sldMasterId id="2147483648" r:id="rId4"/>
   </p:sldMasterIdLst>
   <p:notesMasterIdLst>
-    <p:notesMasterId r:id="rId33"/>
+    <p:notesMasterId r:id="rId34"/>
   </p:notesMasterIdLst>
   <p:handoutMasterIdLst>
-    <p:handoutMasterId r:id="rId34"/>
+    <p:handoutMasterId r:id="rId35"/>
   </p:handoutMasterIdLst>
   <p:sldIdLst>
     <p:sldId id="256" r:id="rId5"/>
-    <p:sldId id="367" r:id="rId6"/>
+    <p:sldId id="380" r:id="rId6"/>
     <p:sldId id="270" r:id="rId7"/>
-    <p:sldId id="364" r:id="rId8"/>
-    <p:sldId id="272" r:id="rId9"/>
-    <p:sldId id="271" r:id="rId10"/>
-    <p:sldId id="281" r:id="rId11"/>
-    <p:sldId id="274" r:id="rId12"/>
-    <p:sldId id="372" r:id="rId13"/>
-    <p:sldId id="275" r:id="rId14"/>
-    <p:sldId id="276" r:id="rId15"/>
-    <p:sldId id="363" r:id="rId16"/>
-    <p:sldId id="277" r:id="rId17"/>
-    <p:sldId id="375" r:id="rId18"/>
-    <p:sldId id="376" r:id="rId19"/>
-    <p:sldId id="377" r:id="rId20"/>
-    <p:sldId id="378" r:id="rId21"/>
-    <p:sldId id="368" r:id="rId22"/>
-    <p:sldId id="369" r:id="rId23"/>
-    <p:sldId id="278" r:id="rId24"/>
-    <p:sldId id="379" r:id="rId25"/>
-    <p:sldId id="279" r:id="rId26"/>
-    <p:sldId id="280" r:id="rId27"/>
-    <p:sldId id="365" r:id="rId28"/>
-    <p:sldId id="373" r:id="rId29"/>
-    <p:sldId id="370" r:id="rId30"/>
-    <p:sldId id="371" r:id="rId31"/>
-    <p:sldId id="314" r:id="rId32"/>
+    <p:sldId id="381" r:id="rId8"/>
+    <p:sldId id="364" r:id="rId9"/>
+    <p:sldId id="272" r:id="rId10"/>
+    <p:sldId id="271" r:id="rId11"/>
+    <p:sldId id="281" r:id="rId12"/>
+    <p:sldId id="274" r:id="rId13"/>
+    <p:sldId id="372" r:id="rId14"/>
+    <p:sldId id="275" r:id="rId15"/>
+    <p:sldId id="276" r:id="rId16"/>
+    <p:sldId id="363" r:id="rId17"/>
+    <p:sldId id="277" r:id="rId18"/>
+    <p:sldId id="375" r:id="rId19"/>
+    <p:sldId id="376" r:id="rId20"/>
+    <p:sldId id="377" r:id="rId21"/>
+    <p:sldId id="378" r:id="rId22"/>
+    <p:sldId id="368" r:id="rId23"/>
+    <p:sldId id="369" r:id="rId24"/>
+    <p:sldId id="278" r:id="rId25"/>
+    <p:sldId id="379" r:id="rId26"/>
+    <p:sldId id="279" r:id="rId27"/>
+    <p:sldId id="280" r:id="rId28"/>
+    <p:sldId id="365" r:id="rId29"/>
+    <p:sldId id="373" r:id="rId30"/>
+    <p:sldId id="370" r:id="rId31"/>
+    <p:sldId id="371" r:id="rId32"/>
+    <p:sldId id="314" r:id="rId33"/>
   </p:sldIdLst>
   <p:sldSz cx="12188825" cy="6858000"/>
   <p:notesSz cx="6858000" cy="9144000"/>
@@ -260,7 +261,7 @@
                 <a:latin typeface="맑은 고딕" panose="020B0503020000020004" pitchFamily="50" charset="-127"/>
                 <a:ea typeface="맑은 고딕" panose="020B0503020000020004" pitchFamily="50" charset="-127"/>
               </a:rPr>
-              <a:t>2026-04-08</a:t>
+              <a:t>2026-04-09</a:t>
             </a:fld>
             <a:endParaRPr lang="ko-KR" altLang="en-US" dirty="0">
               <a:latin typeface="맑은 고딕" panose="020B0503020000020004" pitchFamily="50" charset="-127"/>
@@ -447,7 +448,7 @@
             <a:fld id="{39DBE7D5-AA2D-4B26-8C69-8B60D39FD5EE}" type="datetime1">
               <a:rPr lang="ko-KR" altLang="en-US" smtClean="0"/>
               <a:pPr/>
-              <a:t>2026-04-08</a:t>
+              <a:t>2026-04-09</a:t>
             </a:fld>
             <a:endParaRPr lang="ko-KR" altLang="en-US" dirty="0"/>
           </a:p>
@@ -813,7 +814,13 @@
   <p:cSld>
     <p:spTree>
       <p:nvGrpSpPr>
-        <p:cNvPr id="1" name=""/>
+        <p:cNvPr id="1" name="">
+          <a:extLst>
+            <a:ext uri="{FF2B5EF4-FFF2-40B4-BE49-F238E27FC236}">
+              <a16:creationId xmlns:a16="http://schemas.microsoft.com/office/drawing/2014/main" id="{AC5D8675-0015-6253-E34C-BFFFF1A14252}"/>
+            </a:ext>
+          </a:extLst>
+        </p:cNvPr>
         <p:cNvGrpSpPr/>
         <p:nvPr/>
       </p:nvGrpSpPr>
@@ -827,7 +834,13 @@
       </p:grpSpPr>
       <p:sp>
         <p:nvSpPr>
-          <p:cNvPr id="2" name="슬라이드 이미지 개체 틀 1"/>
+          <p:cNvPr id="2" name="슬라이드 이미지 개체 틀 1">
+            <a:extLst>
+              <a:ext uri="{FF2B5EF4-FFF2-40B4-BE49-F238E27FC236}">
+                <a16:creationId xmlns:a16="http://schemas.microsoft.com/office/drawing/2014/main" id="{16E6DC7F-79B6-9F94-1CEF-11E0F0627019}"/>
+              </a:ext>
+            </a:extLst>
+          </p:cNvPr>
           <p:cNvSpPr>
             <a:spLocks noGrp="1" noRot="1" noChangeAspect="1"/>
           </p:cNvSpPr>
@@ -839,7 +852,13 @@
       </p:sp>
       <p:sp>
         <p:nvSpPr>
-          <p:cNvPr id="3" name="슬라이드 노트 개체 틀 2"/>
+          <p:cNvPr id="3" name="슬라이드 노트 개체 틀 2">
+            <a:extLst>
+              <a:ext uri="{FF2B5EF4-FFF2-40B4-BE49-F238E27FC236}">
+                <a16:creationId xmlns:a16="http://schemas.microsoft.com/office/drawing/2014/main" id="{27D80BAB-8577-4879-6471-13E3CA1C6D2F}"/>
+              </a:ext>
+            </a:extLst>
+          </p:cNvPr>
           <p:cNvSpPr>
             <a:spLocks noGrp="1"/>
           </p:cNvSpPr>
@@ -858,7 +877,13 @@
       </p:sp>
       <p:sp>
         <p:nvSpPr>
-          <p:cNvPr id="4" name="슬라이드 번호 개체 틀 3"/>
+          <p:cNvPr id="4" name="슬라이드 번호 개체 틀 3">
+            <a:extLst>
+              <a:ext uri="{FF2B5EF4-FFF2-40B4-BE49-F238E27FC236}">
+                <a16:creationId xmlns:a16="http://schemas.microsoft.com/office/drawing/2014/main" id="{B7FB335B-13A1-54EA-24C0-C5799F384309}"/>
+              </a:ext>
+            </a:extLst>
+          </p:cNvPr>
           <p:cNvSpPr>
             <a:spLocks noGrp="1"/>
           </p:cNvSpPr>
@@ -883,7 +908,7 @@
     </p:spTree>
     <p:extLst>
       <p:ext uri="{BB962C8B-B14F-4D97-AF65-F5344CB8AC3E}">
-        <p14:creationId xmlns:p14="http://schemas.microsoft.com/office/powerpoint/2010/main" val="3948408493"/>
+        <p14:creationId xmlns:p14="http://schemas.microsoft.com/office/powerpoint/2010/main" val="2023948977"/>
       </p:ext>
     </p:extLst>
   </p:cSld>
@@ -968,6 +993,91 @@
     </p:spTree>
     <p:extLst>
       <p:ext uri="{BB962C8B-B14F-4D97-AF65-F5344CB8AC3E}">
+        <p14:creationId xmlns:p14="http://schemas.microsoft.com/office/powerpoint/2010/main" val="3948408493"/>
+      </p:ext>
+    </p:extLst>
+  </p:cSld>
+  <p:clrMapOvr>
+    <a:masterClrMapping/>
+  </p:clrMapOvr>
+</p:notes>
+</file>
+
+<file path=ppt/notesSlides/notesSlide12.xml><?xml version="1.0" encoding="utf-8"?>
+<p:notes xmlns:a="http://schemas.openxmlformats.org/drawingml/2006/main" xmlns:r="http://schemas.openxmlformats.org/officeDocument/2006/relationships" xmlns:p="http://schemas.openxmlformats.org/presentationml/2006/main">
+  <p:cSld>
+    <p:spTree>
+      <p:nvGrpSpPr>
+        <p:cNvPr id="1" name=""/>
+        <p:cNvGrpSpPr/>
+        <p:nvPr/>
+      </p:nvGrpSpPr>
+      <p:grpSpPr>
+        <a:xfrm>
+          <a:off x="0" y="0"/>
+          <a:ext cx="0" cy="0"/>
+          <a:chOff x="0" y="0"/>
+          <a:chExt cx="0" cy="0"/>
+        </a:xfrm>
+      </p:grpSpPr>
+      <p:sp>
+        <p:nvSpPr>
+          <p:cNvPr id="2" name="슬라이드 이미지 개체 틀 1"/>
+          <p:cNvSpPr>
+            <a:spLocks noGrp="1" noRot="1" noChangeAspect="1"/>
+          </p:cNvSpPr>
+          <p:nvPr>
+            <p:ph type="sldImg"/>
+          </p:nvPr>
+        </p:nvSpPr>
+        <p:spPr/>
+      </p:sp>
+      <p:sp>
+        <p:nvSpPr>
+          <p:cNvPr id="3" name="슬라이드 노트 개체 틀 2"/>
+          <p:cNvSpPr>
+            <a:spLocks noGrp="1"/>
+          </p:cNvSpPr>
+          <p:nvPr>
+            <p:ph type="body" idx="1"/>
+          </p:nvPr>
+        </p:nvSpPr>
+        <p:spPr/>
+        <p:txBody>
+          <a:bodyPr/>
+          <a:lstStyle/>
+          <a:p>
+            <a:endParaRPr lang="ko-KR" altLang="en-US" dirty="0"/>
+          </a:p>
+        </p:txBody>
+      </p:sp>
+      <p:sp>
+        <p:nvSpPr>
+          <p:cNvPr id="4" name="슬라이드 번호 개체 틀 3"/>
+          <p:cNvSpPr>
+            <a:spLocks noGrp="1"/>
+          </p:cNvSpPr>
+          <p:nvPr>
+            <p:ph type="sldNum" sz="quarter" idx="10"/>
+          </p:nvPr>
+        </p:nvSpPr>
+        <p:spPr/>
+        <p:txBody>
+          <a:bodyPr/>
+          <a:lstStyle/>
+          <a:p>
+            <a:pPr rtl="0"/>
+            <a:fld id="{5FB91549-43BF-425A-AF25-75262019208C}" type="slidenum">
+              <a:rPr lang="en-US" altLang="ko-KR" smtClean="0"/>
+              <a:t>12</a:t>
+            </a:fld>
+            <a:endParaRPr lang="ko-KR" altLang="en-US" dirty="0"/>
+          </a:p>
+        </p:txBody>
+      </p:sp>
+    </p:spTree>
+    <p:extLst>
+      <p:ext uri="{BB962C8B-B14F-4D97-AF65-F5344CB8AC3E}">
         <p14:creationId xmlns:p14="http://schemas.microsoft.com/office/powerpoint/2010/main" val="3014349002"/>
       </p:ext>
     </p:extLst>
@@ -978,7 +1088,7 @@
 </p:notes>
 </file>
 
-<file path=ppt/notesSlides/notesSlide12.xml><?xml version="1.0" encoding="utf-8"?>
+<file path=ppt/notesSlides/notesSlide13.xml><?xml version="1.0" encoding="utf-8"?>
 <p:notes xmlns:a="http://schemas.openxmlformats.org/drawingml/2006/main" xmlns:r="http://schemas.openxmlformats.org/officeDocument/2006/relationships" xmlns:p="http://schemas.openxmlformats.org/presentationml/2006/main">
   <p:cSld>
     <p:spTree>
@@ -1068,7 +1178,7 @@
             <a:pPr rtl="0"/>
             <a:fld id="{5FB91549-43BF-425A-AF25-75262019208C}" type="slidenum">
               <a:rPr lang="en-US" altLang="ko-KR" smtClean="0"/>
-              <a:t>12</a:t>
+              <a:t>13</a:t>
             </a:fld>
             <a:endParaRPr lang="ko-KR" altLang="en-US" dirty="0"/>
           </a:p>
@@ -1087,7 +1197,7 @@
 </p:notes>
 </file>
 
-<file path=ppt/notesSlides/notesSlide13.xml><?xml version="1.0" encoding="utf-8"?>
+<file path=ppt/notesSlides/notesSlide14.xml><?xml version="1.0" encoding="utf-8"?>
 <p:notes xmlns:a="http://schemas.openxmlformats.org/drawingml/2006/main" xmlns:r="http://schemas.openxmlformats.org/officeDocument/2006/relationships" xmlns:p="http://schemas.openxmlformats.org/presentationml/2006/main">
   <p:cSld>
     <p:spTree>
@@ -1153,7 +1263,7 @@
             <a:pPr rtl="0"/>
             <a:fld id="{5FB91549-43BF-425A-AF25-75262019208C}" type="slidenum">
               <a:rPr lang="en-US" altLang="ko-KR" smtClean="0"/>
-              <a:t>13</a:t>
+              <a:t>14</a:t>
             </a:fld>
             <a:endParaRPr lang="ko-KR" altLang="en-US" dirty="0"/>
           </a:p>
@@ -1172,7 +1282,7 @@
 </p:notes>
 </file>
 
-<file path=ppt/notesSlides/notesSlide14.xml><?xml version="1.0" encoding="utf-8"?>
+<file path=ppt/notesSlides/notesSlide15.xml><?xml version="1.0" encoding="utf-8"?>
 <p:notes xmlns:a="http://schemas.openxmlformats.org/drawingml/2006/main" xmlns:r="http://schemas.openxmlformats.org/officeDocument/2006/relationships" xmlns:p="http://schemas.openxmlformats.org/presentationml/2006/main">
   <p:cSld>
     <p:spTree>
@@ -1262,7 +1372,7 @@
             <a:pPr rtl="0"/>
             <a:fld id="{5FB91549-43BF-425A-AF25-75262019208C}" type="slidenum">
               <a:rPr lang="en-US" altLang="ko-KR" smtClean="0"/>
-              <a:t>14</a:t>
+              <a:t>15</a:t>
             </a:fld>
             <a:endParaRPr lang="ko-KR" altLang="en-US" dirty="0"/>
           </a:p>
@@ -1281,7 +1391,7 @@
 </p:notes>
 </file>
 
-<file path=ppt/notesSlides/notesSlide15.xml><?xml version="1.0" encoding="utf-8"?>
+<file path=ppt/notesSlides/notesSlide16.xml><?xml version="1.0" encoding="utf-8"?>
 <p:notes xmlns:a="http://schemas.openxmlformats.org/drawingml/2006/main" xmlns:r="http://schemas.openxmlformats.org/officeDocument/2006/relationships" xmlns:p="http://schemas.openxmlformats.org/presentationml/2006/main">
   <p:cSld>
     <p:spTree>
@@ -1371,7 +1481,7 @@
             <a:pPr rtl="0"/>
             <a:fld id="{5FB91549-43BF-425A-AF25-75262019208C}" type="slidenum">
               <a:rPr lang="en-US" altLang="ko-KR" smtClean="0"/>
-              <a:t>15</a:t>
+              <a:t>16</a:t>
             </a:fld>
             <a:endParaRPr lang="ko-KR" altLang="en-US" dirty="0"/>
           </a:p>
@@ -1390,7 +1500,7 @@
 </p:notes>
 </file>
 
-<file path=ppt/notesSlides/notesSlide16.xml><?xml version="1.0" encoding="utf-8"?>
+<file path=ppt/notesSlides/notesSlide17.xml><?xml version="1.0" encoding="utf-8"?>
 <p:notes xmlns:a="http://schemas.openxmlformats.org/drawingml/2006/main" xmlns:r="http://schemas.openxmlformats.org/officeDocument/2006/relationships" xmlns:p="http://schemas.openxmlformats.org/presentationml/2006/main">
   <p:cSld>
     <p:spTree>
@@ -1480,7 +1590,7 @@
             <a:pPr rtl="0"/>
             <a:fld id="{5FB91549-43BF-425A-AF25-75262019208C}" type="slidenum">
               <a:rPr lang="en-US" altLang="ko-KR" smtClean="0"/>
-              <a:t>16</a:t>
+              <a:t>17</a:t>
             </a:fld>
             <a:endParaRPr lang="ko-KR" altLang="en-US" dirty="0"/>
           </a:p>
@@ -1499,7 +1609,7 @@
 </p:notes>
 </file>
 
-<file path=ppt/notesSlides/notesSlide17.xml><?xml version="1.0" encoding="utf-8"?>
+<file path=ppt/notesSlides/notesSlide18.xml><?xml version="1.0" encoding="utf-8"?>
 <p:notes xmlns:a="http://schemas.openxmlformats.org/drawingml/2006/main" xmlns:r="http://schemas.openxmlformats.org/officeDocument/2006/relationships" xmlns:p="http://schemas.openxmlformats.org/presentationml/2006/main">
   <p:cSld>
     <p:spTree>
@@ -1589,7 +1699,7 @@
             <a:pPr rtl="0"/>
             <a:fld id="{5FB91549-43BF-425A-AF25-75262019208C}" type="slidenum">
               <a:rPr lang="en-US" altLang="ko-KR" smtClean="0"/>
-              <a:t>17</a:t>
+              <a:t>18</a:t>
             </a:fld>
             <a:endParaRPr lang="ko-KR" altLang="en-US" dirty="0"/>
           </a:p>
@@ -1608,7 +1718,7 @@
 </p:notes>
 </file>
 
-<file path=ppt/notesSlides/notesSlide18.xml><?xml version="1.0" encoding="utf-8"?>
+<file path=ppt/notesSlides/notesSlide19.xml><?xml version="1.0" encoding="utf-8"?>
 <p:notes xmlns:a="http://schemas.openxmlformats.org/drawingml/2006/main" xmlns:r="http://schemas.openxmlformats.org/officeDocument/2006/relationships" xmlns:p="http://schemas.openxmlformats.org/presentationml/2006/main">
   <p:cSld>
     <p:spTree>
@@ -1698,7 +1808,7 @@
             <a:pPr rtl="0"/>
             <a:fld id="{5FB91549-43BF-425A-AF25-75262019208C}" type="slidenum">
               <a:rPr lang="en-US" altLang="ko-KR" smtClean="0"/>
-              <a:t>18</a:t>
+              <a:t>19</a:t>
             </a:fld>
             <a:endParaRPr lang="ko-KR" altLang="en-US" dirty="0"/>
           </a:p>
@@ -1708,115 +1818,6 @@
     <p:extLst>
       <p:ext uri="{BB962C8B-B14F-4D97-AF65-F5344CB8AC3E}">
         <p14:creationId xmlns:p14="http://schemas.microsoft.com/office/powerpoint/2010/main" val="4224880478"/>
-      </p:ext>
-    </p:extLst>
-  </p:cSld>
-  <p:clrMapOvr>
-    <a:masterClrMapping/>
-  </p:clrMapOvr>
-</p:notes>
-</file>
-
-<file path=ppt/notesSlides/notesSlide19.xml><?xml version="1.0" encoding="utf-8"?>
-<p:notes xmlns:a="http://schemas.openxmlformats.org/drawingml/2006/main" xmlns:r="http://schemas.openxmlformats.org/officeDocument/2006/relationships" xmlns:p="http://schemas.openxmlformats.org/presentationml/2006/main">
-  <p:cSld>
-    <p:spTree>
-      <p:nvGrpSpPr>
-        <p:cNvPr id="1" name="">
-          <a:extLst>
-            <a:ext uri="{FF2B5EF4-FFF2-40B4-BE49-F238E27FC236}">
-              <a16:creationId xmlns:a16="http://schemas.microsoft.com/office/drawing/2014/main" id="{E7D29C17-5C0F-E7F4-9462-04D3462664FD}"/>
-            </a:ext>
-          </a:extLst>
-        </p:cNvPr>
-        <p:cNvGrpSpPr/>
-        <p:nvPr/>
-      </p:nvGrpSpPr>
-      <p:grpSpPr>
-        <a:xfrm>
-          <a:off x="0" y="0"/>
-          <a:ext cx="0" cy="0"/>
-          <a:chOff x="0" y="0"/>
-          <a:chExt cx="0" cy="0"/>
-        </a:xfrm>
-      </p:grpSpPr>
-      <p:sp>
-        <p:nvSpPr>
-          <p:cNvPr id="2" name="슬라이드 이미지 개체 틀 1">
-            <a:extLst>
-              <a:ext uri="{FF2B5EF4-FFF2-40B4-BE49-F238E27FC236}">
-                <a16:creationId xmlns:a16="http://schemas.microsoft.com/office/drawing/2014/main" id="{0B8DCC13-513F-1A84-7AEE-4EBE92B1B600}"/>
-              </a:ext>
-            </a:extLst>
-          </p:cNvPr>
-          <p:cNvSpPr>
-            <a:spLocks noGrp="1" noRot="1" noChangeAspect="1"/>
-          </p:cNvSpPr>
-          <p:nvPr>
-            <p:ph type="sldImg"/>
-          </p:nvPr>
-        </p:nvSpPr>
-        <p:spPr/>
-      </p:sp>
-      <p:sp>
-        <p:nvSpPr>
-          <p:cNvPr id="3" name="슬라이드 노트 개체 틀 2">
-            <a:extLst>
-              <a:ext uri="{FF2B5EF4-FFF2-40B4-BE49-F238E27FC236}">
-                <a16:creationId xmlns:a16="http://schemas.microsoft.com/office/drawing/2014/main" id="{8B5F96C1-401F-6F83-8599-62E6E62FDD96}"/>
-              </a:ext>
-            </a:extLst>
-          </p:cNvPr>
-          <p:cNvSpPr>
-            <a:spLocks noGrp="1"/>
-          </p:cNvSpPr>
-          <p:nvPr>
-            <p:ph type="body" idx="1"/>
-          </p:nvPr>
-        </p:nvSpPr>
-        <p:spPr/>
-        <p:txBody>
-          <a:bodyPr/>
-          <a:lstStyle/>
-          <a:p>
-            <a:endParaRPr lang="ko-KR" altLang="en-US" dirty="0"/>
-          </a:p>
-        </p:txBody>
-      </p:sp>
-      <p:sp>
-        <p:nvSpPr>
-          <p:cNvPr id="4" name="슬라이드 번호 개체 틀 3">
-            <a:extLst>
-              <a:ext uri="{FF2B5EF4-FFF2-40B4-BE49-F238E27FC236}">
-                <a16:creationId xmlns:a16="http://schemas.microsoft.com/office/drawing/2014/main" id="{F1E3BBEA-7162-4DD7-8CCF-56BBB8CFDD38}"/>
-              </a:ext>
-            </a:extLst>
-          </p:cNvPr>
-          <p:cNvSpPr>
-            <a:spLocks noGrp="1"/>
-          </p:cNvSpPr>
-          <p:nvPr>
-            <p:ph type="sldNum" sz="quarter" idx="10"/>
-          </p:nvPr>
-        </p:nvSpPr>
-        <p:spPr/>
-        <p:txBody>
-          <a:bodyPr/>
-          <a:lstStyle/>
-          <a:p>
-            <a:pPr rtl="0"/>
-            <a:fld id="{5FB91549-43BF-425A-AF25-75262019208C}" type="slidenum">
-              <a:rPr lang="en-US" altLang="ko-KR" smtClean="0"/>
-              <a:t>19</a:t>
-            </a:fld>
-            <a:endParaRPr lang="ko-KR" altLang="en-US" dirty="0"/>
-          </a:p>
-        </p:txBody>
-      </p:sp>
-    </p:spTree>
-    <p:extLst>
-      <p:ext uri="{BB962C8B-B14F-4D97-AF65-F5344CB8AC3E}">
-        <p14:creationId xmlns:p14="http://schemas.microsoft.com/office/powerpoint/2010/main" val="3211055714"/>
       </p:ext>
     </p:extLst>
   </p:cSld>
@@ -1940,6 +1941,115 @@
   <p:cSld>
     <p:spTree>
       <p:nvGrpSpPr>
+        <p:cNvPr id="1" name="">
+          <a:extLst>
+            <a:ext uri="{FF2B5EF4-FFF2-40B4-BE49-F238E27FC236}">
+              <a16:creationId xmlns:a16="http://schemas.microsoft.com/office/drawing/2014/main" id="{E7D29C17-5C0F-E7F4-9462-04D3462664FD}"/>
+            </a:ext>
+          </a:extLst>
+        </p:cNvPr>
+        <p:cNvGrpSpPr/>
+        <p:nvPr/>
+      </p:nvGrpSpPr>
+      <p:grpSpPr>
+        <a:xfrm>
+          <a:off x="0" y="0"/>
+          <a:ext cx="0" cy="0"/>
+          <a:chOff x="0" y="0"/>
+          <a:chExt cx="0" cy="0"/>
+        </a:xfrm>
+      </p:grpSpPr>
+      <p:sp>
+        <p:nvSpPr>
+          <p:cNvPr id="2" name="슬라이드 이미지 개체 틀 1">
+            <a:extLst>
+              <a:ext uri="{FF2B5EF4-FFF2-40B4-BE49-F238E27FC236}">
+                <a16:creationId xmlns:a16="http://schemas.microsoft.com/office/drawing/2014/main" id="{0B8DCC13-513F-1A84-7AEE-4EBE92B1B600}"/>
+              </a:ext>
+            </a:extLst>
+          </p:cNvPr>
+          <p:cNvSpPr>
+            <a:spLocks noGrp="1" noRot="1" noChangeAspect="1"/>
+          </p:cNvSpPr>
+          <p:nvPr>
+            <p:ph type="sldImg"/>
+          </p:nvPr>
+        </p:nvSpPr>
+        <p:spPr/>
+      </p:sp>
+      <p:sp>
+        <p:nvSpPr>
+          <p:cNvPr id="3" name="슬라이드 노트 개체 틀 2">
+            <a:extLst>
+              <a:ext uri="{FF2B5EF4-FFF2-40B4-BE49-F238E27FC236}">
+                <a16:creationId xmlns:a16="http://schemas.microsoft.com/office/drawing/2014/main" id="{8B5F96C1-401F-6F83-8599-62E6E62FDD96}"/>
+              </a:ext>
+            </a:extLst>
+          </p:cNvPr>
+          <p:cNvSpPr>
+            <a:spLocks noGrp="1"/>
+          </p:cNvSpPr>
+          <p:nvPr>
+            <p:ph type="body" idx="1"/>
+          </p:nvPr>
+        </p:nvSpPr>
+        <p:spPr/>
+        <p:txBody>
+          <a:bodyPr/>
+          <a:lstStyle/>
+          <a:p>
+            <a:endParaRPr lang="ko-KR" altLang="en-US" dirty="0"/>
+          </a:p>
+        </p:txBody>
+      </p:sp>
+      <p:sp>
+        <p:nvSpPr>
+          <p:cNvPr id="4" name="슬라이드 번호 개체 틀 3">
+            <a:extLst>
+              <a:ext uri="{FF2B5EF4-FFF2-40B4-BE49-F238E27FC236}">
+                <a16:creationId xmlns:a16="http://schemas.microsoft.com/office/drawing/2014/main" id="{F1E3BBEA-7162-4DD7-8CCF-56BBB8CFDD38}"/>
+              </a:ext>
+            </a:extLst>
+          </p:cNvPr>
+          <p:cNvSpPr>
+            <a:spLocks noGrp="1"/>
+          </p:cNvSpPr>
+          <p:nvPr>
+            <p:ph type="sldNum" sz="quarter" idx="10"/>
+          </p:nvPr>
+        </p:nvSpPr>
+        <p:spPr/>
+        <p:txBody>
+          <a:bodyPr/>
+          <a:lstStyle/>
+          <a:p>
+            <a:pPr rtl="0"/>
+            <a:fld id="{5FB91549-43BF-425A-AF25-75262019208C}" type="slidenum">
+              <a:rPr lang="en-US" altLang="ko-KR" smtClean="0"/>
+              <a:t>20</a:t>
+            </a:fld>
+            <a:endParaRPr lang="ko-KR" altLang="en-US" dirty="0"/>
+          </a:p>
+        </p:txBody>
+      </p:sp>
+    </p:spTree>
+    <p:extLst>
+      <p:ext uri="{BB962C8B-B14F-4D97-AF65-F5344CB8AC3E}">
+        <p14:creationId xmlns:p14="http://schemas.microsoft.com/office/powerpoint/2010/main" val="3211055714"/>
+      </p:ext>
+    </p:extLst>
+  </p:cSld>
+  <p:clrMapOvr>
+    <a:masterClrMapping/>
+  </p:clrMapOvr>
+</p:notes>
+</file>
+
+<file path=ppt/notesSlides/notesSlide21.xml><?xml version="1.0" encoding="utf-8"?>
+<p:notes xmlns:a="http://schemas.openxmlformats.org/drawingml/2006/main" xmlns:r="http://schemas.openxmlformats.org/officeDocument/2006/relationships" xmlns:p="http://schemas.openxmlformats.org/presentationml/2006/main">
+  <p:cSld>
+    <p:spTree>
+      <p:nvGrpSpPr>
         <p:cNvPr id="1" name=""/>
         <p:cNvGrpSpPr/>
         <p:nvPr/>
@@ -2001,7 +2111,7 @@
             <a:pPr rtl="0"/>
             <a:fld id="{5FB91549-43BF-425A-AF25-75262019208C}" type="slidenum">
               <a:rPr lang="en-US" altLang="ko-KR" smtClean="0"/>
-              <a:t>20</a:t>
+              <a:t>21</a:t>
             </a:fld>
             <a:endParaRPr lang="ko-KR" altLang="en-US" dirty="0"/>
           </a:p>
@@ -2020,7 +2130,7 @@
 </p:notes>
 </file>
 
-<file path=ppt/notesSlides/notesSlide21.xml><?xml version="1.0" encoding="utf-8"?>
+<file path=ppt/notesSlides/notesSlide22.xml><?xml version="1.0" encoding="utf-8"?>
 <p:notes xmlns:a="http://schemas.openxmlformats.org/drawingml/2006/main" xmlns:r="http://schemas.openxmlformats.org/officeDocument/2006/relationships" xmlns:p="http://schemas.openxmlformats.org/presentationml/2006/main">
   <p:cSld>
     <p:spTree>
@@ -2110,7 +2220,7 @@
             <a:pPr rtl="0"/>
             <a:fld id="{5FB91549-43BF-425A-AF25-75262019208C}" type="slidenum">
               <a:rPr lang="en-US" altLang="ko-KR" smtClean="0"/>
-              <a:t>21</a:t>
+              <a:t>22</a:t>
             </a:fld>
             <a:endParaRPr lang="ko-KR" altLang="en-US" dirty="0"/>
           </a:p>
@@ -2120,91 +2230,6 @@
     <p:extLst>
       <p:ext uri="{BB962C8B-B14F-4D97-AF65-F5344CB8AC3E}">
         <p14:creationId xmlns:p14="http://schemas.microsoft.com/office/powerpoint/2010/main" val="3331964061"/>
-      </p:ext>
-    </p:extLst>
-  </p:cSld>
-  <p:clrMapOvr>
-    <a:masterClrMapping/>
-  </p:clrMapOvr>
-</p:notes>
-</file>
-
-<file path=ppt/notesSlides/notesSlide22.xml><?xml version="1.0" encoding="utf-8"?>
-<p:notes xmlns:a="http://schemas.openxmlformats.org/drawingml/2006/main" xmlns:r="http://schemas.openxmlformats.org/officeDocument/2006/relationships" xmlns:p="http://schemas.openxmlformats.org/presentationml/2006/main">
-  <p:cSld>
-    <p:spTree>
-      <p:nvGrpSpPr>
-        <p:cNvPr id="1" name=""/>
-        <p:cNvGrpSpPr/>
-        <p:nvPr/>
-      </p:nvGrpSpPr>
-      <p:grpSpPr>
-        <a:xfrm>
-          <a:off x="0" y="0"/>
-          <a:ext cx="0" cy="0"/>
-          <a:chOff x="0" y="0"/>
-          <a:chExt cx="0" cy="0"/>
-        </a:xfrm>
-      </p:grpSpPr>
-      <p:sp>
-        <p:nvSpPr>
-          <p:cNvPr id="2" name="슬라이드 이미지 개체 틀 1"/>
-          <p:cNvSpPr>
-            <a:spLocks noGrp="1" noRot="1" noChangeAspect="1"/>
-          </p:cNvSpPr>
-          <p:nvPr>
-            <p:ph type="sldImg"/>
-          </p:nvPr>
-        </p:nvSpPr>
-        <p:spPr/>
-      </p:sp>
-      <p:sp>
-        <p:nvSpPr>
-          <p:cNvPr id="3" name="슬라이드 노트 개체 틀 2"/>
-          <p:cNvSpPr>
-            <a:spLocks noGrp="1"/>
-          </p:cNvSpPr>
-          <p:nvPr>
-            <p:ph type="body" idx="1"/>
-          </p:nvPr>
-        </p:nvSpPr>
-        <p:spPr/>
-        <p:txBody>
-          <a:bodyPr/>
-          <a:lstStyle/>
-          <a:p>
-            <a:endParaRPr lang="ko-KR" altLang="en-US" dirty="0"/>
-          </a:p>
-        </p:txBody>
-      </p:sp>
-      <p:sp>
-        <p:nvSpPr>
-          <p:cNvPr id="4" name="슬라이드 번호 개체 틀 3"/>
-          <p:cNvSpPr>
-            <a:spLocks noGrp="1"/>
-          </p:cNvSpPr>
-          <p:nvPr>
-            <p:ph type="sldNum" sz="quarter" idx="10"/>
-          </p:nvPr>
-        </p:nvSpPr>
-        <p:spPr/>
-        <p:txBody>
-          <a:bodyPr/>
-          <a:lstStyle/>
-          <a:p>
-            <a:pPr rtl="0"/>
-            <a:fld id="{5FB91549-43BF-425A-AF25-75262019208C}" type="slidenum">
-              <a:rPr lang="en-US" altLang="ko-KR" smtClean="0"/>
-              <a:t>22</a:t>
-            </a:fld>
-            <a:endParaRPr lang="ko-KR" altLang="en-US" dirty="0"/>
-          </a:p>
-        </p:txBody>
-      </p:sp>
-    </p:spTree>
-    <p:extLst>
-      <p:ext uri="{BB962C8B-B14F-4D97-AF65-F5344CB8AC3E}">
-        <p14:creationId xmlns:p14="http://schemas.microsoft.com/office/powerpoint/2010/main" val="999459255"/>
       </p:ext>
     </p:extLst>
   </p:cSld>
@@ -2289,6 +2314,91 @@
     </p:spTree>
     <p:extLst>
       <p:ext uri="{BB962C8B-B14F-4D97-AF65-F5344CB8AC3E}">
+        <p14:creationId xmlns:p14="http://schemas.microsoft.com/office/powerpoint/2010/main" val="999459255"/>
+      </p:ext>
+    </p:extLst>
+  </p:cSld>
+  <p:clrMapOvr>
+    <a:masterClrMapping/>
+  </p:clrMapOvr>
+</p:notes>
+</file>
+
+<file path=ppt/notesSlides/notesSlide24.xml><?xml version="1.0" encoding="utf-8"?>
+<p:notes xmlns:a="http://schemas.openxmlformats.org/drawingml/2006/main" xmlns:r="http://schemas.openxmlformats.org/officeDocument/2006/relationships" xmlns:p="http://schemas.openxmlformats.org/presentationml/2006/main">
+  <p:cSld>
+    <p:spTree>
+      <p:nvGrpSpPr>
+        <p:cNvPr id="1" name=""/>
+        <p:cNvGrpSpPr/>
+        <p:nvPr/>
+      </p:nvGrpSpPr>
+      <p:grpSpPr>
+        <a:xfrm>
+          <a:off x="0" y="0"/>
+          <a:ext cx="0" cy="0"/>
+          <a:chOff x="0" y="0"/>
+          <a:chExt cx="0" cy="0"/>
+        </a:xfrm>
+      </p:grpSpPr>
+      <p:sp>
+        <p:nvSpPr>
+          <p:cNvPr id="2" name="슬라이드 이미지 개체 틀 1"/>
+          <p:cNvSpPr>
+            <a:spLocks noGrp="1" noRot="1" noChangeAspect="1"/>
+          </p:cNvSpPr>
+          <p:nvPr>
+            <p:ph type="sldImg"/>
+          </p:nvPr>
+        </p:nvSpPr>
+        <p:spPr/>
+      </p:sp>
+      <p:sp>
+        <p:nvSpPr>
+          <p:cNvPr id="3" name="슬라이드 노트 개체 틀 2"/>
+          <p:cNvSpPr>
+            <a:spLocks noGrp="1"/>
+          </p:cNvSpPr>
+          <p:nvPr>
+            <p:ph type="body" idx="1"/>
+          </p:nvPr>
+        </p:nvSpPr>
+        <p:spPr/>
+        <p:txBody>
+          <a:bodyPr/>
+          <a:lstStyle/>
+          <a:p>
+            <a:endParaRPr lang="ko-KR" altLang="en-US" dirty="0"/>
+          </a:p>
+        </p:txBody>
+      </p:sp>
+      <p:sp>
+        <p:nvSpPr>
+          <p:cNvPr id="4" name="슬라이드 번호 개체 틀 3"/>
+          <p:cNvSpPr>
+            <a:spLocks noGrp="1"/>
+          </p:cNvSpPr>
+          <p:nvPr>
+            <p:ph type="sldNum" sz="quarter" idx="10"/>
+          </p:nvPr>
+        </p:nvSpPr>
+        <p:spPr/>
+        <p:txBody>
+          <a:bodyPr/>
+          <a:lstStyle/>
+          <a:p>
+            <a:pPr rtl="0"/>
+            <a:fld id="{5FB91549-43BF-425A-AF25-75262019208C}" type="slidenum">
+              <a:rPr lang="en-US" altLang="ko-KR" smtClean="0"/>
+              <a:t>24</a:t>
+            </a:fld>
+            <a:endParaRPr lang="ko-KR" altLang="en-US" dirty="0"/>
+          </a:p>
+        </p:txBody>
+      </p:sp>
+    </p:spTree>
+    <p:extLst>
+      <p:ext uri="{BB962C8B-B14F-4D97-AF65-F5344CB8AC3E}">
         <p14:creationId xmlns:p14="http://schemas.microsoft.com/office/powerpoint/2010/main" val="1195164198"/>
       </p:ext>
     </p:extLst>
@@ -2299,7 +2409,7 @@
 </p:notes>
 </file>
 
-<file path=ppt/notesSlides/notesSlide24.xml><?xml version="1.0" encoding="utf-8"?>
+<file path=ppt/notesSlides/notesSlide25.xml><?xml version="1.0" encoding="utf-8"?>
 <p:notes xmlns:a="http://schemas.openxmlformats.org/drawingml/2006/main" xmlns:r="http://schemas.openxmlformats.org/officeDocument/2006/relationships" xmlns:p="http://schemas.openxmlformats.org/presentationml/2006/main">
   <p:cSld>
     <p:spTree>
@@ -2389,7 +2499,7 @@
             <a:pPr rtl="0"/>
             <a:fld id="{5FB91549-43BF-425A-AF25-75262019208C}" type="slidenum">
               <a:rPr lang="en-US" altLang="ko-KR" smtClean="0"/>
-              <a:t>24</a:t>
+              <a:t>25</a:t>
             </a:fld>
             <a:endParaRPr lang="ko-KR" altLang="en-US" dirty="0"/>
           </a:p>
@@ -2408,7 +2518,7 @@
 </p:notes>
 </file>
 
-<file path=ppt/notesSlides/notesSlide25.xml><?xml version="1.0" encoding="utf-8"?>
+<file path=ppt/notesSlides/notesSlide26.xml><?xml version="1.0" encoding="utf-8"?>
 <p:notes xmlns:a="http://schemas.openxmlformats.org/drawingml/2006/main" xmlns:r="http://schemas.openxmlformats.org/officeDocument/2006/relationships" xmlns:p="http://schemas.openxmlformats.org/presentationml/2006/main">
   <p:cSld>
     <p:spTree>
@@ -2498,7 +2608,7 @@
             <a:pPr rtl="0"/>
             <a:fld id="{5FB91549-43BF-425A-AF25-75262019208C}" type="slidenum">
               <a:rPr lang="en-US" altLang="ko-KR" smtClean="0"/>
-              <a:t>25</a:t>
+              <a:t>26</a:t>
             </a:fld>
             <a:endParaRPr lang="ko-KR" altLang="en-US" dirty="0"/>
           </a:p>
@@ -2517,7 +2627,7 @@
 </p:notes>
 </file>
 
-<file path=ppt/notesSlides/notesSlide26.xml><?xml version="1.0" encoding="utf-8"?>
+<file path=ppt/notesSlides/notesSlide27.xml><?xml version="1.0" encoding="utf-8"?>
 <p:notes xmlns:a="http://schemas.openxmlformats.org/drawingml/2006/main" xmlns:r="http://schemas.openxmlformats.org/officeDocument/2006/relationships" xmlns:p="http://schemas.openxmlformats.org/presentationml/2006/main">
   <p:cSld>
     <p:spTree>
@@ -2607,7 +2717,7 @@
             <a:pPr rtl="0"/>
             <a:fld id="{5FB91549-43BF-425A-AF25-75262019208C}" type="slidenum">
               <a:rPr lang="en-US" altLang="ko-KR" smtClean="0"/>
-              <a:t>26</a:t>
+              <a:t>27</a:t>
             </a:fld>
             <a:endParaRPr lang="ko-KR" altLang="en-US" dirty="0"/>
           </a:p>
@@ -2626,7 +2736,7 @@
 </p:notes>
 </file>
 
-<file path=ppt/notesSlides/notesSlide27.xml><?xml version="1.0" encoding="utf-8"?>
+<file path=ppt/notesSlides/notesSlide28.xml><?xml version="1.0" encoding="utf-8"?>
 <p:notes xmlns:a="http://schemas.openxmlformats.org/drawingml/2006/main" xmlns:r="http://schemas.openxmlformats.org/officeDocument/2006/relationships" xmlns:p="http://schemas.openxmlformats.org/presentationml/2006/main">
   <p:cSld>
     <p:spTree>
@@ -2716,7 +2826,7 @@
             <a:pPr rtl="0"/>
             <a:fld id="{5FB91549-43BF-425A-AF25-75262019208C}" type="slidenum">
               <a:rPr lang="en-US" altLang="ko-KR" smtClean="0"/>
-              <a:t>27</a:t>
+              <a:t>28</a:t>
             </a:fld>
             <a:endParaRPr lang="ko-KR" altLang="en-US" dirty="0"/>
           </a:p>
@@ -2828,6 +2938,115 @@
         <p:cNvPr id="1" name="">
           <a:extLst>
             <a:ext uri="{FF2B5EF4-FFF2-40B4-BE49-F238E27FC236}">
+              <a16:creationId xmlns:a16="http://schemas.microsoft.com/office/drawing/2014/main" id="{DDB50CF9-505A-BD46-7C25-C941A84CA985}"/>
+            </a:ext>
+          </a:extLst>
+        </p:cNvPr>
+        <p:cNvGrpSpPr/>
+        <p:nvPr/>
+      </p:nvGrpSpPr>
+      <p:grpSpPr>
+        <a:xfrm>
+          <a:off x="0" y="0"/>
+          <a:ext cx="0" cy="0"/>
+          <a:chOff x="0" y="0"/>
+          <a:chExt cx="0" cy="0"/>
+        </a:xfrm>
+      </p:grpSpPr>
+      <p:sp>
+        <p:nvSpPr>
+          <p:cNvPr id="2" name="슬라이드 이미지 개체 틀 1">
+            <a:extLst>
+              <a:ext uri="{FF2B5EF4-FFF2-40B4-BE49-F238E27FC236}">
+                <a16:creationId xmlns:a16="http://schemas.microsoft.com/office/drawing/2014/main" id="{510BDB87-CDA9-26F4-52D5-6FBB4D183B81}"/>
+              </a:ext>
+            </a:extLst>
+          </p:cNvPr>
+          <p:cNvSpPr>
+            <a:spLocks noGrp="1" noRot="1" noChangeAspect="1"/>
+          </p:cNvSpPr>
+          <p:nvPr>
+            <p:ph type="sldImg"/>
+          </p:nvPr>
+        </p:nvSpPr>
+        <p:spPr/>
+      </p:sp>
+      <p:sp>
+        <p:nvSpPr>
+          <p:cNvPr id="3" name="슬라이드 노트 개체 틀 2">
+            <a:extLst>
+              <a:ext uri="{FF2B5EF4-FFF2-40B4-BE49-F238E27FC236}">
+                <a16:creationId xmlns:a16="http://schemas.microsoft.com/office/drawing/2014/main" id="{175FD80D-7F18-B053-608A-27694AFDBF1C}"/>
+              </a:ext>
+            </a:extLst>
+          </p:cNvPr>
+          <p:cNvSpPr>
+            <a:spLocks noGrp="1"/>
+          </p:cNvSpPr>
+          <p:nvPr>
+            <p:ph type="body" idx="1"/>
+          </p:nvPr>
+        </p:nvSpPr>
+        <p:spPr/>
+        <p:txBody>
+          <a:bodyPr/>
+          <a:lstStyle/>
+          <a:p>
+            <a:endParaRPr lang="ko-KR" altLang="en-US" dirty="0"/>
+          </a:p>
+        </p:txBody>
+      </p:sp>
+      <p:sp>
+        <p:nvSpPr>
+          <p:cNvPr id="4" name="슬라이드 번호 개체 틀 3">
+            <a:extLst>
+              <a:ext uri="{FF2B5EF4-FFF2-40B4-BE49-F238E27FC236}">
+                <a16:creationId xmlns:a16="http://schemas.microsoft.com/office/drawing/2014/main" id="{10E98CA5-BD29-99CC-EE13-0A29D5389A4F}"/>
+              </a:ext>
+            </a:extLst>
+          </p:cNvPr>
+          <p:cNvSpPr>
+            <a:spLocks noGrp="1"/>
+          </p:cNvSpPr>
+          <p:nvPr>
+            <p:ph type="sldNum" sz="quarter" idx="10"/>
+          </p:nvPr>
+        </p:nvSpPr>
+        <p:spPr/>
+        <p:txBody>
+          <a:bodyPr/>
+          <a:lstStyle/>
+          <a:p>
+            <a:pPr rtl="0"/>
+            <a:fld id="{5FB91549-43BF-425A-AF25-75262019208C}" type="slidenum">
+              <a:rPr lang="en-US" altLang="ko-KR" smtClean="0"/>
+              <a:t>4</a:t>
+            </a:fld>
+            <a:endParaRPr lang="ko-KR" altLang="en-US" dirty="0"/>
+          </a:p>
+        </p:txBody>
+      </p:sp>
+    </p:spTree>
+    <p:extLst>
+      <p:ext uri="{BB962C8B-B14F-4D97-AF65-F5344CB8AC3E}">
+        <p14:creationId xmlns:p14="http://schemas.microsoft.com/office/powerpoint/2010/main" val="3733875843"/>
+      </p:ext>
+    </p:extLst>
+  </p:cSld>
+  <p:clrMapOvr>
+    <a:masterClrMapping/>
+  </p:clrMapOvr>
+</p:notes>
+</file>
+
+<file path=ppt/notesSlides/notesSlide5.xml><?xml version="1.0" encoding="utf-8"?>
+<p:notes xmlns:a="http://schemas.openxmlformats.org/drawingml/2006/main" xmlns:r="http://schemas.openxmlformats.org/officeDocument/2006/relationships" xmlns:p="http://schemas.openxmlformats.org/presentationml/2006/main">
+  <p:cSld>
+    <p:spTree>
+      <p:nvGrpSpPr>
+        <p:cNvPr id="1" name="">
+          <a:extLst>
+            <a:ext uri="{FF2B5EF4-FFF2-40B4-BE49-F238E27FC236}">
               <a16:creationId xmlns:a16="http://schemas.microsoft.com/office/drawing/2014/main" id="{1E324254-F259-0186-8184-8C24ABFAD3FA}"/>
             </a:ext>
           </a:extLst>
@@ -2910,7 +3129,7 @@
             <a:pPr rtl="0"/>
             <a:fld id="{5FB91549-43BF-425A-AF25-75262019208C}" type="slidenum">
               <a:rPr lang="en-US" altLang="ko-KR" smtClean="0"/>
-              <a:t>4</a:t>
+              <a:t>5</a:t>
             </a:fld>
             <a:endParaRPr lang="ko-KR" altLang="en-US" dirty="0"/>
           </a:p>
@@ -2920,91 +3139,6 @@
     <p:extLst>
       <p:ext uri="{BB962C8B-B14F-4D97-AF65-F5344CB8AC3E}">
         <p14:creationId xmlns:p14="http://schemas.microsoft.com/office/powerpoint/2010/main" val="2551433410"/>
-      </p:ext>
-    </p:extLst>
-  </p:cSld>
-  <p:clrMapOvr>
-    <a:masterClrMapping/>
-  </p:clrMapOvr>
-</p:notes>
-</file>
-
-<file path=ppt/notesSlides/notesSlide5.xml><?xml version="1.0" encoding="utf-8"?>
-<p:notes xmlns:a="http://schemas.openxmlformats.org/drawingml/2006/main" xmlns:r="http://schemas.openxmlformats.org/officeDocument/2006/relationships" xmlns:p="http://schemas.openxmlformats.org/presentationml/2006/main">
-  <p:cSld>
-    <p:spTree>
-      <p:nvGrpSpPr>
-        <p:cNvPr id="1" name=""/>
-        <p:cNvGrpSpPr/>
-        <p:nvPr/>
-      </p:nvGrpSpPr>
-      <p:grpSpPr>
-        <a:xfrm>
-          <a:off x="0" y="0"/>
-          <a:ext cx="0" cy="0"/>
-          <a:chOff x="0" y="0"/>
-          <a:chExt cx="0" cy="0"/>
-        </a:xfrm>
-      </p:grpSpPr>
-      <p:sp>
-        <p:nvSpPr>
-          <p:cNvPr id="2" name="슬라이드 이미지 개체 틀 1"/>
-          <p:cNvSpPr>
-            <a:spLocks noGrp="1" noRot="1" noChangeAspect="1"/>
-          </p:cNvSpPr>
-          <p:nvPr>
-            <p:ph type="sldImg"/>
-          </p:nvPr>
-        </p:nvSpPr>
-        <p:spPr/>
-      </p:sp>
-      <p:sp>
-        <p:nvSpPr>
-          <p:cNvPr id="3" name="슬라이드 노트 개체 틀 2"/>
-          <p:cNvSpPr>
-            <a:spLocks noGrp="1"/>
-          </p:cNvSpPr>
-          <p:nvPr>
-            <p:ph type="body" idx="1"/>
-          </p:nvPr>
-        </p:nvSpPr>
-        <p:spPr/>
-        <p:txBody>
-          <a:bodyPr/>
-          <a:lstStyle/>
-          <a:p>
-            <a:endParaRPr lang="ko-KR" altLang="en-US" dirty="0"/>
-          </a:p>
-        </p:txBody>
-      </p:sp>
-      <p:sp>
-        <p:nvSpPr>
-          <p:cNvPr id="4" name="슬라이드 번호 개체 틀 3"/>
-          <p:cNvSpPr>
-            <a:spLocks noGrp="1"/>
-          </p:cNvSpPr>
-          <p:nvPr>
-            <p:ph type="sldNum" sz="quarter" idx="10"/>
-          </p:nvPr>
-        </p:nvSpPr>
-        <p:spPr/>
-        <p:txBody>
-          <a:bodyPr/>
-          <a:lstStyle/>
-          <a:p>
-            <a:pPr rtl="0"/>
-            <a:fld id="{5FB91549-43BF-425A-AF25-75262019208C}" type="slidenum">
-              <a:rPr lang="en-US" altLang="ko-KR" smtClean="0"/>
-              <a:t>5</a:t>
-            </a:fld>
-            <a:endParaRPr lang="ko-KR" altLang="en-US" dirty="0"/>
-          </a:p>
-        </p:txBody>
-      </p:sp>
-    </p:spTree>
-    <p:extLst>
-      <p:ext uri="{BB962C8B-B14F-4D97-AF65-F5344CB8AC3E}">
-        <p14:creationId xmlns:p14="http://schemas.microsoft.com/office/powerpoint/2010/main" val="1746534141"/>
       </p:ext>
     </p:extLst>
   </p:cSld>
@@ -3089,6 +3223,91 @@
     </p:spTree>
     <p:extLst>
       <p:ext uri="{BB962C8B-B14F-4D97-AF65-F5344CB8AC3E}">
+        <p14:creationId xmlns:p14="http://schemas.microsoft.com/office/powerpoint/2010/main" val="1746534141"/>
+      </p:ext>
+    </p:extLst>
+  </p:cSld>
+  <p:clrMapOvr>
+    <a:masterClrMapping/>
+  </p:clrMapOvr>
+</p:notes>
+</file>
+
+<file path=ppt/notesSlides/notesSlide7.xml><?xml version="1.0" encoding="utf-8"?>
+<p:notes xmlns:a="http://schemas.openxmlformats.org/drawingml/2006/main" xmlns:r="http://schemas.openxmlformats.org/officeDocument/2006/relationships" xmlns:p="http://schemas.openxmlformats.org/presentationml/2006/main">
+  <p:cSld>
+    <p:spTree>
+      <p:nvGrpSpPr>
+        <p:cNvPr id="1" name=""/>
+        <p:cNvGrpSpPr/>
+        <p:nvPr/>
+      </p:nvGrpSpPr>
+      <p:grpSpPr>
+        <a:xfrm>
+          <a:off x="0" y="0"/>
+          <a:ext cx="0" cy="0"/>
+          <a:chOff x="0" y="0"/>
+          <a:chExt cx="0" cy="0"/>
+        </a:xfrm>
+      </p:grpSpPr>
+      <p:sp>
+        <p:nvSpPr>
+          <p:cNvPr id="2" name="슬라이드 이미지 개체 틀 1"/>
+          <p:cNvSpPr>
+            <a:spLocks noGrp="1" noRot="1" noChangeAspect="1"/>
+          </p:cNvSpPr>
+          <p:nvPr>
+            <p:ph type="sldImg"/>
+          </p:nvPr>
+        </p:nvSpPr>
+        <p:spPr/>
+      </p:sp>
+      <p:sp>
+        <p:nvSpPr>
+          <p:cNvPr id="3" name="슬라이드 노트 개체 틀 2"/>
+          <p:cNvSpPr>
+            <a:spLocks noGrp="1"/>
+          </p:cNvSpPr>
+          <p:nvPr>
+            <p:ph type="body" idx="1"/>
+          </p:nvPr>
+        </p:nvSpPr>
+        <p:spPr/>
+        <p:txBody>
+          <a:bodyPr/>
+          <a:lstStyle/>
+          <a:p>
+            <a:endParaRPr lang="ko-KR" altLang="en-US" dirty="0"/>
+          </a:p>
+        </p:txBody>
+      </p:sp>
+      <p:sp>
+        <p:nvSpPr>
+          <p:cNvPr id="4" name="슬라이드 번호 개체 틀 3"/>
+          <p:cNvSpPr>
+            <a:spLocks noGrp="1"/>
+          </p:cNvSpPr>
+          <p:nvPr>
+            <p:ph type="sldNum" sz="quarter" idx="10"/>
+          </p:nvPr>
+        </p:nvSpPr>
+        <p:spPr/>
+        <p:txBody>
+          <a:bodyPr/>
+          <a:lstStyle/>
+          <a:p>
+            <a:pPr rtl="0"/>
+            <a:fld id="{5FB91549-43BF-425A-AF25-75262019208C}" type="slidenum">
+              <a:rPr lang="en-US" altLang="ko-KR" smtClean="0"/>
+              <a:t>7</a:t>
+            </a:fld>
+            <a:endParaRPr lang="ko-KR" altLang="en-US" dirty="0"/>
+          </a:p>
+        </p:txBody>
+      </p:sp>
+    </p:spTree>
+    <p:extLst>
+      <p:ext uri="{BB962C8B-B14F-4D97-AF65-F5344CB8AC3E}">
         <p14:creationId xmlns:p14="http://schemas.microsoft.com/office/powerpoint/2010/main" val="151191140"/>
       </p:ext>
     </p:extLst>
@@ -3099,7 +3318,7 @@
 </p:notes>
 </file>
 
-<file path=ppt/notesSlides/notesSlide7.xml><?xml version="1.0" encoding="utf-8"?>
+<file path=ppt/notesSlides/notesSlide8.xml><?xml version="1.0" encoding="utf-8"?>
 <p:notes xmlns:a="http://schemas.openxmlformats.org/drawingml/2006/main" xmlns:r="http://schemas.openxmlformats.org/officeDocument/2006/relationships" xmlns:p="http://schemas.openxmlformats.org/presentationml/2006/main">
   <p:cSld>
     <p:spTree>
@@ -3189,7 +3408,7 @@
             <a:pPr rtl="0"/>
             <a:fld id="{5FB91549-43BF-425A-AF25-75262019208C}" type="slidenum">
               <a:rPr lang="en-US" altLang="ko-KR" smtClean="0"/>
-              <a:t>7</a:t>
+              <a:t>8</a:t>
             </a:fld>
             <a:endParaRPr lang="ko-KR" altLang="en-US" dirty="0"/>
           </a:p>
@@ -3208,7 +3427,7 @@
 </p:notes>
 </file>
 
-<file path=ppt/notesSlides/notesSlide8.xml><?xml version="1.0" encoding="utf-8"?>
+<file path=ppt/notesSlides/notesSlide9.xml><?xml version="1.0" encoding="utf-8"?>
 <p:notes xmlns:a="http://schemas.openxmlformats.org/drawingml/2006/main" xmlns:r="http://schemas.openxmlformats.org/officeDocument/2006/relationships" xmlns:p="http://schemas.openxmlformats.org/presentationml/2006/main">
   <p:cSld>
     <p:spTree>
@@ -3274,7 +3493,7 @@
             <a:pPr rtl="0"/>
             <a:fld id="{5FB91549-43BF-425A-AF25-75262019208C}" type="slidenum">
               <a:rPr lang="en-US" altLang="ko-KR" smtClean="0"/>
-              <a:t>8</a:t>
+              <a:t>9</a:t>
             </a:fld>
             <a:endParaRPr lang="ko-KR" altLang="en-US" dirty="0"/>
           </a:p>
@@ -3284,115 +3503,6 @@
     <p:extLst>
       <p:ext uri="{BB962C8B-B14F-4D97-AF65-F5344CB8AC3E}">
         <p14:creationId xmlns:p14="http://schemas.microsoft.com/office/powerpoint/2010/main" val="390987337"/>
-      </p:ext>
-    </p:extLst>
-  </p:cSld>
-  <p:clrMapOvr>
-    <a:masterClrMapping/>
-  </p:clrMapOvr>
-</p:notes>
-</file>
-
-<file path=ppt/notesSlides/notesSlide9.xml><?xml version="1.0" encoding="utf-8"?>
-<p:notes xmlns:a="http://schemas.openxmlformats.org/drawingml/2006/main" xmlns:r="http://schemas.openxmlformats.org/officeDocument/2006/relationships" xmlns:p="http://schemas.openxmlformats.org/presentationml/2006/main">
-  <p:cSld>
-    <p:spTree>
-      <p:nvGrpSpPr>
-        <p:cNvPr id="1" name="">
-          <a:extLst>
-            <a:ext uri="{FF2B5EF4-FFF2-40B4-BE49-F238E27FC236}">
-              <a16:creationId xmlns:a16="http://schemas.microsoft.com/office/drawing/2014/main" id="{AC5D8675-0015-6253-E34C-BFFFF1A14252}"/>
-            </a:ext>
-          </a:extLst>
-        </p:cNvPr>
-        <p:cNvGrpSpPr/>
-        <p:nvPr/>
-      </p:nvGrpSpPr>
-      <p:grpSpPr>
-        <a:xfrm>
-          <a:off x="0" y="0"/>
-          <a:ext cx="0" cy="0"/>
-          <a:chOff x="0" y="0"/>
-          <a:chExt cx="0" cy="0"/>
-        </a:xfrm>
-      </p:grpSpPr>
-      <p:sp>
-        <p:nvSpPr>
-          <p:cNvPr id="2" name="슬라이드 이미지 개체 틀 1">
-            <a:extLst>
-              <a:ext uri="{FF2B5EF4-FFF2-40B4-BE49-F238E27FC236}">
-                <a16:creationId xmlns:a16="http://schemas.microsoft.com/office/drawing/2014/main" id="{16E6DC7F-79B6-9F94-1CEF-11E0F0627019}"/>
-              </a:ext>
-            </a:extLst>
-          </p:cNvPr>
-          <p:cNvSpPr>
-            <a:spLocks noGrp="1" noRot="1" noChangeAspect="1"/>
-          </p:cNvSpPr>
-          <p:nvPr>
-            <p:ph type="sldImg"/>
-          </p:nvPr>
-        </p:nvSpPr>
-        <p:spPr/>
-      </p:sp>
-      <p:sp>
-        <p:nvSpPr>
-          <p:cNvPr id="3" name="슬라이드 노트 개체 틀 2">
-            <a:extLst>
-              <a:ext uri="{FF2B5EF4-FFF2-40B4-BE49-F238E27FC236}">
-                <a16:creationId xmlns:a16="http://schemas.microsoft.com/office/drawing/2014/main" id="{27D80BAB-8577-4879-6471-13E3CA1C6D2F}"/>
-              </a:ext>
-            </a:extLst>
-          </p:cNvPr>
-          <p:cNvSpPr>
-            <a:spLocks noGrp="1"/>
-          </p:cNvSpPr>
-          <p:nvPr>
-            <p:ph type="body" idx="1"/>
-          </p:nvPr>
-        </p:nvSpPr>
-        <p:spPr/>
-        <p:txBody>
-          <a:bodyPr/>
-          <a:lstStyle/>
-          <a:p>
-            <a:endParaRPr lang="ko-KR" altLang="en-US" dirty="0"/>
-          </a:p>
-        </p:txBody>
-      </p:sp>
-      <p:sp>
-        <p:nvSpPr>
-          <p:cNvPr id="4" name="슬라이드 번호 개체 틀 3">
-            <a:extLst>
-              <a:ext uri="{FF2B5EF4-FFF2-40B4-BE49-F238E27FC236}">
-                <a16:creationId xmlns:a16="http://schemas.microsoft.com/office/drawing/2014/main" id="{B7FB335B-13A1-54EA-24C0-C5799F384309}"/>
-              </a:ext>
-            </a:extLst>
-          </p:cNvPr>
-          <p:cNvSpPr>
-            <a:spLocks noGrp="1"/>
-          </p:cNvSpPr>
-          <p:nvPr>
-            <p:ph type="sldNum" sz="quarter" idx="10"/>
-          </p:nvPr>
-        </p:nvSpPr>
-        <p:spPr/>
-        <p:txBody>
-          <a:bodyPr/>
-          <a:lstStyle/>
-          <a:p>
-            <a:pPr rtl="0"/>
-            <a:fld id="{5FB91549-43BF-425A-AF25-75262019208C}" type="slidenum">
-              <a:rPr lang="en-US" altLang="ko-KR" smtClean="0"/>
-              <a:t>9</a:t>
-            </a:fld>
-            <a:endParaRPr lang="ko-KR" altLang="en-US" dirty="0"/>
-          </a:p>
-        </p:txBody>
-      </p:sp>
-    </p:spTree>
-    <p:extLst>
-      <p:ext uri="{BB962C8B-B14F-4D97-AF65-F5344CB8AC3E}">
-        <p14:creationId xmlns:p14="http://schemas.microsoft.com/office/powerpoint/2010/main" val="2023948977"/>
       </p:ext>
     </p:extLst>
   </p:cSld>
@@ -3640,7 +3750,7 @@
           <a:p>
             <a:fld id="{4B229CEB-779D-4AB3-81CB-8FCEEAE03F61}" type="datetime1">
               <a:rPr lang="ko-KR" altLang="en-US" smtClean="0"/>
-              <a:t>2026-04-08</a:t>
+              <a:t>2026-04-09</a:t>
             </a:fld>
             <a:endParaRPr lang="ko-KR" altLang="en-US" dirty="0"/>
           </a:p>
@@ -3878,7 +3988,7 @@
             <a:pPr rtl="0"/>
             <a:fld id="{C3B7A883-0BF0-4B4B-84D5-D747A0111A56}" type="datetime1">
               <a:rPr lang="ko-KR" altLang="en-US" noProof="0" smtClean="0"/>
-              <a:t>2026-04-08</a:t>
+              <a:t>2026-04-09</a:t>
             </a:fld>
             <a:endParaRPr lang="ko-KR" altLang="en-US" noProof="0" dirty="0"/>
           </a:p>
@@ -4096,7 +4206,7 @@
             <a:pPr rtl="0"/>
             <a:fld id="{3DA7EA29-F2BB-4FB1-BB4B-C55A7FA3FC5C}" type="datetime1">
               <a:rPr lang="ko-KR" altLang="en-US" noProof="0" smtClean="0"/>
-              <a:t>2026-04-08</a:t>
+              <a:t>2026-04-09</a:t>
             </a:fld>
             <a:endParaRPr lang="ko-KR" altLang="en-US" noProof="0" dirty="0"/>
           </a:p>
@@ -4305,7 +4415,7 @@
             <a:pPr rtl="0"/>
             <a:fld id="{D76306AB-75A0-421C-B431-0E4E30A5C28E}" type="datetime1">
               <a:rPr lang="ko-KR" altLang="en-US" noProof="0" smtClean="0"/>
-              <a:t>2026-04-08</a:t>
+              <a:t>2026-04-09</a:t>
             </a:fld>
             <a:endParaRPr lang="ko-KR" altLang="en-US" noProof="0" dirty="0"/>
           </a:p>
@@ -4575,7 +4685,7 @@
             <a:pPr rtl="0"/>
             <a:fld id="{E1D969EE-F1EB-462E-B70D-5B36B3806A4E}" type="datetime1">
               <a:rPr lang="ko-KR" altLang="en-US" noProof="0" smtClean="0"/>
-              <a:t>2026-04-08</a:t>
+              <a:t>2026-04-09</a:t>
             </a:fld>
             <a:endParaRPr lang="ko-KR" altLang="en-US" noProof="0" dirty="0"/>
           </a:p>
@@ -4883,7 +4993,7 @@
             <a:pPr rtl="0"/>
             <a:fld id="{E8CBB1B7-E0A1-46A3-B5B5-C69931095FF6}" type="datetime1">
               <a:rPr lang="ko-KR" altLang="en-US" noProof="0" smtClean="0"/>
-              <a:t>2026-04-08</a:t>
+              <a:t>2026-04-09</a:t>
             </a:fld>
             <a:endParaRPr lang="ko-KR" altLang="en-US" noProof="0" dirty="0"/>
           </a:p>
@@ -5334,7 +5444,7 @@
             <a:pPr rtl="0"/>
             <a:fld id="{DAFC0E65-06AB-44D7-AAEE-8F4C7ED84A0C}" type="datetime1">
               <a:rPr lang="ko-KR" altLang="en-US" noProof="0" smtClean="0"/>
-              <a:t>2026-04-08</a:t>
+              <a:t>2026-04-09</a:t>
             </a:fld>
             <a:endParaRPr lang="ko-KR" altLang="en-US" noProof="0" dirty="0"/>
           </a:p>
@@ -5471,7 +5581,7 @@
             <a:pPr rtl="0"/>
             <a:fld id="{30189E66-D439-4767-B911-EB49CB20E313}" type="datetime1">
               <a:rPr lang="ko-KR" altLang="en-US" noProof="0" smtClean="0"/>
-              <a:t>2026-04-08</a:t>
+              <a:t>2026-04-09</a:t>
             </a:fld>
             <a:endParaRPr lang="ko-KR" altLang="en-US" noProof="0" dirty="0"/>
           </a:p>
@@ -5584,7 +5694,7 @@
             <a:pPr rtl="0"/>
             <a:fld id="{D4E4FFC0-DB28-4291-80A0-63DBF8428320}" type="datetime1">
               <a:rPr lang="ko-KR" altLang="en-US" noProof="0" smtClean="0"/>
-              <a:t>2026-04-08</a:t>
+              <a:t>2026-04-09</a:t>
             </a:fld>
             <a:endParaRPr lang="ko-KR" altLang="en-US" noProof="0" dirty="0"/>
           </a:p>
@@ -5889,7 +5999,7 @@
             <a:pPr rtl="0"/>
             <a:fld id="{3AB5804B-C38E-4214-93DF-3E6DA00134E8}" type="datetime1">
               <a:rPr lang="ko-KR" altLang="en-US" noProof="0" smtClean="0"/>
-              <a:t>2026-04-08</a:t>
+              <a:t>2026-04-09</a:t>
             </a:fld>
             <a:endParaRPr lang="ko-KR" altLang="en-US" noProof="0" dirty="0"/>
           </a:p>
@@ -6183,7 +6293,7 @@
             <a:pPr rtl="0"/>
             <a:fld id="{CABEE384-F18F-4153-AC21-608599869F84}" type="datetime1">
               <a:rPr lang="ko-KR" altLang="en-US" noProof="0" smtClean="0"/>
-              <a:t>2026-04-08</a:t>
+              <a:t>2026-04-09</a:t>
             </a:fld>
             <a:endParaRPr lang="ko-KR" altLang="en-US" noProof="0" dirty="0"/>
           </a:p>
@@ -6415,7 +6525,7 @@
           <a:p>
             <a:fld id="{667A4C69-65FB-481C-AC2A-84D254D33675}" type="datetime1">
               <a:rPr lang="ko-KR" altLang="en-US" smtClean="0"/>
-              <a:t>2026-04-08</a:t>
+              <a:t>2026-04-09</a:t>
             </a:fld>
             <a:endParaRPr lang="ko-KR" altLang="en-US" dirty="0"/>
           </a:p>
@@ -7016,6 +7126,367 @@
   <p:cSld>
     <p:spTree>
       <p:nvGrpSpPr>
+        <p:cNvPr id="1" name="">
+          <a:extLst>
+            <a:ext uri="{FF2B5EF4-FFF2-40B4-BE49-F238E27FC236}">
+              <a16:creationId xmlns:a16="http://schemas.microsoft.com/office/drawing/2014/main" id="{762F6384-AE23-9E58-FC91-C5F1361CF6B8}"/>
+            </a:ext>
+          </a:extLst>
+        </p:cNvPr>
+        <p:cNvGrpSpPr/>
+        <p:nvPr/>
+      </p:nvGrpSpPr>
+      <p:grpSpPr>
+        <a:xfrm>
+          <a:off x="0" y="0"/>
+          <a:ext cx="0" cy="0"/>
+          <a:chOff x="0" y="0"/>
+          <a:chExt cx="0" cy="0"/>
+        </a:xfrm>
+      </p:grpSpPr>
+      <p:sp>
+        <p:nvSpPr>
+          <p:cNvPr id="8" name="슬라이드 번호 개체 틀 7">
+            <a:extLst>
+              <a:ext uri="{FF2B5EF4-FFF2-40B4-BE49-F238E27FC236}">
+                <a16:creationId xmlns:a16="http://schemas.microsoft.com/office/drawing/2014/main" id="{E6770638-C1ED-0705-08FE-872C53D9EBE4}"/>
+              </a:ext>
+            </a:extLst>
+          </p:cNvPr>
+          <p:cNvSpPr>
+            <a:spLocks noGrp="1"/>
+          </p:cNvSpPr>
+          <p:nvPr>
+            <p:ph type="sldNum" sz="quarter" idx="12"/>
+          </p:nvPr>
+        </p:nvSpPr>
+        <p:spPr/>
+        <p:txBody>
+          <a:bodyPr/>
+          <a:lstStyle/>
+          <a:p>
+            <a:pPr rtl="0"/>
+            <a:fld id="{A3F31473-23EB-4724-8B59-FE6D21D89FA4}" type="slidenum">
+              <a:rPr lang="en-US" altLang="ko-KR" noProof="0" smtClean="0"/>
+              <a:t>10</a:t>
+            </a:fld>
+            <a:endParaRPr lang="en-US" altLang="ko-KR" noProof="0" dirty="0"/>
+          </a:p>
+        </p:txBody>
+      </p:sp>
+      <p:sp>
+        <p:nvSpPr>
+          <p:cNvPr id="2" name="직사각형 1">
+            <a:extLst>
+              <a:ext uri="{FF2B5EF4-FFF2-40B4-BE49-F238E27FC236}">
+                <a16:creationId xmlns:a16="http://schemas.microsoft.com/office/drawing/2014/main" id="{E2A422D3-43C8-8F2B-7CF1-D410589B5765}"/>
+              </a:ext>
+            </a:extLst>
+          </p:cNvPr>
+          <p:cNvSpPr/>
+          <p:nvPr/>
+        </p:nvSpPr>
+        <p:spPr>
+          <a:xfrm>
+            <a:off x="909836" y="1412776"/>
+            <a:ext cx="10801200" cy="3831818"/>
+          </a:xfrm>
+          <a:prstGeom prst="rect">
+            <a:avLst/>
+          </a:prstGeom>
+        </p:spPr>
+        <p:txBody>
+          <a:bodyPr wrap="square">
+            <a:spAutoFit/>
+          </a:bodyPr>
+          <a:lstStyle/>
+          <a:p>
+            <a:pPr marL="285750" indent="-285750">
+              <a:lnSpc>
+                <a:spcPct val="150000"/>
+              </a:lnSpc>
+              <a:buFont typeface="Wingdings" panose="05000000000000000000" pitchFamily="2" charset="2"/>
+              <a:buChar char="v"/>
+            </a:pPr>
+            <a:r>
+              <a:rPr lang="en-US" altLang="ko-KR" b="1" dirty="0">
+                <a:latin typeface="Arial Narrow" panose="020B0606020202030204" pitchFamily="34" charset="0"/>
+              </a:rPr>
+              <a:t>1</a:t>
+            </a:r>
+            <a:r>
+              <a:rPr lang="ko-KR" altLang="en-US" b="1" dirty="0">
+                <a:latin typeface="Arial Narrow" panose="020B0606020202030204" pitchFamily="34" charset="0"/>
+              </a:rPr>
+              <a:t>단계</a:t>
+            </a:r>
+            <a:r>
+              <a:rPr lang="en-US" altLang="ko-KR" b="1" dirty="0">
+                <a:latin typeface="Arial Narrow" panose="020B0606020202030204" pitchFamily="34" charset="0"/>
+              </a:rPr>
+              <a:t>: </a:t>
+            </a:r>
+            <a:r>
+              <a:rPr lang="ko-KR" altLang="en-US" b="1" dirty="0">
+                <a:latin typeface="Arial Narrow" panose="020B0606020202030204" pitchFamily="34" charset="0"/>
+              </a:rPr>
+              <a:t>데이터 생성</a:t>
+            </a:r>
+          </a:p>
+          <a:p>
+            <a:pPr marL="742950" lvl="1" indent="-285750">
+              <a:lnSpc>
+                <a:spcPct val="150000"/>
+              </a:lnSpc>
+              <a:buFont typeface="Wingdings" panose="05000000000000000000" pitchFamily="2" charset="2"/>
+              <a:buChar char="v"/>
+            </a:pPr>
+            <a:r>
+              <a:rPr lang="ko-KR" altLang="en-US" dirty="0">
+                <a:latin typeface="Arial Narrow" panose="020B0606020202030204" pitchFamily="34" charset="0"/>
+              </a:rPr>
+              <a:t>신약 투여 전과 투여 후의 데이터를 각각 </a:t>
+            </a:r>
+            <a:r>
+              <a:rPr lang="en-US" altLang="ko-KR" dirty="0">
+                <a:latin typeface="Arial Narrow" panose="020B0606020202030204" pitchFamily="34" charset="0"/>
+              </a:rPr>
+              <a:t>100</a:t>
+            </a:r>
+            <a:r>
+              <a:rPr lang="ko-KR" altLang="en-US" dirty="0">
+                <a:latin typeface="Arial Narrow" panose="020B0606020202030204" pitchFamily="34" charset="0"/>
+              </a:rPr>
+              <a:t>명 분량으로 생성합니다</a:t>
+            </a:r>
+            <a:r>
+              <a:rPr lang="en-US" altLang="ko-KR" dirty="0">
+                <a:latin typeface="Arial Narrow" panose="020B0606020202030204" pitchFamily="34" charset="0"/>
+              </a:rPr>
+              <a:t>. </a:t>
+            </a:r>
+            <a:r>
+              <a:rPr lang="ko-KR" altLang="en-US" dirty="0">
+                <a:latin typeface="Arial Narrow" panose="020B0606020202030204" pitchFamily="34" charset="0"/>
+              </a:rPr>
+              <a:t>이 예에서는 투여 전 데이터를 정규 분포 </a:t>
+            </a:r>
+            <a:r>
+              <a:rPr lang="en-US" altLang="ko-KR" dirty="0">
+                <a:latin typeface="Arial Narrow" panose="020B0606020202030204" pitchFamily="34" charset="0"/>
+              </a:rPr>
+              <a:t>N(0, 1)</a:t>
+            </a:r>
+            <a:r>
+              <a:rPr lang="ko-KR" altLang="en-US" dirty="0">
+                <a:latin typeface="Arial Narrow" panose="020B0606020202030204" pitchFamily="34" charset="0"/>
+              </a:rPr>
+              <a:t>을 따르게 하고</a:t>
+            </a:r>
+            <a:r>
+              <a:rPr lang="en-US" altLang="ko-KR" dirty="0">
+                <a:latin typeface="Arial Narrow" panose="020B0606020202030204" pitchFamily="34" charset="0"/>
+              </a:rPr>
+              <a:t>, </a:t>
+            </a:r>
+            <a:r>
+              <a:rPr lang="ko-KR" altLang="en-US" dirty="0">
+                <a:latin typeface="Arial Narrow" panose="020B0606020202030204" pitchFamily="34" charset="0"/>
+              </a:rPr>
+              <a:t>투여 후 데이터는 투여의 효과를 모사하기 위해 평균이 약간 증가한 정규 분포 </a:t>
+            </a:r>
+            <a:r>
+              <a:rPr lang="en-US" altLang="ko-KR" dirty="0">
+                <a:latin typeface="Arial Narrow" panose="020B0606020202030204" pitchFamily="34" charset="0"/>
+              </a:rPr>
+              <a:t>N(0.3, 2)</a:t>
+            </a:r>
+            <a:r>
+              <a:rPr lang="ko-KR" altLang="en-US" dirty="0">
+                <a:latin typeface="Arial Narrow" panose="020B0606020202030204" pitchFamily="34" charset="0"/>
+              </a:rPr>
+              <a:t>를 사용합니다</a:t>
+            </a:r>
+            <a:r>
+              <a:rPr lang="en-US" altLang="ko-KR" dirty="0">
+                <a:latin typeface="Arial Narrow" panose="020B0606020202030204" pitchFamily="34" charset="0"/>
+              </a:rPr>
+              <a:t>.</a:t>
+            </a:r>
+          </a:p>
+          <a:p>
+            <a:pPr marL="285750" indent="-285750">
+              <a:lnSpc>
+                <a:spcPct val="150000"/>
+              </a:lnSpc>
+              <a:buFont typeface="Wingdings" panose="05000000000000000000" pitchFamily="2" charset="2"/>
+              <a:buChar char="v"/>
+            </a:pPr>
+            <a:endParaRPr lang="en-US" altLang="ko-KR" b="1" dirty="0">
+              <a:latin typeface="Arial Narrow" panose="020B0606020202030204" pitchFamily="34" charset="0"/>
+            </a:endParaRPr>
+          </a:p>
+          <a:p>
+            <a:pPr marL="285750" indent="-285750">
+              <a:lnSpc>
+                <a:spcPct val="150000"/>
+              </a:lnSpc>
+              <a:buFont typeface="Wingdings" panose="05000000000000000000" pitchFamily="2" charset="2"/>
+              <a:buChar char="v"/>
+            </a:pPr>
+            <a:endParaRPr lang="en-US" altLang="ko-KR" b="1" dirty="0">
+              <a:latin typeface="Arial Narrow" panose="020B0606020202030204" pitchFamily="34" charset="0"/>
+            </a:endParaRPr>
+          </a:p>
+          <a:p>
+            <a:pPr marL="285750" indent="-285750">
+              <a:lnSpc>
+                <a:spcPct val="150000"/>
+              </a:lnSpc>
+              <a:buFont typeface="Wingdings" panose="05000000000000000000" pitchFamily="2" charset="2"/>
+              <a:buChar char="v"/>
+            </a:pPr>
+            <a:r>
+              <a:rPr lang="en-US" altLang="ko-KR" b="1" dirty="0">
+                <a:latin typeface="Arial Narrow" panose="020B0606020202030204" pitchFamily="34" charset="0"/>
+              </a:rPr>
+              <a:t>2</a:t>
+            </a:r>
+            <a:r>
+              <a:rPr lang="ko-KR" altLang="en-US" b="1" dirty="0">
+                <a:latin typeface="Arial Narrow" panose="020B0606020202030204" pitchFamily="34" charset="0"/>
+              </a:rPr>
+              <a:t>단계</a:t>
+            </a:r>
+            <a:r>
+              <a:rPr lang="en-US" altLang="ko-KR" b="1" dirty="0">
+                <a:latin typeface="Arial Narrow" panose="020B0606020202030204" pitchFamily="34" charset="0"/>
+              </a:rPr>
+              <a:t>: t-test </a:t>
+            </a:r>
+            <a:r>
+              <a:rPr lang="ko-KR" altLang="en-US" b="1" dirty="0">
+                <a:latin typeface="Arial Narrow" panose="020B0606020202030204" pitchFamily="34" charset="0"/>
+              </a:rPr>
+              <a:t>수행</a:t>
+            </a:r>
+          </a:p>
+          <a:p>
+            <a:pPr marL="742950" lvl="1" indent="-285750">
+              <a:lnSpc>
+                <a:spcPct val="150000"/>
+              </a:lnSpc>
+              <a:buFont typeface="Wingdings" panose="05000000000000000000" pitchFamily="2" charset="2"/>
+              <a:buChar char="v"/>
+            </a:pPr>
+            <a:r>
+              <a:rPr lang="ko-KR" altLang="en-US" dirty="0">
+                <a:latin typeface="Arial Narrow" panose="020B0606020202030204" pitchFamily="34" charset="0"/>
+              </a:rPr>
+              <a:t>생성된 데이터에 대해 독립 표본 </a:t>
+            </a:r>
+            <a:r>
+              <a:rPr lang="en-US" altLang="ko-KR" dirty="0">
+                <a:latin typeface="Arial Narrow" panose="020B0606020202030204" pitchFamily="34" charset="0"/>
+              </a:rPr>
+              <a:t>t-test</a:t>
+            </a:r>
+            <a:r>
+              <a:rPr lang="ko-KR" altLang="en-US" dirty="0">
+                <a:latin typeface="Arial Narrow" panose="020B0606020202030204" pitchFamily="34" charset="0"/>
+              </a:rPr>
+              <a:t>를 수행하여 투여 전과 투여 후의 평균 차이가 통계적으로 </a:t>
+            </a:r>
+            <a:r>
+              <a:rPr lang="ko-KR" altLang="en-US" dirty="0" err="1">
+                <a:latin typeface="Arial Narrow" panose="020B0606020202030204" pitchFamily="34" charset="0"/>
+              </a:rPr>
+              <a:t>유의미한지</a:t>
+            </a:r>
+            <a:r>
+              <a:rPr lang="ko-KR" altLang="en-US" dirty="0">
+                <a:latin typeface="Arial Narrow" panose="020B0606020202030204" pitchFamily="34" charset="0"/>
+              </a:rPr>
+              <a:t> 검정합니다</a:t>
+            </a:r>
+            <a:r>
+              <a:rPr lang="en-US" altLang="ko-KR" dirty="0">
+                <a:latin typeface="Arial Narrow" panose="020B0606020202030204" pitchFamily="34" charset="0"/>
+              </a:rPr>
+              <a:t>.</a:t>
+            </a:r>
+          </a:p>
+        </p:txBody>
+      </p:sp>
+      <p:sp>
+        <p:nvSpPr>
+          <p:cNvPr id="4" name="직사각형 3">
+            <a:extLst>
+              <a:ext uri="{FF2B5EF4-FFF2-40B4-BE49-F238E27FC236}">
+                <a16:creationId xmlns:a16="http://schemas.microsoft.com/office/drawing/2014/main" id="{2A6B6102-868A-0C39-9A08-91BF760A29D1}"/>
+              </a:ext>
+            </a:extLst>
+          </p:cNvPr>
+          <p:cNvSpPr/>
+          <p:nvPr/>
+        </p:nvSpPr>
+        <p:spPr>
+          <a:xfrm>
+            <a:off x="333772" y="370028"/>
+            <a:ext cx="7229864" cy="523220"/>
+          </a:xfrm>
+          <a:prstGeom prst="rect">
+            <a:avLst/>
+          </a:prstGeom>
+        </p:spPr>
+        <p:txBody>
+          <a:bodyPr wrap="none">
+            <a:spAutoFit/>
+          </a:bodyPr>
+          <a:lstStyle/>
+          <a:p>
+            <a:r>
+              <a:rPr lang="ko-KR" altLang="en-US" sz="2800" b="1" dirty="0"/>
+              <a:t>새로운 신약의 효과 검정을 위한 통계분석</a:t>
+            </a:r>
+            <a:r>
+              <a:rPr lang="en-US" altLang="ko-KR" sz="2800" b="1" dirty="0"/>
+              <a:t>(1/3)</a:t>
+            </a:r>
+            <a:endParaRPr lang="ko-KR" altLang="en-US" sz="2800" b="1" dirty="0"/>
+          </a:p>
+        </p:txBody>
+      </p:sp>
+    </p:spTree>
+    <p:extLst>
+      <p:ext uri="{BB962C8B-B14F-4D97-AF65-F5344CB8AC3E}">
+        <p14:creationId xmlns:p14="http://schemas.microsoft.com/office/powerpoint/2010/main" val="580817323"/>
+      </p:ext>
+    </p:extLst>
+  </p:cSld>
+  <p:clrMapOvr>
+    <a:masterClrMapping/>
+  </p:clrMapOvr>
+  <mc:AlternateContent xmlns:mc="http://schemas.openxmlformats.org/markup-compatibility/2006" xmlns:p14="http://schemas.microsoft.com/office/powerpoint/2010/main">
+    <mc:Choice Requires="p14">
+      <p:transition spd="med" p14:dur="700">
+        <p:fade/>
+      </p:transition>
+    </mc:Choice>
+    <mc:Fallback xmlns="">
+      <p:transition spd="med">
+        <p:fade/>
+      </p:transition>
+    </mc:Fallback>
+  </mc:AlternateContent>
+</p:sld>
+</file>
+
+<file path=ppt/slides/slide11.xml><?xml version="1.0" encoding="utf-8"?>
+<p:sld xmlns:a="http://schemas.openxmlformats.org/drawingml/2006/main" xmlns:r="http://schemas.openxmlformats.org/officeDocument/2006/relationships" xmlns:p="http://schemas.openxmlformats.org/presentationml/2006/main">
+  <p:cSld>
+    <p:spTree>
+      <p:nvGrpSpPr>
         <p:cNvPr id="1" name=""/>
         <p:cNvGrpSpPr/>
         <p:nvPr/>
@@ -7046,7 +7517,7 @@
             <a:pPr rtl="0"/>
             <a:fld id="{A3F31473-23EB-4724-8B59-FE6D21D89FA4}" type="slidenum">
               <a:rPr lang="en-US" altLang="ko-KR" noProof="0" smtClean="0"/>
-              <a:t>10</a:t>
+              <a:t>11</a:t>
             </a:fld>
             <a:endParaRPr lang="en-US" altLang="ko-KR" noProof="0" dirty="0"/>
           </a:p>
@@ -7158,7 +7629,7 @@
 </p:sld>
 </file>
 
-<file path=ppt/slides/slide11.xml><?xml version="1.0" encoding="utf-8"?>
+<file path=ppt/slides/slide12.xml><?xml version="1.0" encoding="utf-8"?>
 <p:sld xmlns:a="http://schemas.openxmlformats.org/drawingml/2006/main" xmlns:r="http://schemas.openxmlformats.org/officeDocument/2006/relationships" xmlns:p="http://schemas.openxmlformats.org/presentationml/2006/main">
   <p:cSld>
     <p:spTree>
@@ -7193,7 +7664,7 @@
             <a:pPr rtl="0"/>
             <a:fld id="{A3F31473-23EB-4724-8B59-FE6D21D89FA4}" type="slidenum">
               <a:rPr lang="en-US" altLang="ko-KR" noProof="0" smtClean="0"/>
-              <a:t>11</a:t>
+              <a:t>12</a:t>
             </a:fld>
             <a:endParaRPr lang="en-US" altLang="ko-KR" noProof="0" dirty="0"/>
           </a:p>
@@ -7644,7 +8115,7 @@
 </p:sld>
 </file>
 
-<file path=ppt/slides/slide12.xml><?xml version="1.0" encoding="utf-8"?>
+<file path=ppt/slides/slide13.xml><?xml version="1.0" encoding="utf-8"?>
 <p:sld xmlns:a="http://schemas.openxmlformats.org/drawingml/2006/main" xmlns:r="http://schemas.openxmlformats.org/officeDocument/2006/relationships" xmlns:p="http://schemas.openxmlformats.org/presentationml/2006/main">
   <p:cSld>
     <p:spTree>
@@ -7691,7 +8162,7 @@
             <a:pPr rtl="0"/>
             <a:fld id="{A3F31473-23EB-4724-8B59-FE6D21D89FA4}" type="slidenum">
               <a:rPr lang="en-US" altLang="ko-KR" noProof="0" smtClean="0"/>
-              <a:t>12</a:t>
+              <a:t>13</a:t>
             </a:fld>
             <a:endParaRPr lang="en-US" altLang="ko-KR" noProof="0" dirty="0"/>
           </a:p>
@@ -8265,7 +8736,7 @@
 </p:sld>
 </file>
 
-<file path=ppt/slides/slide13.xml><?xml version="1.0" encoding="utf-8"?>
+<file path=ppt/slides/slide14.xml><?xml version="1.0" encoding="utf-8"?>
 <p:sld xmlns:a="http://schemas.openxmlformats.org/drawingml/2006/main" xmlns:r="http://schemas.openxmlformats.org/officeDocument/2006/relationships" xmlns:p="http://schemas.openxmlformats.org/presentationml/2006/main">
   <p:cSld>
     <p:spTree>
@@ -8300,7 +8771,7 @@
             <a:pPr rtl="0"/>
             <a:fld id="{A3F31473-23EB-4724-8B59-FE6D21D89FA4}" type="slidenum">
               <a:rPr lang="en-US" altLang="ko-KR" noProof="0" smtClean="0"/>
-              <a:t>13</a:t>
+              <a:t>14</a:t>
             </a:fld>
             <a:endParaRPr lang="en-US" altLang="ko-KR" noProof="0" dirty="0"/>
           </a:p>
@@ -8452,8 +8923,8 @@
           </a:p>
         </p:txBody>
       </p:sp>
-      <mc:AlternateContent xmlns:mc="http://schemas.openxmlformats.org/markup-compatibility/2006">
-        <mc:Choice xmlns:a14="http://schemas.microsoft.com/office/drawing/2010/main" Requires="a14">
+      <mc:AlternateContent xmlns:mc="http://schemas.openxmlformats.org/markup-compatibility/2006" xmlns:a14="http://schemas.microsoft.com/office/drawing/2010/main">
+        <mc:Choice Requires="a14">
           <p:sp>
             <p:nvSpPr>
               <p:cNvPr id="15" name="TextBox 14">
@@ -8960,7 +9431,7 @@
             </p:txBody>
           </p:sp>
         </mc:Choice>
-        <mc:Fallback>
+        <mc:Fallback xmlns="">
           <p:sp>
             <p:nvSpPr>
               <p:cNvPr id="15" name="TextBox 14">
@@ -9030,7 +9501,7 @@
 </p:sld>
 </file>
 
-<file path=ppt/slides/slide14.xml><?xml version="1.0" encoding="utf-8"?>
+<file path=ppt/slides/slide15.xml><?xml version="1.0" encoding="utf-8"?>
 <p:sld xmlns:a="http://schemas.openxmlformats.org/drawingml/2006/main" xmlns:r="http://schemas.openxmlformats.org/officeDocument/2006/relationships" xmlns:p="http://schemas.openxmlformats.org/presentationml/2006/main">
   <p:cSld>
     <p:spTree>
@@ -9133,7 +9604,7 @@
             <a:pPr rtl="0"/>
             <a:fld id="{A3F31473-23EB-4724-8B59-FE6D21D89FA4}" type="slidenum">
               <a:rPr lang="en-US" altLang="ko-KR" noProof="0" smtClean="0"/>
-              <a:t>14</a:t>
+              <a:t>15</a:t>
             </a:fld>
             <a:endParaRPr lang="en-US" altLang="ko-KR" noProof="0" dirty="0"/>
           </a:p>
@@ -9957,7 +10428,7 @@
 </p:sld>
 </file>
 
-<file path=ppt/slides/slide15.xml><?xml version="1.0" encoding="utf-8"?>
+<file path=ppt/slides/slide16.xml><?xml version="1.0" encoding="utf-8"?>
 <p:sld xmlns:a="http://schemas.openxmlformats.org/drawingml/2006/main" xmlns:r="http://schemas.openxmlformats.org/officeDocument/2006/relationships" xmlns:p="http://schemas.openxmlformats.org/presentationml/2006/main">
   <p:cSld>
     <p:spTree>
@@ -10004,7 +10475,7 @@
             <a:pPr rtl="0"/>
             <a:fld id="{A3F31473-23EB-4724-8B59-FE6D21D89FA4}" type="slidenum">
               <a:rPr lang="en-US" altLang="ko-KR" noProof="0" smtClean="0"/>
-              <a:t>15</a:t>
+              <a:t>16</a:t>
             </a:fld>
             <a:endParaRPr lang="en-US" altLang="ko-KR" noProof="0" dirty="0"/>
           </a:p>
@@ -10463,7 +10934,7 @@
 </p:sld>
 </file>
 
-<file path=ppt/slides/slide16.xml><?xml version="1.0" encoding="utf-8"?>
+<file path=ppt/slides/slide17.xml><?xml version="1.0" encoding="utf-8"?>
 <p:sld xmlns:a="http://schemas.openxmlformats.org/drawingml/2006/main" xmlns:r="http://schemas.openxmlformats.org/officeDocument/2006/relationships" xmlns:p="http://schemas.openxmlformats.org/presentationml/2006/main">
   <p:cSld>
     <p:spTree>
@@ -10604,7 +11075,7 @@
             <a:pPr rtl="0"/>
             <a:fld id="{A3F31473-23EB-4724-8B59-FE6D21D89FA4}" type="slidenum">
               <a:rPr lang="en-US" altLang="ko-KR" noProof="0" smtClean="0"/>
-              <a:t>16</a:t>
+              <a:t>17</a:t>
             </a:fld>
             <a:endParaRPr lang="en-US" altLang="ko-KR" noProof="0" dirty="0"/>
           </a:p>
@@ -11304,7 +11775,7 @@
 </p:sld>
 </file>
 
-<file path=ppt/slides/slide17.xml><?xml version="1.0" encoding="utf-8"?>
+<file path=ppt/slides/slide18.xml><?xml version="1.0" encoding="utf-8"?>
 <p:sld xmlns:a="http://schemas.openxmlformats.org/drawingml/2006/main" xmlns:r="http://schemas.openxmlformats.org/officeDocument/2006/relationships" xmlns:p="http://schemas.openxmlformats.org/presentationml/2006/main">
   <p:cSld>
     <p:spTree>
@@ -11351,7 +11822,7 @@
             <a:pPr rtl="0"/>
             <a:fld id="{A3F31473-23EB-4724-8B59-FE6D21D89FA4}" type="slidenum">
               <a:rPr lang="en-US" altLang="ko-KR" noProof="0" smtClean="0"/>
-              <a:t>17</a:t>
+              <a:t>18</a:t>
             </a:fld>
             <a:endParaRPr lang="en-US" altLang="ko-KR" noProof="0" dirty="0"/>
           </a:p>
@@ -11751,7 +12222,7 @@
 </p:sld>
 </file>
 
-<file path=ppt/slides/slide18.xml><?xml version="1.0" encoding="utf-8"?>
+<file path=ppt/slides/slide19.xml><?xml version="1.0" encoding="utf-8"?>
 <p:sld xmlns:a="http://schemas.openxmlformats.org/drawingml/2006/main" xmlns:r="http://schemas.openxmlformats.org/officeDocument/2006/relationships" xmlns:p="http://schemas.openxmlformats.org/presentationml/2006/main">
   <p:cSld>
     <p:spTree>
@@ -11798,7 +12269,7 @@
             <a:pPr rtl="0"/>
             <a:fld id="{A3F31473-23EB-4724-8B59-FE6D21D89FA4}" type="slidenum">
               <a:rPr lang="en-US" altLang="ko-KR" noProof="0" smtClean="0"/>
-              <a:t>18</a:t>
+              <a:t>19</a:t>
             </a:fld>
             <a:endParaRPr lang="en-US" altLang="ko-KR" noProof="0" dirty="0"/>
           </a:p>
@@ -12438,861 +12909,6 @@
     <p:extLst>
       <p:ext uri="{BB962C8B-B14F-4D97-AF65-F5344CB8AC3E}">
         <p14:creationId xmlns:p14="http://schemas.microsoft.com/office/powerpoint/2010/main" val="3788631061"/>
-      </p:ext>
-    </p:extLst>
-  </p:cSld>
-  <p:clrMapOvr>
-    <a:masterClrMapping/>
-  </p:clrMapOvr>
-  <mc:AlternateContent xmlns:mc="http://schemas.openxmlformats.org/markup-compatibility/2006" xmlns:p14="http://schemas.microsoft.com/office/powerpoint/2010/main">
-    <mc:Choice Requires="p14">
-      <p:transition spd="med" p14:dur="700">
-        <p:fade/>
-      </p:transition>
-    </mc:Choice>
-    <mc:Fallback xmlns="">
-      <p:transition spd="med">
-        <p:fade/>
-      </p:transition>
-    </mc:Fallback>
-  </mc:AlternateContent>
-</p:sld>
-</file>
-
-<file path=ppt/slides/slide19.xml><?xml version="1.0" encoding="utf-8"?>
-<p:sld xmlns:a="http://schemas.openxmlformats.org/drawingml/2006/main" xmlns:r="http://schemas.openxmlformats.org/officeDocument/2006/relationships" xmlns:p="http://schemas.openxmlformats.org/presentationml/2006/main">
-  <p:cSld>
-    <p:spTree>
-      <p:nvGrpSpPr>
-        <p:cNvPr id="1" name="">
-          <a:extLst>
-            <a:ext uri="{FF2B5EF4-FFF2-40B4-BE49-F238E27FC236}">
-              <a16:creationId xmlns:a16="http://schemas.microsoft.com/office/drawing/2014/main" id="{6CE6BC8C-C54D-8E28-FD31-E3F3679D5DED}"/>
-            </a:ext>
-          </a:extLst>
-        </p:cNvPr>
-        <p:cNvGrpSpPr/>
-        <p:nvPr/>
-      </p:nvGrpSpPr>
-      <p:grpSpPr>
-        <a:xfrm>
-          <a:off x="0" y="0"/>
-          <a:ext cx="0" cy="0"/>
-          <a:chOff x="0" y="0"/>
-          <a:chExt cx="0" cy="0"/>
-        </a:xfrm>
-      </p:grpSpPr>
-      <p:sp>
-        <p:nvSpPr>
-          <p:cNvPr id="8" name="슬라이드 번호 개체 틀 7">
-            <a:extLst>
-              <a:ext uri="{FF2B5EF4-FFF2-40B4-BE49-F238E27FC236}">
-                <a16:creationId xmlns:a16="http://schemas.microsoft.com/office/drawing/2014/main" id="{4B43144F-4C54-792C-CD38-CC77C6F1B0EB}"/>
-              </a:ext>
-            </a:extLst>
-          </p:cNvPr>
-          <p:cNvSpPr>
-            <a:spLocks noGrp="1"/>
-          </p:cNvSpPr>
-          <p:nvPr>
-            <p:ph type="sldNum" sz="quarter" idx="12"/>
-          </p:nvPr>
-        </p:nvSpPr>
-        <p:spPr/>
-        <p:txBody>
-          <a:bodyPr/>
-          <a:lstStyle/>
-          <a:p>
-            <a:pPr rtl="0"/>
-            <a:fld id="{A3F31473-23EB-4724-8B59-FE6D21D89FA4}" type="slidenum">
-              <a:rPr lang="en-US" altLang="ko-KR" noProof="0" smtClean="0"/>
-              <a:t>19</a:t>
-            </a:fld>
-            <a:endParaRPr lang="en-US" altLang="ko-KR" noProof="0" dirty="0"/>
-          </a:p>
-        </p:txBody>
-      </p:sp>
-      <p:sp>
-        <p:nvSpPr>
-          <p:cNvPr id="5" name="TextBox 4">
-            <a:extLst>
-              <a:ext uri="{FF2B5EF4-FFF2-40B4-BE49-F238E27FC236}">
-                <a16:creationId xmlns:a16="http://schemas.microsoft.com/office/drawing/2014/main" id="{8ED946B2-7A03-EB07-BCEE-C3EDA7DB0652}"/>
-              </a:ext>
-            </a:extLst>
-          </p:cNvPr>
-          <p:cNvSpPr txBox="1"/>
-          <p:nvPr/>
-        </p:nvSpPr>
-        <p:spPr>
-          <a:xfrm>
-            <a:off x="117748" y="260648"/>
-            <a:ext cx="2592288" cy="584775"/>
-          </a:xfrm>
-          <a:prstGeom prst="rect">
-            <a:avLst/>
-          </a:prstGeom>
-          <a:noFill/>
-        </p:spPr>
-        <p:txBody>
-          <a:bodyPr wrap="square" rtlCol="0">
-            <a:spAutoFit/>
-          </a:bodyPr>
-          <a:lstStyle/>
-          <a:p>
-            <a:r>
-              <a:rPr lang="ko-KR" altLang="en-US" sz="3200" b="1"/>
-              <a:t>문제 풀이</a:t>
-            </a:r>
-          </a:p>
-        </p:txBody>
-      </p:sp>
-      <p:sp>
-        <p:nvSpPr>
-          <p:cNvPr id="2" name="Rectangle 1">
-            <a:extLst>
-              <a:ext uri="{FF2B5EF4-FFF2-40B4-BE49-F238E27FC236}">
-                <a16:creationId xmlns:a16="http://schemas.microsoft.com/office/drawing/2014/main" id="{F1569323-C4D0-EA5E-54D8-05261E28A8E3}"/>
-              </a:ext>
-            </a:extLst>
-          </p:cNvPr>
-          <p:cNvSpPr>
-            <a:spLocks noChangeArrowheads="1"/>
-          </p:cNvSpPr>
-          <p:nvPr/>
-        </p:nvSpPr>
-        <p:spPr bwMode="auto">
-          <a:xfrm>
-            <a:off x="289178" y="1309410"/>
-            <a:ext cx="9477642" cy="783356"/>
-          </a:xfrm>
-          <a:prstGeom prst="rect">
-            <a:avLst/>
-          </a:prstGeom>
-          <a:solidFill>
-            <a:schemeClr val="bg1">
-              <a:lumMod val="85000"/>
-            </a:schemeClr>
-          </a:solidFill>
-          <a:ln>
-            <a:noFill/>
-          </a:ln>
-          <a:effectLst/>
-        </p:spPr>
-        <p:txBody>
-          <a:bodyPr vert="horz" wrap="square" lIns="91440" tIns="0" rIns="91440" bIns="45720" numCol="1" anchor="ctr" anchorCtr="0" compatLnSpc="1">
-            <a:prstTxWarp prst="textNoShape">
-              <a:avLst/>
-            </a:prstTxWarp>
-            <a:spAutoFit/>
-          </a:bodyPr>
-          <a:lstStyle/>
-          <a:p>
-            <a:pPr marL="285750" indent="-285750" eaLnBrk="0" fontAlgn="base" hangingPunct="0">
-              <a:lnSpc>
-                <a:spcPct val="150000"/>
-              </a:lnSpc>
-              <a:spcBef>
-                <a:spcPct val="0"/>
-              </a:spcBef>
-              <a:spcAft>
-                <a:spcPct val="0"/>
-              </a:spcAft>
-              <a:buFont typeface="Wingdings" panose="05000000000000000000" pitchFamily="2" charset="2"/>
-              <a:buChar char="v"/>
-            </a:pPr>
-            <a:r>
-              <a:rPr lang="en-US" altLang="ko-KR" dirty="0" err="1">
-                <a:latin typeface="맑은 고딕 Semilight" panose="020B0502040204020203" pitchFamily="50" charset="-127"/>
-                <a:ea typeface="맑은 고딕 Semilight" panose="020B0502040204020203" pitchFamily="50" charset="-127"/>
-                <a:cs typeface="맑은 고딕 Semilight" panose="020B0502040204020203" pitchFamily="50" charset="-127"/>
-              </a:rPr>
-              <a:t>sns.load_dataset</a:t>
-            </a:r>
-            <a:r>
-              <a:rPr lang="en-US" altLang="ko-KR" dirty="0">
-                <a:latin typeface="맑은 고딕 Semilight" panose="020B0502040204020203" pitchFamily="50" charset="-127"/>
-                <a:ea typeface="맑은 고딕 Semilight" panose="020B0502040204020203" pitchFamily="50" charset="-127"/>
-                <a:cs typeface="맑은 고딕 Semilight" panose="020B0502040204020203" pitchFamily="50" charset="-127"/>
-              </a:rPr>
-              <a:t>("penguins")</a:t>
-            </a:r>
-            <a:r>
-              <a:rPr lang="ko-KR" altLang="en-US" dirty="0">
-                <a:latin typeface="맑은 고딕 Semilight" panose="020B0502040204020203" pitchFamily="50" charset="-127"/>
-                <a:ea typeface="맑은 고딕 Semilight" panose="020B0502040204020203" pitchFamily="50" charset="-127"/>
-                <a:cs typeface="맑은 고딕 Semilight" panose="020B0502040204020203" pitchFamily="50" charset="-127"/>
-              </a:rPr>
-              <a:t>에서 </a:t>
-            </a:r>
-            <a:r>
-              <a:rPr lang="en-US" altLang="ko-KR" sz="1600" dirty="0">
-                <a:latin typeface="맑은 고딕 Semilight" panose="020B0502040204020203" pitchFamily="50" charset="-127"/>
-                <a:ea typeface="맑은 고딕 Semilight" panose="020B0502040204020203" pitchFamily="50" charset="-127"/>
-                <a:cs typeface="맑은 고딕 Semilight" panose="020B0502040204020203" pitchFamily="50" charset="-127"/>
-              </a:rPr>
-              <a:t>Nan</a:t>
-            </a:r>
-            <a:r>
-              <a:rPr lang="ko-KR" altLang="en-US" sz="1600" dirty="0">
-                <a:latin typeface="맑은 고딕 Semilight" panose="020B0502040204020203" pitchFamily="50" charset="-127"/>
-                <a:ea typeface="맑은 고딕 Semilight" panose="020B0502040204020203" pitchFamily="50" charset="-127"/>
-                <a:cs typeface="맑은 고딕 Semilight" panose="020B0502040204020203" pitchFamily="50" charset="-127"/>
-              </a:rPr>
-              <a:t>을 제거하고 </a:t>
-            </a:r>
-            <a:r>
-              <a:rPr lang="en-US" altLang="ko-KR" sz="1600" dirty="0">
-                <a:latin typeface="맑은 고딕 Semilight" panose="020B0502040204020203" pitchFamily="50" charset="-127"/>
-                <a:ea typeface="맑은 고딕 Semilight" panose="020B0502040204020203" pitchFamily="50" charset="-127"/>
-                <a:cs typeface="맑은 고딕 Semilight" panose="020B0502040204020203" pitchFamily="50" charset="-127"/>
-              </a:rPr>
-              <a:t>“Adelie” </a:t>
-            </a:r>
-            <a:r>
-              <a:rPr lang="ko-KR" altLang="en-US" sz="1600" dirty="0">
-                <a:latin typeface="맑은 고딕 Semilight" panose="020B0502040204020203" pitchFamily="50" charset="-127"/>
-                <a:ea typeface="맑은 고딕 Semilight" panose="020B0502040204020203" pitchFamily="50" charset="-127"/>
-                <a:cs typeface="맑은 고딕 Semilight" panose="020B0502040204020203" pitchFamily="50" charset="-127"/>
-              </a:rPr>
-              <a:t>종 펭귄을 제외한 총 </a:t>
-            </a:r>
-            <a:r>
-              <a:rPr lang="en-US" altLang="ko-KR" sz="1600" dirty="0">
-                <a:latin typeface="맑은 고딕 Semilight" panose="020B0502040204020203" pitchFamily="50" charset="-127"/>
-                <a:ea typeface="맑은 고딕 Semilight" panose="020B0502040204020203" pitchFamily="50" charset="-127"/>
-                <a:cs typeface="맑은 고딕 Semilight" panose="020B0502040204020203" pitchFamily="50" charset="-127"/>
-              </a:rPr>
-              <a:t>187</a:t>
-            </a:r>
-            <a:r>
-              <a:rPr lang="ko-KR" altLang="en-US" sz="1600" dirty="0">
-                <a:latin typeface="맑은 고딕 Semilight" panose="020B0502040204020203" pitchFamily="50" charset="-127"/>
-                <a:ea typeface="맑은 고딕 Semilight" panose="020B0502040204020203" pitchFamily="50" charset="-127"/>
-                <a:cs typeface="맑은 고딕 Semilight" panose="020B0502040204020203" pitchFamily="50" charset="-127"/>
-              </a:rPr>
-              <a:t>개 데이터를 바탕으로 </a:t>
-            </a:r>
-            <a:r>
-              <a:rPr lang="en-US" altLang="ko-KR" sz="1600" dirty="0">
-                <a:latin typeface="맑은 고딕 Semilight" panose="020B0502040204020203" pitchFamily="50" charset="-127"/>
-                <a:ea typeface="맑은 고딕 Semilight" panose="020B0502040204020203" pitchFamily="50" charset="-127"/>
-                <a:cs typeface="맑은 고딕 Semilight" panose="020B0502040204020203" pitchFamily="50" charset="-127"/>
-              </a:rPr>
-              <a:t>‘</a:t>
-            </a:r>
-            <a:r>
-              <a:rPr lang="en-US" altLang="ko-KR" sz="1600" dirty="0" err="1">
-                <a:latin typeface="맑은 고딕 Semilight" panose="020B0502040204020203" pitchFamily="50" charset="-127"/>
-                <a:ea typeface="맑은 고딕 Semilight" panose="020B0502040204020203" pitchFamily="50" charset="-127"/>
-                <a:cs typeface="맑은 고딕 Semilight" panose="020B0502040204020203" pitchFamily="50" charset="-127"/>
-              </a:rPr>
-              <a:t>flipper_length_mm</a:t>
-            </a:r>
-            <a:r>
-              <a:rPr lang="en-US" altLang="ko-KR" sz="1600" dirty="0">
-                <a:latin typeface="맑은 고딕 Semilight" panose="020B0502040204020203" pitchFamily="50" charset="-127"/>
-                <a:ea typeface="맑은 고딕 Semilight" panose="020B0502040204020203" pitchFamily="50" charset="-127"/>
-                <a:cs typeface="맑은 고딕 Semilight" panose="020B0502040204020203" pitchFamily="50" charset="-127"/>
-              </a:rPr>
-              <a:t>', '</a:t>
-            </a:r>
-            <a:r>
-              <a:rPr lang="en-US" altLang="ko-KR" sz="1600" dirty="0" err="1">
-                <a:latin typeface="맑은 고딕 Semilight" panose="020B0502040204020203" pitchFamily="50" charset="-127"/>
-                <a:ea typeface="맑은 고딕 Semilight" panose="020B0502040204020203" pitchFamily="50" charset="-127"/>
-                <a:cs typeface="맑은 고딕 Semilight" panose="020B0502040204020203" pitchFamily="50" charset="-127"/>
-              </a:rPr>
-              <a:t>body_mass_g</a:t>
-            </a:r>
-            <a:r>
-              <a:rPr lang="en-US" altLang="ko-KR" sz="1600" dirty="0">
-                <a:latin typeface="맑은 고딕 Semilight" panose="020B0502040204020203" pitchFamily="50" charset="-127"/>
-                <a:ea typeface="맑은 고딕 Semilight" panose="020B0502040204020203" pitchFamily="50" charset="-127"/>
-                <a:cs typeface="맑은 고딕 Semilight" panose="020B0502040204020203" pitchFamily="50" charset="-127"/>
-              </a:rPr>
-              <a:t>’ </a:t>
-            </a:r>
-            <a:r>
-              <a:rPr lang="ko-KR" altLang="en-US" sz="1600" dirty="0">
-                <a:latin typeface="맑은 고딕 Semilight" panose="020B0502040204020203" pitchFamily="50" charset="-127"/>
-                <a:ea typeface="맑은 고딕 Semilight" panose="020B0502040204020203" pitchFamily="50" charset="-127"/>
-                <a:cs typeface="맑은 고딕 Semilight" panose="020B0502040204020203" pitchFamily="50" charset="-127"/>
-              </a:rPr>
-              <a:t>의</a:t>
-            </a:r>
-            <a:r>
-              <a:rPr lang="en-US" altLang="ko-KR" sz="1600" dirty="0">
-                <a:latin typeface="맑은 고딕 Semilight" panose="020B0502040204020203" pitchFamily="50" charset="-127"/>
-                <a:ea typeface="맑은 고딕 Semilight" panose="020B0502040204020203" pitchFamily="50" charset="-127"/>
-                <a:cs typeface="맑은 고딕 Semilight" panose="020B0502040204020203" pitchFamily="50" charset="-127"/>
-              </a:rPr>
-              <a:t> feature </a:t>
-            </a:r>
-            <a:r>
-              <a:rPr lang="ko-KR" altLang="en-US" sz="1600" dirty="0">
-                <a:latin typeface="맑은 고딕 Semilight" panose="020B0502040204020203" pitchFamily="50" charset="-127"/>
-                <a:ea typeface="맑은 고딕 Semilight" panose="020B0502040204020203" pitchFamily="50" charset="-127"/>
-                <a:cs typeface="맑은 고딕 Semilight" panose="020B0502040204020203" pitchFamily="50" charset="-127"/>
-              </a:rPr>
-              <a:t>만을 사용하여 다음 질문에 답하라</a:t>
-            </a:r>
-            <a:endParaRPr lang="en-US" altLang="ko-KR" sz="1600" dirty="0">
-              <a:latin typeface="맑은 고딕 Semilight" panose="020B0502040204020203" pitchFamily="50" charset="-127"/>
-              <a:ea typeface="맑은 고딕 Semilight" panose="020B0502040204020203" pitchFamily="50" charset="-127"/>
-              <a:cs typeface="맑은 고딕 Semilight" panose="020B0502040204020203" pitchFamily="50" charset="-127"/>
-            </a:endParaRPr>
-          </a:p>
-        </p:txBody>
-      </p:sp>
-      <p:sp>
-        <p:nvSpPr>
-          <p:cNvPr id="3" name="Rectangle 1">
-            <a:extLst>
-              <a:ext uri="{FF2B5EF4-FFF2-40B4-BE49-F238E27FC236}">
-                <a16:creationId xmlns:a16="http://schemas.microsoft.com/office/drawing/2014/main" id="{E023ACA3-C0AF-BB15-AD09-4B3E2B1A7F7A}"/>
-              </a:ext>
-            </a:extLst>
-          </p:cNvPr>
-          <p:cNvSpPr>
-            <a:spLocks noChangeArrowheads="1"/>
-          </p:cNvSpPr>
-          <p:nvPr/>
-        </p:nvSpPr>
-        <p:spPr bwMode="auto">
-          <a:xfrm>
-            <a:off x="5230316" y="2444872"/>
-            <a:ext cx="6663406" cy="3559372"/>
-          </a:xfrm>
-          <a:prstGeom prst="rect">
-            <a:avLst/>
-          </a:prstGeom>
-          <a:solidFill>
-            <a:schemeClr val="bg1">
-              <a:lumMod val="85000"/>
-            </a:schemeClr>
-          </a:solidFill>
-          <a:ln>
-            <a:noFill/>
-          </a:ln>
-          <a:effectLst/>
-        </p:spPr>
-        <p:txBody>
-          <a:bodyPr vert="horz" wrap="square" lIns="91440" tIns="0" rIns="91440" bIns="45720" numCol="1" anchor="ctr" anchorCtr="0" compatLnSpc="1">
-            <a:prstTxWarp prst="textNoShape">
-              <a:avLst/>
-            </a:prstTxWarp>
-            <a:spAutoFit/>
-          </a:bodyPr>
-          <a:lstStyle/>
-          <a:p>
-            <a:pPr marL="285750" indent="-285750" eaLnBrk="0" fontAlgn="base" hangingPunct="0">
-              <a:lnSpc>
-                <a:spcPct val="150000"/>
-              </a:lnSpc>
-              <a:spcBef>
-                <a:spcPct val="0"/>
-              </a:spcBef>
-              <a:spcAft>
-                <a:spcPct val="0"/>
-              </a:spcAft>
-              <a:buFont typeface="Wingdings" panose="05000000000000000000" pitchFamily="2" charset="2"/>
-              <a:buChar char="v"/>
-            </a:pPr>
-            <a:r>
-              <a:rPr lang="en-US" altLang="ko-KR" sz="1400" dirty="0">
-                <a:latin typeface="맑은 고딕 Semilight" panose="020B0502040204020203" pitchFamily="50" charset="-127"/>
-                <a:ea typeface="맑은 고딕 Semilight" panose="020B0502040204020203" pitchFamily="50" charset="-127"/>
-                <a:cs typeface="맑은 고딕 Semilight" panose="020B0502040204020203" pitchFamily="50" charset="-127"/>
-              </a:rPr>
-              <a:t>“</a:t>
-            </a:r>
-            <a:r>
-              <a:rPr lang="en-US" altLang="ko-KR" sz="1400" dirty="0" err="1">
-                <a:latin typeface="맑은 고딕 Semilight" panose="020B0502040204020203" pitchFamily="50" charset="-127"/>
-                <a:ea typeface="맑은 고딕 Semilight" panose="020B0502040204020203" pitchFamily="50" charset="-127"/>
-                <a:cs typeface="맑은 고딕 Semilight" panose="020B0502040204020203" pitchFamily="50" charset="-127"/>
-              </a:rPr>
-              <a:t>flipper_length_mm</a:t>
-            </a:r>
-            <a:r>
-              <a:rPr lang="en-US" altLang="ko-KR" sz="1400" dirty="0">
-                <a:latin typeface="맑은 고딕 Semilight" panose="020B0502040204020203" pitchFamily="50" charset="-127"/>
-                <a:ea typeface="맑은 고딕 Semilight" panose="020B0502040204020203" pitchFamily="50" charset="-127"/>
-                <a:cs typeface="맑은 고딕 Semilight" panose="020B0502040204020203" pitchFamily="50" charset="-127"/>
-              </a:rPr>
-              <a:t>” </a:t>
-            </a:r>
-            <a:r>
-              <a:rPr lang="ko-KR" altLang="en-US" sz="1400" dirty="0">
-                <a:latin typeface="맑은 고딕 Semilight" panose="020B0502040204020203" pitchFamily="50" charset="-127"/>
-                <a:ea typeface="맑은 고딕 Semilight" panose="020B0502040204020203" pitchFamily="50" charset="-127"/>
-                <a:cs typeface="맑은 고딕 Semilight" panose="020B0502040204020203" pitchFamily="50" charset="-127"/>
-              </a:rPr>
-              <a:t>와 </a:t>
-            </a:r>
-            <a:r>
-              <a:rPr lang="en-US" altLang="ko-KR" sz="1400" dirty="0">
-                <a:latin typeface="맑은 고딕 Semilight" panose="020B0502040204020203" pitchFamily="50" charset="-127"/>
-                <a:ea typeface="맑은 고딕 Semilight" panose="020B0502040204020203" pitchFamily="50" charset="-127"/>
-                <a:cs typeface="맑은 고딕 Semilight" panose="020B0502040204020203" pitchFamily="50" charset="-127"/>
-              </a:rPr>
-              <a:t>“</a:t>
-            </a:r>
-            <a:r>
-              <a:rPr lang="en-US" altLang="ko-KR" sz="1400" dirty="0" err="1">
-                <a:latin typeface="맑은 고딕 Semilight" panose="020B0502040204020203" pitchFamily="50" charset="-127"/>
-                <a:ea typeface="맑은 고딕 Semilight" panose="020B0502040204020203" pitchFamily="50" charset="-127"/>
-                <a:cs typeface="맑은 고딕 Semilight" panose="020B0502040204020203" pitchFamily="50" charset="-127"/>
-              </a:rPr>
-              <a:t>body_mass_g</a:t>
-            </a:r>
-            <a:r>
-              <a:rPr lang="en-US" altLang="ko-KR" sz="1400" dirty="0">
-                <a:latin typeface="맑은 고딕 Semilight" panose="020B0502040204020203" pitchFamily="50" charset="-127"/>
-                <a:ea typeface="맑은 고딕 Semilight" panose="020B0502040204020203" pitchFamily="50" charset="-127"/>
-                <a:cs typeface="맑은 고딕 Semilight" panose="020B0502040204020203" pitchFamily="50" charset="-127"/>
-              </a:rPr>
-              <a:t>”</a:t>
-            </a:r>
-            <a:r>
-              <a:rPr lang="ko-KR" altLang="en-US" sz="1400" dirty="0">
-                <a:latin typeface="맑은 고딕 Semilight" panose="020B0502040204020203" pitchFamily="50" charset="-127"/>
-                <a:ea typeface="맑은 고딕 Semilight" panose="020B0502040204020203" pitchFamily="50" charset="-127"/>
-                <a:cs typeface="맑은 고딕 Semilight" panose="020B0502040204020203" pitchFamily="50" charset="-127"/>
-              </a:rPr>
-              <a:t> </a:t>
-            </a:r>
-            <a:r>
-              <a:rPr lang="en-US" altLang="ko-KR" sz="1400" dirty="0">
-                <a:latin typeface="맑은 고딕 Semilight" panose="020B0502040204020203" pitchFamily="50" charset="-127"/>
-                <a:ea typeface="맑은 고딕 Semilight" panose="020B0502040204020203" pitchFamily="50" charset="-127"/>
-                <a:cs typeface="맑은 고딕 Semilight" panose="020B0502040204020203" pitchFamily="50" charset="-127"/>
-              </a:rPr>
-              <a:t>2</a:t>
-            </a:r>
-            <a:r>
-              <a:rPr lang="ko-KR" altLang="en-US" sz="1400" dirty="0">
-                <a:latin typeface="맑은 고딕 Semilight" panose="020B0502040204020203" pitchFamily="50" charset="-127"/>
-                <a:ea typeface="맑은 고딕 Semilight" panose="020B0502040204020203" pitchFamily="50" charset="-127"/>
-                <a:cs typeface="맑은 고딕 Semilight" panose="020B0502040204020203" pitchFamily="50" charset="-127"/>
-              </a:rPr>
-              <a:t>개 </a:t>
-            </a:r>
-            <a:r>
-              <a:rPr lang="en-US" altLang="ko-KR" sz="1400" dirty="0">
-                <a:latin typeface="맑은 고딕 Semilight" panose="020B0502040204020203" pitchFamily="50" charset="-127"/>
-                <a:ea typeface="맑은 고딕 Semilight" panose="020B0502040204020203" pitchFamily="50" charset="-127"/>
-                <a:cs typeface="맑은 고딕 Semilight" panose="020B0502040204020203" pitchFamily="50" charset="-127"/>
-              </a:rPr>
-              <a:t>feature</a:t>
-            </a:r>
-            <a:r>
-              <a:rPr lang="ko-KR" altLang="en-US" sz="1400" dirty="0">
-                <a:latin typeface="맑은 고딕 Semilight" panose="020B0502040204020203" pitchFamily="50" charset="-127"/>
-                <a:ea typeface="맑은 고딕 Semilight" panose="020B0502040204020203" pitchFamily="50" charset="-127"/>
-                <a:cs typeface="맑은 고딕 Semilight" panose="020B0502040204020203" pitchFamily="50" charset="-127"/>
-              </a:rPr>
-              <a:t>를 사용하면 분류</a:t>
-            </a:r>
-            <a:r>
-              <a:rPr lang="en-US" altLang="ko-KR" sz="1400" dirty="0">
-                <a:latin typeface="맑은 고딕 Semilight" panose="020B0502040204020203" pitchFamily="50" charset="-127"/>
-                <a:ea typeface="맑은 고딕 Semilight" panose="020B0502040204020203" pitchFamily="50" charset="-127"/>
-                <a:cs typeface="맑은 고딕 Semilight" panose="020B0502040204020203" pitchFamily="50" charset="-127"/>
-              </a:rPr>
-              <a:t>(classification)</a:t>
-            </a:r>
-            <a:r>
-              <a:rPr lang="ko-KR" altLang="en-US" sz="1400" dirty="0">
-                <a:latin typeface="맑은 고딕 Semilight" panose="020B0502040204020203" pitchFamily="50" charset="-127"/>
-                <a:ea typeface="맑은 고딕 Semilight" panose="020B0502040204020203" pitchFamily="50" charset="-127"/>
-                <a:cs typeface="맑은 고딕 Semilight" panose="020B0502040204020203" pitchFamily="50" charset="-127"/>
-              </a:rPr>
-              <a:t>를 하는 기준 값을 제시하라</a:t>
-            </a:r>
-            <a:endParaRPr lang="en-US" altLang="ko-KR" sz="1400" dirty="0">
-              <a:latin typeface="맑은 고딕 Semilight" panose="020B0502040204020203" pitchFamily="50" charset="-127"/>
-              <a:ea typeface="맑은 고딕 Semilight" panose="020B0502040204020203" pitchFamily="50" charset="-127"/>
-              <a:cs typeface="맑은 고딕 Semilight" panose="020B0502040204020203" pitchFamily="50" charset="-127"/>
-            </a:endParaRPr>
-          </a:p>
-          <a:p>
-            <a:pPr marL="285750" indent="-285750" eaLnBrk="0" fontAlgn="base" hangingPunct="0">
-              <a:lnSpc>
-                <a:spcPct val="150000"/>
-              </a:lnSpc>
-              <a:spcBef>
-                <a:spcPct val="0"/>
-              </a:spcBef>
-              <a:spcAft>
-                <a:spcPct val="0"/>
-              </a:spcAft>
-              <a:buFont typeface="Wingdings" panose="05000000000000000000" pitchFamily="2" charset="2"/>
-              <a:buChar char="v"/>
-            </a:pPr>
-            <a:endParaRPr lang="en-US" altLang="ko-KR" sz="1400" dirty="0">
-              <a:latin typeface="맑은 고딕 Semilight" panose="020B0502040204020203" pitchFamily="50" charset="-127"/>
-              <a:ea typeface="맑은 고딕 Semilight" panose="020B0502040204020203" pitchFamily="50" charset="-127"/>
-              <a:cs typeface="맑은 고딕 Semilight" panose="020B0502040204020203" pitchFamily="50" charset="-127"/>
-            </a:endParaRPr>
-          </a:p>
-          <a:p>
-            <a:pPr marL="285750" indent="-285750" eaLnBrk="0" fontAlgn="base" hangingPunct="0">
-              <a:lnSpc>
-                <a:spcPct val="150000"/>
-              </a:lnSpc>
-              <a:spcBef>
-                <a:spcPct val="0"/>
-              </a:spcBef>
-              <a:spcAft>
-                <a:spcPct val="0"/>
-              </a:spcAft>
-              <a:buFont typeface="Wingdings" panose="05000000000000000000" pitchFamily="2" charset="2"/>
-              <a:buChar char="v"/>
-            </a:pPr>
-            <a:r>
-              <a:rPr lang="ko-KR" altLang="en-US" sz="1400" dirty="0">
-                <a:latin typeface="맑은 고딕 Semilight" panose="020B0502040204020203" pitchFamily="50" charset="-127"/>
-                <a:ea typeface="맑은 고딕 Semilight" panose="020B0502040204020203" pitchFamily="50" charset="-127"/>
-                <a:cs typeface="맑은 고딕 Semilight" panose="020B0502040204020203" pitchFamily="50" charset="-127"/>
-              </a:rPr>
-              <a:t>분류를 잘못하는 경우가 몇 가지 있으며</a:t>
-            </a:r>
-            <a:r>
-              <a:rPr lang="en-US" altLang="ko-KR" sz="1400" dirty="0">
-                <a:latin typeface="맑은 고딕 Semilight" panose="020B0502040204020203" pitchFamily="50" charset="-127"/>
-                <a:ea typeface="맑은 고딕 Semilight" panose="020B0502040204020203" pitchFamily="50" charset="-127"/>
-                <a:cs typeface="맑은 고딕 Semilight" panose="020B0502040204020203" pitchFamily="50" charset="-127"/>
-              </a:rPr>
-              <a:t>,</a:t>
-            </a:r>
-          </a:p>
-          <a:p>
-            <a:pPr marL="285750" indent="-285750" eaLnBrk="0" fontAlgn="base" hangingPunct="0">
-              <a:lnSpc>
-                <a:spcPct val="150000"/>
-              </a:lnSpc>
-              <a:spcBef>
-                <a:spcPct val="0"/>
-              </a:spcBef>
-              <a:spcAft>
-                <a:spcPct val="0"/>
-              </a:spcAft>
-              <a:buFont typeface="Wingdings" panose="05000000000000000000" pitchFamily="2" charset="2"/>
-              <a:buChar char="v"/>
-            </a:pPr>
-            <a:endParaRPr lang="en-US" altLang="ko-KR" sz="1400" dirty="0">
-              <a:latin typeface="맑은 고딕 Semilight" panose="020B0502040204020203" pitchFamily="50" charset="-127"/>
-              <a:ea typeface="맑은 고딕 Semilight" panose="020B0502040204020203" pitchFamily="50" charset="-127"/>
-              <a:cs typeface="맑은 고딕 Semilight" panose="020B0502040204020203" pitchFamily="50" charset="-127"/>
-            </a:endParaRPr>
-          </a:p>
-          <a:p>
-            <a:pPr marL="285750" indent="-285750" eaLnBrk="0" fontAlgn="base" hangingPunct="0">
-              <a:lnSpc>
-                <a:spcPct val="150000"/>
-              </a:lnSpc>
-              <a:spcBef>
-                <a:spcPct val="0"/>
-              </a:spcBef>
-              <a:spcAft>
-                <a:spcPct val="0"/>
-              </a:spcAft>
-              <a:buFont typeface="Wingdings" panose="05000000000000000000" pitchFamily="2" charset="2"/>
-              <a:buChar char="v"/>
-            </a:pPr>
-            <a:r>
-              <a:rPr lang="ko-KR" altLang="en-US" sz="1400" dirty="0">
-                <a:latin typeface="맑은 고딕 Semilight" panose="020B0502040204020203" pitchFamily="50" charset="-127"/>
-                <a:ea typeface="맑은 고딕 Semilight" panose="020B0502040204020203" pitchFamily="50" charset="-127"/>
-                <a:cs typeface="맑은 고딕 Semilight" panose="020B0502040204020203" pitchFamily="50" charset="-127"/>
-              </a:rPr>
-              <a:t>잘 못 분류한 경우에 따른 오류의 개수는 각각 몇 개인가</a:t>
-            </a:r>
-            <a:r>
-              <a:rPr lang="en-US" altLang="ko-KR" sz="1400" dirty="0">
-                <a:latin typeface="맑은 고딕 Semilight" panose="020B0502040204020203" pitchFamily="50" charset="-127"/>
-                <a:ea typeface="맑은 고딕 Semilight" panose="020B0502040204020203" pitchFamily="50" charset="-127"/>
-                <a:cs typeface="맑은 고딕 Semilight" panose="020B0502040204020203" pitchFamily="50" charset="-127"/>
-              </a:rPr>
-              <a:t>?</a:t>
-            </a:r>
-          </a:p>
-          <a:p>
-            <a:pPr marL="285750" indent="-285750" eaLnBrk="0" fontAlgn="base" hangingPunct="0">
-              <a:lnSpc>
-                <a:spcPct val="150000"/>
-              </a:lnSpc>
-              <a:spcBef>
-                <a:spcPct val="0"/>
-              </a:spcBef>
-              <a:spcAft>
-                <a:spcPct val="0"/>
-              </a:spcAft>
-              <a:buFont typeface="Wingdings" panose="05000000000000000000" pitchFamily="2" charset="2"/>
-              <a:buChar char="v"/>
-            </a:pPr>
-            <a:endParaRPr lang="en-US" altLang="ko-KR" sz="1400" dirty="0">
-              <a:latin typeface="맑은 고딕 Semilight" panose="020B0502040204020203" pitchFamily="50" charset="-127"/>
-              <a:ea typeface="맑은 고딕 Semilight" panose="020B0502040204020203" pitchFamily="50" charset="-127"/>
-              <a:cs typeface="맑은 고딕 Semilight" panose="020B0502040204020203" pitchFamily="50" charset="-127"/>
-            </a:endParaRPr>
-          </a:p>
-          <a:p>
-            <a:pPr marL="285750" indent="-285750" eaLnBrk="0" fontAlgn="base" hangingPunct="0">
-              <a:lnSpc>
-                <a:spcPct val="150000"/>
-              </a:lnSpc>
-              <a:spcBef>
-                <a:spcPct val="0"/>
-              </a:spcBef>
-              <a:spcAft>
-                <a:spcPct val="0"/>
-              </a:spcAft>
-              <a:buFont typeface="Wingdings" panose="05000000000000000000" pitchFamily="2" charset="2"/>
-              <a:buChar char="v"/>
-            </a:pPr>
-            <a:r>
-              <a:rPr lang="en-US" altLang="ko-KR" sz="1400" dirty="0">
-                <a:latin typeface="맑은 고딕 Semilight" panose="020B0502040204020203" pitchFamily="50" charset="-127"/>
-                <a:ea typeface="맑은 고딕 Semilight" panose="020B0502040204020203" pitchFamily="50" charset="-127"/>
-                <a:cs typeface="맑은 고딕 Semilight" panose="020B0502040204020203" pitchFamily="50" charset="-127"/>
-              </a:rPr>
-              <a:t>Gentoo</a:t>
-            </a:r>
-            <a:r>
-              <a:rPr lang="ko-KR" altLang="en-US" sz="1400" dirty="0">
-                <a:latin typeface="맑은 고딕 Semilight" panose="020B0502040204020203" pitchFamily="50" charset="-127"/>
-                <a:ea typeface="맑은 고딕 Semilight" panose="020B0502040204020203" pitchFamily="50" charset="-127"/>
-                <a:cs typeface="맑은 고딕 Semilight" panose="020B0502040204020203" pitchFamily="50" charset="-127"/>
-              </a:rPr>
-              <a:t>는 </a:t>
-            </a:r>
-            <a:r>
-              <a:rPr lang="ko-KR" altLang="en-US" sz="1400" dirty="0" err="1">
-                <a:latin typeface="맑은 고딕 Semilight" panose="020B0502040204020203" pitchFamily="50" charset="-127"/>
-                <a:ea typeface="맑은 고딕 Semilight" panose="020B0502040204020203" pitchFamily="50" charset="-127"/>
-                <a:cs typeface="맑은 고딕 Semilight" panose="020B0502040204020203" pitchFamily="50" charset="-127"/>
-              </a:rPr>
-              <a:t>천연기념물이고</a:t>
-            </a:r>
-            <a:r>
-              <a:rPr lang="ko-KR" altLang="en-US" sz="1400" dirty="0">
-                <a:latin typeface="맑은 고딕 Semilight" panose="020B0502040204020203" pitchFamily="50" charset="-127"/>
-                <a:ea typeface="맑은 고딕 Semilight" panose="020B0502040204020203" pitchFamily="50" charset="-127"/>
-                <a:cs typeface="맑은 고딕 Semilight" panose="020B0502040204020203" pitchFamily="50" charset="-127"/>
-              </a:rPr>
-              <a:t> 병이 잘 걸려 찾아내서 치료를 해주어야 하는 것이 목적이라면</a:t>
-            </a:r>
-            <a:r>
-              <a:rPr lang="en-US" altLang="ko-KR" sz="1400" dirty="0">
-                <a:latin typeface="맑은 고딕 Semilight" panose="020B0502040204020203" pitchFamily="50" charset="-127"/>
-                <a:ea typeface="맑은 고딕 Semilight" panose="020B0502040204020203" pitchFamily="50" charset="-127"/>
-                <a:cs typeface="맑은 고딕 Semilight" panose="020B0502040204020203" pitchFamily="50" charset="-127"/>
-              </a:rPr>
-              <a:t>, </a:t>
-            </a:r>
-            <a:r>
-              <a:rPr lang="ko-KR" altLang="en-US" sz="1400" dirty="0">
-                <a:latin typeface="맑은 고딕 Semilight" panose="020B0502040204020203" pitchFamily="50" charset="-127"/>
-                <a:ea typeface="맑은 고딕 Semilight" panose="020B0502040204020203" pitchFamily="50" charset="-127"/>
-                <a:cs typeface="맑은 고딕 Semilight" panose="020B0502040204020203" pitchFamily="50" charset="-127"/>
-              </a:rPr>
-              <a:t>어떤 값으로 결정해야 겠는가</a:t>
-            </a:r>
-            <a:r>
-              <a:rPr lang="en-US" altLang="ko-KR" sz="1400" dirty="0">
-                <a:latin typeface="맑은 고딕 Semilight" panose="020B0502040204020203" pitchFamily="50" charset="-127"/>
-                <a:ea typeface="맑은 고딕 Semilight" panose="020B0502040204020203" pitchFamily="50" charset="-127"/>
-                <a:cs typeface="맑은 고딕 Semilight" panose="020B0502040204020203" pitchFamily="50" charset="-127"/>
-              </a:rPr>
-              <a:t>? </a:t>
-            </a:r>
-            <a:r>
-              <a:rPr lang="ko-KR" altLang="en-US" sz="1400" dirty="0">
-                <a:latin typeface="맑은 고딕 Semilight" panose="020B0502040204020203" pitchFamily="50" charset="-127"/>
-                <a:ea typeface="맑은 고딕 Semilight" panose="020B0502040204020203" pitchFamily="50" charset="-127"/>
-                <a:cs typeface="맑은 고딕 Semilight" panose="020B0502040204020203" pitchFamily="50" charset="-127"/>
-              </a:rPr>
-              <a:t>그 이유를 </a:t>
-            </a:r>
-            <a:r>
-              <a:rPr lang="ko-KR" altLang="en-US" sz="1400" dirty="0" err="1">
-                <a:latin typeface="맑은 고딕 Semilight" panose="020B0502040204020203" pitchFamily="50" charset="-127"/>
-                <a:ea typeface="맑은 고딕 Semilight" panose="020B0502040204020203" pitchFamily="50" charset="-127"/>
-                <a:cs typeface="맑은 고딕 Semilight" panose="020B0502040204020203" pitchFamily="50" charset="-127"/>
-              </a:rPr>
-              <a:t>설명하시오</a:t>
-            </a:r>
-            <a:r>
-              <a:rPr lang="en-US" altLang="ko-KR" sz="1400" dirty="0">
-                <a:latin typeface="맑은 고딕 Semilight" panose="020B0502040204020203" pitchFamily="50" charset="-127"/>
-                <a:ea typeface="맑은 고딕 Semilight" panose="020B0502040204020203" pitchFamily="50" charset="-127"/>
-                <a:cs typeface="맑은 고딕 Semilight" panose="020B0502040204020203" pitchFamily="50" charset="-127"/>
-              </a:rPr>
-              <a:t>.</a:t>
-            </a:r>
-          </a:p>
-          <a:p>
-            <a:pPr marL="285750" indent="-285750" eaLnBrk="0" fontAlgn="base" hangingPunct="0">
-              <a:lnSpc>
-                <a:spcPct val="150000"/>
-              </a:lnSpc>
-              <a:spcBef>
-                <a:spcPct val="0"/>
-              </a:spcBef>
-              <a:spcAft>
-                <a:spcPct val="0"/>
-              </a:spcAft>
-              <a:buFont typeface="Wingdings" panose="05000000000000000000" pitchFamily="2" charset="2"/>
-              <a:buChar char="v"/>
-            </a:pPr>
-            <a:endParaRPr lang="en-US" altLang="ko-KR" sz="1400" dirty="0">
-              <a:latin typeface="맑은 고딕 Semilight" panose="020B0502040204020203" pitchFamily="50" charset="-127"/>
-              <a:ea typeface="맑은 고딕 Semilight" panose="020B0502040204020203" pitchFamily="50" charset="-127"/>
-              <a:cs typeface="맑은 고딕 Semilight" panose="020B0502040204020203" pitchFamily="50" charset="-127"/>
-            </a:endParaRPr>
-          </a:p>
-          <a:p>
-            <a:pPr marL="285750" indent="-285750" eaLnBrk="0" fontAlgn="base" hangingPunct="0">
-              <a:lnSpc>
-                <a:spcPct val="150000"/>
-              </a:lnSpc>
-              <a:spcBef>
-                <a:spcPct val="0"/>
-              </a:spcBef>
-              <a:spcAft>
-                <a:spcPct val="0"/>
-              </a:spcAft>
-              <a:buFont typeface="Wingdings" panose="05000000000000000000" pitchFamily="2" charset="2"/>
-              <a:buChar char="v"/>
-            </a:pPr>
-            <a:r>
-              <a:rPr lang="en-US" altLang="ko-KR" sz="1400" dirty="0" err="1">
-                <a:latin typeface="맑은 고딕 Semilight" panose="020B0502040204020203" pitchFamily="50" charset="-127"/>
-                <a:ea typeface="맑은 고딕 Semilight" panose="020B0502040204020203" pitchFamily="50" charset="-127"/>
-                <a:cs typeface="맑은 고딕 Semilight" panose="020B0502040204020203" pitchFamily="50" charset="-127"/>
-              </a:rPr>
-              <a:t>featur</a:t>
-            </a:r>
-            <a:r>
-              <a:rPr lang="ko-KR" altLang="en-US" sz="1400" dirty="0">
-                <a:latin typeface="맑은 고딕 Semilight" panose="020B0502040204020203" pitchFamily="50" charset="-127"/>
-                <a:ea typeface="맑은 고딕 Semilight" panose="020B0502040204020203" pitchFamily="50" charset="-127"/>
-                <a:cs typeface="맑은 고딕 Semilight" panose="020B0502040204020203" pitchFamily="50" charset="-127"/>
-              </a:rPr>
-              <a:t>가 아주 많아지면 의사결정이 가능하겠는가</a:t>
-            </a:r>
-            <a:r>
-              <a:rPr lang="en-US" altLang="ko-KR" sz="1400" dirty="0">
-                <a:latin typeface="맑은 고딕 Semilight" panose="020B0502040204020203" pitchFamily="50" charset="-127"/>
-                <a:ea typeface="맑은 고딕 Semilight" panose="020B0502040204020203" pitchFamily="50" charset="-127"/>
-                <a:cs typeface="맑은 고딕 Semilight" panose="020B0502040204020203" pitchFamily="50" charset="-127"/>
-              </a:rPr>
-              <a:t>?</a:t>
-            </a:r>
-          </a:p>
-        </p:txBody>
-      </p:sp>
-      <p:pic>
-        <p:nvPicPr>
-          <p:cNvPr id="3076" name="Picture 4">
-            <a:extLst>
-              <a:ext uri="{FF2B5EF4-FFF2-40B4-BE49-F238E27FC236}">
-                <a16:creationId xmlns:a16="http://schemas.microsoft.com/office/drawing/2014/main" id="{A35E2700-4BA3-7734-5D6C-C50CE92CF960}"/>
-              </a:ext>
-            </a:extLst>
-          </p:cNvPr>
-          <p:cNvPicPr>
-            <a:picLocks noChangeAspect="1" noChangeArrowheads="1"/>
-          </p:cNvPicPr>
-          <p:nvPr/>
-        </p:nvPicPr>
-        <p:blipFill>
-          <a:blip r:embed="rId3">
-            <a:extLst>
-              <a:ext uri="{28A0092B-C50C-407E-A947-70E740481C1C}">
-                <a14:useLocalDpi xmlns:a14="http://schemas.microsoft.com/office/drawing/2010/main" val="0"/>
-              </a:ext>
-            </a:extLst>
-          </a:blip>
-          <a:srcRect/>
-          <a:stretch>
-            <a:fillRect/>
-          </a:stretch>
-        </p:blipFill>
-        <p:spPr bwMode="auto">
-          <a:xfrm>
-            <a:off x="289178" y="2444872"/>
-            <a:ext cx="3783085" cy="3884304"/>
-          </a:xfrm>
-          <a:prstGeom prst="rect">
-            <a:avLst/>
-          </a:prstGeom>
-          <a:noFill/>
-          <a:extLst>
-            <a:ext uri="{909E8E84-426E-40DD-AFC4-6F175D3DCCD1}">
-              <a14:hiddenFill xmlns:a14="http://schemas.microsoft.com/office/drawing/2010/main">
-                <a:solidFill>
-                  <a:srgbClr val="FFFFFF"/>
-                </a:solidFill>
-              </a14:hiddenFill>
-            </a:ext>
-          </a:extLst>
-        </p:spPr>
-      </p:pic>
-      <p:pic>
-        <p:nvPicPr>
-          <p:cNvPr id="4" name="Picture 2" descr="한 여자가 노트북 컴퓨터에 타이핑을 하고 있다">
-            <a:extLst>
-              <a:ext uri="{FF2B5EF4-FFF2-40B4-BE49-F238E27FC236}">
-                <a16:creationId xmlns:a16="http://schemas.microsoft.com/office/drawing/2014/main" id="{C81D2D8D-C09D-5D15-C6EE-D7672BD773AC}"/>
-              </a:ext>
-            </a:extLst>
-          </p:cNvPr>
-          <p:cNvPicPr>
-            <a:picLocks noChangeAspect="1" noChangeArrowheads="1"/>
-          </p:cNvPicPr>
-          <p:nvPr/>
-        </p:nvPicPr>
-        <p:blipFill>
-          <a:blip r:embed="rId4" cstate="print">
-            <a:extLst>
-              <a:ext uri="{28A0092B-C50C-407E-A947-70E740481C1C}">
-                <a14:useLocalDpi xmlns:a14="http://schemas.microsoft.com/office/drawing/2010/main" val="0"/>
-              </a:ext>
-            </a:extLst>
-          </a:blip>
-          <a:srcRect/>
-          <a:stretch>
-            <a:fillRect/>
-          </a:stretch>
-        </p:blipFill>
-        <p:spPr bwMode="auto">
-          <a:xfrm>
-            <a:off x="9918426" y="260648"/>
-            <a:ext cx="2152650" cy="1424329"/>
-          </a:xfrm>
-          <a:prstGeom prst="rect">
-            <a:avLst/>
-          </a:prstGeom>
-          <a:noFill/>
-          <a:extLst>
-            <a:ext uri="{909E8E84-426E-40DD-AFC4-6F175D3DCCD1}">
-              <a14:hiddenFill xmlns:a14="http://schemas.microsoft.com/office/drawing/2010/main">
-                <a:solidFill>
-                  <a:srgbClr val="FFFFFF"/>
-                </a:solidFill>
-              </a14:hiddenFill>
-            </a:ext>
-          </a:extLst>
-        </p:spPr>
-      </p:pic>
-    </p:spTree>
-    <p:extLst>
-      <p:ext uri="{BB962C8B-B14F-4D97-AF65-F5344CB8AC3E}">
-        <p14:creationId xmlns:p14="http://schemas.microsoft.com/office/powerpoint/2010/main" val="370321040"/>
       </p:ext>
     </p:extLst>
   </p:cSld>
@@ -14334,7 +13950,7 @@
           <p:cNvPr id="2" name="TextBox 1">
             <a:extLst>
               <a:ext uri="{FF2B5EF4-FFF2-40B4-BE49-F238E27FC236}">
-                <a16:creationId xmlns:a16="http://schemas.microsoft.com/office/drawing/2014/main" id="{36EEF756-F50F-9F93-DCD4-0A9EB0ED493D}"/>
+                <a16:creationId xmlns:a16="http://schemas.microsoft.com/office/drawing/2014/main" id="{6F884A9C-176F-954C-B293-76195920609C}"/>
               </a:ext>
             </a:extLst>
           </p:cNvPr>
@@ -14343,8 +13959,8 @@
         </p:nvSpPr>
         <p:spPr>
           <a:xfrm>
-            <a:off x="5155476" y="6130934"/>
-            <a:ext cx="2063385" cy="307777"/>
+            <a:off x="7047646" y="2224651"/>
+            <a:ext cx="1261884" cy="307777"/>
           </a:xfrm>
           <a:prstGeom prst="rect">
             <a:avLst/>
@@ -14357,161 +13973,17 @@
           </a:bodyPr>
           <a:lstStyle/>
           <a:p>
-            <a:pPr marL="285750" indent="-285750">
-              <a:buFont typeface="Wingdings" panose="05000000000000000000" pitchFamily="2" charset="2"/>
-              <a:buChar char="§"/>
-            </a:pPr>
             <a:r>
               <a:rPr lang="ko-KR" altLang="en-US" sz="1400" dirty="0"/>
-              <a:t>표본평균</a:t>
-            </a:r>
-            <a:r>
-              <a:rPr lang="en-US" altLang="ko-KR" sz="1400" dirty="0"/>
-              <a:t>, </a:t>
-            </a:r>
-            <a:r>
-              <a:rPr lang="ko-KR" altLang="en-US" sz="1400" dirty="0"/>
-              <a:t>표본</a:t>
-            </a:r>
-            <a:r>
-              <a:rPr lang="en-US" altLang="ko-KR" sz="1400" dirty="0"/>
-              <a:t> </a:t>
-            </a:r>
-            <a:r>
-              <a:rPr lang="ko-KR" altLang="en-US" sz="1400" dirty="0"/>
-              <a:t>분산</a:t>
-            </a:r>
-          </a:p>
-        </p:txBody>
-      </p:sp>
-      <mc:AlternateContent xmlns:mc="http://schemas.openxmlformats.org/markup-compatibility/2006" xmlns:a14="http://schemas.microsoft.com/office/drawing/2010/main">
-        <mc:Choice Requires="a14">
-          <p:sp>
-            <p:nvSpPr>
-              <p:cNvPr id="4" name="TextBox 3">
-                <a:extLst>
-                  <a:ext uri="{FF2B5EF4-FFF2-40B4-BE49-F238E27FC236}">
-                    <a16:creationId xmlns:a16="http://schemas.microsoft.com/office/drawing/2014/main" id="{F062FE60-E196-7FB5-177A-9E794CBE5CEB}"/>
-                  </a:ext>
-                </a:extLst>
-              </p:cNvPr>
-              <p:cNvSpPr txBox="1"/>
-              <p:nvPr/>
-            </p:nvSpPr>
-            <p:spPr>
-              <a:xfrm>
-                <a:off x="7559419" y="6125612"/>
-                <a:ext cx="2281394" cy="307777"/>
-              </a:xfrm>
-              <a:prstGeom prst="rect">
-                <a:avLst/>
-              </a:prstGeom>
-              <a:noFill/>
-            </p:spPr>
-            <p:txBody>
-              <a:bodyPr wrap="none" rtlCol="0">
-                <a:spAutoFit/>
-              </a:bodyPr>
-              <a:lstStyle/>
-              <a:p>
-                <a:pPr marL="285750" indent="-285750">
-                  <a:buFont typeface="Wingdings" panose="05000000000000000000" pitchFamily="2" charset="2"/>
-                  <a:buChar char="§"/>
-                </a:pPr>
-                <a:r>
-                  <a:rPr lang="ko-KR" altLang="en-US" sz="1400" dirty="0"/>
-                  <a:t>표본평균 </a:t>
-                </a:r>
-                <a14:m>
-                  <m:oMath xmlns:m="http://schemas.openxmlformats.org/officeDocument/2006/math">
-                    <m:r>
-                      <a:rPr lang="en-US" altLang="ko-KR" sz="1400" i="1" smtClean="0">
-                        <a:latin typeface="Cambria Math" panose="02040503050406030204" pitchFamily="18" charset="0"/>
-                        <a:ea typeface="Cambria Math" panose="02040503050406030204" pitchFamily="18" charset="0"/>
-                      </a:rPr>
-                      <m:t>±</m:t>
-                    </m:r>
-                    <m:r>
-                      <a:rPr lang="en-US" altLang="ko-KR" sz="1400" b="0" i="1" smtClean="0">
-                        <a:latin typeface="Cambria Math" panose="02040503050406030204" pitchFamily="18" charset="0"/>
-                        <a:ea typeface="Cambria Math" panose="02040503050406030204" pitchFamily="18" charset="0"/>
-                      </a:rPr>
-                      <m:t> </m:t>
-                    </m:r>
-                    <m:r>
-                      <a:rPr lang="en-US" altLang="ko-KR" sz="1400" i="1" smtClean="0">
-                        <a:latin typeface="Cambria Math" panose="02040503050406030204" pitchFamily="18" charset="0"/>
-                        <a:ea typeface="Cambria Math" panose="02040503050406030204" pitchFamily="18" charset="0"/>
-                      </a:rPr>
-                      <m:t>∝</m:t>
-                    </m:r>
-                  </m:oMath>
-                </a14:m>
-                <a:r>
-                  <a:rPr lang="ko-KR" altLang="en-US" sz="1400" dirty="0"/>
-                  <a:t>표본</a:t>
-                </a:r>
-                <a:r>
-                  <a:rPr lang="en-US" altLang="ko-KR" sz="1400" dirty="0"/>
-                  <a:t> </a:t>
-                </a:r>
-                <a:r>
-                  <a:rPr lang="ko-KR" altLang="en-US" sz="1400" dirty="0"/>
-                  <a:t>분산</a:t>
-                </a:r>
-              </a:p>
-            </p:txBody>
-          </p:sp>
-        </mc:Choice>
-        <mc:Fallback xmlns="">
-          <p:sp>
-            <p:nvSpPr>
-              <p:cNvPr id="4" name="TextBox 3">
-                <a:extLst>
-                  <a:ext uri="{FF2B5EF4-FFF2-40B4-BE49-F238E27FC236}">
-                    <a16:creationId xmlns:a16="http://schemas.microsoft.com/office/drawing/2014/main" id="{F062FE60-E196-7FB5-177A-9E794CBE5CEB}"/>
-                  </a:ext>
-                </a:extLst>
-              </p:cNvPr>
-              <p:cNvSpPr txBox="1">
-                <a:spLocks noRot="1" noChangeAspect="1" noMove="1" noResize="1" noEditPoints="1" noAdjustHandles="1" noChangeArrowheads="1" noChangeShapeType="1" noTextEdit="1"/>
-              </p:cNvSpPr>
-              <p:nvPr/>
-            </p:nvSpPr>
-            <p:spPr>
-              <a:xfrm>
-                <a:off x="7559419" y="6125612"/>
-                <a:ext cx="2281394" cy="307777"/>
-              </a:xfrm>
-              <a:prstGeom prst="rect">
-                <a:avLst/>
-              </a:prstGeom>
-              <a:blipFill>
-                <a:blip r:embed="rId3"/>
-                <a:stretch>
-                  <a:fillRect l="-267" t="-8000" b="-16000"/>
-                </a:stretch>
-              </a:blipFill>
-            </p:spPr>
-            <p:txBody>
-              <a:bodyPr/>
-              <a:lstStyle/>
-              <a:p>
-                <a:r>
-                  <a:rPr lang="ko-KR" altLang="en-US">
-                    <a:noFill/>
-                  </a:rPr>
-                  <a:t> </a:t>
-                </a:r>
-              </a:p>
-            </p:txBody>
-          </p:sp>
-        </mc:Fallback>
-      </mc:AlternateContent>
+              <a:t>중심극한정리</a:t>
+            </a:r>
+          </a:p>
+        </p:txBody>
+      </p:sp>
     </p:spTree>
     <p:extLst>
       <p:ext uri="{BB962C8B-B14F-4D97-AF65-F5344CB8AC3E}">
-        <p14:creationId xmlns:p14="http://schemas.microsoft.com/office/powerpoint/2010/main" val="3840558536"/>
+        <p14:creationId xmlns:p14="http://schemas.microsoft.com/office/powerpoint/2010/main" val="1120983465"/>
       </p:ext>
     </p:extLst>
   </p:cSld>
@@ -14538,6 +14010,861 @@
   <p:cSld>
     <p:spTree>
       <p:nvGrpSpPr>
+        <p:cNvPr id="1" name="">
+          <a:extLst>
+            <a:ext uri="{FF2B5EF4-FFF2-40B4-BE49-F238E27FC236}">
+              <a16:creationId xmlns:a16="http://schemas.microsoft.com/office/drawing/2014/main" id="{6CE6BC8C-C54D-8E28-FD31-E3F3679D5DED}"/>
+            </a:ext>
+          </a:extLst>
+        </p:cNvPr>
+        <p:cNvGrpSpPr/>
+        <p:nvPr/>
+      </p:nvGrpSpPr>
+      <p:grpSpPr>
+        <a:xfrm>
+          <a:off x="0" y="0"/>
+          <a:ext cx="0" cy="0"/>
+          <a:chOff x="0" y="0"/>
+          <a:chExt cx="0" cy="0"/>
+        </a:xfrm>
+      </p:grpSpPr>
+      <p:sp>
+        <p:nvSpPr>
+          <p:cNvPr id="8" name="슬라이드 번호 개체 틀 7">
+            <a:extLst>
+              <a:ext uri="{FF2B5EF4-FFF2-40B4-BE49-F238E27FC236}">
+                <a16:creationId xmlns:a16="http://schemas.microsoft.com/office/drawing/2014/main" id="{4B43144F-4C54-792C-CD38-CC77C6F1B0EB}"/>
+              </a:ext>
+            </a:extLst>
+          </p:cNvPr>
+          <p:cNvSpPr>
+            <a:spLocks noGrp="1"/>
+          </p:cNvSpPr>
+          <p:nvPr>
+            <p:ph type="sldNum" sz="quarter" idx="12"/>
+          </p:nvPr>
+        </p:nvSpPr>
+        <p:spPr/>
+        <p:txBody>
+          <a:bodyPr/>
+          <a:lstStyle/>
+          <a:p>
+            <a:pPr rtl="0"/>
+            <a:fld id="{A3F31473-23EB-4724-8B59-FE6D21D89FA4}" type="slidenum">
+              <a:rPr lang="en-US" altLang="ko-KR" noProof="0" smtClean="0"/>
+              <a:t>20</a:t>
+            </a:fld>
+            <a:endParaRPr lang="en-US" altLang="ko-KR" noProof="0" dirty="0"/>
+          </a:p>
+        </p:txBody>
+      </p:sp>
+      <p:sp>
+        <p:nvSpPr>
+          <p:cNvPr id="5" name="TextBox 4">
+            <a:extLst>
+              <a:ext uri="{FF2B5EF4-FFF2-40B4-BE49-F238E27FC236}">
+                <a16:creationId xmlns:a16="http://schemas.microsoft.com/office/drawing/2014/main" id="{8ED946B2-7A03-EB07-BCEE-C3EDA7DB0652}"/>
+              </a:ext>
+            </a:extLst>
+          </p:cNvPr>
+          <p:cNvSpPr txBox="1"/>
+          <p:nvPr/>
+        </p:nvSpPr>
+        <p:spPr>
+          <a:xfrm>
+            <a:off x="117748" y="260648"/>
+            <a:ext cx="2592288" cy="584775"/>
+          </a:xfrm>
+          <a:prstGeom prst="rect">
+            <a:avLst/>
+          </a:prstGeom>
+          <a:noFill/>
+        </p:spPr>
+        <p:txBody>
+          <a:bodyPr wrap="square" rtlCol="0">
+            <a:spAutoFit/>
+          </a:bodyPr>
+          <a:lstStyle/>
+          <a:p>
+            <a:r>
+              <a:rPr lang="ko-KR" altLang="en-US" sz="3200" b="1"/>
+              <a:t>문제 풀이</a:t>
+            </a:r>
+          </a:p>
+        </p:txBody>
+      </p:sp>
+      <p:sp>
+        <p:nvSpPr>
+          <p:cNvPr id="2" name="Rectangle 1">
+            <a:extLst>
+              <a:ext uri="{FF2B5EF4-FFF2-40B4-BE49-F238E27FC236}">
+                <a16:creationId xmlns:a16="http://schemas.microsoft.com/office/drawing/2014/main" id="{F1569323-C4D0-EA5E-54D8-05261E28A8E3}"/>
+              </a:ext>
+            </a:extLst>
+          </p:cNvPr>
+          <p:cNvSpPr>
+            <a:spLocks noChangeArrowheads="1"/>
+          </p:cNvSpPr>
+          <p:nvPr/>
+        </p:nvSpPr>
+        <p:spPr bwMode="auto">
+          <a:xfrm>
+            <a:off x="289178" y="1309410"/>
+            <a:ext cx="9477642" cy="783356"/>
+          </a:xfrm>
+          <a:prstGeom prst="rect">
+            <a:avLst/>
+          </a:prstGeom>
+          <a:solidFill>
+            <a:schemeClr val="bg1">
+              <a:lumMod val="85000"/>
+            </a:schemeClr>
+          </a:solidFill>
+          <a:ln>
+            <a:noFill/>
+          </a:ln>
+          <a:effectLst/>
+        </p:spPr>
+        <p:txBody>
+          <a:bodyPr vert="horz" wrap="square" lIns="91440" tIns="0" rIns="91440" bIns="45720" numCol="1" anchor="ctr" anchorCtr="0" compatLnSpc="1">
+            <a:prstTxWarp prst="textNoShape">
+              <a:avLst/>
+            </a:prstTxWarp>
+            <a:spAutoFit/>
+          </a:bodyPr>
+          <a:lstStyle/>
+          <a:p>
+            <a:pPr marL="285750" indent="-285750" eaLnBrk="0" fontAlgn="base" hangingPunct="0">
+              <a:lnSpc>
+                <a:spcPct val="150000"/>
+              </a:lnSpc>
+              <a:spcBef>
+                <a:spcPct val="0"/>
+              </a:spcBef>
+              <a:spcAft>
+                <a:spcPct val="0"/>
+              </a:spcAft>
+              <a:buFont typeface="Wingdings" panose="05000000000000000000" pitchFamily="2" charset="2"/>
+              <a:buChar char="v"/>
+            </a:pPr>
+            <a:r>
+              <a:rPr lang="en-US" altLang="ko-KR" dirty="0" err="1">
+                <a:latin typeface="맑은 고딕 Semilight" panose="020B0502040204020203" pitchFamily="50" charset="-127"/>
+                <a:ea typeface="맑은 고딕 Semilight" panose="020B0502040204020203" pitchFamily="50" charset="-127"/>
+                <a:cs typeface="맑은 고딕 Semilight" panose="020B0502040204020203" pitchFamily="50" charset="-127"/>
+              </a:rPr>
+              <a:t>sns.load_dataset</a:t>
+            </a:r>
+            <a:r>
+              <a:rPr lang="en-US" altLang="ko-KR" dirty="0">
+                <a:latin typeface="맑은 고딕 Semilight" panose="020B0502040204020203" pitchFamily="50" charset="-127"/>
+                <a:ea typeface="맑은 고딕 Semilight" panose="020B0502040204020203" pitchFamily="50" charset="-127"/>
+                <a:cs typeface="맑은 고딕 Semilight" panose="020B0502040204020203" pitchFamily="50" charset="-127"/>
+              </a:rPr>
+              <a:t>("penguins")</a:t>
+            </a:r>
+            <a:r>
+              <a:rPr lang="ko-KR" altLang="en-US" dirty="0">
+                <a:latin typeface="맑은 고딕 Semilight" panose="020B0502040204020203" pitchFamily="50" charset="-127"/>
+                <a:ea typeface="맑은 고딕 Semilight" panose="020B0502040204020203" pitchFamily="50" charset="-127"/>
+                <a:cs typeface="맑은 고딕 Semilight" panose="020B0502040204020203" pitchFamily="50" charset="-127"/>
+              </a:rPr>
+              <a:t>에서 </a:t>
+            </a:r>
+            <a:r>
+              <a:rPr lang="en-US" altLang="ko-KR" sz="1600" dirty="0">
+                <a:latin typeface="맑은 고딕 Semilight" panose="020B0502040204020203" pitchFamily="50" charset="-127"/>
+                <a:ea typeface="맑은 고딕 Semilight" panose="020B0502040204020203" pitchFamily="50" charset="-127"/>
+                <a:cs typeface="맑은 고딕 Semilight" panose="020B0502040204020203" pitchFamily="50" charset="-127"/>
+              </a:rPr>
+              <a:t>Nan</a:t>
+            </a:r>
+            <a:r>
+              <a:rPr lang="ko-KR" altLang="en-US" sz="1600" dirty="0">
+                <a:latin typeface="맑은 고딕 Semilight" panose="020B0502040204020203" pitchFamily="50" charset="-127"/>
+                <a:ea typeface="맑은 고딕 Semilight" panose="020B0502040204020203" pitchFamily="50" charset="-127"/>
+                <a:cs typeface="맑은 고딕 Semilight" panose="020B0502040204020203" pitchFamily="50" charset="-127"/>
+              </a:rPr>
+              <a:t>을 제거하고 </a:t>
+            </a:r>
+            <a:r>
+              <a:rPr lang="en-US" altLang="ko-KR" sz="1600" dirty="0">
+                <a:latin typeface="맑은 고딕 Semilight" panose="020B0502040204020203" pitchFamily="50" charset="-127"/>
+                <a:ea typeface="맑은 고딕 Semilight" panose="020B0502040204020203" pitchFamily="50" charset="-127"/>
+                <a:cs typeface="맑은 고딕 Semilight" panose="020B0502040204020203" pitchFamily="50" charset="-127"/>
+              </a:rPr>
+              <a:t>“Adelie” </a:t>
+            </a:r>
+            <a:r>
+              <a:rPr lang="ko-KR" altLang="en-US" sz="1600" dirty="0">
+                <a:latin typeface="맑은 고딕 Semilight" panose="020B0502040204020203" pitchFamily="50" charset="-127"/>
+                <a:ea typeface="맑은 고딕 Semilight" panose="020B0502040204020203" pitchFamily="50" charset="-127"/>
+                <a:cs typeface="맑은 고딕 Semilight" panose="020B0502040204020203" pitchFamily="50" charset="-127"/>
+              </a:rPr>
+              <a:t>종 펭귄을 제외한 총 </a:t>
+            </a:r>
+            <a:r>
+              <a:rPr lang="en-US" altLang="ko-KR" sz="1600" dirty="0">
+                <a:latin typeface="맑은 고딕 Semilight" panose="020B0502040204020203" pitchFamily="50" charset="-127"/>
+                <a:ea typeface="맑은 고딕 Semilight" panose="020B0502040204020203" pitchFamily="50" charset="-127"/>
+                <a:cs typeface="맑은 고딕 Semilight" panose="020B0502040204020203" pitchFamily="50" charset="-127"/>
+              </a:rPr>
+              <a:t>187</a:t>
+            </a:r>
+            <a:r>
+              <a:rPr lang="ko-KR" altLang="en-US" sz="1600" dirty="0">
+                <a:latin typeface="맑은 고딕 Semilight" panose="020B0502040204020203" pitchFamily="50" charset="-127"/>
+                <a:ea typeface="맑은 고딕 Semilight" panose="020B0502040204020203" pitchFamily="50" charset="-127"/>
+                <a:cs typeface="맑은 고딕 Semilight" panose="020B0502040204020203" pitchFamily="50" charset="-127"/>
+              </a:rPr>
+              <a:t>개 데이터를 바탕으로 </a:t>
+            </a:r>
+            <a:r>
+              <a:rPr lang="en-US" altLang="ko-KR" sz="1600" dirty="0">
+                <a:latin typeface="맑은 고딕 Semilight" panose="020B0502040204020203" pitchFamily="50" charset="-127"/>
+                <a:ea typeface="맑은 고딕 Semilight" panose="020B0502040204020203" pitchFamily="50" charset="-127"/>
+                <a:cs typeface="맑은 고딕 Semilight" panose="020B0502040204020203" pitchFamily="50" charset="-127"/>
+              </a:rPr>
+              <a:t>‘</a:t>
+            </a:r>
+            <a:r>
+              <a:rPr lang="en-US" altLang="ko-KR" sz="1600" dirty="0" err="1">
+                <a:latin typeface="맑은 고딕 Semilight" panose="020B0502040204020203" pitchFamily="50" charset="-127"/>
+                <a:ea typeface="맑은 고딕 Semilight" panose="020B0502040204020203" pitchFamily="50" charset="-127"/>
+                <a:cs typeface="맑은 고딕 Semilight" panose="020B0502040204020203" pitchFamily="50" charset="-127"/>
+              </a:rPr>
+              <a:t>flipper_length_mm</a:t>
+            </a:r>
+            <a:r>
+              <a:rPr lang="en-US" altLang="ko-KR" sz="1600" dirty="0">
+                <a:latin typeface="맑은 고딕 Semilight" panose="020B0502040204020203" pitchFamily="50" charset="-127"/>
+                <a:ea typeface="맑은 고딕 Semilight" panose="020B0502040204020203" pitchFamily="50" charset="-127"/>
+                <a:cs typeface="맑은 고딕 Semilight" panose="020B0502040204020203" pitchFamily="50" charset="-127"/>
+              </a:rPr>
+              <a:t>', '</a:t>
+            </a:r>
+            <a:r>
+              <a:rPr lang="en-US" altLang="ko-KR" sz="1600" dirty="0" err="1">
+                <a:latin typeface="맑은 고딕 Semilight" panose="020B0502040204020203" pitchFamily="50" charset="-127"/>
+                <a:ea typeface="맑은 고딕 Semilight" panose="020B0502040204020203" pitchFamily="50" charset="-127"/>
+                <a:cs typeface="맑은 고딕 Semilight" panose="020B0502040204020203" pitchFamily="50" charset="-127"/>
+              </a:rPr>
+              <a:t>body_mass_g</a:t>
+            </a:r>
+            <a:r>
+              <a:rPr lang="en-US" altLang="ko-KR" sz="1600" dirty="0">
+                <a:latin typeface="맑은 고딕 Semilight" panose="020B0502040204020203" pitchFamily="50" charset="-127"/>
+                <a:ea typeface="맑은 고딕 Semilight" panose="020B0502040204020203" pitchFamily="50" charset="-127"/>
+                <a:cs typeface="맑은 고딕 Semilight" panose="020B0502040204020203" pitchFamily="50" charset="-127"/>
+              </a:rPr>
+              <a:t>’ </a:t>
+            </a:r>
+            <a:r>
+              <a:rPr lang="ko-KR" altLang="en-US" sz="1600" dirty="0">
+                <a:latin typeface="맑은 고딕 Semilight" panose="020B0502040204020203" pitchFamily="50" charset="-127"/>
+                <a:ea typeface="맑은 고딕 Semilight" panose="020B0502040204020203" pitchFamily="50" charset="-127"/>
+                <a:cs typeface="맑은 고딕 Semilight" panose="020B0502040204020203" pitchFamily="50" charset="-127"/>
+              </a:rPr>
+              <a:t>의</a:t>
+            </a:r>
+            <a:r>
+              <a:rPr lang="en-US" altLang="ko-KR" sz="1600" dirty="0">
+                <a:latin typeface="맑은 고딕 Semilight" panose="020B0502040204020203" pitchFamily="50" charset="-127"/>
+                <a:ea typeface="맑은 고딕 Semilight" panose="020B0502040204020203" pitchFamily="50" charset="-127"/>
+                <a:cs typeface="맑은 고딕 Semilight" panose="020B0502040204020203" pitchFamily="50" charset="-127"/>
+              </a:rPr>
+              <a:t> feature </a:t>
+            </a:r>
+            <a:r>
+              <a:rPr lang="ko-KR" altLang="en-US" sz="1600" dirty="0">
+                <a:latin typeface="맑은 고딕 Semilight" panose="020B0502040204020203" pitchFamily="50" charset="-127"/>
+                <a:ea typeface="맑은 고딕 Semilight" panose="020B0502040204020203" pitchFamily="50" charset="-127"/>
+                <a:cs typeface="맑은 고딕 Semilight" panose="020B0502040204020203" pitchFamily="50" charset="-127"/>
+              </a:rPr>
+              <a:t>만을 사용하여 다음 질문에 답하라</a:t>
+            </a:r>
+            <a:endParaRPr lang="en-US" altLang="ko-KR" sz="1600" dirty="0">
+              <a:latin typeface="맑은 고딕 Semilight" panose="020B0502040204020203" pitchFamily="50" charset="-127"/>
+              <a:ea typeface="맑은 고딕 Semilight" panose="020B0502040204020203" pitchFamily="50" charset="-127"/>
+              <a:cs typeface="맑은 고딕 Semilight" panose="020B0502040204020203" pitchFamily="50" charset="-127"/>
+            </a:endParaRPr>
+          </a:p>
+        </p:txBody>
+      </p:sp>
+      <p:sp>
+        <p:nvSpPr>
+          <p:cNvPr id="3" name="Rectangle 1">
+            <a:extLst>
+              <a:ext uri="{FF2B5EF4-FFF2-40B4-BE49-F238E27FC236}">
+                <a16:creationId xmlns:a16="http://schemas.microsoft.com/office/drawing/2014/main" id="{E023ACA3-C0AF-BB15-AD09-4B3E2B1A7F7A}"/>
+              </a:ext>
+            </a:extLst>
+          </p:cNvPr>
+          <p:cNvSpPr>
+            <a:spLocks noChangeArrowheads="1"/>
+          </p:cNvSpPr>
+          <p:nvPr/>
+        </p:nvSpPr>
+        <p:spPr bwMode="auto">
+          <a:xfrm>
+            <a:off x="5230316" y="2444872"/>
+            <a:ext cx="6663406" cy="3559372"/>
+          </a:xfrm>
+          <a:prstGeom prst="rect">
+            <a:avLst/>
+          </a:prstGeom>
+          <a:solidFill>
+            <a:schemeClr val="bg1">
+              <a:lumMod val="85000"/>
+            </a:schemeClr>
+          </a:solidFill>
+          <a:ln>
+            <a:noFill/>
+          </a:ln>
+          <a:effectLst/>
+        </p:spPr>
+        <p:txBody>
+          <a:bodyPr vert="horz" wrap="square" lIns="91440" tIns="0" rIns="91440" bIns="45720" numCol="1" anchor="ctr" anchorCtr="0" compatLnSpc="1">
+            <a:prstTxWarp prst="textNoShape">
+              <a:avLst/>
+            </a:prstTxWarp>
+            <a:spAutoFit/>
+          </a:bodyPr>
+          <a:lstStyle/>
+          <a:p>
+            <a:pPr marL="285750" indent="-285750" eaLnBrk="0" fontAlgn="base" hangingPunct="0">
+              <a:lnSpc>
+                <a:spcPct val="150000"/>
+              </a:lnSpc>
+              <a:spcBef>
+                <a:spcPct val="0"/>
+              </a:spcBef>
+              <a:spcAft>
+                <a:spcPct val="0"/>
+              </a:spcAft>
+              <a:buFont typeface="Wingdings" panose="05000000000000000000" pitchFamily="2" charset="2"/>
+              <a:buChar char="v"/>
+            </a:pPr>
+            <a:r>
+              <a:rPr lang="en-US" altLang="ko-KR" sz="1400" dirty="0">
+                <a:latin typeface="맑은 고딕 Semilight" panose="020B0502040204020203" pitchFamily="50" charset="-127"/>
+                <a:ea typeface="맑은 고딕 Semilight" panose="020B0502040204020203" pitchFamily="50" charset="-127"/>
+                <a:cs typeface="맑은 고딕 Semilight" panose="020B0502040204020203" pitchFamily="50" charset="-127"/>
+              </a:rPr>
+              <a:t>“</a:t>
+            </a:r>
+            <a:r>
+              <a:rPr lang="en-US" altLang="ko-KR" sz="1400" dirty="0" err="1">
+                <a:latin typeface="맑은 고딕 Semilight" panose="020B0502040204020203" pitchFamily="50" charset="-127"/>
+                <a:ea typeface="맑은 고딕 Semilight" panose="020B0502040204020203" pitchFamily="50" charset="-127"/>
+                <a:cs typeface="맑은 고딕 Semilight" panose="020B0502040204020203" pitchFamily="50" charset="-127"/>
+              </a:rPr>
+              <a:t>flipper_length_mm</a:t>
+            </a:r>
+            <a:r>
+              <a:rPr lang="en-US" altLang="ko-KR" sz="1400" dirty="0">
+                <a:latin typeface="맑은 고딕 Semilight" panose="020B0502040204020203" pitchFamily="50" charset="-127"/>
+                <a:ea typeface="맑은 고딕 Semilight" panose="020B0502040204020203" pitchFamily="50" charset="-127"/>
+                <a:cs typeface="맑은 고딕 Semilight" panose="020B0502040204020203" pitchFamily="50" charset="-127"/>
+              </a:rPr>
+              <a:t>” </a:t>
+            </a:r>
+            <a:r>
+              <a:rPr lang="ko-KR" altLang="en-US" sz="1400" dirty="0">
+                <a:latin typeface="맑은 고딕 Semilight" panose="020B0502040204020203" pitchFamily="50" charset="-127"/>
+                <a:ea typeface="맑은 고딕 Semilight" panose="020B0502040204020203" pitchFamily="50" charset="-127"/>
+                <a:cs typeface="맑은 고딕 Semilight" panose="020B0502040204020203" pitchFamily="50" charset="-127"/>
+              </a:rPr>
+              <a:t>와 </a:t>
+            </a:r>
+            <a:r>
+              <a:rPr lang="en-US" altLang="ko-KR" sz="1400" dirty="0">
+                <a:latin typeface="맑은 고딕 Semilight" panose="020B0502040204020203" pitchFamily="50" charset="-127"/>
+                <a:ea typeface="맑은 고딕 Semilight" panose="020B0502040204020203" pitchFamily="50" charset="-127"/>
+                <a:cs typeface="맑은 고딕 Semilight" panose="020B0502040204020203" pitchFamily="50" charset="-127"/>
+              </a:rPr>
+              <a:t>“</a:t>
+            </a:r>
+            <a:r>
+              <a:rPr lang="en-US" altLang="ko-KR" sz="1400" dirty="0" err="1">
+                <a:latin typeface="맑은 고딕 Semilight" panose="020B0502040204020203" pitchFamily="50" charset="-127"/>
+                <a:ea typeface="맑은 고딕 Semilight" panose="020B0502040204020203" pitchFamily="50" charset="-127"/>
+                <a:cs typeface="맑은 고딕 Semilight" panose="020B0502040204020203" pitchFamily="50" charset="-127"/>
+              </a:rPr>
+              <a:t>body_mass_g</a:t>
+            </a:r>
+            <a:r>
+              <a:rPr lang="en-US" altLang="ko-KR" sz="1400" dirty="0">
+                <a:latin typeface="맑은 고딕 Semilight" panose="020B0502040204020203" pitchFamily="50" charset="-127"/>
+                <a:ea typeface="맑은 고딕 Semilight" panose="020B0502040204020203" pitchFamily="50" charset="-127"/>
+                <a:cs typeface="맑은 고딕 Semilight" panose="020B0502040204020203" pitchFamily="50" charset="-127"/>
+              </a:rPr>
+              <a:t>”</a:t>
+            </a:r>
+            <a:r>
+              <a:rPr lang="ko-KR" altLang="en-US" sz="1400" dirty="0">
+                <a:latin typeface="맑은 고딕 Semilight" panose="020B0502040204020203" pitchFamily="50" charset="-127"/>
+                <a:ea typeface="맑은 고딕 Semilight" panose="020B0502040204020203" pitchFamily="50" charset="-127"/>
+                <a:cs typeface="맑은 고딕 Semilight" panose="020B0502040204020203" pitchFamily="50" charset="-127"/>
+              </a:rPr>
+              <a:t> </a:t>
+            </a:r>
+            <a:r>
+              <a:rPr lang="en-US" altLang="ko-KR" sz="1400" dirty="0">
+                <a:latin typeface="맑은 고딕 Semilight" panose="020B0502040204020203" pitchFamily="50" charset="-127"/>
+                <a:ea typeface="맑은 고딕 Semilight" panose="020B0502040204020203" pitchFamily="50" charset="-127"/>
+                <a:cs typeface="맑은 고딕 Semilight" panose="020B0502040204020203" pitchFamily="50" charset="-127"/>
+              </a:rPr>
+              <a:t>2</a:t>
+            </a:r>
+            <a:r>
+              <a:rPr lang="ko-KR" altLang="en-US" sz="1400" dirty="0">
+                <a:latin typeface="맑은 고딕 Semilight" panose="020B0502040204020203" pitchFamily="50" charset="-127"/>
+                <a:ea typeface="맑은 고딕 Semilight" panose="020B0502040204020203" pitchFamily="50" charset="-127"/>
+                <a:cs typeface="맑은 고딕 Semilight" panose="020B0502040204020203" pitchFamily="50" charset="-127"/>
+              </a:rPr>
+              <a:t>개 </a:t>
+            </a:r>
+            <a:r>
+              <a:rPr lang="en-US" altLang="ko-KR" sz="1400" dirty="0">
+                <a:latin typeface="맑은 고딕 Semilight" panose="020B0502040204020203" pitchFamily="50" charset="-127"/>
+                <a:ea typeface="맑은 고딕 Semilight" panose="020B0502040204020203" pitchFamily="50" charset="-127"/>
+                <a:cs typeface="맑은 고딕 Semilight" panose="020B0502040204020203" pitchFamily="50" charset="-127"/>
+              </a:rPr>
+              <a:t>feature</a:t>
+            </a:r>
+            <a:r>
+              <a:rPr lang="ko-KR" altLang="en-US" sz="1400" dirty="0">
+                <a:latin typeface="맑은 고딕 Semilight" panose="020B0502040204020203" pitchFamily="50" charset="-127"/>
+                <a:ea typeface="맑은 고딕 Semilight" panose="020B0502040204020203" pitchFamily="50" charset="-127"/>
+                <a:cs typeface="맑은 고딕 Semilight" panose="020B0502040204020203" pitchFamily="50" charset="-127"/>
+              </a:rPr>
+              <a:t>를 사용하면 분류</a:t>
+            </a:r>
+            <a:r>
+              <a:rPr lang="en-US" altLang="ko-KR" sz="1400" dirty="0">
+                <a:latin typeface="맑은 고딕 Semilight" panose="020B0502040204020203" pitchFamily="50" charset="-127"/>
+                <a:ea typeface="맑은 고딕 Semilight" panose="020B0502040204020203" pitchFamily="50" charset="-127"/>
+                <a:cs typeface="맑은 고딕 Semilight" panose="020B0502040204020203" pitchFamily="50" charset="-127"/>
+              </a:rPr>
+              <a:t>(classification)</a:t>
+            </a:r>
+            <a:r>
+              <a:rPr lang="ko-KR" altLang="en-US" sz="1400" dirty="0">
+                <a:latin typeface="맑은 고딕 Semilight" panose="020B0502040204020203" pitchFamily="50" charset="-127"/>
+                <a:ea typeface="맑은 고딕 Semilight" panose="020B0502040204020203" pitchFamily="50" charset="-127"/>
+                <a:cs typeface="맑은 고딕 Semilight" panose="020B0502040204020203" pitchFamily="50" charset="-127"/>
+              </a:rPr>
+              <a:t>를 하는 기준 값을 제시하라</a:t>
+            </a:r>
+            <a:endParaRPr lang="en-US" altLang="ko-KR" sz="1400" dirty="0">
+              <a:latin typeface="맑은 고딕 Semilight" panose="020B0502040204020203" pitchFamily="50" charset="-127"/>
+              <a:ea typeface="맑은 고딕 Semilight" panose="020B0502040204020203" pitchFamily="50" charset="-127"/>
+              <a:cs typeface="맑은 고딕 Semilight" panose="020B0502040204020203" pitchFamily="50" charset="-127"/>
+            </a:endParaRPr>
+          </a:p>
+          <a:p>
+            <a:pPr marL="285750" indent="-285750" eaLnBrk="0" fontAlgn="base" hangingPunct="0">
+              <a:lnSpc>
+                <a:spcPct val="150000"/>
+              </a:lnSpc>
+              <a:spcBef>
+                <a:spcPct val="0"/>
+              </a:spcBef>
+              <a:spcAft>
+                <a:spcPct val="0"/>
+              </a:spcAft>
+              <a:buFont typeface="Wingdings" panose="05000000000000000000" pitchFamily="2" charset="2"/>
+              <a:buChar char="v"/>
+            </a:pPr>
+            <a:endParaRPr lang="en-US" altLang="ko-KR" sz="1400" dirty="0">
+              <a:latin typeface="맑은 고딕 Semilight" panose="020B0502040204020203" pitchFamily="50" charset="-127"/>
+              <a:ea typeface="맑은 고딕 Semilight" panose="020B0502040204020203" pitchFamily="50" charset="-127"/>
+              <a:cs typeface="맑은 고딕 Semilight" panose="020B0502040204020203" pitchFamily="50" charset="-127"/>
+            </a:endParaRPr>
+          </a:p>
+          <a:p>
+            <a:pPr marL="285750" indent="-285750" eaLnBrk="0" fontAlgn="base" hangingPunct="0">
+              <a:lnSpc>
+                <a:spcPct val="150000"/>
+              </a:lnSpc>
+              <a:spcBef>
+                <a:spcPct val="0"/>
+              </a:spcBef>
+              <a:spcAft>
+                <a:spcPct val="0"/>
+              </a:spcAft>
+              <a:buFont typeface="Wingdings" panose="05000000000000000000" pitchFamily="2" charset="2"/>
+              <a:buChar char="v"/>
+            </a:pPr>
+            <a:r>
+              <a:rPr lang="ko-KR" altLang="en-US" sz="1400" dirty="0">
+                <a:latin typeface="맑은 고딕 Semilight" panose="020B0502040204020203" pitchFamily="50" charset="-127"/>
+                <a:ea typeface="맑은 고딕 Semilight" panose="020B0502040204020203" pitchFamily="50" charset="-127"/>
+                <a:cs typeface="맑은 고딕 Semilight" panose="020B0502040204020203" pitchFamily="50" charset="-127"/>
+              </a:rPr>
+              <a:t>분류를 잘못하는 경우가 몇 가지 있으며</a:t>
+            </a:r>
+            <a:r>
+              <a:rPr lang="en-US" altLang="ko-KR" sz="1400" dirty="0">
+                <a:latin typeface="맑은 고딕 Semilight" panose="020B0502040204020203" pitchFamily="50" charset="-127"/>
+                <a:ea typeface="맑은 고딕 Semilight" panose="020B0502040204020203" pitchFamily="50" charset="-127"/>
+                <a:cs typeface="맑은 고딕 Semilight" panose="020B0502040204020203" pitchFamily="50" charset="-127"/>
+              </a:rPr>
+              <a:t>,</a:t>
+            </a:r>
+          </a:p>
+          <a:p>
+            <a:pPr marL="285750" indent="-285750" eaLnBrk="0" fontAlgn="base" hangingPunct="0">
+              <a:lnSpc>
+                <a:spcPct val="150000"/>
+              </a:lnSpc>
+              <a:spcBef>
+                <a:spcPct val="0"/>
+              </a:spcBef>
+              <a:spcAft>
+                <a:spcPct val="0"/>
+              </a:spcAft>
+              <a:buFont typeface="Wingdings" panose="05000000000000000000" pitchFamily="2" charset="2"/>
+              <a:buChar char="v"/>
+            </a:pPr>
+            <a:endParaRPr lang="en-US" altLang="ko-KR" sz="1400" dirty="0">
+              <a:latin typeface="맑은 고딕 Semilight" panose="020B0502040204020203" pitchFamily="50" charset="-127"/>
+              <a:ea typeface="맑은 고딕 Semilight" panose="020B0502040204020203" pitchFamily="50" charset="-127"/>
+              <a:cs typeface="맑은 고딕 Semilight" panose="020B0502040204020203" pitchFamily="50" charset="-127"/>
+            </a:endParaRPr>
+          </a:p>
+          <a:p>
+            <a:pPr marL="285750" indent="-285750" eaLnBrk="0" fontAlgn="base" hangingPunct="0">
+              <a:lnSpc>
+                <a:spcPct val="150000"/>
+              </a:lnSpc>
+              <a:spcBef>
+                <a:spcPct val="0"/>
+              </a:spcBef>
+              <a:spcAft>
+                <a:spcPct val="0"/>
+              </a:spcAft>
+              <a:buFont typeface="Wingdings" panose="05000000000000000000" pitchFamily="2" charset="2"/>
+              <a:buChar char="v"/>
+            </a:pPr>
+            <a:r>
+              <a:rPr lang="ko-KR" altLang="en-US" sz="1400" dirty="0">
+                <a:latin typeface="맑은 고딕 Semilight" panose="020B0502040204020203" pitchFamily="50" charset="-127"/>
+                <a:ea typeface="맑은 고딕 Semilight" panose="020B0502040204020203" pitchFamily="50" charset="-127"/>
+                <a:cs typeface="맑은 고딕 Semilight" panose="020B0502040204020203" pitchFamily="50" charset="-127"/>
+              </a:rPr>
+              <a:t>잘 못 분류한 경우에 따른 오류의 개수는 각각 몇 개인가</a:t>
+            </a:r>
+            <a:r>
+              <a:rPr lang="en-US" altLang="ko-KR" sz="1400" dirty="0">
+                <a:latin typeface="맑은 고딕 Semilight" panose="020B0502040204020203" pitchFamily="50" charset="-127"/>
+                <a:ea typeface="맑은 고딕 Semilight" panose="020B0502040204020203" pitchFamily="50" charset="-127"/>
+                <a:cs typeface="맑은 고딕 Semilight" panose="020B0502040204020203" pitchFamily="50" charset="-127"/>
+              </a:rPr>
+              <a:t>?</a:t>
+            </a:r>
+          </a:p>
+          <a:p>
+            <a:pPr marL="285750" indent="-285750" eaLnBrk="0" fontAlgn="base" hangingPunct="0">
+              <a:lnSpc>
+                <a:spcPct val="150000"/>
+              </a:lnSpc>
+              <a:spcBef>
+                <a:spcPct val="0"/>
+              </a:spcBef>
+              <a:spcAft>
+                <a:spcPct val="0"/>
+              </a:spcAft>
+              <a:buFont typeface="Wingdings" panose="05000000000000000000" pitchFamily="2" charset="2"/>
+              <a:buChar char="v"/>
+            </a:pPr>
+            <a:endParaRPr lang="en-US" altLang="ko-KR" sz="1400" dirty="0">
+              <a:latin typeface="맑은 고딕 Semilight" panose="020B0502040204020203" pitchFamily="50" charset="-127"/>
+              <a:ea typeface="맑은 고딕 Semilight" panose="020B0502040204020203" pitchFamily="50" charset="-127"/>
+              <a:cs typeface="맑은 고딕 Semilight" panose="020B0502040204020203" pitchFamily="50" charset="-127"/>
+            </a:endParaRPr>
+          </a:p>
+          <a:p>
+            <a:pPr marL="285750" indent="-285750" eaLnBrk="0" fontAlgn="base" hangingPunct="0">
+              <a:lnSpc>
+                <a:spcPct val="150000"/>
+              </a:lnSpc>
+              <a:spcBef>
+                <a:spcPct val="0"/>
+              </a:spcBef>
+              <a:spcAft>
+                <a:spcPct val="0"/>
+              </a:spcAft>
+              <a:buFont typeface="Wingdings" panose="05000000000000000000" pitchFamily="2" charset="2"/>
+              <a:buChar char="v"/>
+            </a:pPr>
+            <a:r>
+              <a:rPr lang="en-US" altLang="ko-KR" sz="1400" dirty="0">
+                <a:latin typeface="맑은 고딕 Semilight" panose="020B0502040204020203" pitchFamily="50" charset="-127"/>
+                <a:ea typeface="맑은 고딕 Semilight" panose="020B0502040204020203" pitchFamily="50" charset="-127"/>
+                <a:cs typeface="맑은 고딕 Semilight" panose="020B0502040204020203" pitchFamily="50" charset="-127"/>
+              </a:rPr>
+              <a:t>Gentoo</a:t>
+            </a:r>
+            <a:r>
+              <a:rPr lang="ko-KR" altLang="en-US" sz="1400" dirty="0">
+                <a:latin typeface="맑은 고딕 Semilight" panose="020B0502040204020203" pitchFamily="50" charset="-127"/>
+                <a:ea typeface="맑은 고딕 Semilight" panose="020B0502040204020203" pitchFamily="50" charset="-127"/>
+                <a:cs typeface="맑은 고딕 Semilight" panose="020B0502040204020203" pitchFamily="50" charset="-127"/>
+              </a:rPr>
+              <a:t>는 </a:t>
+            </a:r>
+            <a:r>
+              <a:rPr lang="ko-KR" altLang="en-US" sz="1400" dirty="0" err="1">
+                <a:latin typeface="맑은 고딕 Semilight" panose="020B0502040204020203" pitchFamily="50" charset="-127"/>
+                <a:ea typeface="맑은 고딕 Semilight" panose="020B0502040204020203" pitchFamily="50" charset="-127"/>
+                <a:cs typeface="맑은 고딕 Semilight" panose="020B0502040204020203" pitchFamily="50" charset="-127"/>
+              </a:rPr>
+              <a:t>천연기념물이고</a:t>
+            </a:r>
+            <a:r>
+              <a:rPr lang="ko-KR" altLang="en-US" sz="1400" dirty="0">
+                <a:latin typeface="맑은 고딕 Semilight" panose="020B0502040204020203" pitchFamily="50" charset="-127"/>
+                <a:ea typeface="맑은 고딕 Semilight" panose="020B0502040204020203" pitchFamily="50" charset="-127"/>
+                <a:cs typeface="맑은 고딕 Semilight" panose="020B0502040204020203" pitchFamily="50" charset="-127"/>
+              </a:rPr>
+              <a:t> 병이 잘 걸려 찾아내서 치료를 해주어야 하는 것이 목적이라면</a:t>
+            </a:r>
+            <a:r>
+              <a:rPr lang="en-US" altLang="ko-KR" sz="1400" dirty="0">
+                <a:latin typeface="맑은 고딕 Semilight" panose="020B0502040204020203" pitchFamily="50" charset="-127"/>
+                <a:ea typeface="맑은 고딕 Semilight" panose="020B0502040204020203" pitchFamily="50" charset="-127"/>
+                <a:cs typeface="맑은 고딕 Semilight" panose="020B0502040204020203" pitchFamily="50" charset="-127"/>
+              </a:rPr>
+              <a:t>, </a:t>
+            </a:r>
+            <a:r>
+              <a:rPr lang="ko-KR" altLang="en-US" sz="1400" dirty="0">
+                <a:latin typeface="맑은 고딕 Semilight" panose="020B0502040204020203" pitchFamily="50" charset="-127"/>
+                <a:ea typeface="맑은 고딕 Semilight" panose="020B0502040204020203" pitchFamily="50" charset="-127"/>
+                <a:cs typeface="맑은 고딕 Semilight" panose="020B0502040204020203" pitchFamily="50" charset="-127"/>
+              </a:rPr>
+              <a:t>어떤 값으로 결정해야 겠는가</a:t>
+            </a:r>
+            <a:r>
+              <a:rPr lang="en-US" altLang="ko-KR" sz="1400" dirty="0">
+                <a:latin typeface="맑은 고딕 Semilight" panose="020B0502040204020203" pitchFamily="50" charset="-127"/>
+                <a:ea typeface="맑은 고딕 Semilight" panose="020B0502040204020203" pitchFamily="50" charset="-127"/>
+                <a:cs typeface="맑은 고딕 Semilight" panose="020B0502040204020203" pitchFamily="50" charset="-127"/>
+              </a:rPr>
+              <a:t>? </a:t>
+            </a:r>
+            <a:r>
+              <a:rPr lang="ko-KR" altLang="en-US" sz="1400" dirty="0">
+                <a:latin typeface="맑은 고딕 Semilight" panose="020B0502040204020203" pitchFamily="50" charset="-127"/>
+                <a:ea typeface="맑은 고딕 Semilight" panose="020B0502040204020203" pitchFamily="50" charset="-127"/>
+                <a:cs typeface="맑은 고딕 Semilight" panose="020B0502040204020203" pitchFamily="50" charset="-127"/>
+              </a:rPr>
+              <a:t>그 이유를 </a:t>
+            </a:r>
+            <a:r>
+              <a:rPr lang="ko-KR" altLang="en-US" sz="1400" dirty="0" err="1">
+                <a:latin typeface="맑은 고딕 Semilight" panose="020B0502040204020203" pitchFamily="50" charset="-127"/>
+                <a:ea typeface="맑은 고딕 Semilight" panose="020B0502040204020203" pitchFamily="50" charset="-127"/>
+                <a:cs typeface="맑은 고딕 Semilight" panose="020B0502040204020203" pitchFamily="50" charset="-127"/>
+              </a:rPr>
+              <a:t>설명하시오</a:t>
+            </a:r>
+            <a:r>
+              <a:rPr lang="en-US" altLang="ko-KR" sz="1400" dirty="0">
+                <a:latin typeface="맑은 고딕 Semilight" panose="020B0502040204020203" pitchFamily="50" charset="-127"/>
+                <a:ea typeface="맑은 고딕 Semilight" panose="020B0502040204020203" pitchFamily="50" charset="-127"/>
+                <a:cs typeface="맑은 고딕 Semilight" panose="020B0502040204020203" pitchFamily="50" charset="-127"/>
+              </a:rPr>
+              <a:t>.</a:t>
+            </a:r>
+          </a:p>
+          <a:p>
+            <a:pPr marL="285750" indent="-285750" eaLnBrk="0" fontAlgn="base" hangingPunct="0">
+              <a:lnSpc>
+                <a:spcPct val="150000"/>
+              </a:lnSpc>
+              <a:spcBef>
+                <a:spcPct val="0"/>
+              </a:spcBef>
+              <a:spcAft>
+                <a:spcPct val="0"/>
+              </a:spcAft>
+              <a:buFont typeface="Wingdings" panose="05000000000000000000" pitchFamily="2" charset="2"/>
+              <a:buChar char="v"/>
+            </a:pPr>
+            <a:endParaRPr lang="en-US" altLang="ko-KR" sz="1400" dirty="0">
+              <a:latin typeface="맑은 고딕 Semilight" panose="020B0502040204020203" pitchFamily="50" charset="-127"/>
+              <a:ea typeface="맑은 고딕 Semilight" panose="020B0502040204020203" pitchFamily="50" charset="-127"/>
+              <a:cs typeface="맑은 고딕 Semilight" panose="020B0502040204020203" pitchFamily="50" charset="-127"/>
+            </a:endParaRPr>
+          </a:p>
+          <a:p>
+            <a:pPr marL="285750" indent="-285750" eaLnBrk="0" fontAlgn="base" hangingPunct="0">
+              <a:lnSpc>
+                <a:spcPct val="150000"/>
+              </a:lnSpc>
+              <a:spcBef>
+                <a:spcPct val="0"/>
+              </a:spcBef>
+              <a:spcAft>
+                <a:spcPct val="0"/>
+              </a:spcAft>
+              <a:buFont typeface="Wingdings" panose="05000000000000000000" pitchFamily="2" charset="2"/>
+              <a:buChar char="v"/>
+            </a:pPr>
+            <a:r>
+              <a:rPr lang="en-US" altLang="ko-KR" sz="1400" dirty="0" err="1">
+                <a:latin typeface="맑은 고딕 Semilight" panose="020B0502040204020203" pitchFamily="50" charset="-127"/>
+                <a:ea typeface="맑은 고딕 Semilight" panose="020B0502040204020203" pitchFamily="50" charset="-127"/>
+                <a:cs typeface="맑은 고딕 Semilight" panose="020B0502040204020203" pitchFamily="50" charset="-127"/>
+              </a:rPr>
+              <a:t>featur</a:t>
+            </a:r>
+            <a:r>
+              <a:rPr lang="ko-KR" altLang="en-US" sz="1400" dirty="0">
+                <a:latin typeface="맑은 고딕 Semilight" panose="020B0502040204020203" pitchFamily="50" charset="-127"/>
+                <a:ea typeface="맑은 고딕 Semilight" panose="020B0502040204020203" pitchFamily="50" charset="-127"/>
+                <a:cs typeface="맑은 고딕 Semilight" panose="020B0502040204020203" pitchFamily="50" charset="-127"/>
+              </a:rPr>
+              <a:t>가 아주 많아지면 의사결정이 가능하겠는가</a:t>
+            </a:r>
+            <a:r>
+              <a:rPr lang="en-US" altLang="ko-KR" sz="1400" dirty="0">
+                <a:latin typeface="맑은 고딕 Semilight" panose="020B0502040204020203" pitchFamily="50" charset="-127"/>
+                <a:ea typeface="맑은 고딕 Semilight" panose="020B0502040204020203" pitchFamily="50" charset="-127"/>
+                <a:cs typeface="맑은 고딕 Semilight" panose="020B0502040204020203" pitchFamily="50" charset="-127"/>
+              </a:rPr>
+              <a:t>?</a:t>
+            </a:r>
+          </a:p>
+        </p:txBody>
+      </p:sp>
+      <p:pic>
+        <p:nvPicPr>
+          <p:cNvPr id="3076" name="Picture 4">
+            <a:extLst>
+              <a:ext uri="{FF2B5EF4-FFF2-40B4-BE49-F238E27FC236}">
+                <a16:creationId xmlns:a16="http://schemas.microsoft.com/office/drawing/2014/main" id="{A35E2700-4BA3-7734-5D6C-C50CE92CF960}"/>
+              </a:ext>
+            </a:extLst>
+          </p:cNvPr>
+          <p:cNvPicPr>
+            <a:picLocks noChangeAspect="1" noChangeArrowheads="1"/>
+          </p:cNvPicPr>
+          <p:nvPr/>
+        </p:nvPicPr>
+        <p:blipFill>
+          <a:blip r:embed="rId3">
+            <a:extLst>
+              <a:ext uri="{28A0092B-C50C-407E-A947-70E740481C1C}">
+                <a14:useLocalDpi xmlns:a14="http://schemas.microsoft.com/office/drawing/2010/main" val="0"/>
+              </a:ext>
+            </a:extLst>
+          </a:blip>
+          <a:srcRect/>
+          <a:stretch>
+            <a:fillRect/>
+          </a:stretch>
+        </p:blipFill>
+        <p:spPr bwMode="auto">
+          <a:xfrm>
+            <a:off x="289178" y="2444872"/>
+            <a:ext cx="3783085" cy="3884304"/>
+          </a:xfrm>
+          <a:prstGeom prst="rect">
+            <a:avLst/>
+          </a:prstGeom>
+          <a:noFill/>
+          <a:extLst>
+            <a:ext uri="{909E8E84-426E-40DD-AFC4-6F175D3DCCD1}">
+              <a14:hiddenFill xmlns:a14="http://schemas.microsoft.com/office/drawing/2010/main">
+                <a:solidFill>
+                  <a:srgbClr val="FFFFFF"/>
+                </a:solidFill>
+              </a14:hiddenFill>
+            </a:ext>
+          </a:extLst>
+        </p:spPr>
+      </p:pic>
+      <p:pic>
+        <p:nvPicPr>
+          <p:cNvPr id="4" name="Picture 2" descr="한 여자가 노트북 컴퓨터에 타이핑을 하고 있다">
+            <a:extLst>
+              <a:ext uri="{FF2B5EF4-FFF2-40B4-BE49-F238E27FC236}">
+                <a16:creationId xmlns:a16="http://schemas.microsoft.com/office/drawing/2014/main" id="{C81D2D8D-C09D-5D15-C6EE-D7672BD773AC}"/>
+              </a:ext>
+            </a:extLst>
+          </p:cNvPr>
+          <p:cNvPicPr>
+            <a:picLocks noChangeAspect="1" noChangeArrowheads="1"/>
+          </p:cNvPicPr>
+          <p:nvPr/>
+        </p:nvPicPr>
+        <p:blipFill>
+          <a:blip r:embed="rId4" cstate="print">
+            <a:extLst>
+              <a:ext uri="{28A0092B-C50C-407E-A947-70E740481C1C}">
+                <a14:useLocalDpi xmlns:a14="http://schemas.microsoft.com/office/drawing/2010/main" val="0"/>
+              </a:ext>
+            </a:extLst>
+          </a:blip>
+          <a:srcRect/>
+          <a:stretch>
+            <a:fillRect/>
+          </a:stretch>
+        </p:blipFill>
+        <p:spPr bwMode="auto">
+          <a:xfrm>
+            <a:off x="9918426" y="260648"/>
+            <a:ext cx="2152650" cy="1424329"/>
+          </a:xfrm>
+          <a:prstGeom prst="rect">
+            <a:avLst/>
+          </a:prstGeom>
+          <a:noFill/>
+          <a:extLst>
+            <a:ext uri="{909E8E84-426E-40DD-AFC4-6F175D3DCCD1}">
+              <a14:hiddenFill xmlns:a14="http://schemas.microsoft.com/office/drawing/2010/main">
+                <a:solidFill>
+                  <a:srgbClr val="FFFFFF"/>
+                </a:solidFill>
+              </a14:hiddenFill>
+            </a:ext>
+          </a:extLst>
+        </p:spPr>
+      </p:pic>
+    </p:spTree>
+    <p:extLst>
+      <p:ext uri="{BB962C8B-B14F-4D97-AF65-F5344CB8AC3E}">
+        <p14:creationId xmlns:p14="http://schemas.microsoft.com/office/powerpoint/2010/main" val="370321040"/>
+      </p:ext>
+    </p:extLst>
+  </p:cSld>
+  <p:clrMapOvr>
+    <a:masterClrMapping/>
+  </p:clrMapOvr>
+  <mc:AlternateContent xmlns:mc="http://schemas.openxmlformats.org/markup-compatibility/2006" xmlns:p14="http://schemas.microsoft.com/office/powerpoint/2010/main">
+    <mc:Choice Requires="p14">
+      <p:transition spd="med" p14:dur="700">
+        <p:fade/>
+      </p:transition>
+    </mc:Choice>
+    <mc:Fallback xmlns="">
+      <p:transition spd="med">
+        <p:fade/>
+      </p:transition>
+    </mc:Fallback>
+  </mc:AlternateContent>
+</p:sld>
+</file>
+
+<file path=ppt/slides/slide21.xml><?xml version="1.0" encoding="utf-8"?>
+<p:sld xmlns:a="http://schemas.openxmlformats.org/drawingml/2006/main" xmlns:r="http://schemas.openxmlformats.org/officeDocument/2006/relationships" xmlns:p="http://schemas.openxmlformats.org/presentationml/2006/main">
+  <p:cSld>
+    <p:spTree>
+      <p:nvGrpSpPr>
         <p:cNvPr id="1" name=""/>
         <p:cNvGrpSpPr/>
         <p:nvPr/>
@@ -14568,7 +14895,7 @@
             <a:pPr rtl="0"/>
             <a:fld id="{A3F31473-23EB-4724-8B59-FE6D21D89FA4}" type="slidenum">
               <a:rPr lang="en-US" altLang="ko-KR" noProof="0" smtClean="0"/>
-              <a:t>20</a:t>
+              <a:t>21</a:t>
             </a:fld>
             <a:endParaRPr lang="en-US" altLang="ko-KR" noProof="0" dirty="0"/>
           </a:p>
@@ -14738,7 +15065,7 @@
 </p:sld>
 </file>
 
-<file path=ppt/slides/slide21.xml><?xml version="1.0" encoding="utf-8"?>
+<file path=ppt/slides/slide22.xml><?xml version="1.0" encoding="utf-8"?>
 <p:sld xmlns:a="http://schemas.openxmlformats.org/drawingml/2006/main" xmlns:r="http://schemas.openxmlformats.org/officeDocument/2006/relationships" xmlns:p="http://schemas.openxmlformats.org/presentationml/2006/main">
   <p:cSld>
     <p:spTree>
@@ -14785,14 +15112,14 @@
             <a:pPr rtl="0"/>
             <a:fld id="{A3F31473-23EB-4724-8B59-FE6D21D89FA4}" type="slidenum">
               <a:rPr lang="en-US" altLang="ko-KR" noProof="0" smtClean="0"/>
-              <a:t>21</a:t>
+              <a:t>22</a:t>
             </a:fld>
             <a:endParaRPr lang="en-US" altLang="ko-KR" noProof="0" dirty="0"/>
           </a:p>
         </p:txBody>
       </p:sp>
-      <mc:AlternateContent xmlns:mc="http://schemas.openxmlformats.org/markup-compatibility/2006">
-        <mc:Choice xmlns:a14="http://schemas.microsoft.com/office/drawing/2010/main" Requires="a14">
+      <mc:AlternateContent xmlns:mc="http://schemas.openxmlformats.org/markup-compatibility/2006" xmlns:a14="http://schemas.microsoft.com/office/drawing/2010/main">
+        <mc:Choice Requires="a14">
           <p:sp>
             <p:nvSpPr>
               <p:cNvPr id="7" name="TextBox 6">
@@ -15159,7 +15486,7 @@
             </p:txBody>
           </p:sp>
         </mc:Choice>
-        <mc:Fallback>
+        <mc:Fallback xmlns="">
           <p:sp>
             <p:nvSpPr>
               <p:cNvPr id="7" name="TextBox 6">
@@ -15298,7 +15625,7 @@
 </p:sld>
 </file>
 
-<file path=ppt/slides/slide22.xml><?xml version="1.0" encoding="utf-8"?>
+<file path=ppt/slides/slide23.xml><?xml version="1.0" encoding="utf-8"?>
 <p:sld xmlns:a="http://schemas.openxmlformats.org/drawingml/2006/main" xmlns:r="http://schemas.openxmlformats.org/officeDocument/2006/relationships" xmlns:p="http://schemas.openxmlformats.org/presentationml/2006/main">
   <p:cSld>
     <p:spTree>
@@ -15333,7 +15660,7 @@
             <a:pPr rtl="0"/>
             <a:fld id="{A3F31473-23EB-4724-8B59-FE6D21D89FA4}" type="slidenum">
               <a:rPr lang="en-US" altLang="ko-KR" noProof="0" smtClean="0"/>
-              <a:t>22</a:t>
+              <a:t>23</a:t>
             </a:fld>
             <a:endParaRPr lang="en-US" altLang="ko-KR" noProof="0" dirty="0"/>
           </a:p>
@@ -15492,8 +15819,8 @@
           </a:fontRef>
         </p:style>
       </p:cxnSp>
-      <mc:AlternateContent xmlns:mc="http://schemas.openxmlformats.org/markup-compatibility/2006">
-        <mc:Choice xmlns:a14="http://schemas.microsoft.com/office/drawing/2010/main" Requires="a14">
+      <mc:AlternateContent xmlns:mc="http://schemas.openxmlformats.org/markup-compatibility/2006" xmlns:a14="http://schemas.microsoft.com/office/drawing/2010/main">
+        <mc:Choice Requires="a14">
           <p:sp>
             <p:nvSpPr>
               <p:cNvPr id="11" name="TextBox 10">
@@ -15587,7 +15914,7 @@
             </p:txBody>
           </p:sp>
         </mc:Choice>
-        <mc:Fallback>
+        <mc:Fallback xmlns="">
           <p:sp>
             <p:nvSpPr>
               <p:cNvPr id="11" name="TextBox 10">
@@ -15632,8 +15959,8 @@
           </p:sp>
         </mc:Fallback>
       </mc:AlternateContent>
-      <mc:AlternateContent xmlns:mc="http://schemas.openxmlformats.org/markup-compatibility/2006">
-        <mc:Choice xmlns:a14="http://schemas.microsoft.com/office/drawing/2010/main" Requires="a14">
+      <mc:AlternateContent xmlns:mc="http://schemas.openxmlformats.org/markup-compatibility/2006" xmlns:a14="http://schemas.microsoft.com/office/drawing/2010/main">
+        <mc:Choice Requires="a14">
           <p:sp>
             <p:nvSpPr>
               <p:cNvPr id="12" name="TextBox 11">
@@ -15727,7 +16054,7 @@
             </p:txBody>
           </p:sp>
         </mc:Choice>
-        <mc:Fallback>
+        <mc:Fallback xmlns="">
           <p:sp>
             <p:nvSpPr>
               <p:cNvPr id="12" name="TextBox 11">
@@ -15772,8 +16099,8 @@
           </p:sp>
         </mc:Fallback>
       </mc:AlternateContent>
-      <mc:AlternateContent xmlns:mc="http://schemas.openxmlformats.org/markup-compatibility/2006">
-        <mc:Choice xmlns:a14="http://schemas.microsoft.com/office/drawing/2010/main" Requires="a14">
+      <mc:AlternateContent xmlns:mc="http://schemas.openxmlformats.org/markup-compatibility/2006" xmlns:a14="http://schemas.microsoft.com/office/drawing/2010/main">
+        <mc:Choice Requires="a14">
           <p:sp>
             <p:nvSpPr>
               <p:cNvPr id="13" name="TextBox 12">
@@ -15867,7 +16194,7 @@
             </p:txBody>
           </p:sp>
         </mc:Choice>
-        <mc:Fallback>
+        <mc:Fallback xmlns="">
           <p:sp>
             <p:nvSpPr>
               <p:cNvPr id="13" name="TextBox 12">
@@ -15912,8 +16239,8 @@
           </p:sp>
         </mc:Fallback>
       </mc:AlternateContent>
-      <mc:AlternateContent xmlns:mc="http://schemas.openxmlformats.org/markup-compatibility/2006">
-        <mc:Choice xmlns:a14="http://schemas.microsoft.com/office/drawing/2010/main" Requires="a14">
+      <mc:AlternateContent xmlns:mc="http://schemas.openxmlformats.org/markup-compatibility/2006" xmlns:a14="http://schemas.microsoft.com/office/drawing/2010/main">
+        <mc:Choice Requires="a14">
           <p:sp>
             <p:nvSpPr>
               <p:cNvPr id="14" name="TextBox 13">
@@ -16007,7 +16334,7 @@
             </p:txBody>
           </p:sp>
         </mc:Choice>
-        <mc:Fallback>
+        <mc:Fallback xmlns="">
           <p:sp>
             <p:nvSpPr>
               <p:cNvPr id="14" name="TextBox 13">
@@ -16363,7 +16690,7 @@
 </p:sld>
 </file>
 
-<file path=ppt/slides/slide23.xml><?xml version="1.0" encoding="utf-8"?>
+<file path=ppt/slides/slide24.xml><?xml version="1.0" encoding="utf-8"?>
 <p:sld xmlns:a="http://schemas.openxmlformats.org/drawingml/2006/main" xmlns:r="http://schemas.openxmlformats.org/officeDocument/2006/relationships" xmlns:p="http://schemas.openxmlformats.org/presentationml/2006/main">
   <p:cSld>
     <p:spTree>
@@ -16398,7 +16725,7 @@
             <a:pPr rtl="0"/>
             <a:fld id="{A3F31473-23EB-4724-8B59-FE6D21D89FA4}" type="slidenum">
               <a:rPr lang="en-US" altLang="ko-KR" noProof="0" smtClean="0"/>
-              <a:t>23</a:t>
+              <a:t>24</a:t>
             </a:fld>
             <a:endParaRPr lang="en-US" altLang="ko-KR" noProof="0" dirty="0"/>
           </a:p>
@@ -16453,7 +16780,7 @@
 </p:sld>
 </file>
 
-<file path=ppt/slides/slide24.xml><?xml version="1.0" encoding="utf-8"?>
+<file path=ppt/slides/slide25.xml><?xml version="1.0" encoding="utf-8"?>
 <p:sld xmlns:a="http://schemas.openxmlformats.org/drawingml/2006/main" xmlns:r="http://schemas.openxmlformats.org/officeDocument/2006/relationships" xmlns:p="http://schemas.openxmlformats.org/presentationml/2006/main">
   <p:cSld>
     <p:spTree>
@@ -16500,7 +16827,7 @@
             <a:pPr rtl="0"/>
             <a:fld id="{A3F31473-23EB-4724-8B59-FE6D21D89FA4}" type="slidenum">
               <a:rPr lang="en-US" altLang="ko-KR" noProof="0" smtClean="0"/>
-              <a:t>24</a:t>
+              <a:t>25</a:t>
             </a:fld>
             <a:endParaRPr lang="en-US" altLang="ko-KR" noProof="0" dirty="0"/>
           </a:p>
@@ -17537,7 +17864,7 @@
 </p:sld>
 </file>
 
-<file path=ppt/slides/slide25.xml><?xml version="1.0" encoding="utf-8"?>
+<file path=ppt/slides/slide26.xml><?xml version="1.0" encoding="utf-8"?>
 <p:sld xmlns:a="http://schemas.openxmlformats.org/drawingml/2006/main" xmlns:r="http://schemas.openxmlformats.org/officeDocument/2006/relationships" xmlns:p="http://schemas.openxmlformats.org/presentationml/2006/main">
   <p:cSld>
     <p:spTree>
@@ -17584,7 +17911,7 @@
             <a:pPr rtl="0"/>
             <a:fld id="{A3F31473-23EB-4724-8B59-FE6D21D89FA4}" type="slidenum">
               <a:rPr lang="en-US" altLang="ko-KR" noProof="0" smtClean="0"/>
-              <a:t>25</a:t>
+              <a:t>26</a:t>
             </a:fld>
             <a:endParaRPr lang="en-US" altLang="ko-KR" noProof="0" dirty="0"/>
           </a:p>
@@ -17658,7 +17985,7 @@
 </p:sld>
 </file>
 
-<file path=ppt/slides/slide26.xml><?xml version="1.0" encoding="utf-8"?>
+<file path=ppt/slides/slide27.xml><?xml version="1.0" encoding="utf-8"?>
 <p:sld xmlns:a="http://schemas.openxmlformats.org/drawingml/2006/main" xmlns:r="http://schemas.openxmlformats.org/officeDocument/2006/relationships" xmlns:p="http://schemas.openxmlformats.org/presentationml/2006/main">
   <p:cSld>
     <p:spTree>
@@ -17705,7 +18032,7 @@
             <a:pPr rtl="0"/>
             <a:fld id="{A3F31473-23EB-4724-8B59-FE6D21D89FA4}" type="slidenum">
               <a:rPr lang="en-US" altLang="ko-KR" noProof="0" smtClean="0"/>
-              <a:t>26</a:t>
+              <a:t>27</a:t>
             </a:fld>
             <a:endParaRPr lang="en-US" altLang="ko-KR" noProof="0" dirty="0"/>
           </a:p>
@@ -18215,7 +18542,7 @@
 </p:sld>
 </file>
 
-<file path=ppt/slides/slide27.xml><?xml version="1.0" encoding="utf-8"?>
+<file path=ppt/slides/slide28.xml><?xml version="1.0" encoding="utf-8"?>
 <p:sld xmlns:a="http://schemas.openxmlformats.org/drawingml/2006/main" xmlns:r="http://schemas.openxmlformats.org/officeDocument/2006/relationships" xmlns:p="http://schemas.openxmlformats.org/presentationml/2006/main">
   <p:cSld>
     <p:spTree>
@@ -18262,7 +18589,7 @@
             <a:pPr rtl="0"/>
             <a:fld id="{A3F31473-23EB-4724-8B59-FE6D21D89FA4}" type="slidenum">
               <a:rPr lang="en-US" altLang="ko-KR" noProof="0" smtClean="0"/>
-              <a:t>27</a:t>
+              <a:t>28</a:t>
             </a:fld>
             <a:endParaRPr lang="en-US" altLang="ko-KR" noProof="0" dirty="0"/>
           </a:p>
@@ -18756,7 +19083,7 @@
 </p:sld>
 </file>
 
-<file path=ppt/slides/slide28.xml><?xml version="1.0" encoding="utf-8"?>
+<file path=ppt/slides/slide29.xml><?xml version="1.0" encoding="utf-8"?>
 <p:sld xmlns:a="http://schemas.openxmlformats.org/drawingml/2006/main" xmlns:r="http://schemas.openxmlformats.org/officeDocument/2006/relationships" xmlns:p="http://schemas.openxmlformats.org/presentationml/2006/main">
   <p:cSld>
     <p:spTree>
@@ -18797,7 +19124,7 @@
             <a:pPr rtl="0"/>
             <a:fld id="{A3F31473-23EB-4724-8B59-FE6D21D89FA4}" type="slidenum">
               <a:rPr lang="en-US" altLang="ko-KR" noProof="0" smtClean="0"/>
-              <a:t>28</a:t>
+              <a:t>29</a:t>
             </a:fld>
             <a:endParaRPr lang="en-US" altLang="ko-KR" noProof="0" dirty="0"/>
           </a:p>
@@ -19258,9 +19585,651 @@
           </a:p>
         </p:txBody>
       </p:sp>
+      <p:sp>
+        <p:nvSpPr>
+          <p:cNvPr id="3" name="TextBox 2">
+            <a:extLst>
+              <a:ext uri="{FF2B5EF4-FFF2-40B4-BE49-F238E27FC236}">
+                <a16:creationId xmlns:a16="http://schemas.microsoft.com/office/drawing/2014/main" id="{B1D92C58-8C4D-6C08-A392-EF301B1BC5A4}"/>
+              </a:ext>
+            </a:extLst>
+          </p:cNvPr>
+          <p:cNvSpPr txBox="1"/>
+          <p:nvPr/>
+        </p:nvSpPr>
+        <p:spPr>
+          <a:xfrm>
+            <a:off x="606549" y="1130799"/>
+            <a:ext cx="11191750" cy="4271106"/>
+          </a:xfrm>
+          <a:prstGeom prst="rect">
+            <a:avLst/>
+          </a:prstGeom>
+          <a:noFill/>
+        </p:spPr>
+        <p:txBody>
+          <a:bodyPr wrap="square">
+            <a:spAutoFit/>
+          </a:bodyPr>
+          <a:lstStyle/>
+          <a:p>
+            <a:pPr marL="285750" indent="-285750">
+              <a:lnSpc>
+                <a:spcPct val="200000"/>
+              </a:lnSpc>
+              <a:buFont typeface="Wingdings" panose="05000000000000000000" pitchFamily="2" charset="2"/>
+              <a:buChar char="v"/>
+            </a:pPr>
+            <a:r>
+              <a:rPr lang="ko-KR" altLang="en-US" sz="1600" dirty="0">
+                <a:latin typeface="맑은 고딕 Semilight" panose="020B0502040204020203" pitchFamily="50" charset="-127"/>
+                <a:ea typeface="맑은 고딕 Semilight" panose="020B0502040204020203" pitchFamily="50" charset="-127"/>
+                <a:cs typeface="맑은 고딕 Semilight" panose="020B0502040204020203" pitchFamily="50" charset="-127"/>
+              </a:rPr>
+              <a:t>중심극한정리</a:t>
+            </a:r>
+            <a:r>
+              <a:rPr lang="en-US" altLang="ko-KR" sz="1600" dirty="0">
+                <a:latin typeface="맑은 고딕 Semilight" panose="020B0502040204020203" pitchFamily="50" charset="-127"/>
+                <a:ea typeface="맑은 고딕 Semilight" panose="020B0502040204020203" pitchFamily="50" charset="-127"/>
+                <a:cs typeface="맑은 고딕 Semilight" panose="020B0502040204020203" pitchFamily="50" charset="-127"/>
+              </a:rPr>
+              <a:t>(CLT)</a:t>
+            </a:r>
+            <a:r>
+              <a:rPr lang="ko-KR" altLang="en-US" sz="1600" dirty="0">
+                <a:latin typeface="맑은 고딕 Semilight" panose="020B0502040204020203" pitchFamily="50" charset="-127"/>
+                <a:ea typeface="맑은 고딕 Semilight" panose="020B0502040204020203" pitchFamily="50" charset="-127"/>
+                <a:cs typeface="맑은 고딕 Semilight" panose="020B0502040204020203" pitchFamily="50" charset="-127"/>
+              </a:rPr>
+              <a:t>는 통계적 가설검정을 가능하게 하는 가장 중요한 이론적 토대입니다</a:t>
+            </a:r>
+            <a:r>
+              <a:rPr lang="en-US" altLang="ko-KR" sz="1600" dirty="0">
+                <a:latin typeface="맑은 고딕 Semilight" panose="020B0502040204020203" pitchFamily="50" charset="-127"/>
+                <a:ea typeface="맑은 고딕 Semilight" panose="020B0502040204020203" pitchFamily="50" charset="-127"/>
+                <a:cs typeface="맑은 고딕 Semilight" panose="020B0502040204020203" pitchFamily="50" charset="-127"/>
+              </a:rPr>
+              <a:t>. </a:t>
+            </a:r>
+            <a:r>
+              <a:rPr lang="ko-KR" altLang="en-US" sz="1600" dirty="0">
+                <a:latin typeface="맑은 고딕 Semilight" panose="020B0502040204020203" pitchFamily="50" charset="-127"/>
+                <a:ea typeface="맑은 고딕 Semilight" panose="020B0502040204020203" pitchFamily="50" charset="-127"/>
+                <a:cs typeface="맑은 고딕 Semilight" panose="020B0502040204020203" pitchFamily="50" charset="-127"/>
+              </a:rPr>
+              <a:t>모집단의 분포가 무엇이든 관계없이 </a:t>
+            </a:r>
+            <a:r>
+              <a:rPr lang="en-US" altLang="ko-KR" sz="1600" b="1" dirty="0">
+                <a:latin typeface="맑은 고딕 Semilight" panose="020B0502040204020203" pitchFamily="50" charset="-127"/>
+                <a:ea typeface="맑은 고딕 Semilight" panose="020B0502040204020203" pitchFamily="50" charset="-127"/>
+                <a:cs typeface="맑은 고딕 Semilight" panose="020B0502040204020203" pitchFamily="50" charset="-127"/>
+              </a:rPr>
+              <a:t>"</a:t>
+            </a:r>
+            <a:r>
+              <a:rPr lang="ko-KR" altLang="en-US" sz="1600" b="1" dirty="0">
+                <a:latin typeface="맑은 고딕 Semilight" panose="020B0502040204020203" pitchFamily="50" charset="-127"/>
+                <a:ea typeface="맑은 고딕 Semilight" panose="020B0502040204020203" pitchFamily="50" charset="-127"/>
+                <a:cs typeface="맑은 고딕 Semilight" panose="020B0502040204020203" pitchFamily="50" charset="-127"/>
+              </a:rPr>
+              <a:t>표본평균의 분포</a:t>
+            </a:r>
+            <a:r>
+              <a:rPr lang="en-US" altLang="ko-KR" sz="1600" b="1" dirty="0">
+                <a:latin typeface="맑은 고딕 Semilight" panose="020B0502040204020203" pitchFamily="50" charset="-127"/>
+                <a:ea typeface="맑은 고딕 Semilight" panose="020B0502040204020203" pitchFamily="50" charset="-127"/>
+                <a:cs typeface="맑은 고딕 Semilight" panose="020B0502040204020203" pitchFamily="50" charset="-127"/>
+              </a:rPr>
+              <a:t>"</a:t>
+            </a:r>
+            <a:r>
+              <a:rPr lang="ko-KR" altLang="en-US" sz="1600" b="1" dirty="0">
+                <a:latin typeface="맑은 고딕 Semilight" panose="020B0502040204020203" pitchFamily="50" charset="-127"/>
+                <a:ea typeface="맑은 고딕 Semilight" panose="020B0502040204020203" pitchFamily="50" charset="-127"/>
+                <a:cs typeface="맑은 고딕 Semilight" panose="020B0502040204020203" pitchFamily="50" charset="-127"/>
+              </a:rPr>
+              <a:t>가 정규분포를 따른다</a:t>
+            </a:r>
+            <a:r>
+              <a:rPr lang="ko-KR" altLang="en-US" sz="1600" dirty="0">
+                <a:latin typeface="맑은 고딕 Semilight" panose="020B0502040204020203" pitchFamily="50" charset="-127"/>
+                <a:ea typeface="맑은 고딕 Semilight" panose="020B0502040204020203" pitchFamily="50" charset="-127"/>
+                <a:cs typeface="맑은 고딕 Semilight" panose="020B0502040204020203" pitchFamily="50" charset="-127"/>
+              </a:rPr>
+              <a:t>는 점을 이용해 확률을 계산할 수 있기 때문</a:t>
+            </a:r>
+            <a:endParaRPr lang="en-US" altLang="ko-KR" sz="1600" dirty="0">
+              <a:latin typeface="맑은 고딕 Semilight" panose="020B0502040204020203" pitchFamily="50" charset="-127"/>
+              <a:ea typeface="맑은 고딕 Semilight" panose="020B0502040204020203" pitchFamily="50" charset="-127"/>
+              <a:cs typeface="맑은 고딕 Semilight" panose="020B0502040204020203" pitchFamily="50" charset="-127"/>
+            </a:endParaRPr>
+          </a:p>
+          <a:p>
+            <a:pPr marL="285750" indent="-285750">
+              <a:lnSpc>
+                <a:spcPct val="200000"/>
+              </a:lnSpc>
+              <a:buFont typeface="Wingdings" panose="05000000000000000000" pitchFamily="2" charset="2"/>
+              <a:buChar char="v"/>
+            </a:pPr>
+            <a:endParaRPr lang="en-US" altLang="ko-KR" sz="1600" dirty="0">
+              <a:latin typeface="맑은 고딕 Semilight" panose="020B0502040204020203" pitchFamily="50" charset="-127"/>
+              <a:ea typeface="맑은 고딕 Semilight" panose="020B0502040204020203" pitchFamily="50" charset="-127"/>
+              <a:cs typeface="맑은 고딕 Semilight" panose="020B0502040204020203" pitchFamily="50" charset="-127"/>
+            </a:endParaRPr>
+          </a:p>
+          <a:p>
+            <a:pPr marL="285750" indent="-285750">
+              <a:lnSpc>
+                <a:spcPct val="200000"/>
+              </a:lnSpc>
+              <a:buFont typeface="Wingdings" panose="05000000000000000000" pitchFamily="2" charset="2"/>
+              <a:buChar char="v"/>
+            </a:pPr>
+            <a:endParaRPr lang="en-US" altLang="ko-KR" sz="1600" dirty="0">
+              <a:latin typeface="맑은 고딕 Semilight" panose="020B0502040204020203" pitchFamily="50" charset="-127"/>
+              <a:ea typeface="맑은 고딕 Semilight" panose="020B0502040204020203" pitchFamily="50" charset="-127"/>
+              <a:cs typeface="맑은 고딕 Semilight" panose="020B0502040204020203" pitchFamily="50" charset="-127"/>
+            </a:endParaRPr>
+          </a:p>
+          <a:p>
+            <a:pPr marL="285750" indent="-285750">
+              <a:lnSpc>
+                <a:spcPct val="200000"/>
+              </a:lnSpc>
+              <a:buFont typeface="Wingdings" panose="05000000000000000000" pitchFamily="2" charset="2"/>
+              <a:buChar char="v"/>
+            </a:pPr>
+            <a:r>
+              <a:rPr lang="ko-KR" altLang="en-US" sz="1600" dirty="0">
+                <a:latin typeface="맑은 고딕 Semilight" panose="020B0502040204020203" pitchFamily="50" charset="-127"/>
+                <a:ea typeface="맑은 고딕 Semilight" panose="020B0502040204020203" pitchFamily="50" charset="-127"/>
+                <a:cs typeface="맑은 고딕 Semilight" panose="020B0502040204020203" pitchFamily="50" charset="-127"/>
+              </a:rPr>
+              <a:t>모집단의 분포를 알 수 없어도 표본의 평균과 분산을 통해 모집단의 평균과 분산을 추정하고 가설검정을 할 수 있음 </a:t>
+            </a:r>
+            <a:r>
+              <a:rPr lang="en-US" altLang="ko-KR" sz="1600" dirty="0">
+                <a:latin typeface="맑은 고딕 Semilight" panose="020B0502040204020203" pitchFamily="50" charset="-127"/>
+                <a:ea typeface="맑은 고딕 Semilight" panose="020B0502040204020203" pitchFamily="50" charset="-127"/>
+                <a:cs typeface="맑은 고딕 Semilight" panose="020B0502040204020203" pitchFamily="50" charset="-127"/>
+              </a:rPr>
+              <a:t>: </a:t>
+            </a:r>
+            <a:r>
+              <a:rPr lang="ko-KR" altLang="en-US" sz="1600" b="1" dirty="0">
+                <a:latin typeface="맑은 고딕 Semilight" panose="020B0502040204020203" pitchFamily="50" charset="-127"/>
+                <a:ea typeface="맑은 고딕 Semilight" panose="020B0502040204020203" pitchFamily="50" charset="-127"/>
+                <a:cs typeface="맑은 고딕 Semilight" panose="020B0502040204020203" pitchFamily="50" charset="-127"/>
+              </a:rPr>
+              <a:t>표본평균만으로 모평균을 추정할 수 있고 분포는 표본의 크기에 따라 추정 가능함 </a:t>
+            </a:r>
+            <a:endParaRPr lang="en-US" altLang="ko-KR" sz="1600" b="1" dirty="0">
+              <a:latin typeface="맑은 고딕 Semilight" panose="020B0502040204020203" pitchFamily="50" charset="-127"/>
+              <a:ea typeface="맑은 고딕 Semilight" panose="020B0502040204020203" pitchFamily="50" charset="-127"/>
+              <a:cs typeface="맑은 고딕 Semilight" panose="020B0502040204020203" pitchFamily="50" charset="-127"/>
+            </a:endParaRPr>
+          </a:p>
+          <a:p>
+            <a:pPr marL="742950" lvl="1" indent="-285750">
+              <a:lnSpc>
+                <a:spcPct val="200000"/>
+              </a:lnSpc>
+              <a:buFont typeface="Wingdings" panose="05000000000000000000" pitchFamily="2" charset="2"/>
+              <a:buChar char="v"/>
+            </a:pPr>
+            <a:r>
+              <a:rPr lang="ko-KR" altLang="en-US" sz="1400" dirty="0">
+                <a:latin typeface="맑은 고딕 Semilight" panose="020B0502040204020203" pitchFamily="50" charset="-127"/>
+                <a:ea typeface="맑은 고딕 Semilight" panose="020B0502040204020203" pitchFamily="50" charset="-127"/>
+                <a:cs typeface="맑은 고딕 Semilight" panose="020B0502040204020203" pitchFamily="50" charset="-127"/>
+              </a:rPr>
+              <a:t>보편성</a:t>
+            </a:r>
+            <a:r>
+              <a:rPr lang="en-US" altLang="ko-KR" sz="1400" dirty="0">
+                <a:latin typeface="맑은 고딕 Semilight" panose="020B0502040204020203" pitchFamily="50" charset="-127"/>
+                <a:ea typeface="맑은 고딕 Semilight" panose="020B0502040204020203" pitchFamily="50" charset="-127"/>
+                <a:cs typeface="맑은 고딕 Semilight" panose="020B0502040204020203" pitchFamily="50" charset="-127"/>
+              </a:rPr>
+              <a:t>: </a:t>
+            </a:r>
+            <a:r>
+              <a:rPr lang="ko-KR" altLang="en-US" sz="1400" dirty="0">
+                <a:latin typeface="맑은 고딕 Semilight" panose="020B0502040204020203" pitchFamily="50" charset="-127"/>
+                <a:ea typeface="맑은 고딕 Semilight" panose="020B0502040204020203" pitchFamily="50" charset="-127"/>
+                <a:cs typeface="맑은 고딕 Semilight" panose="020B0502040204020203" pitchFamily="50" charset="-127"/>
+              </a:rPr>
+              <a:t>모집단이 어떤 모양이든 상관없이 동일한 정규분포 기반 </a:t>
+            </a:r>
+            <a:r>
+              <a:rPr lang="ko-KR" altLang="en-US" sz="1400" dirty="0" err="1">
+                <a:latin typeface="맑은 고딕 Semilight" panose="020B0502040204020203" pitchFamily="50" charset="-127"/>
+                <a:ea typeface="맑은 고딕 Semilight" panose="020B0502040204020203" pitchFamily="50" charset="-127"/>
+                <a:cs typeface="맑은 고딕 Semilight" panose="020B0502040204020203" pitchFamily="50" charset="-127"/>
+              </a:rPr>
+              <a:t>검정법</a:t>
+            </a:r>
+            <a:r>
+              <a:rPr lang="en-US" altLang="ko-KR" sz="1400" dirty="0">
+                <a:latin typeface="맑은 고딕 Semilight" panose="020B0502040204020203" pitchFamily="50" charset="-127"/>
+                <a:ea typeface="맑은 고딕 Semilight" panose="020B0502040204020203" pitchFamily="50" charset="-127"/>
+                <a:cs typeface="맑은 고딕 Semilight" panose="020B0502040204020203" pitchFamily="50" charset="-127"/>
+              </a:rPr>
+              <a:t>(Z-test, T-test)</a:t>
+            </a:r>
+            <a:r>
+              <a:rPr lang="ko-KR" altLang="en-US" sz="1400" dirty="0">
+                <a:latin typeface="맑은 고딕 Semilight" panose="020B0502040204020203" pitchFamily="50" charset="-127"/>
+                <a:ea typeface="맑은 고딕 Semilight" panose="020B0502040204020203" pitchFamily="50" charset="-127"/>
+                <a:cs typeface="맑은 고딕 Semilight" panose="020B0502040204020203" pitchFamily="50" charset="-127"/>
+              </a:rPr>
+              <a:t>을 적용</a:t>
+            </a:r>
+            <a:endParaRPr lang="en-US" altLang="ko-KR" sz="1400" dirty="0">
+              <a:latin typeface="맑은 고딕 Semilight" panose="020B0502040204020203" pitchFamily="50" charset="-127"/>
+              <a:ea typeface="맑은 고딕 Semilight" panose="020B0502040204020203" pitchFamily="50" charset="-127"/>
+              <a:cs typeface="맑은 고딕 Semilight" panose="020B0502040204020203" pitchFamily="50" charset="-127"/>
+            </a:endParaRPr>
+          </a:p>
+          <a:p>
+            <a:pPr marL="742950" lvl="1" indent="-285750">
+              <a:lnSpc>
+                <a:spcPct val="200000"/>
+              </a:lnSpc>
+              <a:buFont typeface="Wingdings" panose="05000000000000000000" pitchFamily="2" charset="2"/>
+              <a:buChar char="v"/>
+            </a:pPr>
+            <a:r>
+              <a:rPr lang="ko-KR" altLang="en-US" sz="1400" dirty="0">
+                <a:latin typeface="맑은 고딕 Semilight" panose="020B0502040204020203" pitchFamily="50" charset="-127"/>
+                <a:ea typeface="맑은 고딕 Semilight" panose="020B0502040204020203" pitchFamily="50" charset="-127"/>
+                <a:cs typeface="맑은 고딕 Semilight" panose="020B0502040204020203" pitchFamily="50" charset="-127"/>
+              </a:rPr>
+              <a:t>객관적 기준</a:t>
+            </a:r>
+            <a:r>
+              <a:rPr lang="en-US" altLang="ko-KR" sz="1400" dirty="0">
+                <a:latin typeface="맑은 고딕 Semilight" panose="020B0502040204020203" pitchFamily="50" charset="-127"/>
+                <a:ea typeface="맑은 고딕 Semilight" panose="020B0502040204020203" pitchFamily="50" charset="-127"/>
+                <a:cs typeface="맑은 고딕 Semilight" panose="020B0502040204020203" pitchFamily="50" charset="-127"/>
+              </a:rPr>
+              <a:t>: </a:t>
+            </a:r>
+            <a:r>
+              <a:rPr lang="ko-KR" altLang="en-US" sz="1400" dirty="0">
+                <a:latin typeface="맑은 고딕 Semilight" panose="020B0502040204020203" pitchFamily="50" charset="-127"/>
+                <a:ea typeface="맑은 고딕 Semilight" panose="020B0502040204020203" pitchFamily="50" charset="-127"/>
+                <a:cs typeface="맑은 고딕 Semilight" panose="020B0502040204020203" pitchFamily="50" charset="-127"/>
+              </a:rPr>
+              <a:t>정규분포의 면적을 통해 유의수준</a:t>
+            </a:r>
+            <a:r>
+              <a:rPr lang="en-US" altLang="ko-KR" sz="1400" dirty="0">
+                <a:latin typeface="맑은 고딕 Semilight" panose="020B0502040204020203" pitchFamily="50" charset="-127"/>
+                <a:ea typeface="맑은 고딕 Semilight" panose="020B0502040204020203" pitchFamily="50" charset="-127"/>
+                <a:cs typeface="맑은 고딕 Semilight" panose="020B0502040204020203" pitchFamily="50" charset="-127"/>
+              </a:rPr>
+              <a:t>(</a:t>
+            </a:r>
+            <a:r>
+              <a:rPr lang="ko-KR" altLang="en-US" sz="1400" dirty="0">
+                <a:latin typeface="맑은 고딕 Semilight" panose="020B0502040204020203" pitchFamily="50" charset="-127"/>
+                <a:ea typeface="맑은 고딕 Semilight" panose="020B0502040204020203" pitchFamily="50" charset="-127"/>
+                <a:cs typeface="맑은 고딕 Semilight" panose="020B0502040204020203" pitchFamily="50" charset="-127"/>
+              </a:rPr>
+              <a:t>예</a:t>
+            </a:r>
+            <a:r>
+              <a:rPr lang="en-US" altLang="ko-KR" sz="1400" dirty="0">
+                <a:latin typeface="맑은 고딕 Semilight" panose="020B0502040204020203" pitchFamily="50" charset="-127"/>
+                <a:ea typeface="맑은 고딕 Semilight" panose="020B0502040204020203" pitchFamily="50" charset="-127"/>
+                <a:cs typeface="맑은 고딕 Semilight" panose="020B0502040204020203" pitchFamily="50" charset="-127"/>
+              </a:rPr>
+              <a:t>: 5%, 1%)</a:t>
+            </a:r>
+            <a:r>
+              <a:rPr lang="ko-KR" altLang="en-US" sz="1400" dirty="0">
+                <a:latin typeface="맑은 고딕 Semilight" panose="020B0502040204020203" pitchFamily="50" charset="-127"/>
+                <a:ea typeface="맑은 고딕 Semilight" panose="020B0502040204020203" pitchFamily="50" charset="-127"/>
+                <a:cs typeface="맑은 고딕 Semilight" panose="020B0502040204020203" pitchFamily="50" charset="-127"/>
+              </a:rPr>
+              <a:t>에 해당하는 경계선을 명확히 계산</a:t>
+            </a:r>
+            <a:endParaRPr lang="en-US" altLang="ko-KR" sz="1400" dirty="0">
+              <a:latin typeface="맑은 고딕 Semilight" panose="020B0502040204020203" pitchFamily="50" charset="-127"/>
+              <a:ea typeface="맑은 고딕 Semilight" panose="020B0502040204020203" pitchFamily="50" charset="-127"/>
+              <a:cs typeface="맑은 고딕 Semilight" panose="020B0502040204020203" pitchFamily="50" charset="-127"/>
+            </a:endParaRPr>
+          </a:p>
+          <a:p>
+            <a:pPr marL="742950" lvl="1" indent="-285750">
+              <a:lnSpc>
+                <a:spcPct val="200000"/>
+              </a:lnSpc>
+              <a:buFont typeface="Wingdings" panose="05000000000000000000" pitchFamily="2" charset="2"/>
+              <a:buChar char="v"/>
+            </a:pPr>
+            <a:r>
+              <a:rPr lang="ko-KR" altLang="en-US" sz="1400" dirty="0">
+                <a:latin typeface="맑은 고딕 Semilight" panose="020B0502040204020203" pitchFamily="50" charset="-127"/>
+                <a:ea typeface="맑은 고딕 Semilight" panose="020B0502040204020203" pitchFamily="50" charset="-127"/>
+                <a:cs typeface="맑은 고딕 Semilight" panose="020B0502040204020203" pitchFamily="50" charset="-127"/>
+              </a:rPr>
+              <a:t>표본의 힘</a:t>
+            </a:r>
+            <a:r>
+              <a:rPr lang="en-US" altLang="ko-KR" sz="1400" dirty="0">
+                <a:latin typeface="맑은 고딕 Semilight" panose="020B0502040204020203" pitchFamily="50" charset="-127"/>
+                <a:ea typeface="맑은 고딕 Semilight" panose="020B0502040204020203" pitchFamily="50" charset="-127"/>
+                <a:cs typeface="맑은 고딕 Semilight" panose="020B0502040204020203" pitchFamily="50" charset="-127"/>
+              </a:rPr>
+              <a:t>: </a:t>
+            </a:r>
+            <a:r>
+              <a:rPr lang="ko-KR" altLang="en-US" sz="1400" dirty="0">
+                <a:latin typeface="맑은 고딕 Semilight" panose="020B0502040204020203" pitchFamily="50" charset="-127"/>
+                <a:ea typeface="맑은 고딕 Semilight" panose="020B0502040204020203" pitchFamily="50" charset="-127"/>
+                <a:cs typeface="맑은 고딕 Semilight" panose="020B0502040204020203" pitchFamily="50" charset="-127"/>
+              </a:rPr>
+              <a:t>모집단 전체를 전수 </a:t>
+            </a:r>
+            <a:r>
+              <a:rPr lang="ko-KR" altLang="en-US" sz="1400" dirty="0" err="1">
+                <a:latin typeface="맑은 고딕 Semilight" panose="020B0502040204020203" pitchFamily="50" charset="-127"/>
+                <a:ea typeface="맑은 고딕 Semilight" panose="020B0502040204020203" pitchFamily="50" charset="-127"/>
+                <a:cs typeface="맑은 고딕 Semilight" panose="020B0502040204020203" pitchFamily="50" charset="-127"/>
+              </a:rPr>
+              <a:t>조사없이</a:t>
+            </a:r>
+            <a:r>
+              <a:rPr lang="en-US" altLang="ko-KR" sz="1400" dirty="0">
+                <a:latin typeface="맑은 고딕 Semilight" panose="020B0502040204020203" pitchFamily="50" charset="-127"/>
+                <a:ea typeface="맑은 고딕 Semilight" panose="020B0502040204020203" pitchFamily="50" charset="-127"/>
+                <a:cs typeface="맑은 고딕 Semilight" panose="020B0502040204020203" pitchFamily="50" charset="-127"/>
+              </a:rPr>
+              <a:t> </a:t>
+            </a:r>
+            <a:r>
+              <a:rPr lang="ko-KR" altLang="en-US" sz="1400" dirty="0">
+                <a:latin typeface="맑은 고딕 Semilight" panose="020B0502040204020203" pitchFamily="50" charset="-127"/>
+                <a:ea typeface="맑은 고딕 Semilight" panose="020B0502040204020203" pitchFamily="50" charset="-127"/>
+                <a:cs typeface="맑은 고딕 Semilight" panose="020B0502040204020203" pitchFamily="50" charset="-127"/>
+              </a:rPr>
+              <a:t>충분한 크기의 표본만 있다면 모집단에 대한 추론과 예측이 가능</a:t>
+            </a:r>
+            <a:endParaRPr lang="en-US" altLang="ko-KR" sz="1400" dirty="0">
+              <a:latin typeface="맑은 고딕 Semilight" panose="020B0502040204020203" pitchFamily="50" charset="-127"/>
+              <a:ea typeface="맑은 고딕 Semilight" panose="020B0502040204020203" pitchFamily="50" charset="-127"/>
+              <a:cs typeface="맑은 고딕 Semilight" panose="020B0502040204020203" pitchFamily="50" charset="-127"/>
+            </a:endParaRPr>
+          </a:p>
+        </p:txBody>
+      </p:sp>
+      <p:sp>
+        <p:nvSpPr>
+          <p:cNvPr id="2" name="직사각형 1">
+            <a:extLst>
+              <a:ext uri="{FF2B5EF4-FFF2-40B4-BE49-F238E27FC236}">
+                <a16:creationId xmlns:a16="http://schemas.microsoft.com/office/drawing/2014/main" id="{38338648-42F5-8579-CB6F-5CAC28D723B6}"/>
+              </a:ext>
+            </a:extLst>
+          </p:cNvPr>
+          <p:cNvSpPr/>
+          <p:nvPr/>
+        </p:nvSpPr>
+        <p:spPr>
+          <a:xfrm>
+            <a:off x="765820" y="145576"/>
+            <a:ext cx="10873208" cy="523220"/>
+          </a:xfrm>
+          <a:prstGeom prst="rect">
+            <a:avLst/>
+          </a:prstGeom>
+        </p:spPr>
+        <p:txBody>
+          <a:bodyPr wrap="square">
+            <a:spAutoFit/>
+          </a:bodyPr>
+          <a:lstStyle/>
+          <a:p>
+            <a:pPr algn="ctr">
+              <a:buNone/>
+            </a:pPr>
+            <a:r>
+              <a:rPr lang="ko-KR" altLang="en-US" sz="2800" b="1" dirty="0" err="1"/>
+              <a:t>중심극한</a:t>
+            </a:r>
+            <a:r>
+              <a:rPr lang="ko-KR" altLang="en-US" sz="2800" b="1" dirty="0"/>
+              <a:t> 정리와</a:t>
+            </a:r>
+            <a:r>
+              <a:rPr lang="en-US" altLang="ko-KR" sz="2800" b="1" dirty="0"/>
+              <a:t> </a:t>
+            </a:r>
+            <a:r>
+              <a:rPr lang="ko-KR" altLang="en-US" sz="2800" b="1" dirty="0"/>
+              <a:t>가설검정</a:t>
+            </a:r>
+          </a:p>
+        </p:txBody>
+      </p:sp>
       <p:pic>
         <p:nvPicPr>
-          <p:cNvPr id="4" name="그림 3"/>
+          <p:cNvPr id="10" name="그림 9">
+            <a:extLst>
+              <a:ext uri="{FF2B5EF4-FFF2-40B4-BE49-F238E27FC236}">
+                <a16:creationId xmlns:a16="http://schemas.microsoft.com/office/drawing/2014/main" id="{9863B13D-C89F-49F8-D25B-A823C8119397}"/>
+              </a:ext>
+            </a:extLst>
+          </p:cNvPr>
+          <p:cNvPicPr>
+            <a:picLocks noChangeAspect="1"/>
+          </p:cNvPicPr>
+          <p:nvPr/>
+        </p:nvPicPr>
+        <p:blipFill>
+          <a:blip r:embed="rId3">
+            <a:extLst>
+              <a:ext uri="{BEBA8EAE-BF5A-486C-A8C5-ECC9F3942E4B}">
+                <a14:imgProps xmlns:a14="http://schemas.microsoft.com/office/drawing/2010/main">
+                  <a14:imgLayer r:embed="rId4">
+                    <a14:imgEffect>
+                      <a14:brightnessContrast bright="-20000" contrast="40000"/>
+                    </a14:imgEffect>
+                  </a14:imgLayer>
+                </a14:imgProps>
+              </a:ext>
+            </a:extLst>
+          </a:blip>
+          <a:stretch>
+            <a:fillRect/>
+          </a:stretch>
+        </p:blipFill>
+        <p:spPr>
+          <a:xfrm>
+            <a:off x="3358108" y="2132856"/>
+            <a:ext cx="1941989" cy="864096"/>
+          </a:xfrm>
+          <a:prstGeom prst="rect">
+            <a:avLst/>
+          </a:prstGeom>
+        </p:spPr>
+      </p:pic>
+      <p:pic>
+        <p:nvPicPr>
+          <p:cNvPr id="14" name="그림 13">
+            <a:extLst>
+              <a:ext uri="{FF2B5EF4-FFF2-40B4-BE49-F238E27FC236}">
+                <a16:creationId xmlns:a16="http://schemas.microsoft.com/office/drawing/2014/main" id="{647E3737-D38B-FBEB-4994-E125789904C4}"/>
+              </a:ext>
+            </a:extLst>
+          </p:cNvPr>
+          <p:cNvPicPr>
+            <a:picLocks noChangeAspect="1"/>
+          </p:cNvPicPr>
+          <p:nvPr/>
+        </p:nvPicPr>
+        <p:blipFill>
+          <a:blip r:embed="rId5">
+            <a:extLst>
+              <a:ext uri="{BEBA8EAE-BF5A-486C-A8C5-ECC9F3942E4B}">
+                <a14:imgProps xmlns:a14="http://schemas.microsoft.com/office/drawing/2010/main">
+                  <a14:imgLayer r:embed="rId6">
+                    <a14:imgEffect>
+                      <a14:brightnessContrast bright="-20000" contrast="40000"/>
+                    </a14:imgEffect>
+                  </a14:imgLayer>
+                </a14:imgProps>
+              </a:ext>
+            </a:extLst>
+          </a:blip>
+          <a:stretch>
+            <a:fillRect/>
+          </a:stretch>
+        </p:blipFill>
+        <p:spPr>
+          <a:xfrm>
+            <a:off x="9059719" y="4077072"/>
+            <a:ext cx="1216939" cy="642484"/>
+          </a:xfrm>
+          <a:prstGeom prst="rect">
+            <a:avLst/>
+          </a:prstGeom>
+        </p:spPr>
+      </p:pic>
+      <p:pic>
+        <p:nvPicPr>
+          <p:cNvPr id="18" name="그림 17">
+            <a:extLst>
+              <a:ext uri="{FF2B5EF4-FFF2-40B4-BE49-F238E27FC236}">
+                <a16:creationId xmlns:a16="http://schemas.microsoft.com/office/drawing/2014/main" id="{247CA800-F776-12A3-98C3-A62D0849F459}"/>
+              </a:ext>
+            </a:extLst>
+          </p:cNvPr>
+          <p:cNvPicPr>
+            <a:picLocks noChangeAspect="1"/>
+          </p:cNvPicPr>
+          <p:nvPr/>
+        </p:nvPicPr>
+        <p:blipFill>
+          <a:blip r:embed="rId7">
+            <a:extLst>
+              <a:ext uri="{BEBA8EAE-BF5A-486C-A8C5-ECC9F3942E4B}">
+                <a14:imgProps xmlns:a14="http://schemas.microsoft.com/office/drawing/2010/main">
+                  <a14:imgLayer r:embed="rId8">
+                    <a14:imgEffect>
+                      <a14:brightnessContrast bright="-20000" contrast="40000"/>
+                    </a14:imgEffect>
+                  </a14:imgLayer>
+                </a14:imgProps>
+              </a:ext>
+            </a:extLst>
+          </a:blip>
+          <a:stretch>
+            <a:fillRect/>
+          </a:stretch>
+        </p:blipFill>
+        <p:spPr>
+          <a:xfrm>
+            <a:off x="10276658" y="4077072"/>
+            <a:ext cx="1302726" cy="630880"/>
+          </a:xfrm>
+          <a:prstGeom prst="rect">
+            <a:avLst/>
+          </a:prstGeom>
+        </p:spPr>
+      </p:pic>
+    </p:spTree>
+    <p:extLst>
+      <p:ext uri="{BB962C8B-B14F-4D97-AF65-F5344CB8AC3E}">
+        <p14:creationId xmlns:p14="http://schemas.microsoft.com/office/powerpoint/2010/main" val="1126723429"/>
+      </p:ext>
+    </p:extLst>
+  </p:cSld>
+  <p:clrMapOvr>
+    <a:masterClrMapping/>
+  </p:clrMapOvr>
+  <mc:AlternateContent xmlns:mc="http://schemas.openxmlformats.org/markup-compatibility/2006" xmlns:p14="http://schemas.microsoft.com/office/powerpoint/2010/main">
+    <mc:Choice Requires="p14">
+      <p:transition spd="med" p14:dur="700">
+        <p:fade/>
+      </p:transition>
+    </mc:Choice>
+    <mc:Fallback xmlns="">
+      <p:transition spd="med">
+        <p:fade/>
+      </p:transition>
+    </mc:Fallback>
+  </mc:AlternateContent>
+</p:sld>
+</file>
+
+<file path=ppt/slides/slide4.xml><?xml version="1.0" encoding="utf-8"?>
+<p:sld xmlns:a="http://schemas.openxmlformats.org/drawingml/2006/main" xmlns:r="http://schemas.openxmlformats.org/officeDocument/2006/relationships" xmlns:p="http://schemas.openxmlformats.org/presentationml/2006/main">
+  <p:cSld>
+    <p:spTree>
+      <p:nvGrpSpPr>
+        <p:cNvPr id="1" name="">
+          <a:extLst>
+            <a:ext uri="{FF2B5EF4-FFF2-40B4-BE49-F238E27FC236}">
+              <a16:creationId xmlns:a16="http://schemas.microsoft.com/office/drawing/2014/main" id="{9A829BDA-8235-A869-A175-37677C726CFB}"/>
+            </a:ext>
+          </a:extLst>
+        </p:cNvPr>
+        <p:cNvGrpSpPr/>
+        <p:nvPr/>
+      </p:nvGrpSpPr>
+      <p:grpSpPr>
+        <a:xfrm>
+          <a:off x="0" y="0"/>
+          <a:ext cx="0" cy="0"/>
+          <a:chOff x="0" y="0"/>
+          <a:chExt cx="0" cy="0"/>
+        </a:xfrm>
+      </p:grpSpPr>
+      <p:sp>
+        <p:nvSpPr>
+          <p:cNvPr id="8" name="슬라이드 번호 개체 틀 7">
+            <a:extLst>
+              <a:ext uri="{FF2B5EF4-FFF2-40B4-BE49-F238E27FC236}">
+                <a16:creationId xmlns:a16="http://schemas.microsoft.com/office/drawing/2014/main" id="{B0744DE0-F69A-00B0-9CCF-0E5898E07DFC}"/>
+              </a:ext>
+            </a:extLst>
+          </p:cNvPr>
+          <p:cNvSpPr>
+            <a:spLocks noGrp="1"/>
+          </p:cNvSpPr>
+          <p:nvPr>
+            <p:ph type="sldNum" sz="quarter" idx="12"/>
+          </p:nvPr>
+        </p:nvSpPr>
+        <p:spPr/>
+        <p:txBody>
+          <a:bodyPr/>
+          <a:lstStyle/>
+          <a:p>
+            <a:pPr rtl="0"/>
+            <a:fld id="{A3F31473-23EB-4724-8B59-FE6D21D89FA4}" type="slidenum">
+              <a:rPr lang="en-US" altLang="ko-KR" noProof="0" smtClean="0"/>
+              <a:t>4</a:t>
+            </a:fld>
+            <a:endParaRPr lang="en-US" altLang="ko-KR" noProof="0" dirty="0"/>
+          </a:p>
+        </p:txBody>
+      </p:sp>
+      <p:pic>
+        <p:nvPicPr>
+          <p:cNvPr id="4" name="그림 3">
+            <a:extLst>
+              <a:ext uri="{FF2B5EF4-FFF2-40B4-BE49-F238E27FC236}">
+                <a16:creationId xmlns:a16="http://schemas.microsoft.com/office/drawing/2014/main" id="{51088B00-1DB9-728A-0D35-A653251E811B}"/>
+              </a:ext>
+            </a:extLst>
+          </p:cNvPr>
           <p:cNvPicPr>
             <a:picLocks noChangeAspect="1"/>
           </p:cNvPicPr>
@@ -19284,7 +20253,13 @@
       </p:pic>
       <p:pic>
         <p:nvPicPr>
-          <p:cNvPr id="5" name="그림 4"/>
+          <p:cNvPr id="5" name="그림 4">
+            <a:extLst>
+              <a:ext uri="{FF2B5EF4-FFF2-40B4-BE49-F238E27FC236}">
+                <a16:creationId xmlns:a16="http://schemas.microsoft.com/office/drawing/2014/main" id="{D94BAA5C-EA6F-61DE-B6E9-762201186D2A}"/>
+              </a:ext>
+            </a:extLst>
+          </p:cNvPr>
           <p:cNvPicPr>
             <a:picLocks noChangeAspect="1"/>
           </p:cNvPicPr>
@@ -19310,7 +20285,13 @@
         <mc:Choice Requires="a14">
           <p:sp>
             <p:nvSpPr>
-              <p:cNvPr id="6" name="TextBox 5"/>
+              <p:cNvPr id="6" name="TextBox 5">
+                <a:extLst>
+                  <a:ext uri="{FF2B5EF4-FFF2-40B4-BE49-F238E27FC236}">
+                    <a16:creationId xmlns:a16="http://schemas.microsoft.com/office/drawing/2014/main" id="{1B31FAFF-BD93-B87D-FDA1-BDA932F63EFB}"/>
+                  </a:ext>
+                </a:extLst>
+              </p:cNvPr>
               <p:cNvSpPr txBox="1"/>
               <p:nvPr/>
             </p:nvSpPr>
@@ -19428,7 +20409,13 @@
         <mc:Choice Requires="a14">
           <p:sp>
             <p:nvSpPr>
-              <p:cNvPr id="12" name="TextBox 11"/>
+              <p:cNvPr id="12" name="TextBox 11">
+                <a:extLst>
+                  <a:ext uri="{FF2B5EF4-FFF2-40B4-BE49-F238E27FC236}">
+                    <a16:creationId xmlns:a16="http://schemas.microsoft.com/office/drawing/2014/main" id="{9186AFA1-691F-71B3-CF81-53541CFE0461}"/>
+                  </a:ext>
+                </a:extLst>
+              </p:cNvPr>
               <p:cNvSpPr txBox="1"/>
               <p:nvPr/>
             </p:nvSpPr>
@@ -19544,7 +20531,13 @@
       </mc:AlternateContent>
       <p:cxnSp>
         <p:nvCxnSpPr>
-          <p:cNvPr id="9" name="직선 화살표 연결선 8"/>
+          <p:cNvPr id="9" name="직선 화살표 연결선 8">
+            <a:extLst>
+              <a:ext uri="{FF2B5EF4-FFF2-40B4-BE49-F238E27FC236}">
+                <a16:creationId xmlns:a16="http://schemas.microsoft.com/office/drawing/2014/main" id="{5DD624A0-F561-120F-BBE2-3F784B8A42A0}"/>
+              </a:ext>
+            </a:extLst>
+          </p:cNvPr>
           <p:cNvCxnSpPr>
             <a:cxnSpLocks/>
           </p:cNvCxnSpPr>
@@ -19583,7 +20576,7 @@
           <p:cNvPr id="3" name="TextBox 2">
             <a:extLst>
               <a:ext uri="{FF2B5EF4-FFF2-40B4-BE49-F238E27FC236}">
-                <a16:creationId xmlns:a16="http://schemas.microsoft.com/office/drawing/2014/main" id="{B1D92C58-8C4D-6C08-A392-EF301B1BC5A4}"/>
+                <a16:creationId xmlns:a16="http://schemas.microsoft.com/office/drawing/2014/main" id="{07AC819C-7393-3FAA-8319-A603669F4A46}"/>
               </a:ext>
             </a:extLst>
           </p:cNvPr>
@@ -19714,7 +20707,7 @@
     </p:spTree>
     <p:extLst>
       <p:ext uri="{BB962C8B-B14F-4D97-AF65-F5344CB8AC3E}">
-        <p14:creationId xmlns:p14="http://schemas.microsoft.com/office/powerpoint/2010/main" val="1126723429"/>
+        <p14:creationId xmlns:p14="http://schemas.microsoft.com/office/powerpoint/2010/main" val="3455733660"/>
       </p:ext>
     </p:extLst>
   </p:cSld>
@@ -19736,7 +20729,7 @@
 </p:sld>
 </file>
 
-<file path=ppt/slides/slide4.xml><?xml version="1.0" encoding="utf-8"?>
+<file path=ppt/slides/slide5.xml><?xml version="1.0" encoding="utf-8"?>
 <p:sld xmlns:a="http://schemas.openxmlformats.org/drawingml/2006/main" xmlns:r="http://schemas.openxmlformats.org/officeDocument/2006/relationships" xmlns:p="http://schemas.openxmlformats.org/presentationml/2006/main">
   <p:cSld>
     <p:spTree>
@@ -19783,7 +20776,7 @@
             <a:pPr rtl="0"/>
             <a:fld id="{A3F31473-23EB-4724-8B59-FE6D21D89FA4}" type="slidenum">
               <a:rPr lang="en-US" altLang="ko-KR" noProof="0" smtClean="0"/>
-              <a:t>4</a:t>
+              <a:t>5</a:t>
             </a:fld>
             <a:endParaRPr lang="en-US" altLang="ko-KR" noProof="0" dirty="0"/>
           </a:p>
@@ -20253,7 +21246,7 @@
 </p:sld>
 </file>
 
-<file path=ppt/slides/slide5.xml><?xml version="1.0" encoding="utf-8"?>
+<file path=ppt/slides/slide6.xml><?xml version="1.0" encoding="utf-8"?>
 <p:sld xmlns:a="http://schemas.openxmlformats.org/drawingml/2006/main" xmlns:r="http://schemas.openxmlformats.org/officeDocument/2006/relationships" xmlns:p="http://schemas.openxmlformats.org/presentationml/2006/main">
   <p:cSld>
     <p:spTree>
@@ -20288,7 +21281,7 @@
             <a:pPr rtl="0"/>
             <a:fld id="{A3F31473-23EB-4724-8B59-FE6D21D89FA4}" type="slidenum">
               <a:rPr lang="en-US" altLang="ko-KR" noProof="0" smtClean="0"/>
-              <a:t>5</a:t>
+              <a:t>6</a:t>
             </a:fld>
             <a:endParaRPr lang="en-US" altLang="ko-KR" noProof="0" dirty="0"/>
           </a:p>
@@ -20343,7 +21336,7 @@
 </p:sld>
 </file>
 
-<file path=ppt/slides/slide6.xml><?xml version="1.0" encoding="utf-8"?>
+<file path=ppt/slides/slide7.xml><?xml version="1.0" encoding="utf-8"?>
 <p:sld xmlns:a="http://schemas.openxmlformats.org/drawingml/2006/main" xmlns:r="http://schemas.openxmlformats.org/officeDocument/2006/relationships" xmlns:p="http://schemas.openxmlformats.org/presentationml/2006/main">
   <p:cSld>
     <p:spTree>
@@ -20378,7 +21371,7 @@
             <a:pPr rtl="0"/>
             <a:fld id="{A3F31473-23EB-4724-8B59-FE6D21D89FA4}" type="slidenum">
               <a:rPr lang="en-US" altLang="ko-KR" noProof="0" smtClean="0"/>
-              <a:t>6</a:t>
+              <a:t>7</a:t>
             </a:fld>
             <a:endParaRPr lang="en-US" altLang="ko-KR" noProof="0" dirty="0"/>
           </a:p>
@@ -20739,7 +21732,7 @@
 </p:sld>
 </file>
 
-<file path=ppt/slides/slide7.xml><?xml version="1.0" encoding="utf-8"?>
+<file path=ppt/slides/slide8.xml><?xml version="1.0" encoding="utf-8"?>
 <p:sld xmlns:a="http://schemas.openxmlformats.org/drawingml/2006/main" xmlns:r="http://schemas.openxmlformats.org/officeDocument/2006/relationships" xmlns:p="http://schemas.openxmlformats.org/presentationml/2006/main">
   <p:cSld>
     <p:spTree>
@@ -20786,7 +21779,7 @@
             <a:pPr rtl="0"/>
             <a:fld id="{A3F31473-23EB-4724-8B59-FE6D21D89FA4}" type="slidenum">
               <a:rPr lang="en-US" altLang="ko-KR" noProof="0" smtClean="0"/>
-              <a:t>7</a:t>
+              <a:t>8</a:t>
             </a:fld>
             <a:endParaRPr lang="en-US" altLang="ko-KR" noProof="0" dirty="0"/>
           </a:p>
@@ -20847,7 +21840,7 @@
 </p:sld>
 </file>
 
-<file path=ppt/slides/slide8.xml><?xml version="1.0" encoding="utf-8"?>
+<file path=ppt/slides/slide9.xml><?xml version="1.0" encoding="utf-8"?>
 <p:sld xmlns:a="http://schemas.openxmlformats.org/drawingml/2006/main" xmlns:r="http://schemas.openxmlformats.org/officeDocument/2006/relationships" xmlns:p="http://schemas.openxmlformats.org/presentationml/2006/main">
   <p:cSld>
     <p:spTree>
@@ -20882,7 +21875,7 @@
             <a:pPr rtl="0"/>
             <a:fld id="{A3F31473-23EB-4724-8B59-FE6D21D89FA4}" type="slidenum">
               <a:rPr lang="en-US" altLang="ko-KR" noProof="0" smtClean="0"/>
-              <a:t>8</a:t>
+              <a:t>9</a:t>
             </a:fld>
             <a:endParaRPr lang="en-US" altLang="ko-KR" noProof="0" dirty="0"/>
           </a:p>
@@ -21352,367 +22345,6 @@
     <p:extLst>
       <p:ext uri="{BB962C8B-B14F-4D97-AF65-F5344CB8AC3E}">
         <p14:creationId xmlns:p14="http://schemas.microsoft.com/office/powerpoint/2010/main" val="588309948"/>
-      </p:ext>
-    </p:extLst>
-  </p:cSld>
-  <p:clrMapOvr>
-    <a:masterClrMapping/>
-  </p:clrMapOvr>
-  <mc:AlternateContent xmlns:mc="http://schemas.openxmlformats.org/markup-compatibility/2006" xmlns:p14="http://schemas.microsoft.com/office/powerpoint/2010/main">
-    <mc:Choice Requires="p14">
-      <p:transition spd="med" p14:dur="700">
-        <p:fade/>
-      </p:transition>
-    </mc:Choice>
-    <mc:Fallback xmlns="">
-      <p:transition spd="med">
-        <p:fade/>
-      </p:transition>
-    </mc:Fallback>
-  </mc:AlternateContent>
-</p:sld>
-</file>
-
-<file path=ppt/slides/slide9.xml><?xml version="1.0" encoding="utf-8"?>
-<p:sld xmlns:a="http://schemas.openxmlformats.org/drawingml/2006/main" xmlns:r="http://schemas.openxmlformats.org/officeDocument/2006/relationships" xmlns:p="http://schemas.openxmlformats.org/presentationml/2006/main">
-  <p:cSld>
-    <p:spTree>
-      <p:nvGrpSpPr>
-        <p:cNvPr id="1" name="">
-          <a:extLst>
-            <a:ext uri="{FF2B5EF4-FFF2-40B4-BE49-F238E27FC236}">
-              <a16:creationId xmlns:a16="http://schemas.microsoft.com/office/drawing/2014/main" id="{762F6384-AE23-9E58-FC91-C5F1361CF6B8}"/>
-            </a:ext>
-          </a:extLst>
-        </p:cNvPr>
-        <p:cNvGrpSpPr/>
-        <p:nvPr/>
-      </p:nvGrpSpPr>
-      <p:grpSpPr>
-        <a:xfrm>
-          <a:off x="0" y="0"/>
-          <a:ext cx="0" cy="0"/>
-          <a:chOff x="0" y="0"/>
-          <a:chExt cx="0" cy="0"/>
-        </a:xfrm>
-      </p:grpSpPr>
-      <p:sp>
-        <p:nvSpPr>
-          <p:cNvPr id="8" name="슬라이드 번호 개체 틀 7">
-            <a:extLst>
-              <a:ext uri="{FF2B5EF4-FFF2-40B4-BE49-F238E27FC236}">
-                <a16:creationId xmlns:a16="http://schemas.microsoft.com/office/drawing/2014/main" id="{E6770638-C1ED-0705-08FE-872C53D9EBE4}"/>
-              </a:ext>
-            </a:extLst>
-          </p:cNvPr>
-          <p:cNvSpPr>
-            <a:spLocks noGrp="1"/>
-          </p:cNvSpPr>
-          <p:nvPr>
-            <p:ph type="sldNum" sz="quarter" idx="12"/>
-          </p:nvPr>
-        </p:nvSpPr>
-        <p:spPr/>
-        <p:txBody>
-          <a:bodyPr/>
-          <a:lstStyle/>
-          <a:p>
-            <a:pPr rtl="0"/>
-            <a:fld id="{A3F31473-23EB-4724-8B59-FE6D21D89FA4}" type="slidenum">
-              <a:rPr lang="en-US" altLang="ko-KR" noProof="0" smtClean="0"/>
-              <a:t>9</a:t>
-            </a:fld>
-            <a:endParaRPr lang="en-US" altLang="ko-KR" noProof="0" dirty="0"/>
-          </a:p>
-        </p:txBody>
-      </p:sp>
-      <p:sp>
-        <p:nvSpPr>
-          <p:cNvPr id="2" name="직사각형 1">
-            <a:extLst>
-              <a:ext uri="{FF2B5EF4-FFF2-40B4-BE49-F238E27FC236}">
-                <a16:creationId xmlns:a16="http://schemas.microsoft.com/office/drawing/2014/main" id="{E2A422D3-43C8-8F2B-7CF1-D410589B5765}"/>
-              </a:ext>
-            </a:extLst>
-          </p:cNvPr>
-          <p:cNvSpPr/>
-          <p:nvPr/>
-        </p:nvSpPr>
-        <p:spPr>
-          <a:xfrm>
-            <a:off x="909836" y="1412776"/>
-            <a:ext cx="10801200" cy="3831818"/>
-          </a:xfrm>
-          <a:prstGeom prst="rect">
-            <a:avLst/>
-          </a:prstGeom>
-        </p:spPr>
-        <p:txBody>
-          <a:bodyPr wrap="square">
-            <a:spAutoFit/>
-          </a:bodyPr>
-          <a:lstStyle/>
-          <a:p>
-            <a:pPr marL="285750" indent="-285750">
-              <a:lnSpc>
-                <a:spcPct val="150000"/>
-              </a:lnSpc>
-              <a:buFont typeface="Wingdings" panose="05000000000000000000" pitchFamily="2" charset="2"/>
-              <a:buChar char="v"/>
-            </a:pPr>
-            <a:r>
-              <a:rPr lang="en-US" altLang="ko-KR" b="1" dirty="0">
-                <a:latin typeface="Arial Narrow" panose="020B0606020202030204" pitchFamily="34" charset="0"/>
-              </a:rPr>
-              <a:t>1</a:t>
-            </a:r>
-            <a:r>
-              <a:rPr lang="ko-KR" altLang="en-US" b="1" dirty="0">
-                <a:latin typeface="Arial Narrow" panose="020B0606020202030204" pitchFamily="34" charset="0"/>
-              </a:rPr>
-              <a:t>단계</a:t>
-            </a:r>
-            <a:r>
-              <a:rPr lang="en-US" altLang="ko-KR" b="1" dirty="0">
-                <a:latin typeface="Arial Narrow" panose="020B0606020202030204" pitchFamily="34" charset="0"/>
-              </a:rPr>
-              <a:t>: </a:t>
-            </a:r>
-            <a:r>
-              <a:rPr lang="ko-KR" altLang="en-US" b="1" dirty="0">
-                <a:latin typeface="Arial Narrow" panose="020B0606020202030204" pitchFamily="34" charset="0"/>
-              </a:rPr>
-              <a:t>데이터 생성</a:t>
-            </a:r>
-          </a:p>
-          <a:p>
-            <a:pPr marL="742950" lvl="1" indent="-285750">
-              <a:lnSpc>
-                <a:spcPct val="150000"/>
-              </a:lnSpc>
-              <a:buFont typeface="Wingdings" panose="05000000000000000000" pitchFamily="2" charset="2"/>
-              <a:buChar char="v"/>
-            </a:pPr>
-            <a:r>
-              <a:rPr lang="ko-KR" altLang="en-US" dirty="0">
-                <a:latin typeface="Arial Narrow" panose="020B0606020202030204" pitchFamily="34" charset="0"/>
-              </a:rPr>
-              <a:t>신약 투여 전과 투여 후의 데이터를 각각 </a:t>
-            </a:r>
-            <a:r>
-              <a:rPr lang="en-US" altLang="ko-KR" dirty="0">
-                <a:latin typeface="Arial Narrow" panose="020B0606020202030204" pitchFamily="34" charset="0"/>
-              </a:rPr>
-              <a:t>100</a:t>
-            </a:r>
-            <a:r>
-              <a:rPr lang="ko-KR" altLang="en-US" dirty="0">
-                <a:latin typeface="Arial Narrow" panose="020B0606020202030204" pitchFamily="34" charset="0"/>
-              </a:rPr>
-              <a:t>명 분량으로 생성합니다</a:t>
-            </a:r>
-            <a:r>
-              <a:rPr lang="en-US" altLang="ko-KR" dirty="0">
-                <a:latin typeface="Arial Narrow" panose="020B0606020202030204" pitchFamily="34" charset="0"/>
-              </a:rPr>
-              <a:t>. </a:t>
-            </a:r>
-            <a:r>
-              <a:rPr lang="ko-KR" altLang="en-US" dirty="0">
-                <a:latin typeface="Arial Narrow" panose="020B0606020202030204" pitchFamily="34" charset="0"/>
-              </a:rPr>
-              <a:t>이 예에서는 투여 전 데이터를 정규 분포 </a:t>
-            </a:r>
-            <a:r>
-              <a:rPr lang="en-US" altLang="ko-KR" dirty="0">
-                <a:latin typeface="Arial Narrow" panose="020B0606020202030204" pitchFamily="34" charset="0"/>
-              </a:rPr>
-              <a:t>N(0, 1)</a:t>
-            </a:r>
-            <a:r>
-              <a:rPr lang="ko-KR" altLang="en-US" dirty="0">
-                <a:latin typeface="Arial Narrow" panose="020B0606020202030204" pitchFamily="34" charset="0"/>
-              </a:rPr>
-              <a:t>을 따르게 하고</a:t>
-            </a:r>
-            <a:r>
-              <a:rPr lang="en-US" altLang="ko-KR" dirty="0">
-                <a:latin typeface="Arial Narrow" panose="020B0606020202030204" pitchFamily="34" charset="0"/>
-              </a:rPr>
-              <a:t>, </a:t>
-            </a:r>
-            <a:r>
-              <a:rPr lang="ko-KR" altLang="en-US" dirty="0">
-                <a:latin typeface="Arial Narrow" panose="020B0606020202030204" pitchFamily="34" charset="0"/>
-              </a:rPr>
-              <a:t>투여 후 데이터는 투여의 효과를 모사하기 위해 평균이 약간 증가한 정규 분포 </a:t>
-            </a:r>
-            <a:r>
-              <a:rPr lang="en-US" altLang="ko-KR" dirty="0">
-                <a:latin typeface="Arial Narrow" panose="020B0606020202030204" pitchFamily="34" charset="0"/>
-              </a:rPr>
-              <a:t>N(0.3, 2)</a:t>
-            </a:r>
-            <a:r>
-              <a:rPr lang="ko-KR" altLang="en-US" dirty="0">
-                <a:latin typeface="Arial Narrow" panose="020B0606020202030204" pitchFamily="34" charset="0"/>
-              </a:rPr>
-              <a:t>를 사용합니다</a:t>
-            </a:r>
-            <a:r>
-              <a:rPr lang="en-US" altLang="ko-KR" dirty="0">
-                <a:latin typeface="Arial Narrow" panose="020B0606020202030204" pitchFamily="34" charset="0"/>
-              </a:rPr>
-              <a:t>.</a:t>
-            </a:r>
-          </a:p>
-          <a:p>
-            <a:pPr marL="285750" indent="-285750">
-              <a:lnSpc>
-                <a:spcPct val="150000"/>
-              </a:lnSpc>
-              <a:buFont typeface="Wingdings" panose="05000000000000000000" pitchFamily="2" charset="2"/>
-              <a:buChar char="v"/>
-            </a:pPr>
-            <a:endParaRPr lang="en-US" altLang="ko-KR" b="1" dirty="0">
-              <a:latin typeface="Arial Narrow" panose="020B0606020202030204" pitchFamily="34" charset="0"/>
-            </a:endParaRPr>
-          </a:p>
-          <a:p>
-            <a:pPr marL="285750" indent="-285750">
-              <a:lnSpc>
-                <a:spcPct val="150000"/>
-              </a:lnSpc>
-              <a:buFont typeface="Wingdings" panose="05000000000000000000" pitchFamily="2" charset="2"/>
-              <a:buChar char="v"/>
-            </a:pPr>
-            <a:endParaRPr lang="en-US" altLang="ko-KR" b="1" dirty="0">
-              <a:latin typeface="Arial Narrow" panose="020B0606020202030204" pitchFamily="34" charset="0"/>
-            </a:endParaRPr>
-          </a:p>
-          <a:p>
-            <a:pPr marL="285750" indent="-285750">
-              <a:lnSpc>
-                <a:spcPct val="150000"/>
-              </a:lnSpc>
-              <a:buFont typeface="Wingdings" panose="05000000000000000000" pitchFamily="2" charset="2"/>
-              <a:buChar char="v"/>
-            </a:pPr>
-            <a:r>
-              <a:rPr lang="en-US" altLang="ko-KR" b="1" dirty="0">
-                <a:latin typeface="Arial Narrow" panose="020B0606020202030204" pitchFamily="34" charset="0"/>
-              </a:rPr>
-              <a:t>2</a:t>
-            </a:r>
-            <a:r>
-              <a:rPr lang="ko-KR" altLang="en-US" b="1" dirty="0">
-                <a:latin typeface="Arial Narrow" panose="020B0606020202030204" pitchFamily="34" charset="0"/>
-              </a:rPr>
-              <a:t>단계</a:t>
-            </a:r>
-            <a:r>
-              <a:rPr lang="en-US" altLang="ko-KR" b="1" dirty="0">
-                <a:latin typeface="Arial Narrow" panose="020B0606020202030204" pitchFamily="34" charset="0"/>
-              </a:rPr>
-              <a:t>: t-test </a:t>
-            </a:r>
-            <a:r>
-              <a:rPr lang="ko-KR" altLang="en-US" b="1" dirty="0">
-                <a:latin typeface="Arial Narrow" panose="020B0606020202030204" pitchFamily="34" charset="0"/>
-              </a:rPr>
-              <a:t>수행</a:t>
-            </a:r>
-          </a:p>
-          <a:p>
-            <a:pPr marL="742950" lvl="1" indent="-285750">
-              <a:lnSpc>
-                <a:spcPct val="150000"/>
-              </a:lnSpc>
-              <a:buFont typeface="Wingdings" panose="05000000000000000000" pitchFamily="2" charset="2"/>
-              <a:buChar char="v"/>
-            </a:pPr>
-            <a:r>
-              <a:rPr lang="ko-KR" altLang="en-US" dirty="0">
-                <a:latin typeface="Arial Narrow" panose="020B0606020202030204" pitchFamily="34" charset="0"/>
-              </a:rPr>
-              <a:t>생성된 데이터에 대해 독립 표본 </a:t>
-            </a:r>
-            <a:r>
-              <a:rPr lang="en-US" altLang="ko-KR" dirty="0">
-                <a:latin typeface="Arial Narrow" panose="020B0606020202030204" pitchFamily="34" charset="0"/>
-              </a:rPr>
-              <a:t>t-test</a:t>
-            </a:r>
-            <a:r>
-              <a:rPr lang="ko-KR" altLang="en-US" dirty="0">
-                <a:latin typeface="Arial Narrow" panose="020B0606020202030204" pitchFamily="34" charset="0"/>
-              </a:rPr>
-              <a:t>를 수행하여 투여 전과 투여 후의 평균 차이가 통계적으로 </a:t>
-            </a:r>
-            <a:r>
-              <a:rPr lang="ko-KR" altLang="en-US" dirty="0" err="1">
-                <a:latin typeface="Arial Narrow" panose="020B0606020202030204" pitchFamily="34" charset="0"/>
-              </a:rPr>
-              <a:t>유의미한지</a:t>
-            </a:r>
-            <a:r>
-              <a:rPr lang="ko-KR" altLang="en-US" dirty="0">
-                <a:latin typeface="Arial Narrow" panose="020B0606020202030204" pitchFamily="34" charset="0"/>
-              </a:rPr>
-              <a:t> 검정합니다</a:t>
-            </a:r>
-            <a:r>
-              <a:rPr lang="en-US" altLang="ko-KR" dirty="0">
-                <a:latin typeface="Arial Narrow" panose="020B0606020202030204" pitchFamily="34" charset="0"/>
-              </a:rPr>
-              <a:t>.</a:t>
-            </a:r>
-          </a:p>
-        </p:txBody>
-      </p:sp>
-      <p:sp>
-        <p:nvSpPr>
-          <p:cNvPr id="4" name="직사각형 3">
-            <a:extLst>
-              <a:ext uri="{FF2B5EF4-FFF2-40B4-BE49-F238E27FC236}">
-                <a16:creationId xmlns:a16="http://schemas.microsoft.com/office/drawing/2014/main" id="{2A6B6102-868A-0C39-9A08-91BF760A29D1}"/>
-              </a:ext>
-            </a:extLst>
-          </p:cNvPr>
-          <p:cNvSpPr/>
-          <p:nvPr/>
-        </p:nvSpPr>
-        <p:spPr>
-          <a:xfrm>
-            <a:off x="333772" y="370028"/>
-            <a:ext cx="7229864" cy="523220"/>
-          </a:xfrm>
-          <a:prstGeom prst="rect">
-            <a:avLst/>
-          </a:prstGeom>
-        </p:spPr>
-        <p:txBody>
-          <a:bodyPr wrap="none">
-            <a:spAutoFit/>
-          </a:bodyPr>
-          <a:lstStyle/>
-          <a:p>
-            <a:r>
-              <a:rPr lang="ko-KR" altLang="en-US" sz="2800" b="1" dirty="0"/>
-              <a:t>새로운 신약의 효과 검정을 위한 통계분석</a:t>
-            </a:r>
-            <a:r>
-              <a:rPr lang="en-US" altLang="ko-KR" sz="2800" b="1" dirty="0"/>
-              <a:t>(1/3)</a:t>
-            </a:r>
-            <a:endParaRPr lang="ko-KR" altLang="en-US" sz="2800" b="1" dirty="0"/>
-          </a:p>
-        </p:txBody>
-      </p:sp>
-    </p:spTree>
-    <p:extLst>
-      <p:ext uri="{BB962C8B-B14F-4D97-AF65-F5344CB8AC3E}">
-        <p14:creationId xmlns:p14="http://schemas.microsoft.com/office/powerpoint/2010/main" val="580817323"/>
       </p:ext>
     </p:extLst>
   </p:cSld>
@@ -22535,6 +23167,15 @@
 </file>
 
 <file path=customXml/item1.xml><?xml version="1.0" encoding="utf-8"?>
+<?mso-contentType ?>
+<FormTemplates xmlns="http://schemas.microsoft.com/sharepoint/v3/contenttype/forms">
+  <Display>DocumentLibraryForm</Display>
+  <Edit>DocumentLibraryForm</Edit>
+  <New>DocumentLibraryForm</New>
+</FormTemplates>
+</file>
+
+<file path=customXml/item2.xml><?xml version="1.0" encoding="utf-8"?>
 <p:properties xmlns:p="http://schemas.microsoft.com/office/2006/metadata/properties" xmlns:xsi="http://www.w3.org/2001/XMLSchema-instance" xmlns:pc="http://schemas.microsoft.com/office/infopath/2007/PartnerControls">
   <documentManagement>
     <VSO_x0020_item_x0020_id xmlns="40262f94-9f35-4ac3-9a90-690165a166b7" xsi:nil="true"/>
@@ -22543,15 +23184,6 @@
     <Template_x0020_details xmlns="40262f94-9f35-4ac3-9a90-690165a166b7" xsi:nil="true"/>
   </documentManagement>
 </p:properties>
-</file>
-
-<file path=customXml/item2.xml><?xml version="1.0" encoding="utf-8"?>
-<?mso-contentType ?>
-<FormTemplates xmlns="http://schemas.microsoft.com/sharepoint/v3/contenttype/forms">
-  <Display>DocumentLibraryForm</Display>
-  <Edit>DocumentLibraryForm</Edit>
-  <New>DocumentLibraryForm</New>
-</FormTemplates>
 </file>
 
 <file path=customXml/item3.xml><?xml version="1.0" encoding="utf-8"?>
@@ -22736,6 +23368,14 @@
 </file>
 
 <file path=customXml/itemProps1.xml><?xml version="1.0" encoding="utf-8"?>
+<ds:datastoreItem xmlns:ds="http://schemas.openxmlformats.org/officeDocument/2006/customXml" ds:itemID="{7F9B8BCC-BF24-4800-92E1-9F891BBB27E6}">
+  <ds:schemaRefs>
+    <ds:schemaRef ds:uri="http://schemas.microsoft.com/sharepoint/v3/contenttype/forms"/>
+  </ds:schemaRefs>
+</ds:datastoreItem>
+</file>
+
+<file path=customXml/itemProps2.xml><?xml version="1.0" encoding="utf-8"?>
 <ds:datastoreItem xmlns:ds="http://schemas.openxmlformats.org/officeDocument/2006/customXml" ds:itemID="{50AACE6D-8EB6-447A-8DFD-C2C0C52916AC}">
   <ds:schemaRefs>
     <ds:schemaRef ds:uri="http://schemas.openxmlformats.org/package/2006/metadata/core-properties"/>
@@ -22748,14 +23388,6 @@
     <ds:schemaRef ds:uri="a4f35948-e619-41b3-aa29-22878b09cfd2"/>
     <ds:schemaRef ds:uri="http://schemas.microsoft.com/office/2006/metadata/properties"/>
     <ds:schemaRef ds:uri="http://www.w3.org/XML/1998/namespace"/>
-  </ds:schemaRefs>
-</ds:datastoreItem>
-</file>
-
-<file path=customXml/itemProps2.xml><?xml version="1.0" encoding="utf-8"?>
-<ds:datastoreItem xmlns:ds="http://schemas.openxmlformats.org/officeDocument/2006/customXml" ds:itemID="{7F9B8BCC-BF24-4800-92E1-9F891BBB27E6}">
-  <ds:schemaRefs>
-    <ds:schemaRef ds:uri="http://schemas.microsoft.com/sharepoint/v3/contenttype/forms"/>
   </ds:schemaRefs>
 </ds:datastoreItem>
 </file>
